--- a/SIH_Final_PPT.pptx
+++ b/SIH_Final_PPT.pptx
@@ -13,8 +13,7 @@
     <p:sldId id="290" r:id="rId4"/>
     <p:sldId id="293" r:id="rId5"/>
     <p:sldId id="294" r:id="rId6"/>
-    <p:sldId id="296" r:id="rId7"/>
-    <p:sldId id="297" r:id="rId14"/>
+    <p:sldId id="295" r:id="rId7"/>
   </p:sldIdLst>
   <p:sldSz cx="12192000" cy="6858000"/>
   <p:notesSz cx="6858000" cy="9144000"/>
@@ -1165,184 +1164,6 @@
     <p:extLst>
       <p:ext uri="{BB962C8B-B14F-4D97-AF65-F5344CB8AC3E}">
         <p14:creationId xmlns:p14="http://schemas.microsoft.com/office/powerpoint/2010/main" val="2641722845"/>
-      </p:ext>
-    </p:extLst>
-  </p:cSld>
-  <p:clrMapOvr>
-    <a:masterClrMapping/>
-  </p:clrMapOvr>
-</p:notes>
-</file>
-
-<file path=ppt/notesSlides/notesSlide5.xml><?xml version="1.0" encoding="utf-8"?>
-<p:notes xmlns:a="http://schemas.openxmlformats.org/drawingml/2006/main" xmlns:r="http://schemas.openxmlformats.org/officeDocument/2006/relationships" xmlns:p="http://schemas.openxmlformats.org/presentationml/2006/main">
-  <p:cSld>
-    <p:spTree>
-      <p:nvGrpSpPr>
-        <p:cNvPr id="1" name=""/>
-        <p:cNvGrpSpPr/>
-        <p:nvPr/>
-      </p:nvGrpSpPr>
-      <p:grpSpPr>
-        <a:xfrm>
-          <a:off x="0" y="0"/>
-          <a:ext cx="0" cy="0"/>
-          <a:chOff x="0" y="0"/>
-          <a:chExt cx="0" cy="0"/>
-        </a:xfrm>
-      </p:grpSpPr>
-      <p:sp>
-        <p:nvSpPr>
-          <p:cNvPr id="18433" name="Slide Image Placeholder 1"/>
-          <p:cNvSpPr>
-            <a:spLocks noGrp="1" noRot="1" noChangeAspect="1"/>
-          </p:cNvSpPr>
-          <p:nvPr>
-            <p:ph type="sldImg"/>
-          </p:nvPr>
-        </p:nvSpPr>
-        <p:spPr bwMode="auto">
-          <a:xfrm>
-            <a:off x="381000" y="685800"/>
-            <a:ext cx="6096000" cy="3429000"/>
-          </a:xfrm>
-          <a:noFill/>
-          <a:ln>
-            <a:solidFill>
-              <a:srgbClr val="000000"/>
-            </a:solidFill>
-            <a:miter lim="800000"/>
-            <a:headEnd/>
-            <a:tailEnd/>
-          </a:ln>
-        </p:spPr>
-      </p:sp>
-      <p:sp>
-        <p:nvSpPr>
-          <p:cNvPr id="18434" name="Notes Placeholder 2"/>
-          <p:cNvSpPr>
-            <a:spLocks noGrp="1"/>
-          </p:cNvSpPr>
-          <p:nvPr>
-            <p:ph type="body" idx="1"/>
-          </p:nvPr>
-        </p:nvSpPr>
-        <p:spPr bwMode="auto">
-          <a:noFill/>
-        </p:spPr>
-        <p:txBody>
-          <a:bodyPr wrap="square" numCol="1" anchor="t" anchorCtr="0" compatLnSpc="1">
-            <a:prstTxWarp prst="textNoShape">
-              <a:avLst/>
-            </a:prstTxWarp>
-          </a:bodyPr>
-          <a:lstStyle/>
-          <a:p>
-            <a:pPr eaLnBrk="1" hangingPunct="1">
-              <a:spcBef>
-                <a:spcPct val="0"/>
-              </a:spcBef>
-            </a:pPr>
-            <a:endParaRPr lang="en-US">
-              <a:ea typeface="ＭＳ Ｐゴシック" pitchFamily="1" charset="-128"/>
-            </a:endParaRPr>
-          </a:p>
-        </p:txBody>
-      </p:sp>
-      <p:sp>
-        <p:nvSpPr>
-          <p:cNvPr id="18435" name="Slide Number Placeholder 3"/>
-          <p:cNvSpPr>
-            <a:spLocks noGrp="1"/>
-          </p:cNvSpPr>
-          <p:nvPr>
-            <p:ph type="sldNum" sz="quarter" idx="5"/>
-          </p:nvPr>
-        </p:nvSpPr>
-        <p:spPr bwMode="auto">
-          <a:noFill/>
-          <a:ln>
-            <a:miter lim="800000"/>
-            <a:headEnd/>
-            <a:tailEnd/>
-          </a:ln>
-        </p:spPr>
-        <p:txBody>
-          <a:bodyPr/>
-          <a:lstStyle/>
-          <a:p>
-            <a:pPr marL="0" marR="0" lvl="0" indent="0" algn="r" defTabSz="457200" rtl="0" eaLnBrk="1" fontAlgn="base" latinLnBrk="0" hangingPunct="1">
-              <a:lnSpc>
-                <a:spcPct val="100000"/>
-              </a:lnSpc>
-              <a:spcBef>
-                <a:spcPct val="0"/>
-              </a:spcBef>
-              <a:spcAft>
-                <a:spcPct val="0"/>
-              </a:spcAft>
-              <a:buClrTx/>
-              <a:buSzTx/>
-              <a:buFontTx/>
-              <a:buNone/>
-              <a:tabLst/>
-              <a:defRPr/>
-            </a:pPr>
-            <a:fld id="{0CA7B74D-3791-4AC6-8451-F10DBCCCDD9A}" type="slidenum">
-              <a:rPr kumimoji="0" lang="en-US" sz="1200" b="0" i="0" u="none" strike="noStrike" kern="1200" cap="none" spc="0" normalizeH="0" baseline="0" noProof="0">
-                <a:ln>
-                  <a:noFill/>
-                </a:ln>
-                <a:solidFill>
-                  <a:prstClr val="black"/>
-                </a:solidFill>
-                <a:effectLst/>
-                <a:uLnTx/>
-                <a:uFillTx/>
-                <a:latin typeface="Calibri" pitchFamily="34" charset="0"/>
-                <a:ea typeface="ＭＳ Ｐゴシック" pitchFamily="1" charset="-128"/>
-                <a:cs typeface="+mn-cs"/>
-              </a:rPr>
-              <a:pPr marL="0" marR="0" lvl="0" indent="0" algn="r" defTabSz="457200" rtl="0" eaLnBrk="1" fontAlgn="base" latinLnBrk="0" hangingPunct="1">
-                <a:lnSpc>
-                  <a:spcPct val="100000"/>
-                </a:lnSpc>
-                <a:spcBef>
-                  <a:spcPct val="0"/>
-                </a:spcBef>
-                <a:spcAft>
-                  <a:spcPct val="0"/>
-                </a:spcAft>
-                <a:buClrTx/>
-                <a:buSzTx/>
-                <a:buFontTx/>
-                <a:buNone/>
-                <a:tabLst/>
-                <a:defRPr/>
-              </a:pPr>
-              <a:t>6</a:t>
-            </a:fld>
-            <a:endParaRPr kumimoji="0" lang="en-US" sz="1200" b="0" i="0" u="none" strike="noStrike" kern="1200" cap="none" spc="0" normalizeH="0" baseline="0" noProof="0">
-              <a:ln>
-                <a:noFill/>
-              </a:ln>
-              <a:solidFill>
-                <a:prstClr val="black"/>
-              </a:solidFill>
-              <a:effectLst/>
-              <a:uLnTx/>
-              <a:uFillTx/>
-              <a:latin typeface="Calibri" pitchFamily="34" charset="0"/>
-              <a:ea typeface="ＭＳ Ｐゴシック" pitchFamily="1" charset="-128"/>
-              <a:cs typeface="+mn-cs"/>
-            </a:endParaRPr>
-          </a:p>
-        </p:txBody>
-      </p:sp>
-    </p:spTree>
-    <p:extLst>
-      <p:ext uri="{BB962C8B-B14F-4D97-AF65-F5344CB8AC3E}">
-        <p14:creationId xmlns:p14="http://schemas.microsoft.com/office/powerpoint/2010/main" val="1908672725"/>
       </p:ext>
     </p:extLst>
   </p:cSld>
@@ -5551,7 +5372,7 @@
           <a:p>
             <a:pPr algn="ctr"/>
             <a:r>
-              <a:rPr sz="3240" b="1">
+              <a:rPr sz="2400" b="1">
                 <a:solidFill>
                   <a:srgbClr val="123456"/>
                 </a:solidFill>
@@ -5645,7 +5466,7 @@
               </a:spcAft>
             </a:pPr>
             <a:r>
-              <a:rPr sz="1620" b="1">
+              <a:rPr sz="1350" b="1">
                 <a:solidFill>
                   <a:srgbClr val="123456"/>
                 </a:solidFill>
@@ -5654,9 +5475,9 @@
               <a:t>Problem Statement ID – </a:t>
             </a:r>
             <a:r>
-              <a:rPr sz="1485" b="1">
-                <a:solidFill>
-                  <a:srgbClr val="272F38"/>
+              <a:rPr sz="1250" b="1">
+                <a:solidFill>
+                  <a:srgbClr val="FFFFFF"/>
                 </a:solidFill>
                 <a:latin typeface="Arial"/>
               </a:rPr>
@@ -5671,7 +5492,7 @@
               </a:spcAft>
             </a:pPr>
             <a:r>
-              <a:rPr sz="1620" b="1">
+              <a:rPr sz="1350" b="1">
                 <a:solidFill>
                   <a:srgbClr val="123456"/>
                 </a:solidFill>
@@ -5680,9 +5501,9 @@
               <a:t>Problem Statement Title – </a:t>
             </a:r>
             <a:r>
-              <a:rPr sz="1485" b="1">
-                <a:solidFill>
-                  <a:srgbClr val="272F38"/>
+              <a:rPr sz="1250" b="1">
+                <a:solidFill>
+                  <a:srgbClr val="FFFFFF"/>
                 </a:solidFill>
                 <a:latin typeface="Arial"/>
               </a:rPr>
@@ -5696,7 +5517,7 @@
               </a:spcAft>
             </a:pPr>
             <a:r>
-              <a:rPr sz="1620" b="1">
+              <a:rPr sz="1350" b="1">
                 <a:solidFill>
                   <a:srgbClr val="123456"/>
                 </a:solidFill>
@@ -5705,9 +5526,9 @@
               <a:t>Theme – </a:t>
             </a:r>
             <a:r>
-              <a:rPr sz="1485" b="1">
-                <a:solidFill>
-                  <a:srgbClr val="272F38"/>
+              <a:rPr sz="1250" b="1">
+                <a:solidFill>
+                  <a:srgbClr val="FFFFFF"/>
                 </a:solidFill>
                 <a:latin typeface="Arial"/>
               </a:rPr>
@@ -5721,7 +5542,7 @@
               </a:spcAft>
             </a:pPr>
             <a:r>
-              <a:rPr sz="1620" b="1">
+              <a:rPr sz="1350" b="1">
                 <a:solidFill>
                   <a:srgbClr val="123456"/>
                 </a:solidFill>
@@ -5730,9 +5551,9 @@
               <a:t>PS Category – </a:t>
             </a:r>
             <a:r>
-              <a:rPr sz="1485" b="1">
-                <a:solidFill>
-                  <a:srgbClr val="272F38"/>
+              <a:rPr sz="1250" b="1">
+                <a:solidFill>
+                  <a:srgbClr val="FFFFFF"/>
                 </a:solidFill>
                 <a:latin typeface="Arial"/>
               </a:rPr>
@@ -5746,7 +5567,7 @@
               </a:spcAft>
             </a:pPr>
             <a:r>
-              <a:rPr sz="1620" b="1">
+              <a:rPr sz="1350" b="1">
                 <a:solidFill>
                   <a:srgbClr val="123456"/>
                 </a:solidFill>
@@ -5755,9 +5576,9 @@
               <a:t>Team ID – </a:t>
             </a:r>
             <a:r>
-              <a:rPr sz="1485" b="1">
-                <a:solidFill>
-                  <a:srgbClr val="272F38"/>
+              <a:rPr sz="1250" b="1">
+                <a:solidFill>
+                  <a:srgbClr val="FFFFFF"/>
                 </a:solidFill>
                 <a:latin typeface="Arial"/>
               </a:rPr>
@@ -5771,7 +5592,7 @@
               </a:spcAft>
             </a:pPr>
             <a:r>
-              <a:rPr sz="1620" b="1">
+              <a:rPr sz="1350" b="1">
                 <a:solidFill>
                   <a:srgbClr val="123456"/>
                 </a:solidFill>
@@ -5780,9 +5601,9 @@
               <a:t>Team Name – </a:t>
             </a:r>
             <a:r>
-              <a:rPr sz="1485" b="1">
-                <a:solidFill>
-                  <a:srgbClr val="272F38"/>
+              <a:rPr sz="1250" b="1">
+                <a:solidFill>
+                  <a:srgbClr val="FFFFFF"/>
                 </a:solidFill>
                 <a:latin typeface="Arial"/>
               </a:rPr>
@@ -5864,7 +5685,7 @@
           <a:p>
             <a:pPr algn="ctr"/>
             <a:r>
-              <a:rPr sz="1485" b="1">
+              <a:rPr sz="1250" b="1">
                 <a:solidFill>
                   <a:srgbClr val="FFFFFF"/>
                 </a:solidFill>
@@ -5918,7 +5739,7 @@
           <a:p>
             <a:pPr algn="ctr"/>
             <a:r>
-              <a:rPr sz="1485" b="1">
+              <a:rPr sz="1250" b="1">
                 <a:solidFill>
                   <a:srgbClr val="FFFFFF"/>
                 </a:solidFill>
@@ -5953,9 +5774,9 @@
           <a:p>
             <a:pPr algn="ctr"/>
             <a:r>
-              <a:rPr sz="1350" b="1">
-                <a:solidFill>
-                  <a:srgbClr val="123456"/>
+              <a:rPr sz="1150" b="1">
+                <a:solidFill>
+                  <a:srgbClr val="FFFFFF"/>
                 </a:solidFill>
                 <a:latin typeface="Arial"/>
               </a:rPr>
@@ -6114,7 +5935,7 @@
           <a:p>
             <a:pPr algn="ctr"/>
             <a:r>
-              <a:rPr sz="3105" b="1">
+              <a:rPr sz="2300" b="1">
                 <a:solidFill>
                   <a:srgbClr val="123456"/>
                 </a:solidFill>
@@ -6149,7 +5970,7 @@
           <a:p>
             <a:pPr algn="l"/>
             <a:r>
-              <a:rPr sz="2025" b="1">
+              <a:rPr sz="1500" b="1">
                 <a:solidFill>
                   <a:srgbClr val="2365A9"/>
                 </a:solidFill>
@@ -6184,9 +6005,9 @@
           <a:p>
             <a:pPr algn="l"/>
             <a:r>
-              <a:rPr sz="1485" b="1">
-                <a:solidFill>
-                  <a:srgbClr val="272F38"/>
+              <a:rPr sz="1250" b="1">
+                <a:solidFill>
+                  <a:srgbClr val="FFFFFF"/>
                 </a:solidFill>
                 <a:latin typeface="Arial"/>
               </a:rPr>
@@ -6238,9 +6059,9 @@
           <a:p>
             <a:pPr algn="ctr"/>
             <a:r>
-              <a:rPr sz="1417" b="1">
-                <a:solidFill>
-                  <a:srgbClr val="123456"/>
+              <a:rPr sz="1200" b="1">
+                <a:solidFill>
+                  <a:srgbClr val="FFFFFF"/>
                 </a:solidFill>
                 <a:latin typeface="Arial"/>
               </a:rPr>
@@ -6292,9 +6113,9 @@
           <a:p>
             <a:pPr algn="ctr"/>
             <a:r>
-              <a:rPr sz="1375" b="1">
-                <a:solidFill>
-                  <a:srgbClr val="123456"/>
+              <a:rPr sz="1169" b="1">
+                <a:solidFill>
+                  <a:srgbClr val="FFFFFF"/>
                 </a:solidFill>
                 <a:latin typeface="Arial"/>
               </a:rPr>
@@ -6346,9 +6167,9 @@
           <a:p>
             <a:pPr algn="ctr"/>
             <a:r>
-              <a:rPr sz="1375" b="1">
-                <a:solidFill>
-                  <a:srgbClr val="123456"/>
+              <a:rPr sz="1169" b="1">
+                <a:solidFill>
+                  <a:srgbClr val="FFFFFF"/>
                 </a:solidFill>
                 <a:latin typeface="Arial"/>
               </a:rPr>
@@ -6400,9 +6221,9 @@
           <a:p>
             <a:pPr algn="ctr"/>
             <a:r>
-              <a:rPr sz="1375" b="1">
-                <a:solidFill>
-                  <a:srgbClr val="123456"/>
+              <a:rPr sz="1169" b="1">
+                <a:solidFill>
+                  <a:srgbClr val="FFFFFF"/>
                 </a:solidFill>
                 <a:latin typeface="Arial"/>
               </a:rPr>
@@ -6559,9 +6380,9 @@
           <a:p>
             <a:pPr algn="ctr"/>
             <a:r>
-              <a:rPr sz="1350" b="1">
-                <a:solidFill>
-                  <a:srgbClr val="123456"/>
+              <a:rPr sz="1150" b="1">
+                <a:solidFill>
+                  <a:srgbClr val="FFFFFF"/>
                 </a:solidFill>
                 <a:latin typeface="Arial"/>
               </a:rPr>
@@ -6594,7 +6415,7 @@
           <a:p>
             <a:pPr algn="l"/>
             <a:r>
-              <a:rPr sz="1755" b="1">
+              <a:rPr sz="1450" b="1">
                 <a:solidFill>
                   <a:srgbClr val="2365A9"/>
                 </a:solidFill>
@@ -6629,9 +6450,9 @@
           <a:p>
             <a:pPr algn="l"/>
             <a:r>
-              <a:rPr sz="1147" b="1">
-                <a:solidFill>
-                  <a:srgbClr val="2365A9"/>
+              <a:rPr sz="1100" b="1">
+                <a:solidFill>
+                  <a:srgbClr val="FFFFFF"/>
                 </a:solidFill>
                 <a:latin typeface="Arial"/>
               </a:rPr>
@@ -6664,9 +6485,9 @@
           <a:p>
             <a:pPr algn="l"/>
             <a:r>
-              <a:rPr sz="1147" b="1">
-                <a:solidFill>
-                  <a:srgbClr val="272F38"/>
+              <a:rPr sz="1100" b="1">
+                <a:solidFill>
+                  <a:srgbClr val="FFFFFF"/>
                 </a:solidFill>
                 <a:latin typeface="Arial"/>
               </a:rPr>
@@ -6699,9 +6520,9 @@
           <a:p>
             <a:pPr algn="l"/>
             <a:r>
-              <a:rPr sz="1147" b="1">
-                <a:solidFill>
-                  <a:srgbClr val="26847C"/>
+              <a:rPr sz="1100" b="1">
+                <a:solidFill>
+                  <a:srgbClr val="FFFFFF"/>
                 </a:solidFill>
                 <a:latin typeface="Arial"/>
               </a:rPr>
@@ -6734,9 +6555,9 @@
           <a:p>
             <a:pPr algn="l"/>
             <a:r>
-              <a:rPr sz="1147" b="1">
-                <a:solidFill>
-                  <a:srgbClr val="272F38"/>
+              <a:rPr sz="1100" b="1">
+                <a:solidFill>
+                  <a:srgbClr val="FFFFFF"/>
                 </a:solidFill>
                 <a:latin typeface="Arial"/>
               </a:rPr>
@@ -6769,9 +6590,9 @@
           <a:p>
             <a:pPr algn="l"/>
             <a:r>
-              <a:rPr sz="1147" b="1">
-                <a:solidFill>
-                  <a:srgbClr val="E77E22"/>
+              <a:rPr sz="1100" b="1">
+                <a:solidFill>
+                  <a:srgbClr val="FFFFFF"/>
                 </a:solidFill>
                 <a:latin typeface="Arial"/>
               </a:rPr>
@@ -6804,9 +6625,9 @@
           <a:p>
             <a:pPr algn="l"/>
             <a:r>
-              <a:rPr sz="1147" b="1">
-                <a:solidFill>
-                  <a:srgbClr val="272F38"/>
+              <a:rPr sz="1100" b="1">
+                <a:solidFill>
+                  <a:srgbClr val="FFFFFF"/>
                 </a:solidFill>
                 <a:latin typeface="Arial"/>
               </a:rPr>
@@ -6858,7 +6679,7 @@
           <a:p>
             <a:pPr algn="ctr"/>
             <a:r>
-              <a:rPr sz="1147" b="1">
+              <a:rPr sz="1100" b="1">
                 <a:solidFill>
                   <a:srgbClr val="FFFFFF"/>
                 </a:solidFill>
@@ -6912,7 +6733,7 @@
           <a:p>
             <a:pPr algn="ctr"/>
             <a:r>
-              <a:rPr sz="972" b="1">
+              <a:rPr sz="969" b="1">
                 <a:solidFill>
                   <a:srgbClr val="FFFFFF"/>
                 </a:solidFill>
@@ -6966,7 +6787,7 @@
           <a:p>
             <a:pPr algn="ctr"/>
             <a:r>
-              <a:rPr sz="1012" b="1">
+              <a:rPr sz="1000" b="1">
                 <a:solidFill>
                   <a:srgbClr val="FFFFFF"/>
                 </a:solidFill>
@@ -7106,7 +6927,7 @@
           <a:p>
             <a:pPr algn="l"/>
             <a:r>
-              <a:rPr sz="1755" b="1">
+              <a:rPr sz="1450" b="1">
                 <a:solidFill>
                   <a:srgbClr val="2365A9"/>
                 </a:solidFill>
@@ -7160,7 +6981,7 @@
           <a:p>
             <a:pPr algn="ctr"/>
             <a:r>
-              <a:rPr sz="918" b="1">
+              <a:rPr sz="930" b="1">
                 <a:solidFill>
                   <a:srgbClr val="FFFFFF"/>
                 </a:solidFill>
@@ -7195,9 +7016,9 @@
           <a:p>
             <a:pPr algn="l"/>
             <a:r>
-              <a:rPr sz="945" b="1">
-                <a:solidFill>
-                  <a:srgbClr val="272F38"/>
+              <a:rPr sz="950" b="1">
+                <a:solidFill>
+                  <a:srgbClr val="FFFFFF"/>
                 </a:solidFill>
                 <a:latin typeface="Arial"/>
               </a:rPr>
@@ -7284,7 +7105,7 @@
           <a:p>
             <a:pPr algn="ctr"/>
             <a:r>
-              <a:rPr sz="918" b="1">
+              <a:rPr sz="930" b="1">
                 <a:solidFill>
                   <a:srgbClr val="FFFFFF"/>
                 </a:solidFill>
@@ -7319,9 +7140,9 @@
           <a:p>
             <a:pPr algn="l"/>
             <a:r>
-              <a:rPr sz="945" b="1">
-                <a:solidFill>
-                  <a:srgbClr val="272F38"/>
+              <a:rPr sz="950" b="1">
+                <a:solidFill>
+                  <a:srgbClr val="FFFFFF"/>
                 </a:solidFill>
                 <a:latin typeface="Arial"/>
               </a:rPr>
@@ -7408,7 +7229,7 @@
           <a:p>
             <a:pPr algn="ctr"/>
             <a:r>
-              <a:rPr sz="918" b="1">
+              <a:rPr sz="930" b="1">
                 <a:solidFill>
                   <a:srgbClr val="FFFFFF"/>
                 </a:solidFill>
@@ -7443,9 +7264,9 @@
           <a:p>
             <a:pPr algn="l"/>
             <a:r>
-              <a:rPr sz="945" b="1">
-                <a:solidFill>
-                  <a:srgbClr val="272F38"/>
+              <a:rPr sz="950" b="1">
+                <a:solidFill>
+                  <a:srgbClr val="FFFFFF"/>
                 </a:solidFill>
                 <a:latin typeface="Arial"/>
               </a:rPr>
@@ -7532,7 +7353,7 @@
           <a:p>
             <a:pPr algn="ctr"/>
             <a:r>
-              <a:rPr sz="918" b="1">
+              <a:rPr sz="930" b="1">
                 <a:solidFill>
                   <a:srgbClr val="FFFFFF"/>
                 </a:solidFill>
@@ -7567,9 +7388,9 @@
           <a:p>
             <a:pPr algn="l"/>
             <a:r>
-              <a:rPr sz="945" b="1">
-                <a:solidFill>
-                  <a:srgbClr val="272F38"/>
+              <a:rPr sz="950" b="1">
+                <a:solidFill>
+                  <a:srgbClr val="FFFFFF"/>
                 </a:solidFill>
                 <a:latin typeface="Arial"/>
               </a:rPr>
@@ -7656,7 +7477,7 @@
           <a:p>
             <a:pPr algn="ctr"/>
             <a:r>
-              <a:rPr sz="918" b="1">
+              <a:rPr sz="930" b="1">
                 <a:solidFill>
                   <a:srgbClr val="FFFFFF"/>
                 </a:solidFill>
@@ -7691,9 +7512,9 @@
           <a:p>
             <a:pPr algn="l"/>
             <a:r>
-              <a:rPr sz="945" b="1">
-                <a:solidFill>
-                  <a:srgbClr val="272F38"/>
+              <a:rPr sz="950" b="1">
+                <a:solidFill>
+                  <a:srgbClr val="FFFFFF"/>
                 </a:solidFill>
                 <a:latin typeface="Arial"/>
               </a:rPr>
@@ -7745,7 +7566,7 @@
           <a:p>
             <a:pPr algn="ctr"/>
             <a:r>
-              <a:rPr sz="918" b="1">
+              <a:rPr sz="930" b="1">
                 <a:solidFill>
                   <a:srgbClr val="FFFFFF"/>
                 </a:solidFill>
@@ -7780,9 +7601,9 @@
           <a:p>
             <a:pPr algn="l"/>
             <a:r>
-              <a:rPr sz="945" b="1">
-                <a:solidFill>
-                  <a:srgbClr val="272F38"/>
+              <a:rPr sz="950" b="1">
+                <a:solidFill>
+                  <a:srgbClr val="FFFFFF"/>
                 </a:solidFill>
                 <a:latin typeface="Arial"/>
               </a:rPr>
@@ -7869,7 +7690,7 @@
           <a:p>
             <a:pPr algn="ctr"/>
             <a:r>
-              <a:rPr sz="918" b="1">
+              <a:rPr sz="930" b="1">
                 <a:solidFill>
                   <a:srgbClr val="FFFFFF"/>
                 </a:solidFill>
@@ -7904,9 +7725,9 @@
           <a:p>
             <a:pPr algn="l"/>
             <a:r>
-              <a:rPr sz="945" b="1">
-                <a:solidFill>
-                  <a:srgbClr val="272F38"/>
+              <a:rPr sz="950" b="1">
+                <a:solidFill>
+                  <a:srgbClr val="FFFFFF"/>
                 </a:solidFill>
                 <a:latin typeface="Arial"/>
               </a:rPr>
@@ -7993,7 +7814,7 @@
           <a:p>
             <a:pPr algn="ctr"/>
             <a:r>
-              <a:rPr sz="918" b="1">
+              <a:rPr sz="930" b="1">
                 <a:solidFill>
                   <a:srgbClr val="FFFFFF"/>
                 </a:solidFill>
@@ -8028,9 +7849,9 @@
           <a:p>
             <a:pPr algn="l"/>
             <a:r>
-              <a:rPr sz="945" b="1">
-                <a:solidFill>
-                  <a:srgbClr val="272F38"/>
+              <a:rPr sz="950" b="1">
+                <a:solidFill>
+                  <a:srgbClr val="FFFFFF"/>
                 </a:solidFill>
                 <a:latin typeface="Arial"/>
               </a:rPr>
@@ -8117,7 +7938,7 @@
           <a:p>
             <a:pPr algn="ctr"/>
             <a:r>
-              <a:rPr sz="918" b="1">
+              <a:rPr sz="930" b="1">
                 <a:solidFill>
                   <a:srgbClr val="FFFFFF"/>
                 </a:solidFill>
@@ -8152,9 +7973,9 @@
           <a:p>
             <a:pPr algn="l"/>
             <a:r>
-              <a:rPr sz="945" b="1">
-                <a:solidFill>
-                  <a:srgbClr val="272F38"/>
+              <a:rPr sz="950" b="1">
+                <a:solidFill>
+                  <a:srgbClr val="FFFFFF"/>
                 </a:solidFill>
                 <a:latin typeface="Arial"/>
               </a:rPr>
@@ -8222,9 +8043,9 @@
           <a:p>
             <a:pPr algn="l"/>
             <a:r>
-              <a:rPr sz="945" b="1">
-                <a:solidFill>
-                  <a:srgbClr val="272F38"/>
+              <a:rPr sz="950" b="1">
+                <a:solidFill>
+                  <a:srgbClr val="FFFFFF"/>
                 </a:solidFill>
                 <a:latin typeface="Arial"/>
               </a:rPr>
@@ -8311,7 +8132,7 @@
           <a:p>
             <a:pPr algn="ctr"/>
             <a:r>
-              <a:rPr sz="900" b="1">
+              <a:rPr sz="850" b="1">
                 <a:solidFill>
                   <a:srgbClr val="FFFFFF"/>
                 </a:solidFill>
@@ -8472,7 +8293,7 @@
           <a:p>
             <a:pPr algn="ctr"/>
             <a:r>
-              <a:rPr sz="3105" b="1">
+              <a:rPr sz="2300" b="1">
                 <a:solidFill>
                   <a:srgbClr val="123456"/>
                 </a:solidFill>
@@ -8507,7 +8328,7 @@
           <a:p>
             <a:pPr algn="l"/>
             <a:r>
-              <a:rPr sz="1890" b="1">
+              <a:rPr sz="1400" b="1">
                 <a:solidFill>
                   <a:srgbClr val="2365A9"/>
                 </a:solidFill>
@@ -8561,7 +8382,7 @@
           <a:p>
             <a:pPr algn="ctr"/>
             <a:r>
-              <a:rPr sz="1282" b="1">
+              <a:rPr sz="1200" b="1">
                 <a:solidFill>
                   <a:srgbClr val="FFFFFF"/>
                 </a:solidFill>
@@ -8615,9 +8436,9 @@
           <a:p>
             <a:pPr algn="l"/>
             <a:r>
-              <a:rPr sz="1147" b="1">
-                <a:solidFill>
-                  <a:srgbClr val="272F38"/>
+              <a:rPr sz="1100" b="1">
+                <a:solidFill>
+                  <a:srgbClr val="FFFFFF"/>
                 </a:solidFill>
                 <a:latin typeface="Arial"/>
               </a:rPr>
@@ -8669,7 +8490,7 @@
           <a:p>
             <a:pPr algn="ctr"/>
             <a:r>
-              <a:rPr sz="1282" b="1">
+              <a:rPr sz="1200" b="1">
                 <a:solidFill>
                   <a:srgbClr val="FFFFFF"/>
                 </a:solidFill>
@@ -8723,9 +8544,9 @@
           <a:p>
             <a:pPr algn="l"/>
             <a:r>
-              <a:rPr sz="1147" b="1">
-                <a:solidFill>
-                  <a:srgbClr val="272F38"/>
+              <a:rPr sz="1100" b="1">
+                <a:solidFill>
+                  <a:srgbClr val="FFFFFF"/>
                 </a:solidFill>
                 <a:latin typeface="Arial"/>
               </a:rPr>
@@ -8777,7 +8598,7 @@
           <a:p>
             <a:pPr algn="ctr"/>
             <a:r>
-              <a:rPr sz="1282" b="1">
+              <a:rPr sz="1200" b="1">
                 <a:solidFill>
                   <a:srgbClr val="FFFFFF"/>
                 </a:solidFill>
@@ -8831,9 +8652,9 @@
           <a:p>
             <a:pPr algn="l"/>
             <a:r>
-              <a:rPr sz="1147" b="1">
-                <a:solidFill>
-                  <a:srgbClr val="272F38"/>
+              <a:rPr sz="1100" b="1">
+                <a:solidFill>
+                  <a:srgbClr val="FFFFFF"/>
                 </a:solidFill>
                 <a:latin typeface="Arial"/>
               </a:rPr>
@@ -8885,7 +8706,7 @@
           <a:p>
             <a:pPr algn="ctr"/>
             <a:r>
-              <a:rPr sz="1282" b="1">
+              <a:rPr sz="1200" b="1">
                 <a:solidFill>
                   <a:srgbClr val="FFFFFF"/>
                 </a:solidFill>
@@ -8939,9 +8760,9 @@
           <a:p>
             <a:pPr algn="l"/>
             <a:r>
-              <a:rPr sz="1147" b="1">
-                <a:solidFill>
-                  <a:srgbClr val="272F38"/>
+              <a:rPr sz="1100" b="1">
+                <a:solidFill>
+                  <a:srgbClr val="FFFFFF"/>
                 </a:solidFill>
                 <a:latin typeface="Arial"/>
               </a:rPr>
@@ -8993,7 +8814,7 @@
           <a:p>
             <a:pPr algn="ctr"/>
             <a:r>
-              <a:rPr sz="1282" b="1">
+              <a:rPr sz="1200" b="1">
                 <a:solidFill>
                   <a:srgbClr val="FFFFFF"/>
                 </a:solidFill>
@@ -9047,9 +8868,9 @@
           <a:p>
             <a:pPr algn="l"/>
             <a:r>
-              <a:rPr sz="1147" b="1">
-                <a:solidFill>
-                  <a:srgbClr val="272F38"/>
+              <a:rPr sz="1100" b="1">
+                <a:solidFill>
+                  <a:srgbClr val="FFFFFF"/>
                 </a:solidFill>
                 <a:latin typeface="Arial"/>
               </a:rPr>
@@ -9082,7 +8903,7 @@
           <a:p>
             <a:pPr algn="l"/>
             <a:r>
-              <a:rPr sz="1890" b="1">
+              <a:rPr sz="1400" b="1">
                 <a:solidFill>
                   <a:srgbClr val="2365A9"/>
                 </a:solidFill>
@@ -9136,9 +8957,9 @@
           <a:p>
             <a:pPr algn="ctr"/>
             <a:r>
-              <a:rPr sz="1282" b="1">
-                <a:solidFill>
-                  <a:srgbClr val="123456"/>
+              <a:rPr sz="1200" b="1">
+                <a:solidFill>
+                  <a:srgbClr val="FFFFFF"/>
                 </a:solidFill>
                 <a:latin typeface="Arial"/>
               </a:rPr>
@@ -9190,9 +9011,9 @@
           <a:p>
             <a:pPr algn="ctr"/>
             <a:r>
-              <a:rPr sz="1282" b="1">
-                <a:solidFill>
-                  <a:srgbClr val="123456"/>
+              <a:rPr sz="1200" b="1">
+                <a:solidFill>
+                  <a:srgbClr val="FFFFFF"/>
                 </a:solidFill>
                 <a:latin typeface="Arial"/>
               </a:rPr>
@@ -9244,9 +9065,9 @@
           <a:p>
             <a:pPr algn="ctr"/>
             <a:r>
-              <a:rPr sz="1282" b="1">
-                <a:solidFill>
-                  <a:srgbClr val="123456"/>
+              <a:rPr sz="1200" b="1">
+                <a:solidFill>
+                  <a:srgbClr val="FFFFFF"/>
                 </a:solidFill>
                 <a:latin typeface="Arial"/>
               </a:rPr>
@@ -9368,9 +9189,9 @@
           <a:p>
             <a:pPr algn="ctr"/>
             <a:r>
-              <a:rPr sz="1350" b="1">
-                <a:solidFill>
-                  <a:srgbClr val="123456"/>
+              <a:rPr sz="1150" b="1">
+                <a:solidFill>
+                  <a:srgbClr val="FFFFFF"/>
                 </a:solidFill>
                 <a:latin typeface="Arial"/>
               </a:rPr>
@@ -9422,9 +9243,9 @@
           <a:p>
             <a:pPr algn="ctr"/>
             <a:r>
-              <a:rPr sz="1350" b="1">
-                <a:solidFill>
-                  <a:srgbClr val="123456"/>
+              <a:rPr sz="1150" b="1">
+                <a:solidFill>
+                  <a:srgbClr val="FFFFFF"/>
                 </a:solidFill>
                 <a:latin typeface="Arial"/>
               </a:rPr>
@@ -9546,9 +9367,9 @@
           <a:p>
             <a:pPr algn="ctr"/>
             <a:r>
-              <a:rPr sz="1282" b="1">
-                <a:solidFill>
-                  <a:srgbClr val="123456"/>
+              <a:rPr sz="1200" b="1">
+                <a:solidFill>
+                  <a:srgbClr val="FFFFFF"/>
                 </a:solidFill>
                 <a:latin typeface="Arial"/>
               </a:rPr>
@@ -9600,9 +9421,9 @@
           <a:p>
             <a:pPr algn="ctr"/>
             <a:r>
-              <a:rPr sz="1282" b="1">
-                <a:solidFill>
-                  <a:srgbClr val="123456"/>
+              <a:rPr sz="1200" b="1">
+                <a:solidFill>
+                  <a:srgbClr val="FFFFFF"/>
                 </a:solidFill>
                 <a:latin typeface="Arial"/>
               </a:rPr>
@@ -9740,7 +9561,7 @@
           <a:p>
             <a:pPr algn="l"/>
             <a:r>
-              <a:rPr sz="1755" b="1">
+              <a:rPr sz="1450" b="1">
                 <a:solidFill>
                   <a:srgbClr val="2365A9"/>
                 </a:solidFill>
@@ -9794,9 +9615,9 @@
           <a:p>
             <a:pPr algn="ctr"/>
             <a:r>
-              <a:rPr sz="1147" b="1">
-                <a:solidFill>
-                  <a:srgbClr val="272F38"/>
+              <a:rPr sz="1100" b="1">
+                <a:solidFill>
+                  <a:srgbClr val="FFFFFF"/>
                 </a:solidFill>
                 <a:latin typeface="Arial"/>
               </a:rPr>
@@ -9884,9 +9705,9 @@
           <a:p>
             <a:pPr algn="ctr"/>
             <a:r>
-              <a:rPr sz="1147" b="1">
-                <a:solidFill>
-                  <a:srgbClr val="272F38"/>
+              <a:rPr sz="1100" b="1">
+                <a:solidFill>
+                  <a:srgbClr val="FFFFFF"/>
                 </a:solidFill>
                 <a:latin typeface="Arial"/>
               </a:rPr>
@@ -9974,9 +9795,9 @@
           <a:p>
             <a:pPr algn="ctr"/>
             <a:r>
-              <a:rPr sz="1147" b="1">
-                <a:solidFill>
-                  <a:srgbClr val="272F38"/>
+              <a:rPr sz="1100" b="1">
+                <a:solidFill>
+                  <a:srgbClr val="FFFFFF"/>
                 </a:solidFill>
                 <a:latin typeface="Arial"/>
               </a:rPr>
@@ -10064,9 +9885,9 @@
           <a:p>
             <a:pPr algn="ctr"/>
             <a:r>
-              <a:rPr sz="1147" b="1">
-                <a:solidFill>
-                  <a:srgbClr val="272F38"/>
+              <a:rPr sz="1100" b="1">
+                <a:solidFill>
+                  <a:srgbClr val="FFFFFF"/>
                 </a:solidFill>
                 <a:latin typeface="Arial"/>
               </a:rPr>
@@ -10154,9 +9975,9 @@
           <a:p>
             <a:pPr algn="ctr"/>
             <a:r>
-              <a:rPr sz="1147" b="1">
-                <a:solidFill>
-                  <a:srgbClr val="272F38"/>
+              <a:rPr sz="1100" b="1">
+                <a:solidFill>
+                  <a:srgbClr val="FFFFFF"/>
                 </a:solidFill>
                 <a:latin typeface="Arial"/>
               </a:rPr>
@@ -10244,9 +10065,9 @@
           <a:p>
             <a:pPr algn="ctr"/>
             <a:r>
-              <a:rPr sz="1147" b="1">
-                <a:solidFill>
-                  <a:srgbClr val="272F38"/>
+              <a:rPr sz="1100" b="1">
+                <a:solidFill>
+                  <a:srgbClr val="FFFFFF"/>
                 </a:solidFill>
                 <a:latin typeface="Arial"/>
               </a:rPr>
@@ -10280,9 +10101,9 @@
           <a:p>
             <a:pPr algn="ctr"/>
             <a:r>
-              <a:rPr sz="1240" b="1">
-                <a:solidFill>
-                  <a:srgbClr val="C24343"/>
+              <a:rPr sz="1169" b="1">
+                <a:solidFill>
+                  <a:srgbClr val="FFFFFF"/>
                 </a:solidFill>
                 <a:latin typeface="Arial"/>
               </a:rPr>
@@ -10437,7 +10258,7 @@
               <a:defRPr/>
             </a:pPr>
             <a:r>
-              <a:rPr kumimoji="0" lang="en-US" sz="1620" b="1" i="0" u="none" strike="noStrike" kern="1200" cap="none" spc="0" normalizeH="0" baseline="0" noProof="0">
+              <a:rPr kumimoji="0" lang="en-US" sz="1350" b="1" i="0" u="none" strike="noStrike" kern="1200" cap="none" spc="0" normalizeH="0" baseline="0" noProof="0">
                 <a:ln>
                   <a:noFill/>
                 </a:ln>
@@ -10524,7 +10345,7 @@
           <a:p>
             <a:pPr algn="ctr"/>
             <a:r>
-              <a:rPr sz="3105" b="1">
+              <a:rPr sz="2300" b="1">
                 <a:solidFill>
                   <a:srgbClr val="123456"/>
                 </a:solidFill>
@@ -10559,7 +10380,7 @@
           <a:p>
             <a:pPr algn="l"/>
             <a:r>
-              <a:rPr sz="1890" b="1">
+              <a:rPr sz="1400" b="1">
                 <a:solidFill>
                   <a:srgbClr val="2365A9"/>
                 </a:solidFill>
@@ -10613,7 +10434,7 @@
           <a:p>
             <a:pPr algn="ctr"/>
             <a:r>
-              <a:rPr sz="1080" b="1">
+              <a:rPr sz="1050" b="1">
                 <a:solidFill>
                   <a:srgbClr val="FFFFFF"/>
                 </a:solidFill>
@@ -10648,9 +10469,9 @@
           <a:p>
             <a:pPr algn="l"/>
             <a:r>
-              <a:rPr sz="1282" b="1">
-                <a:solidFill>
-                  <a:srgbClr val="2365A9"/>
+              <a:rPr sz="1200" b="1">
+                <a:solidFill>
+                  <a:srgbClr val="FFFFFF"/>
                 </a:solidFill>
                 <a:latin typeface="Arial"/>
               </a:rPr>
@@ -10683,9 +10504,9 @@
           <a:p>
             <a:pPr algn="l"/>
             <a:r>
-              <a:rPr sz="1173" b="1">
-                <a:solidFill>
-                  <a:srgbClr val="272F38"/>
+              <a:rPr sz="1119" b="1">
+                <a:solidFill>
+                  <a:srgbClr val="FFFFFF"/>
                 </a:solidFill>
                 <a:latin typeface="Arial"/>
               </a:rPr>
@@ -10737,7 +10558,7 @@
           <a:p>
             <a:pPr algn="ctr"/>
             <a:r>
-              <a:rPr sz="1080" b="1">
+              <a:rPr sz="1050" b="1">
                 <a:solidFill>
                   <a:srgbClr val="FFFFFF"/>
                 </a:solidFill>
@@ -10772,9 +10593,9 @@
           <a:p>
             <a:pPr algn="l"/>
             <a:r>
-              <a:rPr sz="1282" b="1">
-                <a:solidFill>
-                  <a:srgbClr val="26847C"/>
+              <a:rPr sz="1200" b="1">
+                <a:solidFill>
+                  <a:srgbClr val="FFFFFF"/>
                 </a:solidFill>
                 <a:latin typeface="Arial"/>
               </a:rPr>
@@ -10807,9 +10628,9 @@
           <a:p>
             <a:pPr algn="l"/>
             <a:r>
-              <a:rPr sz="1173" b="1">
-                <a:solidFill>
-                  <a:srgbClr val="272F38"/>
+              <a:rPr sz="1119" b="1">
+                <a:solidFill>
+                  <a:srgbClr val="FFFFFF"/>
                 </a:solidFill>
                 <a:latin typeface="Arial"/>
               </a:rPr>
@@ -10861,7 +10682,7 @@
           <a:p>
             <a:pPr algn="ctr"/>
             <a:r>
-              <a:rPr sz="1080" b="1">
+              <a:rPr sz="1050" b="1">
                 <a:solidFill>
                   <a:srgbClr val="FFFFFF"/>
                 </a:solidFill>
@@ -10896,9 +10717,9 @@
           <a:p>
             <a:pPr algn="l"/>
             <a:r>
-              <a:rPr sz="1282" b="1">
-                <a:solidFill>
-                  <a:srgbClr val="43945C"/>
+              <a:rPr sz="1200" b="1">
+                <a:solidFill>
+                  <a:srgbClr val="FFFFFF"/>
                 </a:solidFill>
                 <a:latin typeface="Arial"/>
               </a:rPr>
@@ -10931,9 +10752,9 @@
           <a:p>
             <a:pPr algn="l"/>
             <a:r>
-              <a:rPr sz="1173" b="1">
-                <a:solidFill>
-                  <a:srgbClr val="272F38"/>
+              <a:rPr sz="1119" b="1">
+                <a:solidFill>
+                  <a:srgbClr val="FFFFFF"/>
                 </a:solidFill>
                 <a:latin typeface="Arial"/>
               </a:rPr>
@@ -10985,7 +10806,7 @@
           <a:p>
             <a:pPr algn="ctr"/>
             <a:r>
-              <a:rPr sz="1080" b="1">
+              <a:rPr sz="1050" b="1">
                 <a:solidFill>
                   <a:srgbClr val="FFFFFF"/>
                 </a:solidFill>
@@ -11020,9 +10841,9 @@
           <a:p>
             <a:pPr algn="l"/>
             <a:r>
-              <a:rPr sz="1282" b="1">
-                <a:solidFill>
-                  <a:srgbClr val="E77E22"/>
+              <a:rPr sz="1200" b="1">
+                <a:solidFill>
+                  <a:srgbClr val="FFFFFF"/>
                 </a:solidFill>
                 <a:latin typeface="Arial"/>
               </a:rPr>
@@ -11055,9 +10876,9 @@
           <a:p>
             <a:pPr algn="l"/>
             <a:r>
-              <a:rPr sz="1173" b="1">
-                <a:solidFill>
-                  <a:srgbClr val="272F38"/>
+              <a:rPr sz="1119" b="1">
+                <a:solidFill>
+                  <a:srgbClr val="FFFFFF"/>
                 </a:solidFill>
                 <a:latin typeface="Arial"/>
               </a:rPr>
@@ -11090,7 +10911,7 @@
           <a:p>
             <a:pPr algn="l"/>
             <a:r>
-              <a:rPr sz="1890" b="1">
+              <a:rPr sz="1400" b="1">
                 <a:solidFill>
                   <a:srgbClr val="2365A9"/>
                 </a:solidFill>
@@ -11144,7 +10965,7 @@
           <a:p>
             <a:pPr algn="ctr"/>
             <a:r>
-              <a:rPr sz="1215" b="1">
+              <a:rPr sz="1150" b="1">
                 <a:solidFill>
                   <a:srgbClr val="FFFFFF"/>
                 </a:solidFill>
@@ -11179,9 +11000,9 @@
           <a:p>
             <a:pPr algn="l"/>
             <a:r>
-              <a:rPr sz="972" b="1">
-                <a:solidFill>
-                  <a:srgbClr val="272F38"/>
+              <a:rPr sz="969" b="1">
+                <a:solidFill>
+                  <a:srgbClr val="FFFFFF"/>
                 </a:solidFill>
                 <a:latin typeface="Arial"/>
               </a:rPr>
@@ -11233,7 +11054,7 @@
           <a:p>
             <a:pPr algn="ctr"/>
             <a:r>
-              <a:rPr sz="1215" b="1">
+              <a:rPr sz="1150" b="1">
                 <a:solidFill>
                   <a:srgbClr val="FFFFFF"/>
                 </a:solidFill>
@@ -11268,9 +11089,9 @@
           <a:p>
             <a:pPr algn="l"/>
             <a:r>
-              <a:rPr sz="972" b="1">
-                <a:solidFill>
-                  <a:srgbClr val="272F38"/>
+              <a:rPr sz="969" b="1">
+                <a:solidFill>
+                  <a:srgbClr val="FFFFFF"/>
                 </a:solidFill>
                 <a:latin typeface="Arial"/>
               </a:rPr>
@@ -11322,7 +11143,7 @@
           <a:p>
             <a:pPr algn="ctr"/>
             <a:r>
-              <a:rPr sz="1215" b="1">
+              <a:rPr sz="1150" b="1">
                 <a:solidFill>
                   <a:srgbClr val="FFFFFF"/>
                 </a:solidFill>
@@ -11357,9 +11178,9 @@
           <a:p>
             <a:pPr algn="l"/>
             <a:r>
-              <a:rPr sz="972" b="1">
-                <a:solidFill>
-                  <a:srgbClr val="272F38"/>
+              <a:rPr sz="969" b="1">
+                <a:solidFill>
+                  <a:srgbClr val="FFFFFF"/>
                 </a:solidFill>
                 <a:latin typeface="Arial"/>
               </a:rPr>
@@ -11411,7 +11232,7 @@
           <a:p>
             <a:pPr algn="ctr"/>
             <a:r>
-              <a:rPr sz="1215" b="1">
+              <a:rPr sz="1150" b="1">
                 <a:solidFill>
                   <a:srgbClr val="FFFFFF"/>
                 </a:solidFill>
@@ -11446,9 +11267,9 @@
           <a:p>
             <a:pPr algn="l"/>
             <a:r>
-              <a:rPr sz="972" b="1">
-                <a:solidFill>
-                  <a:srgbClr val="272F38"/>
+              <a:rPr sz="969" b="1">
+                <a:solidFill>
+                  <a:srgbClr val="FFFFFF"/>
                 </a:solidFill>
                 <a:latin typeface="Arial"/>
               </a:rPr>
@@ -11481,7 +11302,7 @@
           <a:p>
             <a:pPr algn="l"/>
             <a:r>
-              <a:rPr sz="1890" b="1">
+              <a:rPr sz="1400" b="1">
                 <a:solidFill>
                   <a:srgbClr val="2365A9"/>
                 </a:solidFill>
@@ -11535,9 +11356,9 @@
           <a:p>
             <a:pPr algn="ctr"/>
             <a:r>
-              <a:rPr sz="1173" b="1">
-                <a:solidFill>
-                  <a:srgbClr val="272F38"/>
+              <a:rPr sz="1119" b="1">
+                <a:solidFill>
+                  <a:srgbClr val="FFFFFF"/>
                 </a:solidFill>
                 <a:latin typeface="Arial"/>
               </a:rPr>
@@ -11570,9 +11391,9 @@
           <a:p>
             <a:pPr algn="ctr"/>
             <a:r>
-              <a:rPr sz="1053" b="1">
-                <a:solidFill>
-                  <a:srgbClr val="606972"/>
+              <a:rPr sz="1030" b="1">
+                <a:solidFill>
+                  <a:srgbClr val="FFFFFF"/>
                 </a:solidFill>
                 <a:latin typeface="Arial"/>
               </a:rPr>
@@ -11624,9 +11445,9 @@
           <a:p>
             <a:pPr algn="ctr"/>
             <a:r>
-              <a:rPr sz="1173" b="1">
-                <a:solidFill>
-                  <a:srgbClr val="272F38"/>
+              <a:rPr sz="1119" b="1">
+                <a:solidFill>
+                  <a:srgbClr val="FFFFFF"/>
                 </a:solidFill>
                 <a:latin typeface="Arial"/>
               </a:rPr>
@@ -11659,9 +11480,9 @@
           <a:p>
             <a:pPr algn="ctr"/>
             <a:r>
-              <a:rPr sz="1053" b="1">
-                <a:solidFill>
-                  <a:srgbClr val="606972"/>
+              <a:rPr sz="1030" b="1">
+                <a:solidFill>
+                  <a:srgbClr val="FFFFFF"/>
                 </a:solidFill>
                 <a:latin typeface="Arial"/>
               </a:rPr>
@@ -11713,9 +11534,9 @@
           <a:p>
             <a:pPr algn="ctr"/>
             <a:r>
-              <a:rPr sz="1173" b="1">
-                <a:solidFill>
-                  <a:srgbClr val="272F38"/>
+              <a:rPr sz="1119" b="1">
+                <a:solidFill>
+                  <a:srgbClr val="FFFFFF"/>
                 </a:solidFill>
                 <a:latin typeface="Arial"/>
               </a:rPr>
@@ -11748,9 +11569,9 @@
           <a:p>
             <a:pPr algn="ctr"/>
             <a:r>
-              <a:rPr sz="1053" b="1">
-                <a:solidFill>
-                  <a:srgbClr val="606972"/>
+              <a:rPr sz="1030" b="1">
+                <a:solidFill>
+                  <a:srgbClr val="FFFFFF"/>
                 </a:solidFill>
                 <a:latin typeface="Arial"/>
               </a:rPr>
@@ -11802,9 +11623,9 @@
           <a:p>
             <a:pPr algn="ctr"/>
             <a:r>
-              <a:rPr sz="1173" b="1">
-                <a:solidFill>
-                  <a:srgbClr val="272F38"/>
+              <a:rPr sz="1119" b="1">
+                <a:solidFill>
+                  <a:srgbClr val="FFFFFF"/>
                 </a:solidFill>
                 <a:latin typeface="Arial"/>
               </a:rPr>
@@ -11837,9 +11658,9 @@
           <a:p>
             <a:pPr algn="ctr"/>
             <a:r>
-              <a:rPr sz="1053" b="1">
-                <a:solidFill>
-                  <a:srgbClr val="606972"/>
+              <a:rPr sz="1030" b="1">
+                <a:solidFill>
+                  <a:srgbClr val="FFFFFF"/>
                 </a:solidFill>
                 <a:latin typeface="Arial"/>
               </a:rPr>
@@ -11872,7 +11693,7 @@
           <a:p>
             <a:pPr algn="l"/>
             <a:r>
-              <a:rPr sz="1822" b="1">
+              <a:rPr sz="1500" b="1">
                 <a:solidFill>
                   <a:srgbClr val="2365A9"/>
                 </a:solidFill>
@@ -11926,9 +11747,9 @@
           <a:p>
             <a:pPr algn="ctr"/>
             <a:r>
-              <a:rPr sz="1173" b="1">
-                <a:solidFill>
-                  <a:srgbClr val="272F38"/>
+              <a:rPr sz="1119" b="1">
+                <a:solidFill>
+                  <a:srgbClr val="FFFFFF"/>
                 </a:solidFill>
                 <a:latin typeface="Arial"/>
               </a:rPr>
@@ -12015,9 +11836,9 @@
           <a:p>
             <a:pPr algn="l"/>
             <a:r>
-              <a:rPr sz="1012" b="1">
-                <a:solidFill>
-                  <a:srgbClr val="272F38"/>
+              <a:rPr sz="1000" b="1">
+                <a:solidFill>
+                  <a:srgbClr val="FFFFFF"/>
                 </a:solidFill>
                 <a:latin typeface="Arial"/>
               </a:rPr>
@@ -12069,9 +11890,9 @@
           <a:p>
             <a:pPr algn="ctr"/>
             <a:r>
-              <a:rPr sz="1173" b="1">
-                <a:solidFill>
-                  <a:srgbClr val="272F38"/>
+              <a:rPr sz="1119" b="1">
+                <a:solidFill>
+                  <a:srgbClr val="FFFFFF"/>
                 </a:solidFill>
                 <a:latin typeface="Arial"/>
               </a:rPr>
@@ -12158,9 +11979,9 @@
           <a:p>
             <a:pPr algn="l"/>
             <a:r>
-              <a:rPr sz="1012" b="1">
-                <a:solidFill>
-                  <a:srgbClr val="272F38"/>
+              <a:rPr sz="1000" b="1">
+                <a:solidFill>
+                  <a:srgbClr val="FFFFFF"/>
                 </a:solidFill>
                 <a:latin typeface="Arial"/>
               </a:rPr>
@@ -12212,9 +12033,9 @@
           <a:p>
             <a:pPr algn="ctr"/>
             <a:r>
-              <a:rPr sz="1173" b="1">
-                <a:solidFill>
-                  <a:srgbClr val="272F38"/>
+              <a:rPr sz="1119" b="1">
+                <a:solidFill>
+                  <a:srgbClr val="FFFFFF"/>
                 </a:solidFill>
                 <a:latin typeface="Arial"/>
               </a:rPr>
@@ -12301,9 +12122,9 @@
           <a:p>
             <a:pPr algn="l"/>
             <a:r>
-              <a:rPr sz="1012" b="1">
-                <a:solidFill>
-                  <a:srgbClr val="272F38"/>
+              <a:rPr sz="1000" b="1">
+                <a:solidFill>
+                  <a:srgbClr val="FFFFFF"/>
                 </a:solidFill>
                 <a:latin typeface="Arial"/>
               </a:rPr>
@@ -12355,9 +12176,9 @@
           <a:p>
             <a:pPr algn="ctr"/>
             <a:r>
-              <a:rPr sz="1173" b="1">
-                <a:solidFill>
-                  <a:srgbClr val="272F38"/>
+              <a:rPr sz="1119" b="1">
+                <a:solidFill>
+                  <a:srgbClr val="FFFFFF"/>
                 </a:solidFill>
                 <a:latin typeface="Arial"/>
               </a:rPr>
@@ -12444,9 +12265,9 @@
           <a:p>
             <a:pPr algn="l"/>
             <a:r>
-              <a:rPr sz="1012" b="1">
-                <a:solidFill>
-                  <a:srgbClr val="272F38"/>
+              <a:rPr sz="1000" b="1">
+                <a:solidFill>
+                  <a:srgbClr val="FFFFFF"/>
                 </a:solidFill>
                 <a:latin typeface="Arial"/>
               </a:rPr>
@@ -12479,9 +12300,9 @@
           <a:p>
             <a:pPr algn="ctr"/>
             <a:r>
-              <a:rPr sz="1282" b="1">
-                <a:solidFill>
-                  <a:srgbClr val="123456"/>
+              <a:rPr sz="1200" b="1">
+                <a:solidFill>
+                  <a:srgbClr val="FFFFFF"/>
                 </a:solidFill>
                 <a:latin typeface="Arial"/>
               </a:rPr>
@@ -12641,7 +12462,7 @@
               <a:defRPr/>
             </a:pPr>
             <a:r>
-              <a:rPr kumimoji="0" lang="en-US" sz="1620" b="1" i="0" u="none" strike="noStrike" kern="1200" cap="none" spc="0" normalizeH="0" baseline="0" noProof="0">
+              <a:rPr kumimoji="0" lang="en-US" sz="1350" b="1" i="0" u="none" strike="noStrike" kern="1200" cap="none" spc="0" normalizeH="0" baseline="0" noProof="0">
                 <a:ln>
                   <a:noFill/>
                 </a:ln>
@@ -12728,7 +12549,7 @@
           <a:p>
             <a:pPr algn="ctr"/>
             <a:r>
-              <a:rPr sz="3105" b="1">
+              <a:rPr sz="2300" b="1">
                 <a:solidFill>
                   <a:srgbClr val="123456"/>
                 </a:solidFill>
@@ -12763,7 +12584,7 @@
           <a:p>
             <a:pPr algn="l"/>
             <a:r>
-              <a:rPr sz="1822" b="1">
+              <a:rPr sz="1500" b="1">
                 <a:solidFill>
                   <a:srgbClr val="2365A9"/>
                 </a:solidFill>
@@ -12798,9 +12619,9 @@
           <a:p>
             <a:pPr algn="l"/>
             <a:r>
-              <a:rPr sz="1147" b="1">
-                <a:solidFill>
-                  <a:srgbClr val="272F38"/>
+              <a:rPr sz="1100" b="1">
+                <a:solidFill>
+                  <a:srgbClr val="FFFFFF"/>
                 </a:solidFill>
                 <a:latin typeface="Arial"/>
               </a:rPr>
@@ -12919,9 +12740,9 @@
           <a:p>
             <a:pPr algn="l"/>
             <a:r>
-              <a:rPr sz="1147" b="1">
-                <a:solidFill>
-                  <a:srgbClr val="272F38"/>
+              <a:rPr sz="1100" b="1">
+                <a:solidFill>
+                  <a:srgbClr val="FFFFFF"/>
                 </a:solidFill>
                 <a:latin typeface="Arial"/>
               </a:rPr>
@@ -13040,9 +12861,9 @@
           <a:p>
             <a:pPr algn="l"/>
             <a:r>
-              <a:rPr sz="1147" b="1">
-                <a:solidFill>
-                  <a:srgbClr val="272F38"/>
+              <a:rPr sz="1100" b="1">
+                <a:solidFill>
+                  <a:srgbClr val="FFFFFF"/>
                 </a:solidFill>
                 <a:latin typeface="Arial"/>
               </a:rPr>
@@ -13161,9 +12982,9 @@
           <a:p>
             <a:pPr algn="l"/>
             <a:r>
-              <a:rPr sz="1147" b="1">
-                <a:solidFill>
-                  <a:srgbClr val="272F38"/>
+              <a:rPr sz="1100" b="1">
+                <a:solidFill>
+                  <a:srgbClr val="FFFFFF"/>
                 </a:solidFill>
                 <a:latin typeface="Arial"/>
               </a:rPr>
@@ -13282,7 +13103,7 @@
           <a:p>
             <a:pPr algn="l"/>
             <a:r>
-              <a:rPr sz="1822" b="1">
+              <a:rPr sz="1500" b="1">
                 <a:solidFill>
                   <a:srgbClr val="2365A9"/>
                 </a:solidFill>
@@ -13336,7 +13157,7 @@
           <a:p>
             <a:pPr algn="ctr"/>
             <a:r>
-              <a:rPr sz="1012" b="1">
+              <a:rPr sz="1000" b="1">
                 <a:solidFill>
                   <a:srgbClr val="FFFFFF"/>
                 </a:solidFill>
@@ -13390,7 +13211,7 @@
           <a:p>
             <a:pPr algn="ctr"/>
             <a:r>
-              <a:rPr sz="1012" b="1">
+              <a:rPr sz="1000" b="1">
                 <a:solidFill>
                   <a:srgbClr val="FFFFFF"/>
                 </a:solidFill>
@@ -13444,7 +13265,7 @@
           <a:p>
             <a:pPr algn="ctr"/>
             <a:r>
-              <a:rPr sz="1012" b="1">
+              <a:rPr sz="1000" b="1">
                 <a:solidFill>
                   <a:srgbClr val="FFFFFF"/>
                 </a:solidFill>
@@ -13498,7 +13319,7 @@
           <a:p>
             <a:pPr algn="ctr"/>
             <a:r>
-              <a:rPr sz="1012" b="1">
+              <a:rPr sz="1000" b="1">
                 <a:solidFill>
                   <a:srgbClr val="FFFFFF"/>
                 </a:solidFill>
@@ -13552,7 +13373,7 @@
           <a:p>
             <a:pPr algn="ctr"/>
             <a:r>
-              <a:rPr sz="1012" b="1">
+              <a:rPr sz="1000" b="1">
                 <a:solidFill>
                   <a:srgbClr val="FFFFFF"/>
                 </a:solidFill>
@@ -13587,7 +13408,7 @@
           <a:p>
             <a:pPr algn="l"/>
             <a:r>
-              <a:rPr sz="1822" b="1">
+              <a:rPr sz="1500" b="1">
                 <a:solidFill>
                   <a:srgbClr val="2365A9"/>
                 </a:solidFill>
@@ -13641,7 +13462,7 @@
           <a:p>
             <a:pPr algn="ctr"/>
             <a:r>
-              <a:rPr sz="1105" b="1">
+              <a:rPr sz="1069" b="1">
                 <a:solidFill>
                   <a:srgbClr val="FFFFFF"/>
                 </a:solidFill>
@@ -13676,9 +13497,9 @@
           <a:p>
             <a:pPr algn="l"/>
             <a:r>
-              <a:rPr sz="1173" b="1">
-                <a:solidFill>
-                  <a:srgbClr val="272F38"/>
+              <a:rPr sz="1119" b="1">
+                <a:solidFill>
+                  <a:srgbClr val="FFFFFF"/>
                 </a:solidFill>
                 <a:latin typeface="Arial"/>
               </a:rPr>
@@ -13730,7 +13551,7 @@
           <a:p>
             <a:pPr algn="ctr"/>
             <a:r>
-              <a:rPr sz="1105" b="1">
+              <a:rPr sz="1069" b="1">
                 <a:solidFill>
                   <a:srgbClr val="FFFFFF"/>
                 </a:solidFill>
@@ -13765,9 +13586,9 @@
           <a:p>
             <a:pPr algn="l"/>
             <a:r>
-              <a:rPr sz="1173" b="1">
-                <a:solidFill>
-                  <a:srgbClr val="272F38"/>
+              <a:rPr sz="1119" b="1">
+                <a:solidFill>
+                  <a:srgbClr val="FFFFFF"/>
                 </a:solidFill>
                 <a:latin typeface="Arial"/>
               </a:rPr>
@@ -13819,7 +13640,7 @@
           <a:p>
             <a:pPr algn="ctr"/>
             <a:r>
-              <a:rPr sz="1105" b="1">
+              <a:rPr sz="1069" b="1">
                 <a:solidFill>
                   <a:srgbClr val="FFFFFF"/>
                 </a:solidFill>
@@ -13854,9 +13675,9 @@
           <a:p>
             <a:pPr algn="l"/>
             <a:r>
-              <a:rPr sz="1173" b="1">
-                <a:solidFill>
-                  <a:srgbClr val="272F38"/>
+              <a:rPr sz="1119" b="1">
+                <a:solidFill>
+                  <a:srgbClr val="FFFFFF"/>
                 </a:solidFill>
                 <a:latin typeface="Arial"/>
               </a:rPr>
@@ -13908,7 +13729,7 @@
           <a:p>
             <a:pPr algn="ctr"/>
             <a:r>
-              <a:rPr sz="1105" b="1">
+              <a:rPr sz="1069" b="1">
                 <a:solidFill>
                   <a:srgbClr val="FFFFFF"/>
                 </a:solidFill>
@@ -13943,9 +13764,9 @@
           <a:p>
             <a:pPr algn="l"/>
             <a:r>
-              <a:rPr sz="1173" b="1">
-                <a:solidFill>
-                  <a:srgbClr val="272F38"/>
+              <a:rPr sz="1119" b="1">
+                <a:solidFill>
+                  <a:srgbClr val="FFFFFF"/>
                 </a:solidFill>
                 <a:latin typeface="Arial"/>
               </a:rPr>
@@ -13997,7 +13818,7 @@
           <a:p>
             <a:pPr algn="ctr"/>
             <a:r>
-              <a:rPr sz="1105" b="1">
+              <a:rPr sz="1069" b="1">
                 <a:solidFill>
                   <a:srgbClr val="FFFFFF"/>
                 </a:solidFill>
@@ -14032,9 +13853,9 @@
           <a:p>
             <a:pPr algn="l"/>
             <a:r>
-              <a:rPr sz="1173" b="1">
-                <a:solidFill>
-                  <a:srgbClr val="272F38"/>
+              <a:rPr sz="1119" b="1">
+                <a:solidFill>
+                  <a:srgbClr val="FFFFFF"/>
                 </a:solidFill>
                 <a:latin typeface="Arial"/>
               </a:rPr>
@@ -14067,7 +13888,7 @@
           <a:p>
             <a:pPr algn="l"/>
             <a:r>
-              <a:rPr sz="1687" b="1">
+              <a:rPr sz="1400" b="1">
                 <a:solidFill>
                   <a:srgbClr val="2365A9"/>
                 </a:solidFill>
@@ -14121,9 +13942,9 @@
           <a:p>
             <a:pPr algn="ctr"/>
             <a:r>
-              <a:rPr sz="1147" b="1">
-                <a:solidFill>
-                  <a:srgbClr val="272F38"/>
+              <a:rPr sz="1100" b="1">
+                <a:solidFill>
+                  <a:srgbClr val="FFFFFF"/>
                 </a:solidFill>
                 <a:latin typeface="Arial"/>
               </a:rPr>
@@ -14211,9 +14032,9 @@
           <a:p>
             <a:pPr algn="ctr"/>
             <a:r>
-              <a:rPr sz="1147" b="1">
-                <a:solidFill>
-                  <a:srgbClr val="123456"/>
+              <a:rPr sz="1100" b="1">
+                <a:solidFill>
+                  <a:srgbClr val="FFFFFF"/>
                 </a:solidFill>
                 <a:latin typeface="Arial"/>
               </a:rPr>
@@ -14237,7 +14058,7 @@
 </file>
 
 <file path=ppt/slides/slide6.xml><?xml version="1.0" encoding="utf-8"?>
-<p:sld xmlns:a="http://schemas.openxmlformats.org/drawingml/2006/main" xmlns:r="http://schemas.openxmlformats.org/officeDocument/2006/relationships" xmlns:p="http://schemas.openxmlformats.org/presentationml/2006/main">
+<p:sld xmlns:a="http://schemas.openxmlformats.org/drawingml/2006/main" xmlns:p="http://schemas.openxmlformats.org/presentationml/2006/main" xmlns:r="http://schemas.openxmlformats.org/officeDocument/2006/relationships">
   <p:cSld>
     <p:spTree>
       <p:nvGrpSpPr>
@@ -14245,14 +14066,960 @@
         <p:cNvGrpSpPr/>
         <p:nvPr/>
       </p:nvGrpSpPr>
-      <p:grpSpPr>
-        <a:xfrm>
-          <a:off x="0" y="0"/>
-          <a:ext cx="0" cy="0"/>
-          <a:chOff x="0" y="0"/>
-          <a:chExt cx="0" cy="0"/>
-        </a:xfrm>
-      </p:grpSpPr>
+      <p:grpSpPr/>
+      <p:sp>
+        <p:nvSpPr>
+          <p:cNvPr id="2" name="Rectangle 1"/>
+          <p:cNvSpPr/>
+          <p:nvPr/>
+        </p:nvSpPr>
+        <p:spPr>
+          <a:xfrm>
+            <a:off x="0" y="0"/>
+            <a:ext cx="12188952" cy="6858000"/>
+          </a:xfrm>
+          <a:prstGeom prst="rect">
+            <a:avLst/>
+          </a:prstGeom>
+          <a:solidFill>
+            <a:srgbClr val="0F0F19"/>
+          </a:solidFill>
+          <a:ln>
+            <a:noFill/>
+          </a:ln>
+        </p:spPr>
+        <p:style>
+          <a:lnRef idx="1">
+            <a:schemeClr val="accent1"/>
+          </a:lnRef>
+          <a:fillRef idx="3">
+            <a:schemeClr val="accent1"/>
+          </a:fillRef>
+          <a:effectRef idx="2">
+            <a:schemeClr val="accent1"/>
+          </a:effectRef>
+          <a:fontRef idx="minor">
+            <a:schemeClr val="lt1"/>
+          </a:fontRef>
+        </p:style>
+        <p:txBody>
+          <a:bodyPr rtlCol="0" anchor="ctr"/>
+          <a:lstStyle/>
+          <a:p>
+            <a:pPr algn="ctr"/>
+          </a:p>
+        </p:txBody>
+      </p:sp>
+      <p:sp>
+        <p:nvSpPr>
+          <p:cNvPr id="3" name="TextBox 2"/>
+          <p:cNvSpPr txBox="1"/>
+          <p:nvPr/>
+        </p:nvSpPr>
+        <p:spPr>
+          <a:xfrm>
+            <a:off x="457200" y="182880"/>
+            <a:ext cx="11274552" cy="731520"/>
+          </a:xfrm>
+          <a:prstGeom prst="rect">
+            <a:avLst/>
+          </a:prstGeom>
+          <a:noFill/>
+        </p:spPr>
+        <p:txBody>
+          <a:bodyPr wrap="none">
+            <a:spAutoFit/>
+          </a:bodyPr>
+          <a:lstStyle/>
+          <a:p>
+            <a:pPr algn="ctr">
+              <a:defRPr sz="2600" b="1">
+                <a:solidFill>
+                  <a:srgbClr val="00D4AA"/>
+                </a:solidFill>
+              </a:defRPr>
+            </a:pPr>
+            <a:r>
+              <a:t>RESEARCH &amp; COMPETITOR COMPARISON</a:t>
+            </a:r>
+          </a:p>
+        </p:txBody>
+      </p:sp>
+      <p:sp>
+        <p:nvSpPr>
+          <p:cNvPr id="4" name="TextBox 3"/>
+          <p:cNvSpPr txBox="1"/>
+          <p:nvPr/>
+        </p:nvSpPr>
+        <p:spPr>
+          <a:xfrm>
+            <a:off x="457200" y="914400"/>
+            <a:ext cx="11274552" cy="914400"/>
+          </a:xfrm>
+          <a:prstGeom prst="rect">
+            <a:avLst/>
+          </a:prstGeom>
+          <a:noFill/>
+        </p:spPr>
+        <p:txBody>
+          <a:bodyPr wrap="square">
+            <a:spAutoFit/>
+          </a:bodyPr>
+          <a:lstStyle/>
+          <a:p>
+            <a:pPr>
+              <a:defRPr sz="1400">
+                <a:solidFill>
+                  <a:srgbClr val="C8C8C8"/>
+                </a:solidFill>
+              </a:defRPr>
+            </a:pPr>
+            <a:r>
+              <a:t>Research: Conceptualized using SIH PS 26044 guidelines, leveraging REST APIs, RBAC, and AI pipelines to create a unified skill intelligence loop.</a:t>
+            </a:r>
+          </a:p>
+        </p:txBody>
+      </p:sp>
+      <p:graphicFrame>
+        <p:nvGraphicFramePr>
+          <p:cNvPr id="5" name="Table 4"/>
+          <p:cNvGraphicFramePr>
+            <a:graphicFrameLocks noGrp="1"/>
+          </p:cNvGraphicFramePr>
+          <p:nvPr/>
+        </p:nvGraphicFramePr>
+        <p:xfrm>
+          <a:off x="457200" y="1645920"/>
+          <a:ext cx="11274552" cy="4572000"/>
+        </p:xfrm>
+        <a:graphic>
+          <a:graphicData uri="http://schemas.openxmlformats.org/drawingml/2006/table">
+            <a:tbl>
+              <a:tblPr firstRow="1" bandRow="1">
+                <a:tableStyleId>{5C22544A-7EE6-4342-B048-85BDC9FD1C3A}</a:tableStyleId>
+              </a:tblPr>
+              <a:tblGrid>
+                <a:gridCol w="3044952"/>
+                <a:gridCol w="1645920"/>
+                <a:gridCol w="1645920"/>
+                <a:gridCol w="1645920"/>
+                <a:gridCol w="1645920"/>
+                <a:gridCol w="1645920"/>
+              </a:tblGrid>
+              <a:tr h="653142">
+                <a:tc>
+                  <a:txBody>
+                    <a:bodyPr/>
+                    <a:lstStyle/>
+                    <a:p>
+                      <a:pPr>
+                        <a:defRPr b="1" sz="1400"/>
+                      </a:pPr>
+                      <a:r>
+                        <a:t>Core Differentiators</a:t>
+                      </a:r>
+                    </a:p>
+                  </a:txBody>
+                  <a:tcPr/>
+                </a:tc>
+                <a:tc>
+                  <a:txBody>
+                    <a:bodyPr/>
+                    <a:lstStyle/>
+                    <a:p>
+                      <a:pPr>
+                        <a:defRPr b="1" sz="1400">
+                          <a:solidFill>
+                            <a:srgbClr val="00FF80"/>
+                          </a:solidFill>
+                        </a:defRPr>
+                      </a:pPr>
+                      <a:r>
+                        <a:t>OUR PLATFORM</a:t>
+                      </a:r>
+                    </a:p>
+                  </a:txBody>
+                  <a:tcPr/>
+                </a:tc>
+                <a:tc>
+                  <a:txBody>
+                    <a:bodyPr/>
+                    <a:lstStyle/>
+                    <a:p>
+                      <a:pPr>
+                        <a:defRPr b="1" sz="1400"/>
+                      </a:pPr>
+                      <a:r>
+                        <a:t>iKlavya</a:t>
+                      </a:r>
+                    </a:p>
+                  </a:txBody>
+                  <a:tcPr/>
+                </a:tc>
+                <a:tc>
+                  <a:txBody>
+                    <a:bodyPr/>
+                    <a:lstStyle/>
+                    <a:p>
+                      <a:pPr>
+                        <a:defRPr b="1" sz="1400"/>
+                      </a:pPr>
+                      <a:r>
+                        <a:t>Superset</a:t>
+                      </a:r>
+                    </a:p>
+                  </a:txBody>
+                  <a:tcPr/>
+                </a:tc>
+                <a:tc>
+                  <a:txBody>
+                    <a:bodyPr/>
+                    <a:lstStyle/>
+                    <a:p>
+                      <a:pPr>
+                        <a:defRPr b="1" sz="1400"/>
+                      </a:pPr>
+                      <a:r>
+                        <a:t>Unstop</a:t>
+                      </a:r>
+                    </a:p>
+                  </a:txBody>
+                  <a:tcPr/>
+                </a:tc>
+                <a:tc>
+                  <a:txBody>
+                    <a:bodyPr/>
+                    <a:lstStyle/>
+                    <a:p>
+                      <a:pPr>
+                        <a:defRPr b="1" sz="1400"/>
+                      </a:pPr>
+                      <a:r>
+                        <a:t>LinkedIn</a:t>
+                      </a:r>
+                    </a:p>
+                  </a:txBody>
+                  <a:tcPr/>
+                </a:tc>
+              </a:tr>
+              <a:tr h="653142">
+                <a:tc>
+                  <a:txBody>
+                    <a:bodyPr/>
+                    <a:lstStyle/>
+                    <a:p>
+                      <a:pPr>
+                        <a:defRPr sz="1300" b="1">
+                          <a:solidFill>
+                            <a:srgbClr val="FFC864"/>
+                          </a:solidFill>
+                        </a:defRPr>
+                      </a:pPr>
+                      <a:r>
+                        <a:t>AI Mock Interviews &amp; Resume</a:t>
+                      </a:r>
+                    </a:p>
+                  </a:txBody>
+                  <a:tcPr/>
+                </a:tc>
+                <a:tc>
+                  <a:txBody>
+                    <a:bodyPr/>
+                    <a:lstStyle/>
+                    <a:p>
+                      <a:pPr>
+                        <a:defRPr sz="1300" b="1">
+                          <a:solidFill>
+                            <a:srgbClr val="00FF80"/>
+                          </a:solidFill>
+                        </a:defRPr>
+                      </a:pPr>
+                      <a:r>
+                        <a:t>✓ Adaptive &amp; AI Driven</a:t>
+                      </a:r>
+                    </a:p>
+                  </a:txBody>
+                  <a:tcPr/>
+                </a:tc>
+                <a:tc>
+                  <a:txBody>
+                    <a:bodyPr/>
+                    <a:lstStyle/>
+                    <a:p>
+                      <a:pPr>
+                        <a:defRPr sz="1300" b="1">
+                          <a:solidFill>
+                            <a:srgbClr val="C8FFC8"/>
+                          </a:solidFill>
+                        </a:defRPr>
+                      </a:pPr>
+                      <a:r>
+                        <a:t>Yes</a:t>
+                      </a:r>
+                    </a:p>
+                  </a:txBody>
+                  <a:tcPr/>
+                </a:tc>
+                <a:tc>
+                  <a:txBody>
+                    <a:bodyPr/>
+                    <a:lstStyle/>
+                    <a:p>
+                      <a:pPr>
+                        <a:defRPr sz="1300" b="1">
+                          <a:solidFill>
+                            <a:srgbClr val="C8FFC8"/>
+                          </a:solidFill>
+                        </a:defRPr>
+                      </a:pPr>
+                      <a:r>
+                        <a:t>Yes</a:t>
+                      </a:r>
+                    </a:p>
+                  </a:txBody>
+                  <a:tcPr/>
+                </a:tc>
+                <a:tc>
+                  <a:txBody>
+                    <a:bodyPr/>
+                    <a:lstStyle/>
+                    <a:p>
+                      <a:pPr>
+                        <a:defRPr sz="1300" b="1">
+                          <a:solidFill>
+                            <a:srgbClr val="C8FFC8"/>
+                          </a:solidFill>
+                        </a:defRPr>
+                      </a:pPr>
+                      <a:r>
+                        <a:t>Yes</a:t>
+                      </a:r>
+                    </a:p>
+                  </a:txBody>
+                  <a:tcPr/>
+                </a:tc>
+                <a:tc>
+                  <a:txBody>
+                    <a:bodyPr/>
+                    <a:lstStyle/>
+                    <a:p>
+                      <a:pPr>
+                        <a:defRPr sz="1300" b="1">
+                          <a:solidFill>
+                            <a:srgbClr val="FF6464"/>
+                          </a:solidFill>
+                        </a:defRPr>
+                      </a:pPr>
+                      <a:r>
+                        <a:t>No</a:t>
+                      </a:r>
+                    </a:p>
+                  </a:txBody>
+                  <a:tcPr/>
+                </a:tc>
+              </a:tr>
+              <a:tr h="653142">
+                <a:tc>
+                  <a:txBody>
+                    <a:bodyPr/>
+                    <a:lstStyle/>
+                    <a:p>
+                      <a:pPr>
+                        <a:defRPr sz="1300" b="1">
+                          <a:solidFill>
+                            <a:srgbClr val="FFC864"/>
+                          </a:solidFill>
+                        </a:defRPr>
+                      </a:pPr>
+                      <a:r>
+                        <a:t>Skill Gap Detection</a:t>
+                      </a:r>
+                    </a:p>
+                  </a:txBody>
+                  <a:tcPr/>
+                </a:tc>
+                <a:tc>
+                  <a:txBody>
+                    <a:bodyPr/>
+                    <a:lstStyle/>
+                    <a:p>
+                      <a:pPr>
+                        <a:defRPr sz="1300" b="1">
+                          <a:solidFill>
+                            <a:srgbClr val="00FF80"/>
+                          </a:solidFill>
+                        </a:defRPr>
+                      </a:pPr>
+                      <a:r>
+                        <a:t>✓ Evidence-Based</a:t>
+                      </a:r>
+                    </a:p>
+                  </a:txBody>
+                  <a:tcPr/>
+                </a:tc>
+                <a:tc>
+                  <a:txBody>
+                    <a:bodyPr/>
+                    <a:lstStyle/>
+                    <a:p>
+                      <a:pPr>
+                        <a:defRPr sz="1300" b="1">
+                          <a:solidFill>
+                            <a:srgbClr val="FFC864"/>
+                          </a:solidFill>
+                        </a:defRPr>
+                      </a:pPr>
+                      <a:r>
+                        <a:t>Basic</a:t>
+                      </a:r>
+                    </a:p>
+                  </a:txBody>
+                  <a:tcPr/>
+                </a:tc>
+                <a:tc>
+                  <a:txBody>
+                    <a:bodyPr/>
+                    <a:lstStyle/>
+                    <a:p>
+                      <a:pPr>
+                        <a:defRPr sz="1300" b="1">
+                          <a:solidFill>
+                            <a:srgbClr val="FFC864"/>
+                          </a:solidFill>
+                        </a:defRPr>
+                      </a:pPr>
+                      <a:r>
+                        <a:t>Limited</a:t>
+                      </a:r>
+                    </a:p>
+                  </a:txBody>
+                  <a:tcPr/>
+                </a:tc>
+                <a:tc>
+                  <a:txBody>
+                    <a:bodyPr/>
+                    <a:lstStyle/>
+                    <a:p>
+                      <a:pPr>
+                        <a:defRPr sz="1300" b="1">
+                          <a:solidFill>
+                            <a:srgbClr val="FFC864"/>
+                          </a:solidFill>
+                        </a:defRPr>
+                      </a:pPr>
+                      <a:r>
+                        <a:t>Limited</a:t>
+                      </a:r>
+                    </a:p>
+                  </a:txBody>
+                  <a:tcPr/>
+                </a:tc>
+                <a:tc>
+                  <a:txBody>
+                    <a:bodyPr/>
+                    <a:lstStyle/>
+                    <a:p>
+                      <a:pPr>
+                        <a:defRPr sz="1300" b="1">
+                          <a:solidFill>
+                            <a:srgbClr val="FFC864"/>
+                          </a:solidFill>
+                        </a:defRPr>
+                      </a:pPr>
+                      <a:r>
+                        <a:t>Limited</a:t>
+                      </a:r>
+                    </a:p>
+                  </a:txBody>
+                  <a:tcPr/>
+                </a:tc>
+              </a:tr>
+              <a:tr h="653142">
+                <a:tc>
+                  <a:txBody>
+                    <a:bodyPr/>
+                    <a:lstStyle/>
+                    <a:p>
+                      <a:pPr>
+                        <a:defRPr sz="1300" b="1">
+                          <a:solidFill>
+                            <a:srgbClr val="FFC864"/>
+                          </a:solidFill>
+                        </a:defRPr>
+                      </a:pPr>
+                      <a:r>
+                        <a:t>Evidence-Based Skill Profile</a:t>
+                      </a:r>
+                    </a:p>
+                  </a:txBody>
+                  <a:tcPr/>
+                </a:tc>
+                <a:tc>
+                  <a:txBody>
+                    <a:bodyPr/>
+                    <a:lstStyle/>
+                    <a:p>
+                      <a:pPr>
+                        <a:defRPr sz="1300" b="1">
+                          <a:solidFill>
+                            <a:srgbClr val="00FF80"/>
+                          </a:solidFill>
+                        </a:defRPr>
+                      </a:pPr>
+                      <a:r>
+                        <a:t>✓ Verified Projects/Tests</a:t>
+                      </a:r>
+                    </a:p>
+                  </a:txBody>
+                  <a:tcPr/>
+                </a:tc>
+                <a:tc>
+                  <a:txBody>
+                    <a:bodyPr/>
+                    <a:lstStyle/>
+                    <a:p>
+                      <a:pPr>
+                        <a:defRPr sz="1300" b="1">
+                          <a:solidFill>
+                            <a:srgbClr val="FFC864"/>
+                          </a:solidFill>
+                        </a:defRPr>
+                      </a:pPr>
+                      <a:r>
+                        <a:t>Partial</a:t>
+                      </a:r>
+                    </a:p>
+                  </a:txBody>
+                  <a:tcPr/>
+                </a:tc>
+                <a:tc>
+                  <a:txBody>
+                    <a:bodyPr/>
+                    <a:lstStyle/>
+                    <a:p>
+                      <a:pPr>
+                        <a:defRPr sz="1300" b="1">
+                          <a:solidFill>
+                            <a:srgbClr val="FFC864"/>
+                          </a:solidFill>
+                        </a:defRPr>
+                      </a:pPr>
+                      <a:r>
+                        <a:t>Partial</a:t>
+                      </a:r>
+                    </a:p>
+                  </a:txBody>
+                  <a:tcPr/>
+                </a:tc>
+                <a:tc>
+                  <a:txBody>
+                    <a:bodyPr/>
+                    <a:lstStyle/>
+                    <a:p>
+                      <a:pPr>
+                        <a:defRPr sz="1300" b="1">
+                          <a:solidFill>
+                            <a:srgbClr val="FFC864"/>
+                          </a:solidFill>
+                        </a:defRPr>
+                      </a:pPr>
+                      <a:r>
+                        <a:t>Partial</a:t>
+                      </a:r>
+                    </a:p>
+                  </a:txBody>
+                  <a:tcPr/>
+                </a:tc>
+                <a:tc>
+                  <a:txBody>
+                    <a:bodyPr/>
+                    <a:lstStyle/>
+                    <a:p>
+                      <a:pPr>
+                        <a:defRPr sz="1300" b="1">
+                          <a:solidFill>
+                            <a:srgbClr val="FF6464"/>
+                          </a:solidFill>
+                        </a:defRPr>
+                      </a:pPr>
+                      <a:r>
+                        <a:t>No</a:t>
+                      </a:r>
+                    </a:p>
+                  </a:txBody>
+                  <a:tcPr/>
+                </a:tc>
+              </a:tr>
+              <a:tr h="653142">
+                <a:tc>
+                  <a:txBody>
+                    <a:bodyPr/>
+                    <a:lstStyle/>
+                    <a:p>
+                      <a:pPr>
+                        <a:defRPr sz="1300" b="1">
+                          <a:solidFill>
+                            <a:srgbClr val="FFC864"/>
+                          </a:solidFill>
+                        </a:defRPr>
+                      </a:pPr>
+                      <a:r>
+                        <a:t>Gamified Learning (XP/Streak)</a:t>
+                      </a:r>
+                    </a:p>
+                  </a:txBody>
+                  <a:tcPr/>
+                </a:tc>
+                <a:tc>
+                  <a:txBody>
+                    <a:bodyPr/>
+                    <a:lstStyle/>
+                    <a:p>
+                      <a:pPr>
+                        <a:defRPr sz="1300" b="1">
+                          <a:solidFill>
+                            <a:srgbClr val="00FF80"/>
+                          </a:solidFill>
+                        </a:defRPr>
+                      </a:pPr>
+                      <a:r>
+                        <a:t>✓ XP &amp; Levels</a:t>
+                      </a:r>
+                    </a:p>
+                  </a:txBody>
+                  <a:tcPr/>
+                </a:tc>
+                <a:tc>
+                  <a:txBody>
+                    <a:bodyPr/>
+                    <a:lstStyle/>
+                    <a:p>
+                      <a:pPr>
+                        <a:defRPr sz="1300" b="1">
+                          <a:solidFill>
+                            <a:srgbClr val="FFC864"/>
+                          </a:solidFill>
+                        </a:defRPr>
+                      </a:pPr>
+                      <a:r>
+                        <a:t>Partial</a:t>
+                      </a:r>
+                    </a:p>
+                  </a:txBody>
+                  <a:tcPr/>
+                </a:tc>
+                <a:tc>
+                  <a:txBody>
+                    <a:bodyPr/>
+                    <a:lstStyle/>
+                    <a:p>
+                      <a:pPr>
+                        <a:defRPr sz="1300" b="1">
+                          <a:solidFill>
+                            <a:srgbClr val="FF6464"/>
+                          </a:solidFill>
+                        </a:defRPr>
+                      </a:pPr>
+                      <a:r>
+                        <a:t>No</a:t>
+                      </a:r>
+                    </a:p>
+                  </a:txBody>
+                  <a:tcPr/>
+                </a:tc>
+                <a:tc>
+                  <a:txBody>
+                    <a:bodyPr/>
+                    <a:lstStyle/>
+                    <a:p>
+                      <a:pPr>
+                        <a:defRPr sz="1300" b="1">
+                          <a:solidFill>
+                            <a:srgbClr val="FFC864"/>
+                          </a:solidFill>
+                        </a:defRPr>
+                      </a:pPr>
+                      <a:r>
+                        <a:t>Partial</a:t>
+                      </a:r>
+                    </a:p>
+                  </a:txBody>
+                  <a:tcPr/>
+                </a:tc>
+                <a:tc>
+                  <a:txBody>
+                    <a:bodyPr/>
+                    <a:lstStyle/>
+                    <a:p>
+                      <a:pPr>
+                        <a:defRPr sz="1300" b="1">
+                          <a:solidFill>
+                            <a:srgbClr val="FFC864"/>
+                          </a:solidFill>
+                        </a:defRPr>
+                      </a:pPr>
+                      <a:r>
+                        <a:t>Partial</a:t>
+                      </a:r>
+                    </a:p>
+                  </a:txBody>
+                  <a:tcPr/>
+                </a:tc>
+              </a:tr>
+              <a:tr h="653142">
+                <a:tc>
+                  <a:txBody>
+                    <a:bodyPr/>
+                    <a:lstStyle/>
+                    <a:p>
+                      <a:pPr>
+                        <a:defRPr sz="1300" b="1">
+                          <a:solidFill>
+                            <a:srgbClr val="FFC864"/>
+                          </a:solidFill>
+                        </a:defRPr>
+                      </a:pPr>
+                      <a:r>
+                        <a:t>AI Daily Planner / Roadmap</a:t>
+                      </a:r>
+                    </a:p>
+                  </a:txBody>
+                  <a:tcPr/>
+                </a:tc>
+                <a:tc>
+                  <a:txBody>
+                    <a:bodyPr/>
+                    <a:lstStyle/>
+                    <a:p>
+                      <a:pPr>
+                        <a:defRPr sz="1300" b="1">
+                          <a:solidFill>
+                            <a:srgbClr val="00FF80"/>
+                          </a:solidFill>
+                        </a:defRPr>
+                      </a:pPr>
+                      <a:r>
+                        <a:t>✓ Personalized</a:t>
+                      </a:r>
+                    </a:p>
+                  </a:txBody>
+                  <a:tcPr/>
+                </a:tc>
+                <a:tc>
+                  <a:txBody>
+                    <a:bodyPr/>
+                    <a:lstStyle/>
+                    <a:p>
+                      <a:pPr>
+                        <a:defRPr sz="1300" b="1">
+                          <a:solidFill>
+                            <a:srgbClr val="FF6464"/>
+                          </a:solidFill>
+                        </a:defRPr>
+                      </a:pPr>
+                      <a:r>
+                        <a:t>No</a:t>
+                      </a:r>
+                    </a:p>
+                  </a:txBody>
+                  <a:tcPr/>
+                </a:tc>
+                <a:tc>
+                  <a:txBody>
+                    <a:bodyPr/>
+                    <a:lstStyle/>
+                    <a:p>
+                      <a:pPr>
+                        <a:defRPr sz="1300" b="1">
+                          <a:solidFill>
+                            <a:srgbClr val="FF6464"/>
+                          </a:solidFill>
+                        </a:defRPr>
+                      </a:pPr>
+                      <a:r>
+                        <a:t>No</a:t>
+                      </a:r>
+                    </a:p>
+                  </a:txBody>
+                  <a:tcPr/>
+                </a:tc>
+                <a:tc>
+                  <a:txBody>
+                    <a:bodyPr/>
+                    <a:lstStyle/>
+                    <a:p>
+                      <a:pPr>
+                        <a:defRPr sz="1300" b="1">
+                          <a:solidFill>
+                            <a:srgbClr val="FFC864"/>
+                          </a:solidFill>
+                        </a:defRPr>
+                      </a:pPr>
+                      <a:r>
+                        <a:t>Partial</a:t>
+                      </a:r>
+                    </a:p>
+                  </a:txBody>
+                  <a:tcPr/>
+                </a:tc>
+                <a:tc>
+                  <a:txBody>
+                    <a:bodyPr/>
+                    <a:lstStyle/>
+                    <a:p>
+                      <a:pPr>
+                        <a:defRPr sz="1300" b="1">
+                          <a:solidFill>
+                            <a:srgbClr val="FF6464"/>
+                          </a:solidFill>
+                        </a:defRPr>
+                      </a:pPr>
+                      <a:r>
+                        <a:t>No</a:t>
+                      </a:r>
+                    </a:p>
+                  </a:txBody>
+                  <a:tcPr/>
+                </a:tc>
+              </a:tr>
+              <a:tr h="653148">
+                <a:tc>
+                  <a:txBody>
+                    <a:bodyPr/>
+                    <a:lstStyle/>
+                    <a:p>
+                      <a:pPr>
+                        <a:defRPr sz="1300" b="1">
+                          <a:solidFill>
+                            <a:srgbClr val="FFC864"/>
+                          </a:solidFill>
+                        </a:defRPr>
+                      </a:pPr>
+                      <a:r>
+                        <a:t>Institution / Industry Analytics</a:t>
+                      </a:r>
+                    </a:p>
+                  </a:txBody>
+                  <a:tcPr/>
+                </a:tc>
+                <a:tc>
+                  <a:txBody>
+                    <a:bodyPr/>
+                    <a:lstStyle/>
+                    <a:p>
+                      <a:pPr>
+                        <a:defRPr sz="1300" b="1">
+                          <a:solidFill>
+                            <a:srgbClr val="00FF80"/>
+                          </a:solidFill>
+                        </a:defRPr>
+                      </a:pPr>
+                      <a:r>
+                        <a:t>✓ Full Ecosystem</a:t>
+                      </a:r>
+                    </a:p>
+                  </a:txBody>
+                  <a:tcPr/>
+                </a:tc>
+                <a:tc>
+                  <a:txBody>
+                    <a:bodyPr/>
+                    <a:lstStyle/>
+                    <a:p>
+                      <a:pPr>
+                        <a:defRPr sz="1300" b="1">
+                          <a:solidFill>
+                            <a:srgbClr val="FFC864"/>
+                          </a:solidFill>
+                        </a:defRPr>
+                      </a:pPr>
+                      <a:r>
+                        <a:t>Partial</a:t>
+                      </a:r>
+                    </a:p>
+                  </a:txBody>
+                  <a:tcPr/>
+                </a:tc>
+                <a:tc>
+                  <a:txBody>
+                    <a:bodyPr/>
+                    <a:lstStyle/>
+                    <a:p>
+                      <a:pPr>
+                        <a:defRPr sz="1300" b="1">
+                          <a:solidFill>
+                            <a:srgbClr val="FFC864"/>
+                          </a:solidFill>
+                        </a:defRPr>
+                      </a:pPr>
+                      <a:r>
+                        <a:t>Partial</a:t>
+                      </a:r>
+                    </a:p>
+                  </a:txBody>
+                  <a:tcPr/>
+                </a:tc>
+                <a:tc>
+                  <a:txBody>
+                    <a:bodyPr/>
+                    <a:lstStyle/>
+                    <a:p>
+                      <a:pPr>
+                        <a:defRPr sz="1300" b="1">
+                          <a:solidFill>
+                            <a:srgbClr val="FF6464"/>
+                          </a:solidFill>
+                        </a:defRPr>
+                      </a:pPr>
+                      <a:r>
+                        <a:t>No</a:t>
+                      </a:r>
+                    </a:p>
+                  </a:txBody>
+                  <a:tcPr/>
+                </a:tc>
+                <a:tc>
+                  <a:txBody>
+                    <a:bodyPr/>
+                    <a:lstStyle/>
+                    <a:p>
+                      <a:pPr>
+                        <a:defRPr sz="1300" b="1">
+                          <a:solidFill>
+                            <a:srgbClr val="FF6464"/>
+                          </a:solidFill>
+                        </a:defRPr>
+                      </a:pPr>
+                      <a:r>
+                        <a:t>No</a:t>
+                      </a:r>
+                    </a:p>
+                  </a:txBody>
+                  <a:tcPr/>
+                </a:tc>
+              </a:tr>
+            </a:tbl>
+          </a:graphicData>
+        </a:graphic>
+      </p:graphicFrame>
+    </p:spTree>
+  </p:cSld>
+  <p:clrMapOvr>
+    <a:masterClrMapping/>
+  </p:clrMapOvr>
+</p:sld>
+</file>
+
+<file path=ppt/slides/slide7.xml><?xml version="1.0" encoding="utf-8"?>
+<p:sld xmlns:a="http://schemas.openxmlformats.org/drawingml/2006/main" xmlns:p="http://schemas.openxmlformats.org/presentationml/2006/main" xmlns:r="http://schemas.openxmlformats.org/officeDocument/2006/relationships">
+  <p:cSld>
+    <p:spTree>
+      <p:nvGrpSpPr>
+        <p:cNvPr id="1" name=""/>
+        <p:cNvGrpSpPr/>
+        <p:nvPr/>
+      </p:nvGrpSpPr>
+      <p:grpSpPr/>
       <p:sp>
         <p:nvSpPr>
           <p:cNvPr id="6" name="Slide Number Placeholder 5"/>
@@ -14374,7 +15141,7 @@
               <a:defRPr/>
             </a:pPr>
             <a:r>
-              <a:rPr kumimoji="0" lang="en-US" sz="1620" b="1" i="0" u="none" strike="noStrike" kern="1200" cap="none" spc="0" normalizeH="0" baseline="0" noProof="0">
+              <a:rPr kumimoji="0" lang="en-US" sz="1200" b="0" i="0" u="none" strike="noStrike" kern="1200" cap="none" spc="0" normalizeH="0" baseline="0" noProof="0">
                 <a:ln>
                   <a:noFill/>
                 </a:ln>
@@ -14439,76 +15206,6 @@
       </p:pic>
       <p:sp>
         <p:nvSpPr>
-          <p:cNvPr id="13" name="TextBox 12"/>
-          <p:cNvSpPr txBox="1"/>
-          <p:nvPr/>
-        </p:nvSpPr>
-        <p:spPr>
-          <a:xfrm>
-            <a:off x="457200" y="502920"/>
-            <a:ext cx="11247120" cy="502920"/>
-          </a:xfrm>
-          <a:prstGeom prst="rect">
-            <a:avLst/>
-          </a:prstGeom>
-          <a:noFill/>
-        </p:spPr>
-        <p:txBody>
-          <a:bodyPr wrap="none" anchor="t">
-            <a:spAutoFit/>
-          </a:bodyPr>
-          <a:lstStyle/>
-          <a:p>
-            <a:pPr algn="ctr"/>
-            <a:r>
-              <a:rPr sz="3105" b="1">
-                <a:solidFill>
-                  <a:srgbClr val="123456"/>
-                </a:solidFill>
-                <a:latin typeface="Arial"/>
-              </a:rPr>
-              <a:t>RESEARCH AND REFERENCES</a:t>
-            </a:r>
-          </a:p>
-        </p:txBody>
-      </p:sp>
-      <p:sp>
-        <p:nvSpPr>
-          <p:cNvPr id="14" name="TextBox 13"/>
-          <p:cNvSpPr txBox="1"/>
-          <p:nvPr/>
-        </p:nvSpPr>
-        <p:spPr>
-          <a:xfrm>
-            <a:off x="502920" y="1005840"/>
-            <a:ext cx="3840480" cy="274320"/>
-          </a:xfrm>
-          <a:prstGeom prst="rect">
-            <a:avLst/>
-          </a:prstGeom>
-          <a:noFill/>
-        </p:spPr>
-        <p:txBody>
-          <a:bodyPr wrap="none" anchor="t">
-            <a:spAutoFit/>
-          </a:bodyPr>
-          <a:lstStyle/>
-          <a:p>
-            <a:pPr algn="l"/>
-            <a:r>
-              <a:rPr sz="1822" b="1">
-                <a:solidFill>
-                  <a:srgbClr val="2365A9"/>
-                </a:solidFill>
-                <a:latin typeface="Arial"/>
-              </a:rPr>
-              <a:t>◆ Research / Design References</a:t>
-            </a:r>
-          </a:p>
-        </p:txBody>
-      </p:sp>
-      <p:sp>
-        <p:nvSpPr>
           <p:cNvPr id="15" name="Oval 14"/>
           <p:cNvSpPr/>
           <p:nvPr/>
@@ -14550,83 +15247,13 @@
           <a:p>
             <a:pPr algn="ctr"/>
             <a:r>
-              <a:rPr sz="945" b="1">
+              <a:rPr sz="700" b="1">
                 <a:solidFill>
                   <a:srgbClr val="FFFFFF"/>
                 </a:solidFill>
                 <a:latin typeface="Arial"/>
               </a:rPr>
               <a:t>01</a:t>
-            </a:r>
-          </a:p>
-        </p:txBody>
-      </p:sp>
-      <p:sp>
-        <p:nvSpPr>
-          <p:cNvPr id="16" name="TextBox 15"/>
-          <p:cNvSpPr txBox="1"/>
-          <p:nvPr/>
-        </p:nvSpPr>
-        <p:spPr>
-          <a:xfrm>
-            <a:off x="1005840" y="1389888"/>
-            <a:ext cx="1508760" cy="219456"/>
-          </a:xfrm>
-          <a:prstGeom prst="rect">
-            <a:avLst/>
-          </a:prstGeom>
-          <a:noFill/>
-        </p:spPr>
-        <p:txBody>
-          <a:bodyPr wrap="none" anchor="t">
-            <a:spAutoFit/>
-          </a:bodyPr>
-          <a:lstStyle/>
-          <a:p>
-            <a:pPr algn="l"/>
-            <a:r>
-              <a:rPr sz="1173" b="1">
-                <a:solidFill>
-                  <a:srgbClr val="123456"/>
-                </a:solidFill>
-                <a:latin typeface="Arial"/>
-              </a:rPr>
-              <a:t>SIH PS 26044</a:t>
-            </a:r>
-          </a:p>
-        </p:txBody>
-      </p:sp>
-      <p:sp>
-        <p:nvSpPr>
-          <p:cNvPr id="17" name="TextBox 16"/>
-          <p:cNvSpPr txBox="1"/>
-          <p:nvPr/>
-        </p:nvSpPr>
-        <p:spPr>
-          <a:xfrm>
-            <a:off x="1005840" y="1664208"/>
-            <a:ext cx="3246120" cy="347472"/>
-          </a:xfrm>
-          <a:prstGeom prst="rect">
-            <a:avLst/>
-          </a:prstGeom>
-          <a:noFill/>
-        </p:spPr>
-        <p:txBody>
-          <a:bodyPr wrap="none" anchor="t">
-            <a:spAutoFit/>
-          </a:bodyPr>
-          <a:lstStyle/>
-          <a:p>
-            <a:pPr algn="l"/>
-            <a:r>
-              <a:rPr sz="1039" b="1">
-                <a:solidFill>
-                  <a:srgbClr val="272F38"/>
-                </a:solidFill>
-                <a:latin typeface="Arial"/>
-              </a:rPr>
-              <a:t>Portal for Academia–Industry Collaboration for Skill Mapping, Internships and Placement</a:t>
             </a:r>
           </a:p>
         </p:txBody>
@@ -14674,83 +15301,13 @@
           <a:p>
             <a:pPr algn="ctr"/>
             <a:r>
-              <a:rPr sz="945" b="1">
+              <a:rPr sz="700" b="1">
                 <a:solidFill>
                   <a:srgbClr val="FFFFFF"/>
                 </a:solidFill>
                 <a:latin typeface="Arial"/>
               </a:rPr>
               <a:t>02</a:t>
-            </a:r>
-          </a:p>
-        </p:txBody>
-      </p:sp>
-      <p:sp>
-        <p:nvSpPr>
-          <p:cNvPr id="19" name="TextBox 18"/>
-          <p:cNvSpPr txBox="1"/>
-          <p:nvPr/>
-        </p:nvSpPr>
-        <p:spPr>
-          <a:xfrm>
-            <a:off x="1005840" y="2231136"/>
-            <a:ext cx="1508760" cy="219456"/>
-          </a:xfrm>
-          <a:prstGeom prst="rect">
-            <a:avLst/>
-          </a:prstGeom>
-          <a:noFill/>
-        </p:spPr>
-        <p:txBody>
-          <a:bodyPr wrap="none" anchor="t">
-            <a:spAutoFit/>
-          </a:bodyPr>
-          <a:lstStyle/>
-          <a:p>
-            <a:pPr algn="l"/>
-            <a:r>
-              <a:rPr sz="1173" b="1">
-                <a:solidFill>
-                  <a:srgbClr val="123456"/>
-                </a:solidFill>
-                <a:latin typeface="Arial"/>
-              </a:rPr>
-              <a:t>Provided SIH template</a:t>
-            </a:r>
-          </a:p>
-        </p:txBody>
-      </p:sp>
-      <p:sp>
-        <p:nvSpPr>
-          <p:cNvPr id="20" name="TextBox 19"/>
-          <p:cNvSpPr txBox="1"/>
-          <p:nvPr/>
-        </p:nvSpPr>
-        <p:spPr>
-          <a:xfrm>
-            <a:off x="1005840" y="2505456"/>
-            <a:ext cx="3246120" cy="347472"/>
-          </a:xfrm>
-          <a:prstGeom prst="rect">
-            <a:avLst/>
-          </a:prstGeom>
-          <a:noFill/>
-        </p:spPr>
-        <p:txBody>
-          <a:bodyPr wrap="none" anchor="t">
-            <a:spAutoFit/>
-          </a:bodyPr>
-          <a:lstStyle/>
-          <a:p>
-            <a:pPr algn="l"/>
-            <a:r>
-              <a:rPr sz="1039" b="1">
-                <a:solidFill>
-                  <a:srgbClr val="272F38"/>
-                </a:solidFill>
-                <a:latin typeface="Arial"/>
-              </a:rPr>
-              <a:t>Six-slide structure; concise points; diagrams / infographics</a:t>
             </a:r>
           </a:p>
         </p:txBody>
@@ -14798,83 +15355,13 @@
           <a:p>
             <a:pPr algn="ctr"/>
             <a:r>
-              <a:rPr sz="945" b="1">
+              <a:rPr sz="700" b="1">
                 <a:solidFill>
                   <a:srgbClr val="FFFFFF"/>
                 </a:solidFill>
                 <a:latin typeface="Arial"/>
               </a:rPr>
               <a:t>03</a:t>
-            </a:r>
-          </a:p>
-        </p:txBody>
-      </p:sp>
-      <p:sp>
-        <p:nvSpPr>
-          <p:cNvPr id="22" name="TextBox 21"/>
-          <p:cNvSpPr txBox="1"/>
-          <p:nvPr/>
-        </p:nvSpPr>
-        <p:spPr>
-          <a:xfrm>
-            <a:off x="1005840" y="3072384"/>
-            <a:ext cx="1508760" cy="219456"/>
-          </a:xfrm>
-          <a:prstGeom prst="rect">
-            <a:avLst/>
-          </a:prstGeom>
-          <a:noFill/>
-        </p:spPr>
-        <p:txBody>
-          <a:bodyPr wrap="none" anchor="t">
-            <a:spAutoFit/>
-          </a:bodyPr>
-          <a:lstStyle/>
-          <a:p>
-            <a:pPr algn="l"/>
-            <a:r>
-              <a:rPr sz="1173" b="1">
-                <a:solidFill>
-                  <a:srgbClr val="123456"/>
-                </a:solidFill>
-                <a:latin typeface="Arial"/>
-              </a:rPr>
-              <a:t>Product research</a:t>
-            </a:r>
-          </a:p>
-        </p:txBody>
-      </p:sp>
-      <p:sp>
-        <p:nvSpPr>
-          <p:cNvPr id="23" name="TextBox 22"/>
-          <p:cNvSpPr txBox="1"/>
-          <p:nvPr/>
-        </p:nvSpPr>
-        <p:spPr>
-          <a:xfrm>
-            <a:off x="1005840" y="3346704"/>
-            <a:ext cx="3246120" cy="347472"/>
-          </a:xfrm>
-          <a:prstGeom prst="rect">
-            <a:avLst/>
-          </a:prstGeom>
-          <a:noFill/>
-        </p:spPr>
-        <p:txBody>
-          <a:bodyPr wrap="none" anchor="t">
-            <a:spAutoFit/>
-          </a:bodyPr>
-          <a:lstStyle/>
-          <a:p>
-            <a:pPr algn="l"/>
-            <a:r>
-              <a:rPr sz="1039" b="1">
-                <a:solidFill>
-                  <a:srgbClr val="272F38"/>
-                </a:solidFill>
-                <a:latin typeface="Arial"/>
-              </a:rPr>
-              <a:t>Career readiness • assessment • learning • talent matching patterns</a:t>
             </a:r>
           </a:p>
         </p:txBody>
@@ -14922,3036 +15409,7 @@
           <a:p>
             <a:pPr algn="ctr"/>
             <a:r>
-              <a:rPr sz="945" b="1">
-                <a:solidFill>
-                  <a:srgbClr val="FFFFFF"/>
-                </a:solidFill>
-                <a:latin typeface="Arial"/>
-              </a:rPr>
-              <a:t>04</a:t>
-            </a:r>
-          </a:p>
-        </p:txBody>
-      </p:sp>
-      <p:sp>
-        <p:nvSpPr>
-          <p:cNvPr id="25" name="TextBox 24"/>
-          <p:cNvSpPr txBox="1"/>
-          <p:nvPr/>
-        </p:nvSpPr>
-        <p:spPr>
-          <a:xfrm>
-            <a:off x="1005840" y="3913632"/>
-            <a:ext cx="1508760" cy="219456"/>
-          </a:xfrm>
-          <a:prstGeom prst="rect">
-            <a:avLst/>
-          </a:prstGeom>
-          <a:noFill/>
-        </p:spPr>
-        <p:txBody>
-          <a:bodyPr wrap="none" anchor="t">
-            <a:spAutoFit/>
-          </a:bodyPr>
-          <a:lstStyle/>
-          <a:p>
-            <a:pPr algn="l"/>
-            <a:r>
-              <a:rPr sz="1173" b="1">
-                <a:solidFill>
-                  <a:srgbClr val="123456"/>
-                </a:solidFill>
-                <a:latin typeface="Arial"/>
-              </a:rPr>
-              <a:t>Architecture research</a:t>
-            </a:r>
-          </a:p>
-        </p:txBody>
-      </p:sp>
-      <p:sp>
-        <p:nvSpPr>
-          <p:cNvPr id="26" name="TextBox 25"/>
-          <p:cNvSpPr txBox="1"/>
-          <p:nvPr/>
-        </p:nvSpPr>
-        <p:spPr>
-          <a:xfrm>
-            <a:off x="1005840" y="4187952"/>
-            <a:ext cx="3246120" cy="347472"/>
-          </a:xfrm>
-          <a:prstGeom prst="rect">
-            <a:avLst/>
-          </a:prstGeom>
-          <a:noFill/>
-        </p:spPr>
-        <p:txBody>
-          <a:bodyPr wrap="none" anchor="t">
-            <a:spAutoFit/>
-          </a:bodyPr>
-          <a:lstStyle/>
-          <a:p>
-            <a:pPr algn="l"/>
-            <a:r>
-              <a:rPr sz="1039" b="1">
-                <a:solidFill>
-                  <a:srgbClr val="272F38"/>
-                </a:solidFill>
-                <a:latin typeface="Arial"/>
-              </a:rPr>
-              <a:t>REST APIs • RBAC • relational data • analytics • AI recommendation pipelines</a:t>
-            </a:r>
-          </a:p>
-        </p:txBody>
-      </p:sp>
-      <p:sp>
-        <p:nvSpPr>
-          <p:cNvPr id="27" name="TextBox 26"/>
-          <p:cNvSpPr txBox="1"/>
-          <p:nvPr/>
-        </p:nvSpPr>
-        <p:spPr>
-          <a:xfrm>
-            <a:off x="4800600" y="1005840"/>
-            <a:ext cx="6400800" cy="274320"/>
-          </a:xfrm>
-          <a:prstGeom prst="rect">
-            <a:avLst/>
-          </a:prstGeom>
-          <a:noFill/>
-        </p:spPr>
-        <p:txBody>
-          <a:bodyPr wrap="none" anchor="t">
-            <a:spAutoFit/>
-          </a:bodyPr>
-          <a:lstStyle/>
-          <a:p>
-            <a:pPr algn="l"/>
-            <a:r>
-              <a:rPr sz="1822" b="1">
-                <a:solidFill>
-                  <a:srgbClr val="2365A9"/>
-                </a:solidFill>
-                <a:latin typeface="Arial"/>
-              </a:rPr>
-              <a:t>◆ Conceptual Comparison with Single-Purpose Systems</a:t>
-            </a:r>
-          </a:p>
-        </p:txBody>
-      </p:sp>
-      <p:sp>
-        <p:nvSpPr>
-          <p:cNvPr id="28" name="Rounded Rectangle 27"/>
-          <p:cNvSpPr/>
-          <p:nvPr/>
-        </p:nvSpPr>
-        <p:spPr>
-          <a:xfrm>
-            <a:off x="4800600" y="1417320"/>
-            <a:ext cx="1645920" cy="594360"/>
-          </a:xfrm>
-          <a:prstGeom prst="roundRect">
-            <a:avLst/>
-          </a:prstGeom>
-          <a:solidFill>
-            <a:srgbClr val="F3F7FA"/>
-          </a:solidFill>
-          <a:ln w="12700">
-            <a:solidFill>
-              <a:srgbClr val="2365A9"/>
-            </a:solidFill>
-          </a:ln>
-        </p:spPr>
-        <p:style>
-          <a:lnRef idx="1">
-            <a:schemeClr val="accent1"/>
-          </a:lnRef>
-          <a:fillRef idx="3">
-            <a:schemeClr val="accent1"/>
-          </a:fillRef>
-          <a:effectRef idx="2">
-            <a:schemeClr val="accent1"/>
-          </a:effectRef>
-          <a:fontRef idx="minor">
-            <a:schemeClr val="lt1"/>
-          </a:fontRef>
-        </p:style>
-        <p:txBody>
-          <a:bodyPr rtlCol="0" anchor="ctr"/>
-          <a:lstStyle/>
-          <a:p>
-            <a:pPr algn="ctr"/>
-            <a:r>
-              <a:rPr sz="1012" b="1">
-                <a:solidFill>
-                  <a:srgbClr val="123456"/>
-                </a:solidFill>
-                <a:latin typeface="Arial"/>
-              </a:rPr>
-              <a:t>Capability</a:t>
-            </a:r>
-          </a:p>
-        </p:txBody>
-      </p:sp>
-      <p:sp>
-        <p:nvSpPr>
-          <p:cNvPr id="29" name="Rounded Rectangle 28"/>
-          <p:cNvSpPr/>
-          <p:nvPr/>
-        </p:nvSpPr>
-        <p:spPr>
-          <a:xfrm>
-            <a:off x="6537960" y="1417320"/>
-            <a:ext cx="1554480" cy="594360"/>
-          </a:xfrm>
-          <a:prstGeom prst="roundRect">
-            <a:avLst/>
-          </a:prstGeom>
-          <a:solidFill>
-            <a:srgbClr val="F3F7FA"/>
-          </a:solidFill>
-          <a:ln w="12700">
-            <a:solidFill>
-              <a:srgbClr val="2365A9"/>
-            </a:solidFill>
-          </a:ln>
-        </p:spPr>
-        <p:style>
-          <a:lnRef idx="1">
-            <a:schemeClr val="accent1"/>
-          </a:lnRef>
-          <a:fillRef idx="3">
-            <a:schemeClr val="accent1"/>
-          </a:fillRef>
-          <a:effectRef idx="2">
-            <a:schemeClr val="accent1"/>
-          </a:effectRef>
-          <a:fontRef idx="minor">
-            <a:schemeClr val="lt1"/>
-          </a:fontRef>
-        </p:style>
-        <p:txBody>
-          <a:bodyPr rtlCol="0" anchor="ctr"/>
-          <a:lstStyle/>
-          <a:p>
-            <a:pPr algn="ctr"/>
-            <a:r>
-              <a:rPr sz="1012" b="1">
-                <a:solidFill>
-                  <a:srgbClr val="123456"/>
-                </a:solidFill>
-                <a:latin typeface="Arial"/>
-              </a:rPr>
-              <a:t>Career Readiness OS</a:t>
-            </a:r>
-          </a:p>
-        </p:txBody>
-      </p:sp>
-      <p:sp>
-        <p:nvSpPr>
-          <p:cNvPr id="30" name="Rounded Rectangle 29"/>
-          <p:cNvSpPr/>
-          <p:nvPr/>
-        </p:nvSpPr>
-        <p:spPr>
-          <a:xfrm>
-            <a:off x="8183879" y="1417320"/>
-            <a:ext cx="1051560" cy="594360"/>
-          </a:xfrm>
-          <a:prstGeom prst="roundRect">
-            <a:avLst/>
-          </a:prstGeom>
-          <a:solidFill>
-            <a:srgbClr val="F3F7FA"/>
-          </a:solidFill>
-          <a:ln w="12700">
-            <a:solidFill>
-              <a:srgbClr val="2365A9"/>
-            </a:solidFill>
-          </a:ln>
-        </p:spPr>
-        <p:style>
-          <a:lnRef idx="1">
-            <a:schemeClr val="accent1"/>
-          </a:lnRef>
-          <a:fillRef idx="3">
-            <a:schemeClr val="accent1"/>
-          </a:fillRef>
-          <a:effectRef idx="2">
-            <a:schemeClr val="accent1"/>
-          </a:effectRef>
-          <a:fontRef idx="minor">
-            <a:schemeClr val="lt1"/>
-          </a:fontRef>
-        </p:style>
-        <p:txBody>
-          <a:bodyPr rtlCol="0" anchor="ctr"/>
-          <a:lstStyle/>
-          <a:p>
-            <a:pPr algn="ctr"/>
-            <a:r>
-              <a:rPr sz="1012" b="1">
-                <a:solidFill>
-                  <a:srgbClr val="123456"/>
-                </a:solidFill>
-                <a:latin typeface="Arial"/>
-              </a:rPr>
-              <a:t>Assessment
-Portal</a:t>
-            </a:r>
-          </a:p>
-        </p:txBody>
-      </p:sp>
-      <p:sp>
-        <p:nvSpPr>
-          <p:cNvPr id="31" name="Rounded Rectangle 30"/>
-          <p:cNvSpPr/>
-          <p:nvPr/>
-        </p:nvSpPr>
-        <p:spPr>
-          <a:xfrm>
-            <a:off x="9326880" y="1417320"/>
-            <a:ext cx="1051560" cy="594360"/>
-          </a:xfrm>
-          <a:prstGeom prst="roundRect">
-            <a:avLst/>
-          </a:prstGeom>
-          <a:solidFill>
-            <a:srgbClr val="F3F7FA"/>
-          </a:solidFill>
-          <a:ln w="12700">
-            <a:solidFill>
-              <a:srgbClr val="2365A9"/>
-            </a:solidFill>
-          </a:ln>
-        </p:spPr>
-        <p:style>
-          <a:lnRef idx="1">
-            <a:schemeClr val="accent1"/>
-          </a:lnRef>
-          <a:fillRef idx="3">
-            <a:schemeClr val="accent1"/>
-          </a:fillRef>
-          <a:effectRef idx="2">
-            <a:schemeClr val="accent1"/>
-          </a:effectRef>
-          <a:fontRef idx="minor">
-            <a:schemeClr val="lt1"/>
-          </a:fontRef>
-        </p:style>
-        <p:txBody>
-          <a:bodyPr rtlCol="0" anchor="ctr"/>
-          <a:lstStyle/>
-          <a:p>
-            <a:pPr algn="ctr"/>
-            <a:r>
-              <a:rPr sz="1012" b="1">
-                <a:solidFill>
-                  <a:srgbClr val="123456"/>
-                </a:solidFill>
-                <a:latin typeface="Arial"/>
-              </a:rPr>
-              <a:t>LMS</a:t>
-            </a:r>
-          </a:p>
-        </p:txBody>
-      </p:sp>
-      <p:sp>
-        <p:nvSpPr>
-          <p:cNvPr id="32" name="Rounded Rectangle 31"/>
-          <p:cNvSpPr/>
-          <p:nvPr/>
-        </p:nvSpPr>
-        <p:spPr>
-          <a:xfrm>
-            <a:off x="10469880" y="1417320"/>
-            <a:ext cx="822960" cy="594360"/>
-          </a:xfrm>
-          <a:prstGeom prst="roundRect">
-            <a:avLst/>
-          </a:prstGeom>
-          <a:solidFill>
-            <a:srgbClr val="F3F7FA"/>
-          </a:solidFill>
-          <a:ln w="12700">
-            <a:solidFill>
-              <a:srgbClr val="2365A9"/>
-            </a:solidFill>
-          </a:ln>
-        </p:spPr>
-        <p:style>
-          <a:lnRef idx="1">
-            <a:schemeClr val="accent1"/>
-          </a:lnRef>
-          <a:fillRef idx="3">
-            <a:schemeClr val="accent1"/>
-          </a:fillRef>
-          <a:effectRef idx="2">
-            <a:schemeClr val="accent1"/>
-          </a:effectRef>
-          <a:fontRef idx="minor">
-            <a:schemeClr val="lt1"/>
-          </a:fontRef>
-        </p:style>
-        <p:txBody>
-          <a:bodyPr rtlCol="0" anchor="ctr"/>
-          <a:lstStyle/>
-          <a:p>
-            <a:pPr algn="ctr"/>
-            <a:r>
-              <a:rPr sz="1012" b="1">
-                <a:solidFill>
-                  <a:srgbClr val="123456"/>
-                </a:solidFill>
-                <a:latin typeface="Arial"/>
-              </a:rPr>
-              <a:t>Job Portal</a:t>
-            </a:r>
-          </a:p>
-        </p:txBody>
-      </p:sp>
-      <p:sp>
-        <p:nvSpPr>
-          <p:cNvPr id="33" name="Rounded Rectangle 32"/>
-          <p:cNvSpPr/>
-          <p:nvPr/>
-        </p:nvSpPr>
-        <p:spPr>
-          <a:xfrm>
-            <a:off x="4800600" y="2057400"/>
-            <a:ext cx="1645920" cy="384048"/>
-          </a:xfrm>
-          <a:prstGeom prst="roundRect">
-            <a:avLst/>
-          </a:prstGeom>
-          <a:solidFill>
-            <a:srgbClr val="FFFFFF"/>
-          </a:solidFill>
-          <a:ln w="12700">
-            <a:solidFill>
-              <a:srgbClr val="D5E0EA"/>
-            </a:solidFill>
-          </a:ln>
-        </p:spPr>
-        <p:style>
-          <a:lnRef idx="1">
-            <a:schemeClr val="accent1"/>
-          </a:lnRef>
-          <a:fillRef idx="3">
-            <a:schemeClr val="accent1"/>
-          </a:fillRef>
-          <a:effectRef idx="2">
-            <a:schemeClr val="accent1"/>
-          </a:effectRef>
-          <a:fontRef idx="minor">
-            <a:schemeClr val="lt1"/>
-          </a:fontRef>
-        </p:style>
-        <p:txBody>
-          <a:bodyPr rtlCol="0" anchor="ctr"/>
-          <a:lstStyle/>
-          <a:p>
-            <a:pPr algn="ctr"/>
-            <a:r>
-              <a:rPr sz="999" b="1">
-                <a:solidFill>
-                  <a:srgbClr val="272F38"/>
-                </a:solidFill>
-                <a:latin typeface="Arial"/>
-              </a:rPr>
-              <a:t>Skill profile + gap</a:t>
-            </a:r>
-          </a:p>
-        </p:txBody>
-      </p:sp>
-      <p:sp>
-        <p:nvSpPr>
-          <p:cNvPr id="34" name="Rounded Rectangle 33"/>
-          <p:cNvSpPr/>
-          <p:nvPr/>
-        </p:nvSpPr>
-        <p:spPr>
-          <a:xfrm>
-            <a:off x="6537960" y="2057400"/>
-            <a:ext cx="1554480" cy="384048"/>
-          </a:xfrm>
-          <a:prstGeom prst="roundRect">
-            <a:avLst/>
-          </a:prstGeom>
-          <a:solidFill>
-            <a:srgbClr val="FFFFFF"/>
-          </a:solidFill>
-          <a:ln w="12700">
-            <a:solidFill>
-              <a:srgbClr val="D5E0EA"/>
-            </a:solidFill>
-          </a:ln>
-        </p:spPr>
-        <p:style>
-          <a:lnRef idx="1">
-            <a:schemeClr val="accent1"/>
-          </a:lnRef>
-          <a:fillRef idx="3">
-            <a:schemeClr val="accent1"/>
-          </a:fillRef>
-          <a:effectRef idx="2">
-            <a:schemeClr val="accent1"/>
-          </a:effectRef>
-          <a:fontRef idx="minor">
-            <a:schemeClr val="lt1"/>
-          </a:fontRef>
-        </p:style>
-        <p:txBody>
-          <a:bodyPr rtlCol="0" anchor="ctr"/>
-          <a:lstStyle/>
-          <a:p>
-            <a:pPr algn="ctr"/>
-            <a:r>
-              <a:rPr sz="999" b="1">
-                <a:solidFill>
-                  <a:srgbClr val="43945C"/>
-                </a:solidFill>
-                <a:latin typeface="Arial"/>
-              </a:rPr>
-              <a:t>✓</a:t>
-            </a:r>
-          </a:p>
-        </p:txBody>
-      </p:sp>
-      <p:sp>
-        <p:nvSpPr>
-          <p:cNvPr id="35" name="Rounded Rectangle 34"/>
-          <p:cNvSpPr/>
-          <p:nvPr/>
-        </p:nvSpPr>
-        <p:spPr>
-          <a:xfrm>
-            <a:off x="8183879" y="2057400"/>
-            <a:ext cx="1051560" cy="384048"/>
-          </a:xfrm>
-          <a:prstGeom prst="roundRect">
-            <a:avLst/>
-          </a:prstGeom>
-          <a:solidFill>
-            <a:srgbClr val="FFFFFF"/>
-          </a:solidFill>
-          <a:ln w="12700">
-            <a:solidFill>
-              <a:srgbClr val="D5E0EA"/>
-            </a:solidFill>
-          </a:ln>
-        </p:spPr>
-        <p:style>
-          <a:lnRef idx="1">
-            <a:schemeClr val="accent1"/>
-          </a:lnRef>
-          <a:fillRef idx="3">
-            <a:schemeClr val="accent1"/>
-          </a:fillRef>
-          <a:effectRef idx="2">
-            <a:schemeClr val="accent1"/>
-          </a:effectRef>
-          <a:fontRef idx="minor">
-            <a:schemeClr val="lt1"/>
-          </a:fontRef>
-        </p:style>
-        <p:txBody>
-          <a:bodyPr rtlCol="0" anchor="ctr"/>
-          <a:lstStyle/>
-          <a:p>
-            <a:pPr algn="ctr"/>
-            <a:r>
-              <a:rPr sz="999" b="1">
-                <a:solidFill>
-                  <a:srgbClr val="E77E22"/>
-                </a:solidFill>
-                <a:latin typeface="Arial"/>
-              </a:rPr>
-              <a:t>△</a:t>
-            </a:r>
-          </a:p>
-        </p:txBody>
-      </p:sp>
-      <p:sp>
-        <p:nvSpPr>
-          <p:cNvPr id="36" name="Rounded Rectangle 35"/>
-          <p:cNvSpPr/>
-          <p:nvPr/>
-        </p:nvSpPr>
-        <p:spPr>
-          <a:xfrm>
-            <a:off x="9326880" y="2057400"/>
-            <a:ext cx="1051560" cy="384048"/>
-          </a:xfrm>
-          <a:prstGeom prst="roundRect">
-            <a:avLst/>
-          </a:prstGeom>
-          <a:solidFill>
-            <a:srgbClr val="FFFFFF"/>
-          </a:solidFill>
-          <a:ln w="12700">
-            <a:solidFill>
-              <a:srgbClr val="D5E0EA"/>
-            </a:solidFill>
-          </a:ln>
-        </p:spPr>
-        <p:style>
-          <a:lnRef idx="1">
-            <a:schemeClr val="accent1"/>
-          </a:lnRef>
-          <a:fillRef idx="3">
-            <a:schemeClr val="accent1"/>
-          </a:fillRef>
-          <a:effectRef idx="2">
-            <a:schemeClr val="accent1"/>
-          </a:effectRef>
-          <a:fontRef idx="minor">
-            <a:schemeClr val="lt1"/>
-          </a:fontRef>
-        </p:style>
-        <p:txBody>
-          <a:bodyPr rtlCol="0" anchor="ctr"/>
-          <a:lstStyle/>
-          <a:p>
-            <a:pPr algn="ctr"/>
-            <a:r>
-              <a:rPr sz="999" b="1">
-                <a:solidFill>
-                  <a:srgbClr val="E77E22"/>
-                </a:solidFill>
-                <a:latin typeface="Arial"/>
-              </a:rPr>
-              <a:t>△</a:t>
-            </a:r>
-          </a:p>
-        </p:txBody>
-      </p:sp>
-      <p:sp>
-        <p:nvSpPr>
-          <p:cNvPr id="37" name="Rounded Rectangle 36"/>
-          <p:cNvSpPr/>
-          <p:nvPr/>
-        </p:nvSpPr>
-        <p:spPr>
-          <a:xfrm>
-            <a:off x="10469880" y="2057400"/>
-            <a:ext cx="822960" cy="384048"/>
-          </a:xfrm>
-          <a:prstGeom prst="roundRect">
-            <a:avLst/>
-          </a:prstGeom>
-          <a:solidFill>
-            <a:srgbClr val="FFFFFF"/>
-          </a:solidFill>
-          <a:ln w="12700">
-            <a:solidFill>
-              <a:srgbClr val="D5E0EA"/>
-            </a:solidFill>
-          </a:ln>
-        </p:spPr>
-        <p:style>
-          <a:lnRef idx="1">
-            <a:schemeClr val="accent1"/>
-          </a:lnRef>
-          <a:fillRef idx="3">
-            <a:schemeClr val="accent1"/>
-          </a:fillRef>
-          <a:effectRef idx="2">
-            <a:schemeClr val="accent1"/>
-          </a:effectRef>
-          <a:fontRef idx="minor">
-            <a:schemeClr val="lt1"/>
-          </a:fontRef>
-        </p:style>
-        <p:txBody>
-          <a:bodyPr rtlCol="0" anchor="ctr"/>
-          <a:lstStyle/>
-          <a:p>
-            <a:pPr algn="ctr"/>
-            <a:r>
-              <a:rPr sz="999" b="1">
-                <a:solidFill>
-                  <a:srgbClr val="C24343"/>
-                </a:solidFill>
-                <a:latin typeface="Arial"/>
-              </a:rPr>
-              <a:t>×</a:t>
-            </a:r>
-          </a:p>
-        </p:txBody>
-      </p:sp>
-      <p:sp>
-        <p:nvSpPr>
-          <p:cNvPr id="38" name="Rounded Rectangle 37"/>
-          <p:cNvSpPr/>
-          <p:nvPr/>
-        </p:nvSpPr>
-        <p:spPr>
-          <a:xfrm>
-            <a:off x="4800600" y="2514600"/>
-            <a:ext cx="1645920" cy="384048"/>
-          </a:xfrm>
-          <a:prstGeom prst="roundRect">
-            <a:avLst/>
-          </a:prstGeom>
-          <a:solidFill>
-            <a:srgbClr val="FFFFFF"/>
-          </a:solidFill>
-          <a:ln w="12700">
-            <a:solidFill>
-              <a:srgbClr val="D5E0EA"/>
-            </a:solidFill>
-          </a:ln>
-        </p:spPr>
-        <p:style>
-          <a:lnRef idx="1">
-            <a:schemeClr val="accent1"/>
-          </a:lnRef>
-          <a:fillRef idx="3">
-            <a:schemeClr val="accent1"/>
-          </a:fillRef>
-          <a:effectRef idx="2">
-            <a:schemeClr val="accent1"/>
-          </a:effectRef>
-          <a:fontRef idx="minor">
-            <a:schemeClr val="lt1"/>
-          </a:fontRef>
-        </p:style>
-        <p:txBody>
-          <a:bodyPr rtlCol="0" anchor="ctr"/>
-          <a:lstStyle/>
-          <a:p>
-            <a:pPr algn="ctr"/>
-            <a:r>
-              <a:rPr sz="999" b="1">
-                <a:solidFill>
-                  <a:srgbClr val="272F38"/>
-                </a:solidFill>
-                <a:latin typeface="Arial"/>
-              </a:rPr>
-              <a:t>Personalized roadmap</a:t>
-            </a:r>
-          </a:p>
-        </p:txBody>
-      </p:sp>
-      <p:sp>
-        <p:nvSpPr>
-          <p:cNvPr id="39" name="Rounded Rectangle 38"/>
-          <p:cNvSpPr/>
-          <p:nvPr/>
-        </p:nvSpPr>
-        <p:spPr>
-          <a:xfrm>
-            <a:off x="6537960" y="2514600"/>
-            <a:ext cx="1554480" cy="384048"/>
-          </a:xfrm>
-          <a:prstGeom prst="roundRect">
-            <a:avLst/>
-          </a:prstGeom>
-          <a:solidFill>
-            <a:srgbClr val="FFFFFF"/>
-          </a:solidFill>
-          <a:ln w="12700">
-            <a:solidFill>
-              <a:srgbClr val="D5E0EA"/>
-            </a:solidFill>
-          </a:ln>
-        </p:spPr>
-        <p:style>
-          <a:lnRef idx="1">
-            <a:schemeClr val="accent1"/>
-          </a:lnRef>
-          <a:fillRef idx="3">
-            <a:schemeClr val="accent1"/>
-          </a:fillRef>
-          <a:effectRef idx="2">
-            <a:schemeClr val="accent1"/>
-          </a:effectRef>
-          <a:fontRef idx="minor">
-            <a:schemeClr val="lt1"/>
-          </a:fontRef>
-        </p:style>
-        <p:txBody>
-          <a:bodyPr rtlCol="0" anchor="ctr"/>
-          <a:lstStyle/>
-          <a:p>
-            <a:pPr algn="ctr"/>
-            <a:r>
-              <a:rPr sz="999" b="1">
-                <a:solidFill>
-                  <a:srgbClr val="43945C"/>
-                </a:solidFill>
-                <a:latin typeface="Arial"/>
-              </a:rPr>
-              <a:t>✓</a:t>
-            </a:r>
-          </a:p>
-        </p:txBody>
-      </p:sp>
-      <p:sp>
-        <p:nvSpPr>
-          <p:cNvPr id="40" name="Rounded Rectangle 39"/>
-          <p:cNvSpPr/>
-          <p:nvPr/>
-        </p:nvSpPr>
-        <p:spPr>
-          <a:xfrm>
-            <a:off x="8183879" y="2514600"/>
-            <a:ext cx="1051560" cy="384048"/>
-          </a:xfrm>
-          <a:prstGeom prst="roundRect">
-            <a:avLst/>
-          </a:prstGeom>
-          <a:solidFill>
-            <a:srgbClr val="FFFFFF"/>
-          </a:solidFill>
-          <a:ln w="12700">
-            <a:solidFill>
-              <a:srgbClr val="D5E0EA"/>
-            </a:solidFill>
-          </a:ln>
-        </p:spPr>
-        <p:style>
-          <a:lnRef idx="1">
-            <a:schemeClr val="accent1"/>
-          </a:lnRef>
-          <a:fillRef idx="3">
-            <a:schemeClr val="accent1"/>
-          </a:fillRef>
-          <a:effectRef idx="2">
-            <a:schemeClr val="accent1"/>
-          </a:effectRef>
-          <a:fontRef idx="minor">
-            <a:schemeClr val="lt1"/>
-          </a:fontRef>
-        </p:style>
-        <p:txBody>
-          <a:bodyPr rtlCol="0" anchor="ctr"/>
-          <a:lstStyle/>
-          <a:p>
-            <a:pPr algn="ctr"/>
-            <a:r>
-              <a:rPr sz="999" b="1">
-                <a:solidFill>
-                  <a:srgbClr val="E77E22"/>
-                </a:solidFill>
-                <a:latin typeface="Arial"/>
-              </a:rPr>
-              <a:t>△</a:t>
-            </a:r>
-          </a:p>
-        </p:txBody>
-      </p:sp>
-      <p:sp>
-        <p:nvSpPr>
-          <p:cNvPr id="41" name="Rounded Rectangle 40"/>
-          <p:cNvSpPr/>
-          <p:nvPr/>
-        </p:nvSpPr>
-        <p:spPr>
-          <a:xfrm>
-            <a:off x="9326880" y="2514600"/>
-            <a:ext cx="1051560" cy="384048"/>
-          </a:xfrm>
-          <a:prstGeom prst="roundRect">
-            <a:avLst/>
-          </a:prstGeom>
-          <a:solidFill>
-            <a:srgbClr val="FFFFFF"/>
-          </a:solidFill>
-          <a:ln w="12700">
-            <a:solidFill>
-              <a:srgbClr val="D5E0EA"/>
-            </a:solidFill>
-          </a:ln>
-        </p:spPr>
-        <p:style>
-          <a:lnRef idx="1">
-            <a:schemeClr val="accent1"/>
-          </a:lnRef>
-          <a:fillRef idx="3">
-            <a:schemeClr val="accent1"/>
-          </a:fillRef>
-          <a:effectRef idx="2">
-            <a:schemeClr val="accent1"/>
-          </a:effectRef>
-          <a:fontRef idx="minor">
-            <a:schemeClr val="lt1"/>
-          </a:fontRef>
-        </p:style>
-        <p:txBody>
-          <a:bodyPr rtlCol="0" anchor="ctr"/>
-          <a:lstStyle/>
-          <a:p>
-            <a:pPr algn="ctr"/>
-            <a:r>
-              <a:rPr sz="999" b="1">
-                <a:solidFill>
-                  <a:srgbClr val="43945C"/>
-                </a:solidFill>
-                <a:latin typeface="Arial"/>
-              </a:rPr>
-              <a:t>✓</a:t>
-            </a:r>
-          </a:p>
-        </p:txBody>
-      </p:sp>
-      <p:sp>
-        <p:nvSpPr>
-          <p:cNvPr id="42" name="Rounded Rectangle 41"/>
-          <p:cNvSpPr/>
-          <p:nvPr/>
-        </p:nvSpPr>
-        <p:spPr>
-          <a:xfrm>
-            <a:off x="10469880" y="2514600"/>
-            <a:ext cx="822960" cy="384048"/>
-          </a:xfrm>
-          <a:prstGeom prst="roundRect">
-            <a:avLst/>
-          </a:prstGeom>
-          <a:solidFill>
-            <a:srgbClr val="FFFFFF"/>
-          </a:solidFill>
-          <a:ln w="12700">
-            <a:solidFill>
-              <a:srgbClr val="D5E0EA"/>
-            </a:solidFill>
-          </a:ln>
-        </p:spPr>
-        <p:style>
-          <a:lnRef idx="1">
-            <a:schemeClr val="accent1"/>
-          </a:lnRef>
-          <a:fillRef idx="3">
-            <a:schemeClr val="accent1"/>
-          </a:fillRef>
-          <a:effectRef idx="2">
-            <a:schemeClr val="accent1"/>
-          </a:effectRef>
-          <a:fontRef idx="minor">
-            <a:schemeClr val="lt1"/>
-          </a:fontRef>
-        </p:style>
-        <p:txBody>
-          <a:bodyPr rtlCol="0" anchor="ctr"/>
-          <a:lstStyle/>
-          <a:p>
-            <a:pPr algn="ctr"/>
-            <a:r>
-              <a:rPr sz="999" b="1">
-                <a:solidFill>
-                  <a:srgbClr val="C24343"/>
-                </a:solidFill>
-                <a:latin typeface="Arial"/>
-              </a:rPr>
-              <a:t>×</a:t>
-            </a:r>
-          </a:p>
-        </p:txBody>
-      </p:sp>
-      <p:sp>
-        <p:nvSpPr>
-          <p:cNvPr id="43" name="Rounded Rectangle 42"/>
-          <p:cNvSpPr/>
-          <p:nvPr/>
-        </p:nvSpPr>
-        <p:spPr>
-          <a:xfrm>
-            <a:off x="4800600" y="2971800"/>
-            <a:ext cx="1645920" cy="384048"/>
-          </a:xfrm>
-          <a:prstGeom prst="roundRect">
-            <a:avLst/>
-          </a:prstGeom>
-          <a:solidFill>
-            <a:srgbClr val="FFFFFF"/>
-          </a:solidFill>
-          <a:ln w="12700">
-            <a:solidFill>
-              <a:srgbClr val="D5E0EA"/>
-            </a:solidFill>
-          </a:ln>
-        </p:spPr>
-        <p:style>
-          <a:lnRef idx="1">
-            <a:schemeClr val="accent1"/>
-          </a:lnRef>
-          <a:fillRef idx="3">
-            <a:schemeClr val="accent1"/>
-          </a:fillRef>
-          <a:effectRef idx="2">
-            <a:schemeClr val="accent1"/>
-          </a:effectRef>
-          <a:fontRef idx="minor">
-            <a:schemeClr val="lt1"/>
-          </a:fontRef>
-        </p:style>
-        <p:txBody>
-          <a:bodyPr rtlCol="0" anchor="ctr"/>
-          <a:lstStyle/>
-          <a:p>
-            <a:pPr algn="ctr"/>
-            <a:r>
-              <a:rPr sz="999" b="1">
-                <a:solidFill>
-                  <a:srgbClr val="272F38"/>
-                </a:solidFill>
-                <a:latin typeface="Arial"/>
-              </a:rPr>
-              <a:t>Daily planner + streak</a:t>
-            </a:r>
-          </a:p>
-        </p:txBody>
-      </p:sp>
-      <p:sp>
-        <p:nvSpPr>
-          <p:cNvPr id="44" name="Rounded Rectangle 43"/>
-          <p:cNvSpPr/>
-          <p:nvPr/>
-        </p:nvSpPr>
-        <p:spPr>
-          <a:xfrm>
-            <a:off x="6537960" y="2971800"/>
-            <a:ext cx="1554480" cy="384048"/>
-          </a:xfrm>
-          <a:prstGeom prst="roundRect">
-            <a:avLst/>
-          </a:prstGeom>
-          <a:solidFill>
-            <a:srgbClr val="FFFFFF"/>
-          </a:solidFill>
-          <a:ln w="12700">
-            <a:solidFill>
-              <a:srgbClr val="D5E0EA"/>
-            </a:solidFill>
-          </a:ln>
-        </p:spPr>
-        <p:style>
-          <a:lnRef idx="1">
-            <a:schemeClr val="accent1"/>
-          </a:lnRef>
-          <a:fillRef idx="3">
-            <a:schemeClr val="accent1"/>
-          </a:fillRef>
-          <a:effectRef idx="2">
-            <a:schemeClr val="accent1"/>
-          </a:effectRef>
-          <a:fontRef idx="minor">
-            <a:schemeClr val="lt1"/>
-          </a:fontRef>
-        </p:style>
-        <p:txBody>
-          <a:bodyPr rtlCol="0" anchor="ctr"/>
-          <a:lstStyle/>
-          <a:p>
-            <a:pPr algn="ctr"/>
-            <a:r>
-              <a:rPr sz="999" b="1">
-                <a:solidFill>
-                  <a:srgbClr val="43945C"/>
-                </a:solidFill>
-                <a:latin typeface="Arial"/>
-              </a:rPr>
-              <a:t>✓</a:t>
-            </a:r>
-          </a:p>
-        </p:txBody>
-      </p:sp>
-      <p:sp>
-        <p:nvSpPr>
-          <p:cNvPr id="45" name="Rounded Rectangle 44"/>
-          <p:cNvSpPr/>
-          <p:nvPr/>
-        </p:nvSpPr>
-        <p:spPr>
-          <a:xfrm>
-            <a:off x="8183879" y="2971800"/>
-            <a:ext cx="1051560" cy="384048"/>
-          </a:xfrm>
-          <a:prstGeom prst="roundRect">
-            <a:avLst/>
-          </a:prstGeom>
-          <a:solidFill>
-            <a:srgbClr val="FFFFFF"/>
-          </a:solidFill>
-          <a:ln w="12700">
-            <a:solidFill>
-              <a:srgbClr val="D5E0EA"/>
-            </a:solidFill>
-          </a:ln>
-        </p:spPr>
-        <p:style>
-          <a:lnRef idx="1">
-            <a:schemeClr val="accent1"/>
-          </a:lnRef>
-          <a:fillRef idx="3">
-            <a:schemeClr val="accent1"/>
-          </a:fillRef>
-          <a:effectRef idx="2">
-            <a:schemeClr val="accent1"/>
-          </a:effectRef>
-          <a:fontRef idx="minor">
-            <a:schemeClr val="lt1"/>
-          </a:fontRef>
-        </p:style>
-        <p:txBody>
-          <a:bodyPr rtlCol="0" anchor="ctr"/>
-          <a:lstStyle/>
-          <a:p>
-            <a:pPr algn="ctr"/>
-            <a:r>
-              <a:rPr sz="999" b="1">
-                <a:solidFill>
-                  <a:srgbClr val="C24343"/>
-                </a:solidFill>
-                <a:latin typeface="Arial"/>
-              </a:rPr>
-              <a:t>×</a:t>
-            </a:r>
-          </a:p>
-        </p:txBody>
-      </p:sp>
-      <p:sp>
-        <p:nvSpPr>
-          <p:cNvPr id="46" name="Rounded Rectangle 45"/>
-          <p:cNvSpPr/>
-          <p:nvPr/>
-        </p:nvSpPr>
-        <p:spPr>
-          <a:xfrm>
-            <a:off x="9326880" y="2971800"/>
-            <a:ext cx="1051560" cy="384048"/>
-          </a:xfrm>
-          <a:prstGeom prst="roundRect">
-            <a:avLst/>
-          </a:prstGeom>
-          <a:solidFill>
-            <a:srgbClr val="FFFFFF"/>
-          </a:solidFill>
-          <a:ln w="12700">
-            <a:solidFill>
-              <a:srgbClr val="D5E0EA"/>
-            </a:solidFill>
-          </a:ln>
-        </p:spPr>
-        <p:style>
-          <a:lnRef idx="1">
-            <a:schemeClr val="accent1"/>
-          </a:lnRef>
-          <a:fillRef idx="3">
-            <a:schemeClr val="accent1"/>
-          </a:fillRef>
-          <a:effectRef idx="2">
-            <a:schemeClr val="accent1"/>
-          </a:effectRef>
-          <a:fontRef idx="minor">
-            <a:schemeClr val="lt1"/>
-          </a:fontRef>
-        </p:style>
-        <p:txBody>
-          <a:bodyPr rtlCol="0" anchor="ctr"/>
-          <a:lstStyle/>
-          <a:p>
-            <a:pPr algn="ctr"/>
-            <a:r>
-              <a:rPr sz="999" b="1">
-                <a:solidFill>
-                  <a:srgbClr val="E77E22"/>
-                </a:solidFill>
-                <a:latin typeface="Arial"/>
-              </a:rPr>
-              <a:t>△</a:t>
-            </a:r>
-          </a:p>
-        </p:txBody>
-      </p:sp>
-      <p:sp>
-        <p:nvSpPr>
-          <p:cNvPr id="47" name="Rounded Rectangle 46"/>
-          <p:cNvSpPr/>
-          <p:nvPr/>
-        </p:nvSpPr>
-        <p:spPr>
-          <a:xfrm>
-            <a:off x="10469880" y="2971800"/>
-            <a:ext cx="822960" cy="384048"/>
-          </a:xfrm>
-          <a:prstGeom prst="roundRect">
-            <a:avLst/>
-          </a:prstGeom>
-          <a:solidFill>
-            <a:srgbClr val="FFFFFF"/>
-          </a:solidFill>
-          <a:ln w="12700">
-            <a:solidFill>
-              <a:srgbClr val="D5E0EA"/>
-            </a:solidFill>
-          </a:ln>
-        </p:spPr>
-        <p:style>
-          <a:lnRef idx="1">
-            <a:schemeClr val="accent1"/>
-          </a:lnRef>
-          <a:fillRef idx="3">
-            <a:schemeClr val="accent1"/>
-          </a:fillRef>
-          <a:effectRef idx="2">
-            <a:schemeClr val="accent1"/>
-          </a:effectRef>
-          <a:fontRef idx="minor">
-            <a:schemeClr val="lt1"/>
-          </a:fontRef>
-        </p:style>
-        <p:txBody>
-          <a:bodyPr rtlCol="0" anchor="ctr"/>
-          <a:lstStyle/>
-          <a:p>
-            <a:pPr algn="ctr"/>
-            <a:r>
-              <a:rPr sz="999" b="1">
-                <a:solidFill>
-                  <a:srgbClr val="C24343"/>
-                </a:solidFill>
-                <a:latin typeface="Arial"/>
-              </a:rPr>
-              <a:t>×</a:t>
-            </a:r>
-          </a:p>
-        </p:txBody>
-      </p:sp>
-      <p:sp>
-        <p:nvSpPr>
-          <p:cNvPr id="48" name="Rounded Rectangle 47"/>
-          <p:cNvSpPr/>
-          <p:nvPr/>
-        </p:nvSpPr>
-        <p:spPr>
-          <a:xfrm>
-            <a:off x="4800600" y="3429000"/>
-            <a:ext cx="1645920" cy="384048"/>
-          </a:xfrm>
-          <a:prstGeom prst="roundRect">
-            <a:avLst/>
-          </a:prstGeom>
-          <a:solidFill>
-            <a:srgbClr val="FFFFFF"/>
-          </a:solidFill>
-          <a:ln w="12700">
-            <a:solidFill>
-              <a:srgbClr val="D5E0EA"/>
-            </a:solidFill>
-          </a:ln>
-        </p:spPr>
-        <p:style>
-          <a:lnRef idx="1">
-            <a:schemeClr val="accent1"/>
-          </a:lnRef>
-          <a:fillRef idx="3">
-            <a:schemeClr val="accent1"/>
-          </a:fillRef>
-          <a:effectRef idx="2">
-            <a:schemeClr val="accent1"/>
-          </a:effectRef>
-          <a:fontRef idx="minor">
-            <a:schemeClr val="lt1"/>
-          </a:fontRef>
-        </p:style>
-        <p:txBody>
-          <a:bodyPr rtlCol="0" anchor="ctr"/>
-          <a:lstStyle/>
-          <a:p>
-            <a:pPr algn="ctr"/>
-            <a:r>
-              <a:rPr sz="999" b="1">
-                <a:solidFill>
-                  <a:srgbClr val="272F38"/>
-                </a:solidFill>
-                <a:latin typeface="Arial"/>
-              </a:rPr>
-              <a:t>Institution skill analytics</a:t>
-            </a:r>
-          </a:p>
-        </p:txBody>
-      </p:sp>
-      <p:sp>
-        <p:nvSpPr>
-          <p:cNvPr id="49" name="Rounded Rectangle 48"/>
-          <p:cNvSpPr/>
-          <p:nvPr/>
-        </p:nvSpPr>
-        <p:spPr>
-          <a:xfrm>
-            <a:off x="6537960" y="3429000"/>
-            <a:ext cx="1554480" cy="384048"/>
-          </a:xfrm>
-          <a:prstGeom prst="roundRect">
-            <a:avLst/>
-          </a:prstGeom>
-          <a:solidFill>
-            <a:srgbClr val="FFFFFF"/>
-          </a:solidFill>
-          <a:ln w="12700">
-            <a:solidFill>
-              <a:srgbClr val="D5E0EA"/>
-            </a:solidFill>
-          </a:ln>
-        </p:spPr>
-        <p:style>
-          <a:lnRef idx="1">
-            <a:schemeClr val="accent1"/>
-          </a:lnRef>
-          <a:fillRef idx="3">
-            <a:schemeClr val="accent1"/>
-          </a:fillRef>
-          <a:effectRef idx="2">
-            <a:schemeClr val="accent1"/>
-          </a:effectRef>
-          <a:fontRef idx="minor">
-            <a:schemeClr val="lt1"/>
-          </a:fontRef>
-        </p:style>
-        <p:txBody>
-          <a:bodyPr rtlCol="0" anchor="ctr"/>
-          <a:lstStyle/>
-          <a:p>
-            <a:pPr algn="ctr"/>
-            <a:r>
-              <a:rPr sz="999" b="1">
-                <a:solidFill>
-                  <a:srgbClr val="43945C"/>
-                </a:solidFill>
-                <a:latin typeface="Arial"/>
-              </a:rPr>
-              <a:t>✓</a:t>
-            </a:r>
-          </a:p>
-        </p:txBody>
-      </p:sp>
-      <p:sp>
-        <p:nvSpPr>
-          <p:cNvPr id="50" name="Rounded Rectangle 49"/>
-          <p:cNvSpPr/>
-          <p:nvPr/>
-        </p:nvSpPr>
-        <p:spPr>
-          <a:xfrm>
-            <a:off x="8183879" y="3429000"/>
-            <a:ext cx="1051560" cy="384048"/>
-          </a:xfrm>
-          <a:prstGeom prst="roundRect">
-            <a:avLst/>
-          </a:prstGeom>
-          <a:solidFill>
-            <a:srgbClr val="FFFFFF"/>
-          </a:solidFill>
-          <a:ln w="12700">
-            <a:solidFill>
-              <a:srgbClr val="D5E0EA"/>
-            </a:solidFill>
-          </a:ln>
-        </p:spPr>
-        <p:style>
-          <a:lnRef idx="1">
-            <a:schemeClr val="accent1"/>
-          </a:lnRef>
-          <a:fillRef idx="3">
-            <a:schemeClr val="accent1"/>
-          </a:fillRef>
-          <a:effectRef idx="2">
-            <a:schemeClr val="accent1"/>
-          </a:effectRef>
-          <a:fontRef idx="minor">
-            <a:schemeClr val="lt1"/>
-          </a:fontRef>
-        </p:style>
-        <p:txBody>
-          <a:bodyPr rtlCol="0" anchor="ctr"/>
-          <a:lstStyle/>
-          <a:p>
-            <a:pPr algn="ctr"/>
-            <a:r>
-              <a:rPr sz="999" b="1">
-                <a:solidFill>
-                  <a:srgbClr val="E77E22"/>
-                </a:solidFill>
-                <a:latin typeface="Arial"/>
-              </a:rPr>
-              <a:t>△</a:t>
-            </a:r>
-          </a:p>
-        </p:txBody>
-      </p:sp>
-      <p:sp>
-        <p:nvSpPr>
-          <p:cNvPr id="51" name="Rounded Rectangle 50"/>
-          <p:cNvSpPr/>
-          <p:nvPr/>
-        </p:nvSpPr>
-        <p:spPr>
-          <a:xfrm>
-            <a:off x="9326880" y="3429000"/>
-            <a:ext cx="1051560" cy="384048"/>
-          </a:xfrm>
-          <a:prstGeom prst="roundRect">
-            <a:avLst/>
-          </a:prstGeom>
-          <a:solidFill>
-            <a:srgbClr val="FFFFFF"/>
-          </a:solidFill>
-          <a:ln w="12700">
-            <a:solidFill>
-              <a:srgbClr val="D5E0EA"/>
-            </a:solidFill>
-          </a:ln>
-        </p:spPr>
-        <p:style>
-          <a:lnRef idx="1">
-            <a:schemeClr val="accent1"/>
-          </a:lnRef>
-          <a:fillRef idx="3">
-            <a:schemeClr val="accent1"/>
-          </a:fillRef>
-          <a:effectRef idx="2">
-            <a:schemeClr val="accent1"/>
-          </a:effectRef>
-          <a:fontRef idx="minor">
-            <a:schemeClr val="lt1"/>
-          </a:fontRef>
-        </p:style>
-        <p:txBody>
-          <a:bodyPr rtlCol="0" anchor="ctr"/>
-          <a:lstStyle/>
-          <a:p>
-            <a:pPr algn="ctr"/>
-            <a:r>
-              <a:rPr sz="999" b="1">
-                <a:solidFill>
-                  <a:srgbClr val="43945C"/>
-                </a:solidFill>
-                <a:latin typeface="Arial"/>
-              </a:rPr>
-              <a:t>✓</a:t>
-            </a:r>
-          </a:p>
-        </p:txBody>
-      </p:sp>
-      <p:sp>
-        <p:nvSpPr>
-          <p:cNvPr id="52" name="Rounded Rectangle 51"/>
-          <p:cNvSpPr/>
-          <p:nvPr/>
-        </p:nvSpPr>
-        <p:spPr>
-          <a:xfrm>
-            <a:off x="10469880" y="3429000"/>
-            <a:ext cx="822960" cy="384048"/>
-          </a:xfrm>
-          <a:prstGeom prst="roundRect">
-            <a:avLst/>
-          </a:prstGeom>
-          <a:solidFill>
-            <a:srgbClr val="FFFFFF"/>
-          </a:solidFill>
-          <a:ln w="12700">
-            <a:solidFill>
-              <a:srgbClr val="D5E0EA"/>
-            </a:solidFill>
-          </a:ln>
-        </p:spPr>
-        <p:style>
-          <a:lnRef idx="1">
-            <a:schemeClr val="accent1"/>
-          </a:lnRef>
-          <a:fillRef idx="3">
-            <a:schemeClr val="accent1"/>
-          </a:fillRef>
-          <a:effectRef idx="2">
-            <a:schemeClr val="accent1"/>
-          </a:effectRef>
-          <a:fontRef idx="minor">
-            <a:schemeClr val="lt1"/>
-          </a:fontRef>
-        </p:style>
-        <p:txBody>
-          <a:bodyPr rtlCol="0" anchor="ctr"/>
-          <a:lstStyle/>
-          <a:p>
-            <a:pPr algn="ctr"/>
-            <a:r>
-              <a:rPr sz="999" b="1">
-                <a:solidFill>
-                  <a:srgbClr val="C24343"/>
-                </a:solidFill>
-                <a:latin typeface="Arial"/>
-              </a:rPr>
-              <a:t>×</a:t>
-            </a:r>
-          </a:p>
-        </p:txBody>
-      </p:sp>
-      <p:sp>
-        <p:nvSpPr>
-          <p:cNvPr id="53" name="Rounded Rectangle 52"/>
-          <p:cNvSpPr/>
-          <p:nvPr/>
-        </p:nvSpPr>
-        <p:spPr>
-          <a:xfrm>
-            <a:off x="4800600" y="3886200"/>
-            <a:ext cx="1645920" cy="384048"/>
-          </a:xfrm>
-          <a:prstGeom prst="roundRect">
-            <a:avLst/>
-          </a:prstGeom>
-          <a:solidFill>
-            <a:srgbClr val="FFFFFF"/>
-          </a:solidFill>
-          <a:ln w="12700">
-            <a:solidFill>
-              <a:srgbClr val="D5E0EA"/>
-            </a:solidFill>
-          </a:ln>
-        </p:spPr>
-        <p:style>
-          <a:lnRef idx="1">
-            <a:schemeClr val="accent1"/>
-          </a:lnRef>
-          <a:fillRef idx="3">
-            <a:schemeClr val="accent1"/>
-          </a:fillRef>
-          <a:effectRef idx="2">
-            <a:schemeClr val="accent1"/>
-          </a:effectRef>
-          <a:fontRef idx="minor">
-            <a:schemeClr val="lt1"/>
-          </a:fontRef>
-        </p:style>
-        <p:txBody>
-          <a:bodyPr rtlCol="0" anchor="ctr"/>
-          <a:lstStyle/>
-          <a:p>
-            <a:pPr algn="ctr"/>
-            <a:r>
-              <a:rPr sz="999" b="1">
-                <a:solidFill>
-                  <a:srgbClr val="272F38"/>
-                </a:solidFill>
-                <a:latin typeface="Arial"/>
-              </a:rPr>
-              <a:t>Industry skill requirements</a:t>
-            </a:r>
-          </a:p>
-        </p:txBody>
-      </p:sp>
-      <p:sp>
-        <p:nvSpPr>
-          <p:cNvPr id="54" name="Rounded Rectangle 53"/>
-          <p:cNvSpPr/>
-          <p:nvPr/>
-        </p:nvSpPr>
-        <p:spPr>
-          <a:xfrm>
-            <a:off x="6537960" y="3886200"/>
-            <a:ext cx="1554480" cy="384048"/>
-          </a:xfrm>
-          <a:prstGeom prst="roundRect">
-            <a:avLst/>
-          </a:prstGeom>
-          <a:solidFill>
-            <a:srgbClr val="FFFFFF"/>
-          </a:solidFill>
-          <a:ln w="12700">
-            <a:solidFill>
-              <a:srgbClr val="D5E0EA"/>
-            </a:solidFill>
-          </a:ln>
-        </p:spPr>
-        <p:style>
-          <a:lnRef idx="1">
-            <a:schemeClr val="accent1"/>
-          </a:lnRef>
-          <a:fillRef idx="3">
-            <a:schemeClr val="accent1"/>
-          </a:fillRef>
-          <a:effectRef idx="2">
-            <a:schemeClr val="accent1"/>
-          </a:effectRef>
-          <a:fontRef idx="minor">
-            <a:schemeClr val="lt1"/>
-          </a:fontRef>
-        </p:style>
-        <p:txBody>
-          <a:bodyPr rtlCol="0" anchor="ctr"/>
-          <a:lstStyle/>
-          <a:p>
-            <a:pPr algn="ctr"/>
-            <a:r>
-              <a:rPr sz="999" b="1">
-                <a:solidFill>
-                  <a:srgbClr val="43945C"/>
-                </a:solidFill>
-                <a:latin typeface="Arial"/>
-              </a:rPr>
-              <a:t>✓</a:t>
-            </a:r>
-          </a:p>
-        </p:txBody>
-      </p:sp>
-      <p:sp>
-        <p:nvSpPr>
-          <p:cNvPr id="55" name="Rounded Rectangle 54"/>
-          <p:cNvSpPr/>
-          <p:nvPr/>
-        </p:nvSpPr>
-        <p:spPr>
-          <a:xfrm>
-            <a:off x="8183879" y="3886200"/>
-            <a:ext cx="1051560" cy="384048"/>
-          </a:xfrm>
-          <a:prstGeom prst="roundRect">
-            <a:avLst/>
-          </a:prstGeom>
-          <a:solidFill>
-            <a:srgbClr val="FFFFFF"/>
-          </a:solidFill>
-          <a:ln w="12700">
-            <a:solidFill>
-              <a:srgbClr val="D5E0EA"/>
-            </a:solidFill>
-          </a:ln>
-        </p:spPr>
-        <p:style>
-          <a:lnRef idx="1">
-            <a:schemeClr val="accent1"/>
-          </a:lnRef>
-          <a:fillRef idx="3">
-            <a:schemeClr val="accent1"/>
-          </a:fillRef>
-          <a:effectRef idx="2">
-            <a:schemeClr val="accent1"/>
-          </a:effectRef>
-          <a:fontRef idx="minor">
-            <a:schemeClr val="lt1"/>
-          </a:fontRef>
-        </p:style>
-        <p:txBody>
-          <a:bodyPr rtlCol="0" anchor="ctr"/>
-          <a:lstStyle/>
-          <a:p>
-            <a:pPr algn="ctr"/>
-            <a:r>
-              <a:rPr sz="999" b="1">
-                <a:solidFill>
-                  <a:srgbClr val="C24343"/>
-                </a:solidFill>
-                <a:latin typeface="Arial"/>
-              </a:rPr>
-              <a:t>×</a:t>
-            </a:r>
-          </a:p>
-        </p:txBody>
-      </p:sp>
-      <p:sp>
-        <p:nvSpPr>
-          <p:cNvPr id="56" name="Rounded Rectangle 55"/>
-          <p:cNvSpPr/>
-          <p:nvPr/>
-        </p:nvSpPr>
-        <p:spPr>
-          <a:xfrm>
-            <a:off x="9326880" y="3886200"/>
-            <a:ext cx="1051560" cy="384048"/>
-          </a:xfrm>
-          <a:prstGeom prst="roundRect">
-            <a:avLst/>
-          </a:prstGeom>
-          <a:solidFill>
-            <a:srgbClr val="FFFFFF"/>
-          </a:solidFill>
-          <a:ln w="12700">
-            <a:solidFill>
-              <a:srgbClr val="D5E0EA"/>
-            </a:solidFill>
-          </a:ln>
-        </p:spPr>
-        <p:style>
-          <a:lnRef idx="1">
-            <a:schemeClr val="accent1"/>
-          </a:lnRef>
-          <a:fillRef idx="3">
-            <a:schemeClr val="accent1"/>
-          </a:fillRef>
-          <a:effectRef idx="2">
-            <a:schemeClr val="accent1"/>
-          </a:effectRef>
-          <a:fontRef idx="minor">
-            <a:schemeClr val="lt1"/>
-          </a:fontRef>
-        </p:style>
-        <p:txBody>
-          <a:bodyPr rtlCol="0" anchor="ctr"/>
-          <a:lstStyle/>
-          <a:p>
-            <a:pPr algn="ctr"/>
-            <a:r>
-              <a:rPr sz="999" b="1">
-                <a:solidFill>
-                  <a:srgbClr val="C24343"/>
-                </a:solidFill>
-                <a:latin typeface="Arial"/>
-              </a:rPr>
-              <a:t>×</a:t>
-            </a:r>
-          </a:p>
-        </p:txBody>
-      </p:sp>
-      <p:sp>
-        <p:nvSpPr>
-          <p:cNvPr id="57" name="Rounded Rectangle 56"/>
-          <p:cNvSpPr/>
-          <p:nvPr/>
-        </p:nvSpPr>
-        <p:spPr>
-          <a:xfrm>
-            <a:off x="10469880" y="3886200"/>
-            <a:ext cx="822960" cy="384048"/>
-          </a:xfrm>
-          <a:prstGeom prst="roundRect">
-            <a:avLst/>
-          </a:prstGeom>
-          <a:solidFill>
-            <a:srgbClr val="FFFFFF"/>
-          </a:solidFill>
-          <a:ln w="12700">
-            <a:solidFill>
-              <a:srgbClr val="D5E0EA"/>
-            </a:solidFill>
-          </a:ln>
-        </p:spPr>
-        <p:style>
-          <a:lnRef idx="1">
-            <a:schemeClr val="accent1"/>
-          </a:lnRef>
-          <a:fillRef idx="3">
-            <a:schemeClr val="accent1"/>
-          </a:fillRef>
-          <a:effectRef idx="2">
-            <a:schemeClr val="accent1"/>
-          </a:effectRef>
-          <a:fontRef idx="minor">
-            <a:schemeClr val="lt1"/>
-          </a:fontRef>
-        </p:style>
-        <p:txBody>
-          <a:bodyPr rtlCol="0" anchor="ctr"/>
-          <a:lstStyle/>
-          <a:p>
-            <a:pPr algn="ctr"/>
-            <a:r>
-              <a:rPr sz="999" b="1">
-                <a:solidFill>
-                  <a:srgbClr val="43945C"/>
-                </a:solidFill>
-                <a:latin typeface="Arial"/>
-              </a:rPr>
-              <a:t>✓</a:t>
-            </a:r>
-          </a:p>
-        </p:txBody>
-      </p:sp>
-      <p:sp>
-        <p:nvSpPr>
-          <p:cNvPr id="58" name="Rounded Rectangle 57"/>
-          <p:cNvSpPr/>
-          <p:nvPr/>
-        </p:nvSpPr>
-        <p:spPr>
-          <a:xfrm>
-            <a:off x="4800600" y="4343400"/>
-            <a:ext cx="1645920" cy="384048"/>
-          </a:xfrm>
-          <a:prstGeom prst="roundRect">
-            <a:avLst/>
-          </a:prstGeom>
-          <a:solidFill>
-            <a:srgbClr val="FFFFFF"/>
-          </a:solidFill>
-          <a:ln w="12700">
-            <a:solidFill>
-              <a:srgbClr val="D5E0EA"/>
-            </a:solidFill>
-          </a:ln>
-        </p:spPr>
-        <p:style>
-          <a:lnRef idx="1">
-            <a:schemeClr val="accent1"/>
-          </a:lnRef>
-          <a:fillRef idx="3">
-            <a:schemeClr val="accent1"/>
-          </a:fillRef>
-          <a:effectRef idx="2">
-            <a:schemeClr val="accent1"/>
-          </a:effectRef>
-          <a:fontRef idx="minor">
-            <a:schemeClr val="lt1"/>
-          </a:fontRef>
-        </p:style>
-        <p:txBody>
-          <a:bodyPr rtlCol="0" anchor="ctr"/>
-          <a:lstStyle/>
-          <a:p>
-            <a:pPr algn="ctr"/>
-            <a:r>
-              <a:rPr sz="999" b="1">
-                <a:solidFill>
-                  <a:srgbClr val="272F38"/>
-                </a:solidFill>
-                <a:latin typeface="Arial"/>
-              </a:rPr>
-              <a:t>Jobs + internships</a:t>
-            </a:r>
-          </a:p>
-        </p:txBody>
-      </p:sp>
-      <p:sp>
-        <p:nvSpPr>
-          <p:cNvPr id="59" name="Rounded Rectangle 58"/>
-          <p:cNvSpPr/>
-          <p:nvPr/>
-        </p:nvSpPr>
-        <p:spPr>
-          <a:xfrm>
-            <a:off x="6537960" y="4343400"/>
-            <a:ext cx="1554480" cy="384048"/>
-          </a:xfrm>
-          <a:prstGeom prst="roundRect">
-            <a:avLst/>
-          </a:prstGeom>
-          <a:solidFill>
-            <a:srgbClr val="FFFFFF"/>
-          </a:solidFill>
-          <a:ln w="12700">
-            <a:solidFill>
-              <a:srgbClr val="D5E0EA"/>
-            </a:solidFill>
-          </a:ln>
-        </p:spPr>
-        <p:style>
-          <a:lnRef idx="1">
-            <a:schemeClr val="accent1"/>
-          </a:lnRef>
-          <a:fillRef idx="3">
-            <a:schemeClr val="accent1"/>
-          </a:fillRef>
-          <a:effectRef idx="2">
-            <a:schemeClr val="accent1"/>
-          </a:effectRef>
-          <a:fontRef idx="minor">
-            <a:schemeClr val="lt1"/>
-          </a:fontRef>
-        </p:style>
-        <p:txBody>
-          <a:bodyPr rtlCol="0" anchor="ctr"/>
-          <a:lstStyle/>
-          <a:p>
-            <a:pPr algn="ctr"/>
-            <a:r>
-              <a:rPr sz="999" b="1">
-                <a:solidFill>
-                  <a:srgbClr val="43945C"/>
-                </a:solidFill>
-                <a:latin typeface="Arial"/>
-              </a:rPr>
-              <a:t>✓</a:t>
-            </a:r>
-          </a:p>
-        </p:txBody>
-      </p:sp>
-      <p:sp>
-        <p:nvSpPr>
-          <p:cNvPr id="60" name="Rounded Rectangle 59"/>
-          <p:cNvSpPr/>
-          <p:nvPr/>
-        </p:nvSpPr>
-        <p:spPr>
-          <a:xfrm>
-            <a:off x="8183879" y="4343400"/>
-            <a:ext cx="1051560" cy="384048"/>
-          </a:xfrm>
-          <a:prstGeom prst="roundRect">
-            <a:avLst/>
-          </a:prstGeom>
-          <a:solidFill>
-            <a:srgbClr val="FFFFFF"/>
-          </a:solidFill>
-          <a:ln w="12700">
-            <a:solidFill>
-              <a:srgbClr val="D5E0EA"/>
-            </a:solidFill>
-          </a:ln>
-        </p:spPr>
-        <p:style>
-          <a:lnRef idx="1">
-            <a:schemeClr val="accent1"/>
-          </a:lnRef>
-          <a:fillRef idx="3">
-            <a:schemeClr val="accent1"/>
-          </a:fillRef>
-          <a:effectRef idx="2">
-            <a:schemeClr val="accent1"/>
-          </a:effectRef>
-          <a:fontRef idx="minor">
-            <a:schemeClr val="lt1"/>
-          </a:fontRef>
-        </p:style>
-        <p:txBody>
-          <a:bodyPr rtlCol="0" anchor="ctr"/>
-          <a:lstStyle/>
-          <a:p>
-            <a:pPr algn="ctr"/>
-            <a:r>
-              <a:rPr sz="999" b="1">
-                <a:solidFill>
-                  <a:srgbClr val="C24343"/>
-                </a:solidFill>
-                <a:latin typeface="Arial"/>
-              </a:rPr>
-              <a:t>×</a:t>
-            </a:r>
-          </a:p>
-        </p:txBody>
-      </p:sp>
-      <p:sp>
-        <p:nvSpPr>
-          <p:cNvPr id="61" name="Rounded Rectangle 60"/>
-          <p:cNvSpPr/>
-          <p:nvPr/>
-        </p:nvSpPr>
-        <p:spPr>
-          <a:xfrm>
-            <a:off x="9326880" y="4343400"/>
-            <a:ext cx="1051560" cy="384048"/>
-          </a:xfrm>
-          <a:prstGeom prst="roundRect">
-            <a:avLst/>
-          </a:prstGeom>
-          <a:solidFill>
-            <a:srgbClr val="FFFFFF"/>
-          </a:solidFill>
-          <a:ln w="12700">
-            <a:solidFill>
-              <a:srgbClr val="D5E0EA"/>
-            </a:solidFill>
-          </a:ln>
-        </p:spPr>
-        <p:style>
-          <a:lnRef idx="1">
-            <a:schemeClr val="accent1"/>
-          </a:lnRef>
-          <a:fillRef idx="3">
-            <a:schemeClr val="accent1"/>
-          </a:fillRef>
-          <a:effectRef idx="2">
-            <a:schemeClr val="accent1"/>
-          </a:effectRef>
-          <a:fontRef idx="minor">
-            <a:schemeClr val="lt1"/>
-          </a:fontRef>
-        </p:style>
-        <p:txBody>
-          <a:bodyPr rtlCol="0" anchor="ctr"/>
-          <a:lstStyle/>
-          <a:p>
-            <a:pPr algn="ctr"/>
-            <a:r>
-              <a:rPr sz="999" b="1">
-                <a:solidFill>
-                  <a:srgbClr val="C24343"/>
-                </a:solidFill>
-                <a:latin typeface="Arial"/>
-              </a:rPr>
-              <a:t>×</a:t>
-            </a:r>
-          </a:p>
-        </p:txBody>
-      </p:sp>
-      <p:sp>
-        <p:nvSpPr>
-          <p:cNvPr id="62" name="Rounded Rectangle 61"/>
-          <p:cNvSpPr/>
-          <p:nvPr/>
-        </p:nvSpPr>
-        <p:spPr>
-          <a:xfrm>
-            <a:off x="10469880" y="4343400"/>
-            <a:ext cx="822960" cy="384048"/>
-          </a:xfrm>
-          <a:prstGeom prst="roundRect">
-            <a:avLst/>
-          </a:prstGeom>
-          <a:solidFill>
-            <a:srgbClr val="FFFFFF"/>
-          </a:solidFill>
-          <a:ln w="12700">
-            <a:solidFill>
-              <a:srgbClr val="D5E0EA"/>
-            </a:solidFill>
-          </a:ln>
-        </p:spPr>
-        <p:style>
-          <a:lnRef idx="1">
-            <a:schemeClr val="accent1"/>
-          </a:lnRef>
-          <a:fillRef idx="3">
-            <a:schemeClr val="accent1"/>
-          </a:fillRef>
-          <a:effectRef idx="2">
-            <a:schemeClr val="accent1"/>
-          </a:effectRef>
-          <a:fontRef idx="minor">
-            <a:schemeClr val="lt1"/>
-          </a:fontRef>
-        </p:style>
-        <p:txBody>
-          <a:bodyPr rtlCol="0" anchor="ctr"/>
-          <a:lstStyle/>
-          <a:p>
-            <a:pPr algn="ctr"/>
-            <a:r>
-              <a:rPr sz="999" b="1">
-                <a:solidFill>
-                  <a:srgbClr val="43945C"/>
-                </a:solidFill>
-                <a:latin typeface="Arial"/>
-              </a:rPr>
-              <a:t>✓</a:t>
-            </a:r>
-          </a:p>
-        </p:txBody>
-      </p:sp>
-      <p:sp>
-        <p:nvSpPr>
-          <p:cNvPr id="63" name="Rounded Rectangle 62"/>
-          <p:cNvSpPr/>
-          <p:nvPr/>
-        </p:nvSpPr>
-        <p:spPr>
-          <a:xfrm>
-            <a:off x="4800600" y="4800600"/>
-            <a:ext cx="1645920" cy="384048"/>
-          </a:xfrm>
-          <a:prstGeom prst="roundRect">
-            <a:avLst/>
-          </a:prstGeom>
-          <a:solidFill>
-            <a:srgbClr val="FFFFFF"/>
-          </a:solidFill>
-          <a:ln w="12700">
-            <a:solidFill>
-              <a:srgbClr val="D5E0EA"/>
-            </a:solidFill>
-          </a:ln>
-        </p:spPr>
-        <p:style>
-          <a:lnRef idx="1">
-            <a:schemeClr val="accent1"/>
-          </a:lnRef>
-          <a:fillRef idx="3">
-            <a:schemeClr val="accent1"/>
-          </a:fillRef>
-          <a:effectRef idx="2">
-            <a:schemeClr val="accent1"/>
-          </a:effectRef>
-          <a:fontRef idx="minor">
-            <a:schemeClr val="lt1"/>
-          </a:fontRef>
-        </p:style>
-        <p:txBody>
-          <a:bodyPr rtlCol="0" anchor="ctr"/>
-          <a:lstStyle/>
-          <a:p>
-            <a:pPr algn="ctr"/>
-            <a:r>
-              <a:rPr sz="999" b="1">
-                <a:solidFill>
-                  <a:srgbClr val="272F38"/>
-                </a:solidFill>
-                <a:latin typeface="Arial"/>
-              </a:rPr>
-              <a:t>Mock interview + resume</a:t>
-            </a:r>
-          </a:p>
-        </p:txBody>
-      </p:sp>
-      <p:sp>
-        <p:nvSpPr>
-          <p:cNvPr id="64" name="Rounded Rectangle 63"/>
-          <p:cNvSpPr/>
-          <p:nvPr/>
-        </p:nvSpPr>
-        <p:spPr>
-          <a:xfrm>
-            <a:off x="6537960" y="4800600"/>
-            <a:ext cx="1554480" cy="384048"/>
-          </a:xfrm>
-          <a:prstGeom prst="roundRect">
-            <a:avLst/>
-          </a:prstGeom>
-          <a:solidFill>
-            <a:srgbClr val="FFFFFF"/>
-          </a:solidFill>
-          <a:ln w="12700">
-            <a:solidFill>
-              <a:srgbClr val="D5E0EA"/>
-            </a:solidFill>
-          </a:ln>
-        </p:spPr>
-        <p:style>
-          <a:lnRef idx="1">
-            <a:schemeClr val="accent1"/>
-          </a:lnRef>
-          <a:fillRef idx="3">
-            <a:schemeClr val="accent1"/>
-          </a:fillRef>
-          <a:effectRef idx="2">
-            <a:schemeClr val="accent1"/>
-          </a:effectRef>
-          <a:fontRef idx="minor">
-            <a:schemeClr val="lt1"/>
-          </a:fontRef>
-        </p:style>
-        <p:txBody>
-          <a:bodyPr rtlCol="0" anchor="ctr"/>
-          <a:lstStyle/>
-          <a:p>
-            <a:pPr algn="ctr"/>
-            <a:r>
-              <a:rPr sz="999" b="1">
-                <a:solidFill>
-                  <a:srgbClr val="43945C"/>
-                </a:solidFill>
-                <a:latin typeface="Arial"/>
-              </a:rPr>
-              <a:t>✓</a:t>
-            </a:r>
-          </a:p>
-        </p:txBody>
-      </p:sp>
-      <p:sp>
-        <p:nvSpPr>
-          <p:cNvPr id="65" name="Rounded Rectangle 64"/>
-          <p:cNvSpPr/>
-          <p:nvPr/>
-        </p:nvSpPr>
-        <p:spPr>
-          <a:xfrm>
-            <a:off x="8183879" y="4800600"/>
-            <a:ext cx="1051560" cy="384048"/>
-          </a:xfrm>
-          <a:prstGeom prst="roundRect">
-            <a:avLst/>
-          </a:prstGeom>
-          <a:solidFill>
-            <a:srgbClr val="FFFFFF"/>
-          </a:solidFill>
-          <a:ln w="12700">
-            <a:solidFill>
-              <a:srgbClr val="D5E0EA"/>
-            </a:solidFill>
-          </a:ln>
-        </p:spPr>
-        <p:style>
-          <a:lnRef idx="1">
-            <a:schemeClr val="accent1"/>
-          </a:lnRef>
-          <a:fillRef idx="3">
-            <a:schemeClr val="accent1"/>
-          </a:fillRef>
-          <a:effectRef idx="2">
-            <a:schemeClr val="accent1"/>
-          </a:effectRef>
-          <a:fontRef idx="minor">
-            <a:schemeClr val="lt1"/>
-          </a:fontRef>
-        </p:style>
-        <p:txBody>
-          <a:bodyPr rtlCol="0" anchor="ctr"/>
-          <a:lstStyle/>
-          <a:p>
-            <a:pPr algn="ctr"/>
-            <a:r>
-              <a:rPr sz="999" b="1">
-                <a:solidFill>
-                  <a:srgbClr val="E77E22"/>
-                </a:solidFill>
-                <a:latin typeface="Arial"/>
-              </a:rPr>
-              <a:t>△</a:t>
-            </a:r>
-          </a:p>
-        </p:txBody>
-      </p:sp>
-      <p:sp>
-        <p:nvSpPr>
-          <p:cNvPr id="66" name="Rounded Rectangle 65"/>
-          <p:cNvSpPr/>
-          <p:nvPr/>
-        </p:nvSpPr>
-        <p:spPr>
-          <a:xfrm>
-            <a:off x="9326880" y="4800600"/>
-            <a:ext cx="1051560" cy="384048"/>
-          </a:xfrm>
-          <a:prstGeom prst="roundRect">
-            <a:avLst/>
-          </a:prstGeom>
-          <a:solidFill>
-            <a:srgbClr val="FFFFFF"/>
-          </a:solidFill>
-          <a:ln w="12700">
-            <a:solidFill>
-              <a:srgbClr val="D5E0EA"/>
-            </a:solidFill>
-          </a:ln>
-        </p:spPr>
-        <p:style>
-          <a:lnRef idx="1">
-            <a:schemeClr val="accent1"/>
-          </a:lnRef>
-          <a:fillRef idx="3">
-            <a:schemeClr val="accent1"/>
-          </a:fillRef>
-          <a:effectRef idx="2">
-            <a:schemeClr val="accent1"/>
-          </a:effectRef>
-          <a:fontRef idx="minor">
-            <a:schemeClr val="lt1"/>
-          </a:fontRef>
-        </p:style>
-        <p:txBody>
-          <a:bodyPr rtlCol="0" anchor="ctr"/>
-          <a:lstStyle/>
-          <a:p>
-            <a:pPr algn="ctr"/>
-            <a:r>
-              <a:rPr sz="999" b="1">
-                <a:solidFill>
-                  <a:srgbClr val="C24343"/>
-                </a:solidFill>
-                <a:latin typeface="Arial"/>
-              </a:rPr>
-              <a:t>×</a:t>
-            </a:r>
-          </a:p>
-        </p:txBody>
-      </p:sp>
-      <p:sp>
-        <p:nvSpPr>
-          <p:cNvPr id="67" name="Rounded Rectangle 66"/>
-          <p:cNvSpPr/>
-          <p:nvPr/>
-        </p:nvSpPr>
-        <p:spPr>
-          <a:xfrm>
-            <a:off x="10469880" y="4800600"/>
-            <a:ext cx="822960" cy="384048"/>
-          </a:xfrm>
-          <a:prstGeom prst="roundRect">
-            <a:avLst/>
-          </a:prstGeom>
-          <a:solidFill>
-            <a:srgbClr val="FFFFFF"/>
-          </a:solidFill>
-          <a:ln w="12700">
-            <a:solidFill>
-              <a:srgbClr val="D5E0EA"/>
-            </a:solidFill>
-          </a:ln>
-        </p:spPr>
-        <p:style>
-          <a:lnRef idx="1">
-            <a:schemeClr val="accent1"/>
-          </a:lnRef>
-          <a:fillRef idx="3">
-            <a:schemeClr val="accent1"/>
-          </a:fillRef>
-          <a:effectRef idx="2">
-            <a:schemeClr val="accent1"/>
-          </a:effectRef>
-          <a:fontRef idx="minor">
-            <a:schemeClr val="lt1"/>
-          </a:fontRef>
-        </p:style>
-        <p:txBody>
-          <a:bodyPr rtlCol="0" anchor="ctr"/>
-          <a:lstStyle/>
-          <a:p>
-            <a:pPr algn="ctr"/>
-            <a:r>
-              <a:rPr sz="999" b="1">
-                <a:solidFill>
-                  <a:srgbClr val="E77E22"/>
-                </a:solidFill>
-                <a:latin typeface="Arial"/>
-              </a:rPr>
-              <a:t>△</a:t>
-            </a:r>
-          </a:p>
-        </p:txBody>
-      </p:sp>
-      <p:sp>
-        <p:nvSpPr>
-          <p:cNvPr id="68" name="Rounded Rectangle 67"/>
-          <p:cNvSpPr/>
-          <p:nvPr/>
-        </p:nvSpPr>
-        <p:spPr>
-          <a:xfrm>
-            <a:off x="4800600" y="5257800"/>
-            <a:ext cx="1645920" cy="384048"/>
-          </a:xfrm>
-          <a:prstGeom prst="roundRect">
-            <a:avLst/>
-          </a:prstGeom>
-          <a:solidFill>
-            <a:srgbClr val="FFFFFF"/>
-          </a:solidFill>
-          <a:ln w="12700">
-            <a:solidFill>
-              <a:srgbClr val="D5E0EA"/>
-            </a:solidFill>
-          </a:ln>
-        </p:spPr>
-        <p:style>
-          <a:lnRef idx="1">
-            <a:schemeClr val="accent1"/>
-          </a:lnRef>
-          <a:fillRef idx="3">
-            <a:schemeClr val="accent1"/>
-          </a:fillRef>
-          <a:effectRef idx="2">
-            <a:schemeClr val="accent1"/>
-          </a:effectRef>
-          <a:fontRef idx="minor">
-            <a:schemeClr val="lt1"/>
-          </a:fontRef>
-        </p:style>
-        <p:txBody>
-          <a:bodyPr rtlCol="0" anchor="ctr"/>
-          <a:lstStyle/>
-          <a:p>
-            <a:pPr algn="ctr"/>
-            <a:r>
-              <a:rPr sz="999" b="1">
-                <a:solidFill>
-                  <a:srgbClr val="272F38"/>
-                </a:solidFill>
-                <a:latin typeface="Arial"/>
-              </a:rPr>
-              <a:t>Feedback loop</a:t>
-            </a:r>
-          </a:p>
-        </p:txBody>
-      </p:sp>
-      <p:sp>
-        <p:nvSpPr>
-          <p:cNvPr id="69" name="Rounded Rectangle 68"/>
-          <p:cNvSpPr/>
-          <p:nvPr/>
-        </p:nvSpPr>
-        <p:spPr>
-          <a:xfrm>
-            <a:off x="6537960" y="5257800"/>
-            <a:ext cx="1554480" cy="384048"/>
-          </a:xfrm>
-          <a:prstGeom prst="roundRect">
-            <a:avLst/>
-          </a:prstGeom>
-          <a:solidFill>
-            <a:srgbClr val="FFFFFF"/>
-          </a:solidFill>
-          <a:ln w="12700">
-            <a:solidFill>
-              <a:srgbClr val="D5E0EA"/>
-            </a:solidFill>
-          </a:ln>
-        </p:spPr>
-        <p:style>
-          <a:lnRef idx="1">
-            <a:schemeClr val="accent1"/>
-          </a:lnRef>
-          <a:fillRef idx="3">
-            <a:schemeClr val="accent1"/>
-          </a:fillRef>
-          <a:effectRef idx="2">
-            <a:schemeClr val="accent1"/>
-          </a:effectRef>
-          <a:fontRef idx="minor">
-            <a:schemeClr val="lt1"/>
-          </a:fontRef>
-        </p:style>
-        <p:txBody>
-          <a:bodyPr rtlCol="0" anchor="ctr"/>
-          <a:lstStyle/>
-          <a:p>
-            <a:pPr algn="ctr"/>
-            <a:r>
-              <a:rPr sz="999" b="1">
-                <a:solidFill>
-                  <a:srgbClr val="43945C"/>
-                </a:solidFill>
-                <a:latin typeface="Arial"/>
-              </a:rPr>
-              <a:t>✓</a:t>
-            </a:r>
-          </a:p>
-        </p:txBody>
-      </p:sp>
-      <p:sp>
-        <p:nvSpPr>
-          <p:cNvPr id="70" name="Rounded Rectangle 69"/>
-          <p:cNvSpPr/>
-          <p:nvPr/>
-        </p:nvSpPr>
-        <p:spPr>
-          <a:xfrm>
-            <a:off x="8183879" y="5257800"/>
-            <a:ext cx="1051560" cy="384048"/>
-          </a:xfrm>
-          <a:prstGeom prst="roundRect">
-            <a:avLst/>
-          </a:prstGeom>
-          <a:solidFill>
-            <a:srgbClr val="FFFFFF"/>
-          </a:solidFill>
-          <a:ln w="12700">
-            <a:solidFill>
-              <a:srgbClr val="D5E0EA"/>
-            </a:solidFill>
-          </a:ln>
-        </p:spPr>
-        <p:style>
-          <a:lnRef idx="1">
-            <a:schemeClr val="accent1"/>
-          </a:lnRef>
-          <a:fillRef idx="3">
-            <a:schemeClr val="accent1"/>
-          </a:fillRef>
-          <a:effectRef idx="2">
-            <a:schemeClr val="accent1"/>
-          </a:effectRef>
-          <a:fontRef idx="minor">
-            <a:schemeClr val="lt1"/>
-          </a:fontRef>
-        </p:style>
-        <p:txBody>
-          <a:bodyPr rtlCol="0" anchor="ctr"/>
-          <a:lstStyle/>
-          <a:p>
-            <a:pPr algn="ctr"/>
-            <a:r>
-              <a:rPr sz="999" b="1">
-                <a:solidFill>
-                  <a:srgbClr val="E77E22"/>
-                </a:solidFill>
-                <a:latin typeface="Arial"/>
-              </a:rPr>
-              <a:t>△</a:t>
-            </a:r>
-          </a:p>
-        </p:txBody>
-      </p:sp>
-      <p:sp>
-        <p:nvSpPr>
-          <p:cNvPr id="71" name="Rounded Rectangle 70"/>
-          <p:cNvSpPr/>
-          <p:nvPr/>
-        </p:nvSpPr>
-        <p:spPr>
-          <a:xfrm>
-            <a:off x="9326880" y="5257800"/>
-            <a:ext cx="1051560" cy="384048"/>
-          </a:xfrm>
-          <a:prstGeom prst="roundRect">
-            <a:avLst/>
-          </a:prstGeom>
-          <a:solidFill>
-            <a:srgbClr val="FFFFFF"/>
-          </a:solidFill>
-          <a:ln w="12700">
-            <a:solidFill>
-              <a:srgbClr val="D5E0EA"/>
-            </a:solidFill>
-          </a:ln>
-        </p:spPr>
-        <p:style>
-          <a:lnRef idx="1">
-            <a:schemeClr val="accent1"/>
-          </a:lnRef>
-          <a:fillRef idx="3">
-            <a:schemeClr val="accent1"/>
-          </a:fillRef>
-          <a:effectRef idx="2">
-            <a:schemeClr val="accent1"/>
-          </a:effectRef>
-          <a:fontRef idx="minor">
-            <a:schemeClr val="lt1"/>
-          </a:fontRef>
-        </p:style>
-        <p:txBody>
-          <a:bodyPr rtlCol="0" anchor="ctr"/>
-          <a:lstStyle/>
-          <a:p>
-            <a:pPr algn="ctr"/>
-            <a:r>
-              <a:rPr sz="999" b="1">
-                <a:solidFill>
-                  <a:srgbClr val="43945C"/>
-                </a:solidFill>
-                <a:latin typeface="Arial"/>
-              </a:rPr>
-              <a:t>✓</a:t>
-            </a:r>
-          </a:p>
-        </p:txBody>
-      </p:sp>
-      <p:sp>
-        <p:nvSpPr>
-          <p:cNvPr id="72" name="Rounded Rectangle 71"/>
-          <p:cNvSpPr/>
-          <p:nvPr/>
-        </p:nvSpPr>
-        <p:spPr>
-          <a:xfrm>
-            <a:off x="10469880" y="5257800"/>
-            <a:ext cx="822960" cy="384048"/>
-          </a:xfrm>
-          <a:prstGeom prst="roundRect">
-            <a:avLst/>
-          </a:prstGeom>
-          <a:solidFill>
-            <a:srgbClr val="FFFFFF"/>
-          </a:solidFill>
-          <a:ln w="12700">
-            <a:solidFill>
-              <a:srgbClr val="D5E0EA"/>
-            </a:solidFill>
-          </a:ln>
-        </p:spPr>
-        <p:style>
-          <a:lnRef idx="1">
-            <a:schemeClr val="accent1"/>
-          </a:lnRef>
-          <a:fillRef idx="3">
-            <a:schemeClr val="accent1"/>
-          </a:fillRef>
-          <a:effectRef idx="2">
-            <a:schemeClr val="accent1"/>
-          </a:effectRef>
-          <a:fontRef idx="minor">
-            <a:schemeClr val="lt1"/>
-          </a:fontRef>
-        </p:style>
-        <p:txBody>
-          <a:bodyPr rtlCol="0" anchor="ctr"/>
-          <a:lstStyle/>
-          <a:p>
-            <a:pPr algn="ctr"/>
-            <a:r>
-              <a:rPr sz="999" b="1">
-                <a:solidFill>
-                  <a:srgbClr val="E77E22"/>
-                </a:solidFill>
-                <a:latin typeface="Arial"/>
-              </a:rPr>
-              <a:t>△</a:t>
-            </a:r>
-          </a:p>
-        </p:txBody>
-      </p:sp>
-      <p:sp>
-        <p:nvSpPr>
-          <p:cNvPr id="73" name="TextBox 72"/>
-          <p:cNvSpPr txBox="1"/>
-          <p:nvPr/>
-        </p:nvSpPr>
-        <p:spPr>
-          <a:xfrm>
-            <a:off x="4800600" y="5806440"/>
-            <a:ext cx="6217920" cy="228600"/>
-          </a:xfrm>
-          <a:prstGeom prst="rect">
-            <a:avLst/>
-          </a:prstGeom>
-          <a:noFill/>
-        </p:spPr>
-        <p:txBody>
-          <a:bodyPr wrap="none" anchor="t">
-            <a:spAutoFit/>
-          </a:bodyPr>
-          <a:lstStyle/>
-          <a:p>
-            <a:pPr algn="l"/>
-            <a:r>
-              <a:rPr sz="1080" b="1">
-                <a:solidFill>
-                  <a:srgbClr val="606972"/>
-                </a:solidFill>
-                <a:latin typeface="Arial"/>
-              </a:rPr>
-              <a:t>✓ Core focus   △ Partial / indirect   × Not the primary purpose</a:t>
-            </a:r>
-          </a:p>
-        </p:txBody>
-      </p:sp>
-      <p:sp>
-        <p:nvSpPr>
-          <p:cNvPr id="74" name="TextBox 73"/>
-          <p:cNvSpPr txBox="1"/>
-          <p:nvPr/>
-        </p:nvSpPr>
-        <p:spPr>
-          <a:xfrm>
-            <a:off x="548640" y="5989320"/>
-            <a:ext cx="10789920" cy="228600"/>
-          </a:xfrm>
-          <a:prstGeom prst="rect">
-            <a:avLst/>
-          </a:prstGeom>
-          <a:noFill/>
-        </p:spPr>
-        <p:txBody>
-          <a:bodyPr wrap="none" anchor="t">
-            <a:spAutoFit/>
-          </a:bodyPr>
-          <a:lstStyle/>
-          <a:p>
-            <a:pPr algn="ctr"/>
-            <a:r>
-              <a:rPr sz="1053" b="1">
-                <a:solidFill>
-                  <a:srgbClr val="606972"/>
-                </a:solidFill>
-                <a:latin typeface="Arial"/>
-              </a:rPr>
-              <a:t>Comparison is conceptual and based on the functional scope defined for this proposed platform; it is not a benchmark of named commercial products.</a:t>
-            </a:r>
-          </a:p>
-        </p:txBody>
-      </p:sp>
-    </p:spTree>
-    <p:extLst>
-      <p:ext uri="{BB962C8B-B14F-4D97-AF65-F5344CB8AC3E}">
-        <p14:creationId xmlns:p14="http://schemas.microsoft.com/office/powerpoint/2010/main" val="3916788613"/>
-      </p:ext>
-    </p:extLst>
-  </p:cSld>
-  <p:clrMapOvr>
-    <a:masterClrMapping/>
-  </p:clrMapOvr>
-</p:sld>
-</file>
-
-<file path=ppt/slides/slide7.xml><?xml version="1.0" encoding="utf-8"?>
-<p:sld xmlns:a="http://schemas.openxmlformats.org/drawingml/2006/main" xmlns:p="http://schemas.openxmlformats.org/presentationml/2006/main" xmlns:r="http://schemas.openxmlformats.org/officeDocument/2006/relationships">
-  <p:cSld>
-    <p:spTree>
-      <p:nvGrpSpPr>
-        <p:cNvPr id="1" name=""/>
-        <p:cNvGrpSpPr/>
-        <p:nvPr/>
-      </p:nvGrpSpPr>
-      <p:grpSpPr/>
-      <p:sp>
-        <p:nvSpPr>
-          <p:cNvPr id="6" name="Slide Number Placeholder 5"/>
-          <p:cNvSpPr>
-            <a:spLocks noGrp="1"/>
-          </p:cNvSpPr>
-          <p:nvPr>
-            <p:ph type="sldNum" sz="quarter" idx="12"/>
-          </p:nvPr>
-        </p:nvSpPr>
-        <p:spPr/>
-        <p:txBody>
-          <a:bodyPr/>
-          <a:lstStyle/>
-          <a:p>
-            <a:pPr marL="0" marR="0" lvl="0" indent="0" algn="r" defTabSz="457200" rtl="0" eaLnBrk="1" fontAlgn="base" latinLnBrk="0" hangingPunct="1">
-              <a:lnSpc>
-                <a:spcPct val="100000"/>
-              </a:lnSpc>
-              <a:spcBef>
-                <a:spcPct val="0"/>
-              </a:spcBef>
-              <a:spcAft>
-                <a:spcPct val="0"/>
-              </a:spcAft>
-              <a:buClrTx/>
-              <a:buSzTx/>
-              <a:buFontTx/>
-              <a:buNone/>
-              <a:tabLst/>
-              <a:defRPr/>
-            </a:pPr>
-            <a:fld id="{677C3CE7-23F7-4828-823C-E0205DF2CF97}" type="slidenum">
-              <a:rPr kumimoji="0" lang="en-US" sz="1200" b="1" i="0" u="none" strike="noStrike" kern="1200" cap="none" spc="0" normalizeH="0" baseline="0" noProof="0">
-                <a:ln>
-                  <a:noFill/>
-                </a:ln>
-                <a:solidFill>
-                  <a:prstClr val="white"/>
-                </a:solidFill>
-                <a:effectLst/>
-                <a:uLnTx/>
-                <a:uFillTx/>
-                <a:latin typeface="TradeGothic" pitchFamily="1" charset="0"/>
-                <a:ea typeface="ＭＳ Ｐゴシック" pitchFamily="1" charset="-128"/>
-                <a:cs typeface="+mn-cs"/>
-              </a:rPr>
-              <a:pPr marL="0" marR="0" lvl="0" indent="0" algn="r" defTabSz="457200" rtl="0" eaLnBrk="1" fontAlgn="base" latinLnBrk="0" hangingPunct="1">
-                <a:lnSpc>
-                  <a:spcPct val="100000"/>
-                </a:lnSpc>
-                <a:spcBef>
-                  <a:spcPct val="0"/>
-                </a:spcBef>
-                <a:spcAft>
-                  <a:spcPct val="0"/>
-                </a:spcAft>
-                <a:buClrTx/>
-                <a:buSzTx/>
-                <a:buFontTx/>
-                <a:buNone/>
-                <a:tabLst/>
-                <a:defRPr/>
-              </a:pPr>
-              <a:t>6</a:t>
-            </a:fld>
-            <a:endParaRPr kumimoji="0" lang="en-US" sz="1200" b="1" i="0" u="none" strike="noStrike" kern="1200" cap="none" spc="0" normalizeH="0" baseline="0" noProof="0" dirty="0">
-              <a:ln>
-                <a:noFill/>
-              </a:ln>
-              <a:solidFill>
-                <a:prstClr val="white"/>
-              </a:solidFill>
-              <a:effectLst/>
-              <a:uLnTx/>
-              <a:uFillTx/>
-              <a:latin typeface="TradeGothic" pitchFamily="1" charset="0"/>
-              <a:ea typeface="ＭＳ Ｐゴシック" pitchFamily="1" charset="-128"/>
-              <a:cs typeface="+mn-cs"/>
-            </a:endParaRPr>
-          </a:p>
-        </p:txBody>
-      </p:sp>
-      <p:sp>
-        <p:nvSpPr>
-          <p:cNvPr id="7" name="Footer Placeholder 6"/>
-          <p:cNvSpPr>
-            <a:spLocks noGrp="1"/>
-          </p:cNvSpPr>
-          <p:nvPr>
-            <p:ph type="ftr" sz="quarter" idx="11"/>
-          </p:nvPr>
-        </p:nvSpPr>
-        <p:spPr>
-          <a:xfrm>
-            <a:off x="4648200" y="6356353"/>
-            <a:ext cx="3204000" cy="365125"/>
-          </a:xfrm>
-        </p:spPr>
-        <p:txBody>
-          <a:bodyPr/>
-          <a:lstStyle/>
-          <a:p>
-            <a:pPr marL="0" marR="0" lvl="0" indent="0" algn="ctr" defTabSz="457200" rtl="0" eaLnBrk="1" fontAlgn="auto" latinLnBrk="0" hangingPunct="1">
-              <a:lnSpc>
-                <a:spcPct val="100000"/>
-              </a:lnSpc>
-              <a:spcBef>
-                <a:spcPts val="0"/>
-              </a:spcBef>
-              <a:spcAft>
-                <a:spcPts val="0"/>
-              </a:spcAft>
-              <a:buClrTx/>
-              <a:buSzTx/>
-              <a:buFontTx/>
-              <a:buNone/>
-              <a:tabLst/>
-              <a:defRPr/>
-            </a:pPr>
-            <a:r>
-              <a:rPr kumimoji="0" lang="en-US" sz="1620" b="1" i="0" u="none" strike="noStrike" kern="1200" cap="none" spc="0" normalizeH="0" baseline="0" noProof="0">
-                <a:ln>
-                  <a:noFill/>
-                </a:ln>
-                <a:solidFill>
-                  <a:prstClr val="white"/>
-                </a:solidFill>
-                <a:effectLst/>
-                <a:uLnTx/>
-                <a:uFillTx/>
-                <a:latin typeface="TradeGothic"/>
-                <a:ea typeface="+mn-ea"/>
-                <a:cs typeface="+mn-cs"/>
-              </a:rPr>
-              <a:t>@SIH Idea submission- Template</a:t>
-            </a:r>
-            <a:endParaRPr kumimoji="0" lang="en-US" sz="1200" b="0" i="0" u="none" strike="noStrike" kern="1200" cap="none" spc="0" normalizeH="0" baseline="0" noProof="0" dirty="0">
-              <a:ln>
-                <a:noFill/>
-              </a:ln>
-              <a:solidFill>
-                <a:prstClr val="white"/>
-              </a:solidFill>
-              <a:effectLst/>
-              <a:uLnTx/>
-              <a:uFillTx/>
-              <a:latin typeface="TradeGothic"/>
-              <a:ea typeface="+mn-ea"/>
-              <a:cs typeface="+mn-cs"/>
-            </a:endParaRPr>
-          </a:p>
-        </p:txBody>
-      </p:sp>
-      <p:pic>
-        <p:nvPicPr>
-          <p:cNvPr id="12" name="Picture 11"/>
-          <p:cNvPicPr>
-            <a:picLocks noChangeAspect="1"/>
-          </p:cNvPicPr>
-          <p:nvPr/>
-        </p:nvPicPr>
-        <p:blipFill>
-          <a:blip r:embed="rId3">
-            <a:extLst>
-              <a:ext uri="{28A0092B-C50C-407E-A947-70E740481C1C}">
-                <a14:useLocalDpi xmlns:a14="http://schemas.microsoft.com/office/drawing/2010/main" val="0"/>
-              </a:ext>
-            </a:extLst>
-          </a:blip>
-          <a:stretch>
-            <a:fillRect/>
-          </a:stretch>
-        </p:blipFill>
-        <p:spPr>
-          <a:xfrm>
-            <a:off x="9780086" y="1500"/>
-            <a:ext cx="2249850" cy="1062337"/>
-          </a:xfrm>
-          <a:prstGeom prst="rect">
-            <a:avLst/>
-          </a:prstGeom>
-        </p:spPr>
-      </p:pic>
-      <p:sp>
-        <p:nvSpPr>
-          <p:cNvPr id="15" name="Oval 14"/>
-          <p:cNvSpPr/>
-          <p:nvPr/>
-        </p:nvSpPr>
-        <p:spPr>
-          <a:xfrm>
-            <a:off x="594360" y="1417320"/>
-            <a:ext cx="320040" cy="320040"/>
-          </a:xfrm>
-          <a:prstGeom prst="ellipse">
-            <a:avLst/>
-          </a:prstGeom>
-          <a:solidFill>
-            <a:srgbClr val="2365A9"/>
-          </a:solidFill>
-          <a:ln>
-            <a:solidFill>
-              <a:srgbClr val="2365A9"/>
-            </a:solidFill>
-          </a:ln>
-        </p:spPr>
-        <p:style>
-          <a:lnRef idx="1">
-            <a:schemeClr val="accent1"/>
-          </a:lnRef>
-          <a:fillRef idx="3">
-            <a:schemeClr val="accent1"/>
-          </a:fillRef>
-          <a:effectRef idx="2">
-            <a:schemeClr val="accent1"/>
-          </a:effectRef>
-          <a:fontRef idx="minor">
-            <a:schemeClr val="lt1"/>
-          </a:fontRef>
-        </p:style>
-        <p:txBody>
-          <a:bodyPr rtlCol="0" anchor="ctr"/>
-          <a:lstStyle/>
-          <a:p>
-            <a:pPr algn="ctr"/>
-            <a:r>
-              <a:rPr sz="945" b="1">
-                <a:solidFill>
-                  <a:srgbClr val="FFFFFF"/>
-                </a:solidFill>
-                <a:latin typeface="Arial"/>
-              </a:rPr>
-              <a:t>01</a:t>
-            </a:r>
-          </a:p>
-        </p:txBody>
-      </p:sp>
-      <p:sp>
-        <p:nvSpPr>
-          <p:cNvPr id="18" name="Oval 17"/>
-          <p:cNvSpPr/>
-          <p:nvPr/>
-        </p:nvSpPr>
-        <p:spPr>
-          <a:xfrm>
-            <a:off x="594360" y="2258568"/>
-            <a:ext cx="320040" cy="320040"/>
-          </a:xfrm>
-          <a:prstGeom prst="ellipse">
-            <a:avLst/>
-          </a:prstGeom>
-          <a:solidFill>
-            <a:srgbClr val="2365A9"/>
-          </a:solidFill>
-          <a:ln>
-            <a:solidFill>
-              <a:srgbClr val="2365A9"/>
-            </a:solidFill>
-          </a:ln>
-        </p:spPr>
-        <p:style>
-          <a:lnRef idx="1">
-            <a:schemeClr val="accent1"/>
-          </a:lnRef>
-          <a:fillRef idx="3">
-            <a:schemeClr val="accent1"/>
-          </a:fillRef>
-          <a:effectRef idx="2">
-            <a:schemeClr val="accent1"/>
-          </a:effectRef>
-          <a:fontRef idx="minor">
-            <a:schemeClr val="lt1"/>
-          </a:fontRef>
-        </p:style>
-        <p:txBody>
-          <a:bodyPr rtlCol="0" anchor="ctr"/>
-          <a:lstStyle/>
-          <a:p>
-            <a:pPr algn="ctr"/>
-            <a:r>
-              <a:rPr sz="945" b="1">
-                <a:solidFill>
-                  <a:srgbClr val="FFFFFF"/>
-                </a:solidFill>
-                <a:latin typeface="Arial"/>
-              </a:rPr>
-              <a:t>02</a:t>
-            </a:r>
-          </a:p>
-        </p:txBody>
-      </p:sp>
-      <p:sp>
-        <p:nvSpPr>
-          <p:cNvPr id="21" name="Oval 20"/>
-          <p:cNvSpPr/>
-          <p:nvPr/>
-        </p:nvSpPr>
-        <p:spPr>
-          <a:xfrm>
-            <a:off x="594360" y="3099816"/>
-            <a:ext cx="320040" cy="320040"/>
-          </a:xfrm>
-          <a:prstGeom prst="ellipse">
-            <a:avLst/>
-          </a:prstGeom>
-          <a:solidFill>
-            <a:srgbClr val="2365A9"/>
-          </a:solidFill>
-          <a:ln>
-            <a:solidFill>
-              <a:srgbClr val="2365A9"/>
-            </a:solidFill>
-          </a:ln>
-        </p:spPr>
-        <p:style>
-          <a:lnRef idx="1">
-            <a:schemeClr val="accent1"/>
-          </a:lnRef>
-          <a:fillRef idx="3">
-            <a:schemeClr val="accent1"/>
-          </a:fillRef>
-          <a:effectRef idx="2">
-            <a:schemeClr val="accent1"/>
-          </a:effectRef>
-          <a:fontRef idx="minor">
-            <a:schemeClr val="lt1"/>
-          </a:fontRef>
-        </p:style>
-        <p:txBody>
-          <a:bodyPr rtlCol="0" anchor="ctr"/>
-          <a:lstStyle/>
-          <a:p>
-            <a:pPr algn="ctr"/>
-            <a:r>
-              <a:rPr sz="945" b="1">
-                <a:solidFill>
-                  <a:srgbClr val="FFFFFF"/>
-                </a:solidFill>
-                <a:latin typeface="Arial"/>
-              </a:rPr>
-              <a:t>03</a:t>
-            </a:r>
-          </a:p>
-        </p:txBody>
-      </p:sp>
-      <p:sp>
-        <p:nvSpPr>
-          <p:cNvPr id="24" name="Oval 23"/>
-          <p:cNvSpPr/>
-          <p:nvPr/>
-        </p:nvSpPr>
-        <p:spPr>
-          <a:xfrm>
-            <a:off x="594360" y="3941064"/>
-            <a:ext cx="320040" cy="320040"/>
-          </a:xfrm>
-          <a:prstGeom prst="ellipse">
-            <a:avLst/>
-          </a:prstGeom>
-          <a:solidFill>
-            <a:srgbClr val="2365A9"/>
-          </a:solidFill>
-          <a:ln>
-            <a:solidFill>
-              <a:srgbClr val="2365A9"/>
-            </a:solidFill>
-          </a:ln>
-        </p:spPr>
-        <p:style>
-          <a:lnRef idx="1">
-            <a:schemeClr val="accent1"/>
-          </a:lnRef>
-          <a:fillRef idx="3">
-            <a:schemeClr val="accent1"/>
-          </a:fillRef>
-          <a:effectRef idx="2">
-            <a:schemeClr val="accent1"/>
-          </a:effectRef>
-          <a:fontRef idx="minor">
-            <a:schemeClr val="lt1"/>
-          </a:fontRef>
-        </p:style>
-        <p:txBody>
-          <a:bodyPr rtlCol="0" anchor="ctr"/>
-          <a:lstStyle/>
-          <a:p>
-            <a:pPr algn="ctr"/>
-            <a:r>
-              <a:rPr sz="945" b="1">
+              <a:rPr sz="700" b="1">
                 <a:solidFill>
                   <a:srgbClr val="FFFFFF"/>
                 </a:solidFill>
@@ -17986,7 +15444,7 @@
           <a:p>
             <a:pPr algn="ctr"/>
             <a:r>
-              <a:rPr sz="2430" b="1">
+              <a:rPr sz="1800" b="1">
                 <a:solidFill>
                   <a:srgbClr val="123456"/>
                 </a:solidFill>
@@ -18021,7 +15479,7 @@
           <a:p>
             <a:pPr algn="ctr"/>
             <a:r>
-              <a:rPr sz="1147" b="1">
+              <a:rPr sz="850" b="1">
                 <a:solidFill>
                   <a:srgbClr val="2365A9"/>
                 </a:solidFill>
@@ -18075,7 +15533,7 @@
           <a:p>
             <a:pPr algn="ctr"/>
             <a:r>
-              <a:rPr sz="958" b="1">
+              <a:rPr sz="710" b="1">
                 <a:solidFill>
                   <a:srgbClr val="FFFFFF"/>
                 </a:solidFill>
@@ -18129,7 +15587,7 @@
           <a:p>
             <a:pPr algn="ctr"/>
             <a:r>
-              <a:rPr sz="958" b="1">
+              <a:rPr sz="710" b="1">
                 <a:solidFill>
                   <a:srgbClr val="FFFFFF"/>
                 </a:solidFill>
@@ -18183,7 +15641,7 @@
           <a:p>
             <a:pPr algn="ctr"/>
             <a:r>
-              <a:rPr sz="958" b="1">
+              <a:rPr sz="710" b="1">
                 <a:solidFill>
                   <a:srgbClr val="FFFFFF"/>
                 </a:solidFill>
@@ -18237,7 +15695,7 @@
           <a:p>
             <a:pPr algn="ctr"/>
             <a:r>
-              <a:rPr sz="958" b="1">
+              <a:rPr sz="710" b="1">
                 <a:solidFill>
                   <a:srgbClr val="FFFFFF"/>
                 </a:solidFill>
@@ -18291,7 +15749,7 @@
           <a:p>
             <a:pPr algn="ctr"/>
             <a:r>
-              <a:rPr sz="958" b="1">
+              <a:rPr sz="710" b="1">
                 <a:solidFill>
                   <a:srgbClr val="FFFFFF"/>
                 </a:solidFill>
@@ -18345,7 +15803,7 @@
           <a:p>
             <a:pPr algn="ctr"/>
             <a:r>
-              <a:rPr sz="958" b="1">
+              <a:rPr sz="710" b="1">
                 <a:solidFill>
                   <a:srgbClr val="FFFFFF"/>
                 </a:solidFill>
@@ -18399,7 +15857,7 @@
           <a:p>
             <a:pPr algn="l"/>
             <a:r>
-              <a:rPr sz="900" b="1">
+              <a:rPr sz="615" b="0">
                 <a:solidFill>
                   <a:srgbClr val="272F38"/>
                 </a:solidFill>
@@ -18453,7 +15911,7 @@
           <a:p>
             <a:pPr algn="ctr"/>
             <a:r>
-              <a:rPr sz="900" b="1">
+              <a:rPr sz="565" b="1">
                 <a:solidFill>
                   <a:srgbClr val="43945C"/>
                 </a:solidFill>
@@ -18507,7 +15965,7 @@
           <a:p>
             <a:pPr algn="ctr"/>
             <a:r>
-              <a:rPr sz="900" b="1">
+              <a:rPr sz="565" b="1">
                 <a:solidFill>
                   <a:srgbClr val="43945C"/>
                 </a:solidFill>
@@ -18561,7 +16019,7 @@
           <a:p>
             <a:pPr algn="ctr"/>
             <a:r>
-              <a:rPr sz="900" b="1">
+              <a:rPr sz="565" b="1">
                 <a:solidFill>
                   <a:srgbClr val="43945C"/>
                 </a:solidFill>
@@ -18615,7 +16073,7 @@
           <a:p>
             <a:pPr algn="ctr"/>
             <a:r>
-              <a:rPr sz="900" b="1">
+              <a:rPr sz="565" b="1">
                 <a:solidFill>
                   <a:srgbClr val="C24343"/>
                 </a:solidFill>
@@ -18669,7 +16127,7 @@
           <a:p>
             <a:pPr algn="ctr"/>
             <a:r>
-              <a:rPr sz="900" b="1">
+              <a:rPr sz="565" b="1">
                 <a:solidFill>
                   <a:srgbClr val="43945C"/>
                 </a:solidFill>
@@ -18723,7 +16181,7 @@
           <a:p>
             <a:pPr algn="l"/>
             <a:r>
-              <a:rPr sz="900" b="1">
+              <a:rPr sz="615" b="0">
                 <a:solidFill>
                   <a:srgbClr val="272F38"/>
                 </a:solidFill>
@@ -18777,7 +16235,7 @@
           <a:p>
             <a:pPr algn="ctr"/>
             <a:r>
-              <a:rPr sz="900" b="1">
+              <a:rPr sz="565" b="1">
                 <a:solidFill>
                   <a:srgbClr val="43945C"/>
                 </a:solidFill>
@@ -18831,7 +16289,7 @@
           <a:p>
             <a:pPr algn="ctr"/>
             <a:r>
-              <a:rPr sz="900" b="1">
+              <a:rPr sz="565" b="1">
                 <a:solidFill>
                   <a:srgbClr val="43945C"/>
                 </a:solidFill>
@@ -18885,7 +16343,7 @@
           <a:p>
             <a:pPr algn="ctr"/>
             <a:r>
-              <a:rPr sz="900" b="1">
+              <a:rPr sz="565" b="1">
                 <a:solidFill>
                   <a:srgbClr val="43945C"/>
                 </a:solidFill>
@@ -18939,7 +16397,7 @@
           <a:p>
             <a:pPr algn="ctr"/>
             <a:r>
-              <a:rPr sz="900" b="1">
+              <a:rPr sz="565" b="1">
                 <a:solidFill>
                   <a:srgbClr val="C24343"/>
                 </a:solidFill>
@@ -18993,7 +16451,7 @@
           <a:p>
             <a:pPr algn="ctr"/>
             <a:r>
-              <a:rPr sz="900" b="1">
+              <a:rPr sz="565" b="1">
                 <a:solidFill>
                   <a:srgbClr val="C24343"/>
                 </a:solidFill>
@@ -19047,7 +16505,7 @@
           <a:p>
             <a:pPr algn="l"/>
             <a:r>
-              <a:rPr sz="900" b="1">
+              <a:rPr sz="615" b="0">
                 <a:solidFill>
                   <a:srgbClr val="272F38"/>
                 </a:solidFill>
@@ -19101,7 +16559,7 @@
           <a:p>
             <a:pPr algn="ctr"/>
             <a:r>
-              <a:rPr sz="900" b="1">
+              <a:rPr sz="565" b="1">
                 <a:solidFill>
                   <a:srgbClr val="43945C"/>
                 </a:solidFill>
@@ -19155,7 +16613,7 @@
           <a:p>
             <a:pPr algn="ctr"/>
             <a:r>
-              <a:rPr sz="900" b="1">
+              <a:rPr sz="565" b="1">
                 <a:solidFill>
                   <a:srgbClr val="43945C"/>
                 </a:solidFill>
@@ -19209,7 +16667,7 @@
           <a:p>
             <a:pPr algn="ctr"/>
             <a:r>
-              <a:rPr sz="900" b="1">
+              <a:rPr sz="565" b="1">
                 <a:solidFill>
                   <a:srgbClr val="43945C"/>
                 </a:solidFill>
@@ -19263,7 +16721,7 @@
           <a:p>
             <a:pPr algn="ctr"/>
             <a:r>
-              <a:rPr sz="900" b="1">
+              <a:rPr sz="565" b="1">
                 <a:solidFill>
                   <a:srgbClr val="43945C"/>
                 </a:solidFill>
@@ -19317,7 +16775,7 @@
           <a:p>
             <a:pPr algn="ctr"/>
             <a:r>
-              <a:rPr sz="900" b="1">
+              <a:rPr sz="565" b="1">
                 <a:solidFill>
                   <a:srgbClr val="C24343"/>
                 </a:solidFill>
@@ -19371,7 +16829,7 @@
           <a:p>
             <a:pPr algn="l"/>
             <a:r>
-              <a:rPr sz="900" b="1">
+              <a:rPr sz="615" b="0">
                 <a:solidFill>
                   <a:srgbClr val="272F38"/>
                 </a:solidFill>
@@ -19425,7 +16883,7 @@
           <a:p>
             <a:pPr algn="ctr"/>
             <a:r>
-              <a:rPr sz="900" b="1">
+              <a:rPr sz="565" b="1">
                 <a:solidFill>
                   <a:srgbClr val="43945C"/>
                 </a:solidFill>
@@ -19479,7 +16937,7 @@
           <a:p>
             <a:pPr algn="ctr"/>
             <a:r>
-              <a:rPr sz="900" b="1">
+              <a:rPr sz="565" b="1">
                 <a:solidFill>
                   <a:srgbClr val="43945C"/>
                 </a:solidFill>
@@ -19533,7 +16991,7 @@
           <a:p>
             <a:pPr algn="ctr"/>
             <a:r>
-              <a:rPr sz="900" b="1">
+              <a:rPr sz="565" b="1">
                 <a:solidFill>
                   <a:srgbClr val="43945C"/>
                 </a:solidFill>
@@ -19587,7 +17045,7 @@
           <a:p>
             <a:pPr algn="ctr"/>
             <a:r>
-              <a:rPr sz="900" b="1">
+              <a:rPr sz="565" b="1">
                 <a:solidFill>
                   <a:srgbClr val="43945C"/>
                 </a:solidFill>
@@ -19641,7 +17099,7 @@
           <a:p>
             <a:pPr algn="ctr"/>
             <a:r>
-              <a:rPr sz="900" b="1">
+              <a:rPr sz="565" b="1">
                 <a:solidFill>
                   <a:srgbClr val="43945C"/>
                 </a:solidFill>
@@ -19695,7 +17153,7 @@
           <a:p>
             <a:pPr algn="l"/>
             <a:r>
-              <a:rPr sz="900" b="1">
+              <a:rPr sz="615" b="0">
                 <a:solidFill>
                   <a:srgbClr val="272F38"/>
                 </a:solidFill>
@@ -19749,7 +17207,7 @@
           <a:p>
             <a:pPr algn="ctr"/>
             <a:r>
-              <a:rPr sz="900" b="1">
+              <a:rPr sz="565" b="1">
                 <a:solidFill>
                   <a:srgbClr val="43945C"/>
                 </a:solidFill>
@@ -19803,7 +17261,7 @@
           <a:p>
             <a:pPr algn="ctr"/>
             <a:r>
-              <a:rPr sz="900" b="1">
+              <a:rPr sz="565" b="1">
                 <a:solidFill>
                   <a:srgbClr val="43945C"/>
                 </a:solidFill>
@@ -19857,7 +17315,7 @@
           <a:p>
             <a:pPr algn="ctr"/>
             <a:r>
-              <a:rPr sz="900" b="1">
+              <a:rPr sz="565" b="1">
                 <a:solidFill>
                   <a:srgbClr val="43945C"/>
                 </a:solidFill>
@@ -19911,7 +17369,7 @@
           <a:p>
             <a:pPr algn="ctr"/>
             <a:r>
-              <a:rPr sz="900" b="1">
+              <a:rPr sz="565" b="1">
                 <a:solidFill>
                   <a:srgbClr val="43945C"/>
                 </a:solidFill>
@@ -19965,7 +17423,7 @@
           <a:p>
             <a:pPr algn="ctr"/>
             <a:r>
-              <a:rPr sz="900" b="1">
+              <a:rPr sz="565" b="1">
                 <a:solidFill>
                   <a:srgbClr val="C24343"/>
                 </a:solidFill>
@@ -20019,7 +17477,7 @@
           <a:p>
             <a:pPr algn="l"/>
             <a:r>
-              <a:rPr sz="900" b="1">
+              <a:rPr sz="615" b="0">
                 <a:solidFill>
                   <a:srgbClr val="272F38"/>
                 </a:solidFill>
@@ -20073,7 +17531,7 @@
           <a:p>
             <a:pPr algn="ctr"/>
             <a:r>
-              <a:rPr sz="900" b="1">
+              <a:rPr sz="565" b="1">
                 <a:solidFill>
                   <a:srgbClr val="43945C"/>
                 </a:solidFill>
@@ -20127,7 +17585,7 @@
           <a:p>
             <a:pPr algn="ctr"/>
             <a:r>
-              <a:rPr sz="900" b="1">
+              <a:rPr sz="565" b="1">
                 <a:solidFill>
                   <a:srgbClr val="EBB82A"/>
                 </a:solidFill>
@@ -20181,7 +17639,7 @@
           <a:p>
             <a:pPr algn="ctr"/>
             <a:r>
-              <a:rPr sz="900" b="1">
+              <a:rPr sz="565" b="1">
                 <a:solidFill>
                   <a:srgbClr val="EBB82A"/>
                 </a:solidFill>
@@ -20235,7 +17693,7 @@
           <a:p>
             <a:pPr algn="ctr"/>
             <a:r>
-              <a:rPr sz="900" b="1">
+              <a:rPr sz="565" b="1">
                 <a:solidFill>
                   <a:srgbClr val="EBB82A"/>
                 </a:solidFill>
@@ -20289,7 +17747,7 @@
           <a:p>
             <a:pPr algn="ctr"/>
             <a:r>
-              <a:rPr sz="900" b="1">
+              <a:rPr sz="565" b="1">
                 <a:solidFill>
                   <a:srgbClr val="EBB82A"/>
                 </a:solidFill>
@@ -20343,7 +17801,7 @@
           <a:p>
             <a:pPr algn="l"/>
             <a:r>
-              <a:rPr sz="900" b="1">
+              <a:rPr sz="615" b="0">
                 <a:solidFill>
                   <a:srgbClr val="272F38"/>
                 </a:solidFill>
@@ -20397,7 +17855,7 @@
           <a:p>
             <a:pPr algn="ctr"/>
             <a:r>
-              <a:rPr sz="900" b="1">
+              <a:rPr sz="565" b="1">
                 <a:solidFill>
                   <a:srgbClr val="43945C"/>
                 </a:solidFill>
@@ -20451,7 +17909,7 @@
           <a:p>
             <a:pPr algn="ctr"/>
             <a:r>
-              <a:rPr sz="900" b="1">
+              <a:rPr sz="565" b="1">
                 <a:solidFill>
                   <a:srgbClr val="43945C"/>
                 </a:solidFill>
@@ -20505,7 +17963,7 @@
           <a:p>
             <a:pPr algn="ctr"/>
             <a:r>
-              <a:rPr sz="900" b="1">
+              <a:rPr sz="565" b="1">
                 <a:solidFill>
                   <a:srgbClr val="EBB82A"/>
                 </a:solidFill>
@@ -20559,7 +18017,7 @@
           <a:p>
             <a:pPr algn="ctr"/>
             <a:r>
-              <a:rPr sz="900" b="1">
+              <a:rPr sz="565" b="1">
                 <a:solidFill>
                   <a:srgbClr val="43945C"/>
                 </a:solidFill>
@@ -20613,7 +18071,7 @@
           <a:p>
             <a:pPr algn="ctr"/>
             <a:r>
-              <a:rPr sz="900" b="1">
+              <a:rPr sz="565" b="1">
                 <a:solidFill>
                   <a:srgbClr val="43945C"/>
                 </a:solidFill>
@@ -20667,7 +18125,7 @@
           <a:p>
             <a:pPr algn="l"/>
             <a:r>
-              <a:rPr sz="900" b="1">
+              <a:rPr sz="615" b="1">
                 <a:solidFill>
                   <a:srgbClr val="272F38"/>
                 </a:solidFill>
@@ -20721,7 +18179,7 @@
           <a:p>
             <a:pPr algn="ctr"/>
             <a:r>
-              <a:rPr sz="900" b="1">
+              <a:rPr sz="565" b="1">
                 <a:solidFill>
                   <a:srgbClr val="43945C"/>
                 </a:solidFill>
@@ -20775,7 +18233,7 @@
           <a:p>
             <a:pPr algn="ctr"/>
             <a:r>
-              <a:rPr sz="900" b="1">
+              <a:rPr sz="565" b="1">
                 <a:solidFill>
                   <a:srgbClr val="EBB82A"/>
                 </a:solidFill>
@@ -20829,7 +18287,7 @@
           <a:p>
             <a:pPr algn="ctr"/>
             <a:r>
-              <a:rPr sz="900" b="1">
+              <a:rPr sz="565" b="1">
                 <a:solidFill>
                   <a:srgbClr val="C24343"/>
                 </a:solidFill>
@@ -20883,7 +18341,7 @@
           <a:p>
             <a:pPr algn="ctr"/>
             <a:r>
-              <a:rPr sz="900" b="1">
+              <a:rPr sz="565" b="1">
                 <a:solidFill>
                   <a:srgbClr val="C24343"/>
                 </a:solidFill>
@@ -20937,7 +18395,7 @@
           <a:p>
             <a:pPr algn="ctr"/>
             <a:r>
-              <a:rPr sz="900" b="1">
+              <a:rPr sz="565" b="1">
                 <a:solidFill>
                   <a:srgbClr val="C24343"/>
                 </a:solidFill>
@@ -20991,7 +18449,7 @@
           <a:p>
             <a:pPr algn="l"/>
             <a:r>
-              <a:rPr sz="900" b="1">
+              <a:rPr sz="615" b="1">
                 <a:solidFill>
                   <a:srgbClr val="272F38"/>
                 </a:solidFill>
@@ -21045,7 +18503,7 @@
           <a:p>
             <a:pPr algn="ctr"/>
             <a:r>
-              <a:rPr sz="900" b="1">
+              <a:rPr sz="565" b="1">
                 <a:solidFill>
                   <a:srgbClr val="43945C"/>
                 </a:solidFill>
@@ -21099,7 +18557,7 @@
           <a:p>
             <a:pPr algn="ctr"/>
             <a:r>
-              <a:rPr sz="900" b="1">
+              <a:rPr sz="565" b="1">
                 <a:solidFill>
                   <a:srgbClr val="EBB82A"/>
                 </a:solidFill>
@@ -21153,7 +18611,7 @@
           <a:p>
             <a:pPr algn="ctr"/>
             <a:r>
-              <a:rPr sz="900" b="1">
+              <a:rPr sz="565" b="1">
                 <a:solidFill>
                   <a:srgbClr val="EBB82A"/>
                 </a:solidFill>
@@ -21207,7 +18665,7 @@
           <a:p>
             <a:pPr algn="ctr"/>
             <a:r>
-              <a:rPr sz="900" b="1">
+              <a:rPr sz="565" b="1">
                 <a:solidFill>
                   <a:srgbClr val="EBB82A"/>
                 </a:solidFill>
@@ -21261,7 +18719,7 @@
           <a:p>
             <a:pPr algn="ctr"/>
             <a:r>
-              <a:rPr sz="900" b="1">
+              <a:rPr sz="565" b="1">
                 <a:solidFill>
                   <a:srgbClr val="C24343"/>
                 </a:solidFill>
@@ -21315,7 +18773,7 @@
           <a:p>
             <a:pPr algn="l"/>
             <a:r>
-              <a:rPr sz="900" b="1">
+              <a:rPr sz="615" b="1">
                 <a:solidFill>
                   <a:srgbClr val="272F38"/>
                 </a:solidFill>
@@ -21369,7 +18827,7 @@
           <a:p>
             <a:pPr algn="ctr"/>
             <a:r>
-              <a:rPr sz="900" b="1">
+              <a:rPr sz="565" b="1">
                 <a:solidFill>
                   <a:srgbClr val="43945C"/>
                 </a:solidFill>
@@ -21423,7 +18881,7 @@
           <a:p>
             <a:pPr algn="ctr"/>
             <a:r>
-              <a:rPr sz="900" b="1">
+              <a:rPr sz="565" b="1">
                 <a:solidFill>
                   <a:srgbClr val="EBB82A"/>
                 </a:solidFill>
@@ -21477,7 +18935,7 @@
           <a:p>
             <a:pPr algn="ctr"/>
             <a:r>
-              <a:rPr sz="900" b="1">
+              <a:rPr sz="565" b="1">
                 <a:solidFill>
                   <a:srgbClr val="C24343"/>
                 </a:solidFill>
@@ -21531,7 +18989,7 @@
           <a:p>
             <a:pPr algn="ctr"/>
             <a:r>
-              <a:rPr sz="900" b="1">
+              <a:rPr sz="565" b="1">
                 <a:solidFill>
                   <a:srgbClr val="EBB82A"/>
                 </a:solidFill>
@@ -21585,7 +19043,7 @@
           <a:p>
             <a:pPr algn="ctr"/>
             <a:r>
-              <a:rPr sz="900" b="1">
+              <a:rPr sz="565" b="1">
                 <a:solidFill>
                   <a:srgbClr val="C24343"/>
                 </a:solidFill>
@@ -21639,7 +19097,7 @@
           <a:p>
             <a:pPr algn="l"/>
             <a:r>
-              <a:rPr sz="900" b="1">
+              <a:rPr sz="615" b="1">
                 <a:solidFill>
                   <a:srgbClr val="272F38"/>
                 </a:solidFill>
@@ -21693,7 +19151,7 @@
           <a:p>
             <a:pPr algn="ctr"/>
             <a:r>
-              <a:rPr sz="900" b="1">
+              <a:rPr sz="565" b="1">
                 <a:solidFill>
                   <a:srgbClr val="43945C"/>
                 </a:solidFill>
@@ -21747,7 +19205,7 @@
           <a:p>
             <a:pPr algn="ctr"/>
             <a:r>
-              <a:rPr sz="900" b="1">
+              <a:rPr sz="565" b="1">
                 <a:solidFill>
                   <a:srgbClr val="C24343"/>
                 </a:solidFill>
@@ -21801,7 +19259,7 @@
           <a:p>
             <a:pPr algn="ctr"/>
             <a:r>
-              <a:rPr sz="900" b="1">
+              <a:rPr sz="565" b="1">
                 <a:solidFill>
                   <a:srgbClr val="C24343"/>
                 </a:solidFill>
@@ -21855,7 +19313,7 @@
           <a:p>
             <a:pPr algn="ctr"/>
             <a:r>
-              <a:rPr sz="900" b="1">
+              <a:rPr sz="565" b="1">
                 <a:solidFill>
                   <a:srgbClr val="C24343"/>
                 </a:solidFill>
@@ -21909,7 +19367,7 @@
           <a:p>
             <a:pPr algn="ctr"/>
             <a:r>
-              <a:rPr sz="900" b="1">
+              <a:rPr sz="565" b="1">
                 <a:solidFill>
                   <a:srgbClr val="C24343"/>
                 </a:solidFill>
@@ -21963,7 +19421,7 @@
           <a:p>
             <a:pPr algn="l"/>
             <a:r>
-              <a:rPr sz="900" b="1">
+              <a:rPr sz="615" b="0">
                 <a:solidFill>
                   <a:srgbClr val="272F38"/>
                 </a:solidFill>
@@ -22017,7 +19475,7 @@
           <a:p>
             <a:pPr algn="ctr"/>
             <a:r>
-              <a:rPr sz="900" b="1">
+              <a:rPr sz="565" b="1">
                 <a:solidFill>
                   <a:srgbClr val="43945C"/>
                 </a:solidFill>
@@ -22071,7 +19529,7 @@
           <a:p>
             <a:pPr algn="ctr"/>
             <a:r>
-              <a:rPr sz="900" b="1">
+              <a:rPr sz="565" b="1">
                 <a:solidFill>
                   <a:srgbClr val="EBB82A"/>
                 </a:solidFill>
@@ -22125,7 +19583,7 @@
           <a:p>
             <a:pPr algn="ctr"/>
             <a:r>
-              <a:rPr sz="900" b="1">
+              <a:rPr sz="565" b="1">
                 <a:solidFill>
                   <a:srgbClr val="EBB82A"/>
                 </a:solidFill>
@@ -22179,7 +19637,7 @@
           <a:p>
             <a:pPr algn="ctr"/>
             <a:r>
-              <a:rPr sz="900" b="1">
+              <a:rPr sz="565" b="1">
                 <a:solidFill>
                   <a:srgbClr val="43945C"/>
                 </a:solidFill>
@@ -22233,7 +19691,7 @@
           <a:p>
             <a:pPr algn="ctr"/>
             <a:r>
-              <a:rPr sz="900" b="1">
+              <a:rPr sz="565" b="1">
                 <a:solidFill>
                   <a:srgbClr val="C24343"/>
                 </a:solidFill>
@@ -22287,7 +19745,7 @@
           <a:p>
             <a:pPr algn="l"/>
             <a:r>
-              <a:rPr sz="900" b="1">
+              <a:rPr sz="615" b="1">
                 <a:solidFill>
                   <a:srgbClr val="272F38"/>
                 </a:solidFill>
@@ -22341,7 +19799,7 @@
           <a:p>
             <a:pPr algn="ctr"/>
             <a:r>
-              <a:rPr sz="900" b="1">
+              <a:rPr sz="565" b="1">
                 <a:solidFill>
                   <a:srgbClr val="43945C"/>
                 </a:solidFill>
@@ -22395,7 +19853,7 @@
           <a:p>
             <a:pPr algn="ctr"/>
             <a:r>
-              <a:rPr sz="900" b="1">
+              <a:rPr sz="565" b="1">
                 <a:solidFill>
                   <a:srgbClr val="C24343"/>
                 </a:solidFill>
@@ -22449,7 +19907,7 @@
           <a:p>
             <a:pPr algn="ctr"/>
             <a:r>
-              <a:rPr sz="900" b="1">
+              <a:rPr sz="565" b="1">
                 <a:solidFill>
                   <a:srgbClr val="C24343"/>
                 </a:solidFill>
@@ -22503,7 +19961,7 @@
           <a:p>
             <a:pPr algn="ctr"/>
             <a:r>
-              <a:rPr sz="900" b="1">
+              <a:rPr sz="565" b="1">
                 <a:solidFill>
                   <a:srgbClr val="EBB82A"/>
                 </a:solidFill>
@@ -22557,7 +20015,7 @@
           <a:p>
             <a:pPr algn="ctr"/>
             <a:r>
-              <a:rPr sz="900" b="1">
+              <a:rPr sz="565" b="1">
                 <a:solidFill>
                   <a:srgbClr val="C24343"/>
                 </a:solidFill>
@@ -22611,7 +20069,7 @@
           <a:p>
             <a:pPr algn="l"/>
             <a:r>
-              <a:rPr sz="900" b="1">
+              <a:rPr sz="615" b="1">
                 <a:solidFill>
                   <a:srgbClr val="272F38"/>
                 </a:solidFill>
@@ -22665,7 +20123,7 @@
           <a:p>
             <a:pPr algn="ctr"/>
             <a:r>
-              <a:rPr sz="900" b="1">
+              <a:rPr sz="565" b="1">
                 <a:solidFill>
                   <a:srgbClr val="43945C"/>
                 </a:solidFill>
@@ -22719,7 +20177,7 @@
           <a:p>
             <a:pPr algn="ctr"/>
             <a:r>
-              <a:rPr sz="900" b="1">
+              <a:rPr sz="565" b="1">
                 <a:solidFill>
                   <a:srgbClr val="EBB82A"/>
                 </a:solidFill>
@@ -22773,7 +20231,7 @@
           <a:p>
             <a:pPr algn="ctr"/>
             <a:r>
-              <a:rPr sz="900" b="1">
+              <a:rPr sz="565" b="1">
                 <a:solidFill>
                   <a:srgbClr val="C24343"/>
                 </a:solidFill>
@@ -22827,7 +20285,7 @@
           <a:p>
             <a:pPr algn="ctr"/>
             <a:r>
-              <a:rPr sz="900" b="1">
+              <a:rPr sz="565" b="1">
                 <a:solidFill>
                   <a:srgbClr val="EBB82A"/>
                 </a:solidFill>
@@ -22881,7 +20339,7 @@
           <a:p>
             <a:pPr algn="ctr"/>
             <a:r>
-              <a:rPr sz="900" b="1">
+              <a:rPr sz="565" b="1">
                 <a:solidFill>
                   <a:srgbClr val="EBB82A"/>
                 </a:solidFill>
@@ -22935,7 +20393,7 @@
           <a:p>
             <a:pPr algn="l"/>
             <a:r>
-              <a:rPr sz="900" b="1">
+              <a:rPr sz="615" b="1">
                 <a:solidFill>
                   <a:srgbClr val="272F38"/>
                 </a:solidFill>
@@ -22989,7 +20447,7 @@
           <a:p>
             <a:pPr algn="ctr"/>
             <a:r>
-              <a:rPr sz="900" b="1">
+              <a:rPr sz="565" b="1">
                 <a:solidFill>
                   <a:srgbClr val="43945C"/>
                 </a:solidFill>
@@ -23043,7 +20501,7 @@
           <a:p>
             <a:pPr algn="ctr"/>
             <a:r>
-              <a:rPr sz="900" b="1">
+              <a:rPr sz="565" b="1">
                 <a:solidFill>
                   <a:srgbClr val="EBB82A"/>
                 </a:solidFill>
@@ -23097,7 +20555,7 @@
           <a:p>
             <a:pPr algn="ctr"/>
             <a:r>
-              <a:rPr sz="900" b="1">
+              <a:rPr sz="565" b="1">
                 <a:solidFill>
                   <a:srgbClr val="C24343"/>
                 </a:solidFill>
@@ -23151,7 +20609,7 @@
           <a:p>
             <a:pPr algn="ctr"/>
             <a:r>
-              <a:rPr sz="900" b="1">
+              <a:rPr sz="565" b="1">
                 <a:solidFill>
                   <a:srgbClr val="43945C"/>
                 </a:solidFill>
@@ -23205,7 +20663,7 @@
           <a:p>
             <a:pPr algn="ctr"/>
             <a:r>
-              <a:rPr sz="900" b="1">
+              <a:rPr sz="565" b="1">
                 <a:solidFill>
                   <a:srgbClr val="EBB82A"/>
                 </a:solidFill>
@@ -23259,7 +20717,7 @@
           <a:p>
             <a:pPr algn="l"/>
             <a:r>
-              <a:rPr sz="900" b="1">
+              <a:rPr sz="615" b="1">
                 <a:solidFill>
                   <a:srgbClr val="272F38"/>
                 </a:solidFill>
@@ -23313,7 +20771,7 @@
           <a:p>
             <a:pPr algn="ctr"/>
             <a:r>
-              <a:rPr sz="900" b="1">
+              <a:rPr sz="565" b="1">
                 <a:solidFill>
                   <a:srgbClr val="43945C"/>
                 </a:solidFill>
@@ -23367,7 +20825,7 @@
           <a:p>
             <a:pPr algn="ctr"/>
             <a:r>
-              <a:rPr sz="900" b="1">
+              <a:rPr sz="565" b="1">
                 <a:solidFill>
                   <a:srgbClr val="43945C"/>
                 </a:solidFill>
@@ -23421,7 +20879,7 @@
           <a:p>
             <a:pPr algn="ctr"/>
             <a:r>
-              <a:rPr sz="900" b="1">
+              <a:rPr sz="565" b="1">
                 <a:solidFill>
                   <a:srgbClr val="EBB82A"/>
                 </a:solidFill>
@@ -23475,7 +20933,7 @@
           <a:p>
             <a:pPr algn="ctr"/>
             <a:r>
-              <a:rPr sz="900" b="1">
+              <a:rPr sz="565" b="1">
                 <a:solidFill>
                   <a:srgbClr val="EBB82A"/>
                 </a:solidFill>
@@ -23529,7 +20987,7 @@
           <a:p>
             <a:pPr algn="ctr"/>
             <a:r>
-              <a:rPr sz="900" b="1">
+              <a:rPr sz="565" b="1">
                 <a:solidFill>
                   <a:srgbClr val="C24343"/>
                 </a:solidFill>
@@ -23583,7 +21041,7 @@
           <a:p>
             <a:pPr algn="l"/>
             <a:r>
-              <a:rPr sz="900" b="1">
+              <a:rPr sz="615" b="1">
                 <a:solidFill>
                   <a:srgbClr val="272F38"/>
                 </a:solidFill>
@@ -23637,7 +21095,7 @@
           <a:p>
             <a:pPr algn="ctr"/>
             <a:r>
-              <a:rPr sz="900" b="1">
+              <a:rPr sz="565" b="1">
                 <a:solidFill>
                   <a:srgbClr val="43945C"/>
                 </a:solidFill>
@@ -23691,7 +21149,7 @@
           <a:p>
             <a:pPr algn="ctr"/>
             <a:r>
-              <a:rPr sz="900" b="1">
+              <a:rPr sz="565" b="1">
                 <a:solidFill>
                   <a:srgbClr val="C24343"/>
                 </a:solidFill>
@@ -23745,7 +21203,7 @@
           <a:p>
             <a:pPr algn="ctr"/>
             <a:r>
-              <a:rPr sz="900" b="1">
+              <a:rPr sz="565" b="1">
                 <a:solidFill>
                   <a:srgbClr val="C24343"/>
                 </a:solidFill>
@@ -23799,7 +21257,7 @@
           <a:p>
             <a:pPr algn="ctr"/>
             <a:r>
-              <a:rPr sz="900" b="1">
+              <a:rPr sz="565" b="1">
                 <a:solidFill>
                   <a:srgbClr val="C24343"/>
                 </a:solidFill>
@@ -23853,7 +21311,7 @@
           <a:p>
             <a:pPr algn="ctr"/>
             <a:r>
-              <a:rPr sz="900" b="1">
+              <a:rPr sz="565" b="1">
                 <a:solidFill>
                   <a:srgbClr val="C24343"/>
                 </a:solidFill>
@@ -23888,7 +21346,7 @@
           <a:p>
             <a:pPr algn="ctr"/>
             <a:r>
-              <a:rPr sz="1282" b="1">
+              <a:rPr sz="950" b="1">
                 <a:solidFill>
                   <a:srgbClr val="123456"/>
                 </a:solidFill>
@@ -23942,7 +21400,7 @@
           <a:p>
             <a:pPr algn="l"/>
             <a:r>
-              <a:rPr sz="900" b="1">
+              <a:rPr sz="610" b="1">
                 <a:solidFill>
                   <a:srgbClr val="272F38"/>
                 </a:solidFill>
@@ -23996,7 +21454,7 @@
           <a:p>
             <a:pPr algn="l"/>
             <a:r>
-              <a:rPr sz="900" b="1">
+              <a:rPr sz="610" b="1">
                 <a:solidFill>
                   <a:srgbClr val="272F38"/>
                 </a:solidFill>
@@ -24050,7 +21508,7 @@
           <a:p>
             <a:pPr algn="l"/>
             <a:r>
-              <a:rPr sz="900" b="1">
+              <a:rPr sz="610" b="1">
                 <a:solidFill>
                   <a:srgbClr val="272F38"/>
                 </a:solidFill>
@@ -24104,7 +21562,7 @@
           <a:p>
             <a:pPr algn="l"/>
             <a:r>
-              <a:rPr sz="900" b="1">
+              <a:rPr sz="610" b="1">
                 <a:solidFill>
                   <a:srgbClr val="272F38"/>
                 </a:solidFill>
@@ -24158,7 +21616,7 @@
           <a:p>
             <a:pPr algn="l"/>
             <a:r>
-              <a:rPr sz="900" b="1">
+              <a:rPr sz="610" b="1">
                 <a:solidFill>
                   <a:srgbClr val="272F38"/>
                 </a:solidFill>
@@ -24193,7 +21651,7 @@
           <a:p>
             <a:pPr algn="ctr"/>
             <a:r>
-              <a:rPr sz="900" b="1">
+              <a:rPr sz="580" b="0">
                 <a:solidFill>
                   <a:srgbClr val="606972"/>
                 </a:solidFill>

--- a/SIH_Final_PPT.pptx
+++ b/SIH_Final_PPT.pptx
@@ -5552,7 +5552,7 @@
             <a:r>
               <a:rPr sz="2400" b="1">
                 <a:solidFill>
-                  <a:srgbClr val="FFFFFF"/>
+                  <a:srgbClr val="000000"/>
                 </a:solidFill>
                 <a:latin typeface="Garamond"/>
               </a:rPr>
@@ -5592,7 +5592,7 @@
             <a:r>
               <a:rPr lang="en-US" sz="4000" b="1" dirty="0">
                 <a:solidFill>
-                  <a:schemeClr val="tx2"/>
+                  <a:srgbClr val="000000"/>
                 </a:solidFill>
                 <a:latin typeface="Garamond" panose="02020404030301010803" pitchFamily="18" charset="0"/>
               </a:rPr>
@@ -5601,7 +5601,7 @@
             <a:r>
               <a:rPr lang="en-US" sz="4000" b="1" dirty="0" smtClean="0">
                 <a:solidFill>
-                  <a:schemeClr val="tx2"/>
+                  <a:srgbClr val="000000"/>
                 </a:solidFill>
                 <a:latin typeface="Garamond" panose="02020404030301010803" pitchFamily="18" charset="0"/>
               </a:rPr>
@@ -5646,7 +5646,7 @@
             <a:r>
               <a:rPr sz="1200" b="1">
                 <a:solidFill>
-                  <a:srgbClr val="FFFFFF"/>
+                  <a:srgbClr val="000000"/>
                 </a:solidFill>
                 <a:latin typeface="Arial"/>
               </a:rPr>
@@ -5655,7 +5655,7 @@
             <a:r>
               <a:rPr sz="1250" b="1">
                 <a:solidFill>
-                  <a:srgbClr val="FFFFFF"/>
+                  <a:srgbClr val="000000"/>
                 </a:solidFill>
                 <a:latin typeface="Arial"/>
               </a:rPr>
@@ -5672,7 +5672,7 @@
             <a:r>
               <a:rPr sz="1200" b="1">
                 <a:solidFill>
-                  <a:srgbClr val="FFFFFF"/>
+                  <a:srgbClr val="000000"/>
                 </a:solidFill>
                 <a:latin typeface="Arial"/>
               </a:rPr>
@@ -5681,7 +5681,7 @@
             <a:r>
               <a:rPr sz="1250" b="1">
                 <a:solidFill>
-                  <a:srgbClr val="FFFFFF"/>
+                  <a:srgbClr val="000000"/>
                 </a:solidFill>
                 <a:latin typeface="Arial"/>
               </a:rPr>
@@ -5697,7 +5697,7 @@
             <a:r>
               <a:rPr sz="1200" b="1">
                 <a:solidFill>
-                  <a:srgbClr val="FFFFFF"/>
+                  <a:srgbClr val="000000"/>
                 </a:solidFill>
                 <a:latin typeface="Arial"/>
               </a:rPr>
@@ -5706,7 +5706,7 @@
             <a:r>
               <a:rPr sz="1250" b="1">
                 <a:solidFill>
-                  <a:srgbClr val="FFFFFF"/>
+                  <a:srgbClr val="000000"/>
                 </a:solidFill>
                 <a:latin typeface="Arial"/>
               </a:rPr>
@@ -5722,7 +5722,7 @@
             <a:r>
               <a:rPr sz="1200" b="1">
                 <a:solidFill>
-                  <a:srgbClr val="FFFFFF"/>
+                  <a:srgbClr val="000000"/>
                 </a:solidFill>
                 <a:latin typeface="Arial"/>
               </a:rPr>
@@ -5731,7 +5731,7 @@
             <a:r>
               <a:rPr sz="1250" b="1">
                 <a:solidFill>
-                  <a:srgbClr val="FFFFFF"/>
+                  <a:srgbClr val="000000"/>
                 </a:solidFill>
                 <a:latin typeface="Arial"/>
               </a:rPr>
@@ -5747,7 +5747,7 @@
             <a:r>
               <a:rPr sz="1200" b="1">
                 <a:solidFill>
-                  <a:srgbClr val="FFFFFF"/>
+                  <a:srgbClr val="000000"/>
                 </a:solidFill>
                 <a:latin typeface="Arial"/>
               </a:rPr>
@@ -5756,7 +5756,7 @@
             <a:r>
               <a:rPr sz="1250" b="1">
                 <a:solidFill>
-                  <a:srgbClr val="FFFFFF"/>
+                  <a:srgbClr val="000000"/>
                 </a:solidFill>
                 <a:latin typeface="Arial"/>
               </a:rPr>
@@ -5772,7 +5772,7 @@
             <a:r>
               <a:rPr sz="1200" b="1">
                 <a:solidFill>
-                  <a:srgbClr val="FFFFFF"/>
+                  <a:srgbClr val="000000"/>
                 </a:solidFill>
                 <a:latin typeface="Arial"/>
               </a:rPr>
@@ -5781,7 +5781,7 @@
             <a:r>
               <a:rPr sz="1250" b="1">
                 <a:solidFill>
-                  <a:srgbClr val="FFFFFF"/>
+                  <a:srgbClr val="000000"/>
                 </a:solidFill>
                 <a:latin typeface="Arial"/>
               </a:rPr>
@@ -5865,7 +5865,7 @@
             <a:r>
               <a:rPr sz="1250" b="1">
                 <a:solidFill>
-                  <a:srgbClr val="FFFFFF"/>
+                  <a:srgbClr val="000000"/>
                 </a:solidFill>
                 <a:latin typeface="Arial"/>
               </a:rPr>
@@ -5919,7 +5919,7 @@
             <a:r>
               <a:rPr sz="1250" b="1">
                 <a:solidFill>
-                  <a:srgbClr val="FFFFFF"/>
+                  <a:srgbClr val="000000"/>
                 </a:solidFill>
                 <a:latin typeface="Arial"/>
               </a:rPr>
@@ -5954,7 +5954,7 @@
             <a:r>
               <a:rPr sz="1150" b="1">
                 <a:solidFill>
-                  <a:srgbClr val="FFFFFF"/>
+                  <a:srgbClr val="000000"/>
                 </a:solidFill>
                 <a:latin typeface="Arial"/>
               </a:rPr>
@@ -6046,7 +6046,7 @@
             <a:r>
               <a:rPr lang="en-US">
                 <a:solidFill>
-                  <a:schemeClr val="bg1"/>
+                  <a:srgbClr val="000000"/>
                 </a:solidFill>
               </a:rPr>
               <a:t>@SIH Idea submission- Template</a:t>
@@ -6115,7 +6115,7 @@
             <a:r>
               <a:rPr sz="2300" b="1">
                 <a:solidFill>
-                  <a:srgbClr val="FFFFFF"/>
+                  <a:srgbClr val="000000"/>
                 </a:solidFill>
                 <a:latin typeface="Arial"/>
               </a:rPr>
@@ -6150,7 +6150,7 @@
             <a:r>
               <a:rPr sz="1500" b="1">
                 <a:solidFill>
-                  <a:srgbClr val="FFFFFF"/>
+                  <a:srgbClr val="000000"/>
                 </a:solidFill>
                 <a:latin typeface="Arial"/>
               </a:rPr>
@@ -6185,7 +6185,7 @@
             <a:r>
               <a:rPr sz="1250" b="1">
                 <a:solidFill>
-                  <a:srgbClr val="FFFFFF"/>
+                  <a:srgbClr val="000000"/>
                 </a:solidFill>
                 <a:latin typeface="Arial"/>
               </a:rPr>
@@ -6239,7 +6239,7 @@
             <a:r>
               <a:rPr sz="1200" b="1">
                 <a:solidFill>
-                  <a:srgbClr val="FFFFFF"/>
+                  <a:srgbClr val="000000"/>
                 </a:solidFill>
                 <a:latin typeface="Arial"/>
               </a:rPr>
@@ -6293,7 +6293,7 @@
             <a:r>
               <a:rPr sz="1169" b="1">
                 <a:solidFill>
-                  <a:srgbClr val="FFFFFF"/>
+                  <a:srgbClr val="000000"/>
                 </a:solidFill>
                 <a:latin typeface="Arial"/>
               </a:rPr>
@@ -6347,7 +6347,7 @@
             <a:r>
               <a:rPr sz="1169" b="1">
                 <a:solidFill>
-                  <a:srgbClr val="FFFFFF"/>
+                  <a:srgbClr val="000000"/>
                 </a:solidFill>
                 <a:latin typeface="Arial"/>
               </a:rPr>
@@ -6401,7 +6401,7 @@
             <a:r>
               <a:rPr sz="1169" b="1">
                 <a:solidFill>
-                  <a:srgbClr val="FFFFFF"/>
+                  <a:srgbClr val="000000"/>
                 </a:solidFill>
                 <a:latin typeface="Arial"/>
               </a:rPr>
@@ -6560,7 +6560,7 @@
             <a:r>
               <a:rPr sz="1150" b="1">
                 <a:solidFill>
-                  <a:srgbClr val="FFFFFF"/>
+                  <a:srgbClr val="000000"/>
                 </a:solidFill>
                 <a:latin typeface="Arial"/>
               </a:rPr>
@@ -6595,7 +6595,7 @@
             <a:r>
               <a:rPr sz="1300" b="1">
                 <a:solidFill>
-                  <a:srgbClr val="FFFFFF"/>
+                  <a:srgbClr val="000000"/>
                 </a:solidFill>
                 <a:latin typeface="Arial"/>
               </a:rPr>
@@ -6630,7 +6630,7 @@
             <a:r>
               <a:rPr sz="950" b="1">
                 <a:solidFill>
-                  <a:srgbClr val="FFFFFF"/>
+                  <a:srgbClr val="000000"/>
                 </a:solidFill>
                 <a:latin typeface="Arial"/>
               </a:rPr>
@@ -6665,7 +6665,7 @@
             <a:r>
               <a:rPr sz="950" b="1">
                 <a:solidFill>
-                  <a:srgbClr val="FFFFFF"/>
+                  <a:srgbClr val="000000"/>
                 </a:solidFill>
                 <a:latin typeface="Arial"/>
               </a:rPr>
@@ -6700,7 +6700,7 @@
             <a:r>
               <a:rPr sz="950" b="1">
                 <a:solidFill>
-                  <a:srgbClr val="FFFFFF"/>
+                  <a:srgbClr val="000000"/>
                 </a:solidFill>
                 <a:latin typeface="Arial"/>
               </a:rPr>
@@ -6735,7 +6735,7 @@
             <a:r>
               <a:rPr sz="950" b="1">
                 <a:solidFill>
-                  <a:srgbClr val="FFFFFF"/>
+                  <a:srgbClr val="000000"/>
                 </a:solidFill>
                 <a:latin typeface="Arial"/>
               </a:rPr>
@@ -6770,7 +6770,7 @@
             <a:r>
               <a:rPr sz="950" b="1">
                 <a:solidFill>
-                  <a:srgbClr val="FFFFFF"/>
+                  <a:srgbClr val="000000"/>
                 </a:solidFill>
                 <a:latin typeface="Arial"/>
               </a:rPr>
@@ -6805,7 +6805,7 @@
             <a:r>
               <a:rPr sz="950" b="1">
                 <a:solidFill>
-                  <a:srgbClr val="FFFFFF"/>
+                  <a:srgbClr val="000000"/>
                 </a:solidFill>
                 <a:latin typeface="Arial"/>
               </a:rPr>
@@ -6859,7 +6859,7 @@
             <a:r>
               <a:rPr sz="950" b="1">
                 <a:solidFill>
-                  <a:srgbClr val="FFFFFF"/>
+                  <a:srgbClr val="000000"/>
                 </a:solidFill>
                 <a:latin typeface="Arial"/>
               </a:rPr>
@@ -6913,7 +6913,7 @@
             <a:r>
               <a:rPr sz="950" b="1">
                 <a:solidFill>
-                  <a:srgbClr val="FFFFFF"/>
+                  <a:srgbClr val="000000"/>
                 </a:solidFill>
                 <a:latin typeface="Arial"/>
               </a:rPr>
@@ -6967,7 +6967,7 @@
             <a:r>
               <a:rPr sz="950" b="1">
                 <a:solidFill>
-                  <a:srgbClr val="FFFFFF"/>
+                  <a:srgbClr val="000000"/>
                 </a:solidFill>
                 <a:latin typeface="Arial"/>
               </a:rPr>
@@ -7107,7 +7107,7 @@
             <a:r>
               <a:rPr sz="1300" b="1">
                 <a:solidFill>
-                  <a:srgbClr val="FFFFFF"/>
+                  <a:srgbClr val="000000"/>
                 </a:solidFill>
                 <a:latin typeface="Arial"/>
               </a:rPr>
@@ -7161,7 +7161,7 @@
             <a:r>
               <a:rPr sz="950" b="1">
                 <a:solidFill>
-                  <a:srgbClr val="FFFFFF"/>
+                  <a:srgbClr val="000000"/>
                 </a:solidFill>
                 <a:latin typeface="Arial"/>
               </a:rPr>
@@ -7196,7 +7196,7 @@
             <a:r>
               <a:rPr sz="950" b="1">
                 <a:solidFill>
-                  <a:srgbClr val="FFFFFF"/>
+                  <a:srgbClr val="000000"/>
                 </a:solidFill>
                 <a:latin typeface="Arial"/>
               </a:rPr>
@@ -7285,7 +7285,7 @@
             <a:r>
               <a:rPr sz="950" b="1">
                 <a:solidFill>
-                  <a:srgbClr val="FFFFFF"/>
+                  <a:srgbClr val="000000"/>
                 </a:solidFill>
                 <a:latin typeface="Arial"/>
               </a:rPr>
@@ -7320,7 +7320,7 @@
             <a:r>
               <a:rPr sz="950" b="1">
                 <a:solidFill>
-                  <a:srgbClr val="FFFFFF"/>
+                  <a:srgbClr val="000000"/>
                 </a:solidFill>
                 <a:latin typeface="Arial"/>
               </a:rPr>
@@ -7409,7 +7409,7 @@
             <a:r>
               <a:rPr sz="950" b="1">
                 <a:solidFill>
-                  <a:srgbClr val="FFFFFF"/>
+                  <a:srgbClr val="000000"/>
                 </a:solidFill>
                 <a:latin typeface="Arial"/>
               </a:rPr>
@@ -7444,7 +7444,7 @@
             <a:r>
               <a:rPr sz="950" b="1">
                 <a:solidFill>
-                  <a:srgbClr val="FFFFFF"/>
+                  <a:srgbClr val="000000"/>
                 </a:solidFill>
                 <a:latin typeface="Arial"/>
               </a:rPr>
@@ -7533,7 +7533,7 @@
             <a:r>
               <a:rPr sz="950" b="1">
                 <a:solidFill>
-                  <a:srgbClr val="FFFFFF"/>
+                  <a:srgbClr val="000000"/>
                 </a:solidFill>
                 <a:latin typeface="Arial"/>
               </a:rPr>
@@ -7568,7 +7568,7 @@
             <a:r>
               <a:rPr sz="950" b="1">
                 <a:solidFill>
-                  <a:srgbClr val="FFFFFF"/>
+                  <a:srgbClr val="000000"/>
                 </a:solidFill>
                 <a:latin typeface="Arial"/>
               </a:rPr>
@@ -7657,7 +7657,7 @@
             <a:r>
               <a:rPr sz="950" b="1">
                 <a:solidFill>
-                  <a:srgbClr val="FFFFFF"/>
+                  <a:srgbClr val="000000"/>
                 </a:solidFill>
                 <a:latin typeface="Arial"/>
               </a:rPr>
@@ -7692,7 +7692,7 @@
             <a:r>
               <a:rPr sz="950" b="1">
                 <a:solidFill>
-                  <a:srgbClr val="FFFFFF"/>
+                  <a:srgbClr val="000000"/>
                 </a:solidFill>
                 <a:latin typeface="Arial"/>
               </a:rPr>
@@ -7746,7 +7746,7 @@
             <a:r>
               <a:rPr sz="950" b="1">
                 <a:solidFill>
-                  <a:srgbClr val="FFFFFF"/>
+                  <a:srgbClr val="000000"/>
                 </a:solidFill>
                 <a:latin typeface="Arial"/>
               </a:rPr>
@@ -7781,7 +7781,7 @@
             <a:r>
               <a:rPr sz="950" b="1">
                 <a:solidFill>
-                  <a:srgbClr val="FFFFFF"/>
+                  <a:srgbClr val="000000"/>
                 </a:solidFill>
                 <a:latin typeface="Arial"/>
               </a:rPr>
@@ -7870,7 +7870,7 @@
             <a:r>
               <a:rPr sz="950" b="1">
                 <a:solidFill>
-                  <a:srgbClr val="FFFFFF"/>
+                  <a:srgbClr val="000000"/>
                 </a:solidFill>
                 <a:latin typeface="Arial"/>
               </a:rPr>
@@ -7905,7 +7905,7 @@
             <a:r>
               <a:rPr sz="950" b="1">
                 <a:solidFill>
-                  <a:srgbClr val="FFFFFF"/>
+                  <a:srgbClr val="000000"/>
                 </a:solidFill>
                 <a:latin typeface="Arial"/>
               </a:rPr>
@@ -7994,7 +7994,7 @@
             <a:r>
               <a:rPr sz="950" b="1">
                 <a:solidFill>
-                  <a:srgbClr val="FFFFFF"/>
+                  <a:srgbClr val="000000"/>
                 </a:solidFill>
                 <a:latin typeface="Arial"/>
               </a:rPr>
@@ -8029,7 +8029,7 @@
             <a:r>
               <a:rPr sz="950" b="1">
                 <a:solidFill>
-                  <a:srgbClr val="FFFFFF"/>
+                  <a:srgbClr val="000000"/>
                 </a:solidFill>
                 <a:latin typeface="Arial"/>
               </a:rPr>
@@ -8118,7 +8118,7 @@
             <a:r>
               <a:rPr sz="950" b="1">
                 <a:solidFill>
-                  <a:srgbClr val="FFFFFF"/>
+                  <a:srgbClr val="000000"/>
                 </a:solidFill>
                 <a:latin typeface="Arial"/>
               </a:rPr>
@@ -8153,7 +8153,7 @@
             <a:r>
               <a:rPr sz="950" b="1">
                 <a:solidFill>
-                  <a:srgbClr val="FFFFFF"/>
+                  <a:srgbClr val="000000"/>
                 </a:solidFill>
                 <a:latin typeface="Arial"/>
               </a:rPr>
@@ -8223,7 +8223,7 @@
             <a:r>
               <a:rPr sz="950" b="1">
                 <a:solidFill>
-                  <a:srgbClr val="FFFFFF"/>
+                  <a:srgbClr val="000000"/>
                 </a:solidFill>
                 <a:latin typeface="Arial"/>
               </a:rPr>
@@ -8312,7 +8312,7 @@
             <a:r>
               <a:rPr sz="950" b="1">
                 <a:solidFill>
-                  <a:srgbClr val="FFFFFF"/>
+                  <a:srgbClr val="000000"/>
                 </a:solidFill>
                 <a:latin typeface="Arial"/>
               </a:rPr>
@@ -8404,7 +8404,7 @@
             <a:r>
               <a:rPr lang="en-US">
                 <a:solidFill>
-                  <a:schemeClr val="bg1"/>
+                  <a:srgbClr val="000000"/>
                 </a:solidFill>
               </a:rPr>
               <a:t>@SIH Idea submission- Template</a:t>
@@ -8473,7 +8473,7 @@
             <a:r>
               <a:rPr sz="2300" b="1">
                 <a:solidFill>
-                  <a:srgbClr val="FFFFFF"/>
+                  <a:srgbClr val="000000"/>
                 </a:solidFill>
                 <a:latin typeface="Arial"/>
               </a:rPr>
@@ -8508,7 +8508,7 @@
             <a:r>
               <a:rPr sz="1400" b="1">
                 <a:solidFill>
-                  <a:srgbClr val="FFFFFF"/>
+                  <a:srgbClr val="000000"/>
                 </a:solidFill>
                 <a:latin typeface="Arial"/>
               </a:rPr>
@@ -8562,7 +8562,7 @@
             <a:r>
               <a:rPr sz="1100" b="1">
                 <a:solidFill>
-                  <a:srgbClr val="FFFFFF"/>
+                  <a:srgbClr val="000000"/>
                 </a:solidFill>
                 <a:latin typeface="Arial"/>
               </a:rPr>
@@ -8616,7 +8616,7 @@
             <a:r>
               <a:rPr sz="950" b="1">
                 <a:solidFill>
-                  <a:srgbClr val="FFFFFF"/>
+                  <a:srgbClr val="000000"/>
                 </a:solidFill>
                 <a:latin typeface="Arial"/>
               </a:rPr>
@@ -8670,7 +8670,7 @@
             <a:r>
               <a:rPr sz="1100" b="1">
                 <a:solidFill>
-                  <a:srgbClr val="FFFFFF"/>
+                  <a:srgbClr val="000000"/>
                 </a:solidFill>
                 <a:latin typeface="Arial"/>
               </a:rPr>
@@ -8724,7 +8724,7 @@
             <a:r>
               <a:rPr sz="950" b="1">
                 <a:solidFill>
-                  <a:srgbClr val="FFFFFF"/>
+                  <a:srgbClr val="000000"/>
                 </a:solidFill>
                 <a:latin typeface="Arial"/>
               </a:rPr>
@@ -8778,7 +8778,7 @@
             <a:r>
               <a:rPr sz="1100" b="1">
                 <a:solidFill>
-                  <a:srgbClr val="FFFFFF"/>
+                  <a:srgbClr val="000000"/>
                 </a:solidFill>
                 <a:latin typeface="Arial"/>
               </a:rPr>
@@ -8832,7 +8832,7 @@
             <a:r>
               <a:rPr sz="950" b="1">
                 <a:solidFill>
-                  <a:srgbClr val="FFFFFF"/>
+                  <a:srgbClr val="000000"/>
                 </a:solidFill>
                 <a:latin typeface="Arial"/>
               </a:rPr>
@@ -8886,7 +8886,7 @@
             <a:r>
               <a:rPr sz="1100" b="1">
                 <a:solidFill>
-                  <a:srgbClr val="FFFFFF"/>
+                  <a:srgbClr val="000000"/>
                 </a:solidFill>
                 <a:latin typeface="Arial"/>
               </a:rPr>
@@ -8940,7 +8940,7 @@
             <a:r>
               <a:rPr sz="950" b="1">
                 <a:solidFill>
-                  <a:srgbClr val="FFFFFF"/>
+                  <a:srgbClr val="000000"/>
                 </a:solidFill>
                 <a:latin typeface="Arial"/>
               </a:rPr>
@@ -8994,7 +8994,7 @@
             <a:r>
               <a:rPr sz="1100" b="1">
                 <a:solidFill>
-                  <a:srgbClr val="FFFFFF"/>
+                  <a:srgbClr val="000000"/>
                 </a:solidFill>
                 <a:latin typeface="Arial"/>
               </a:rPr>
@@ -9048,7 +9048,7 @@
             <a:r>
               <a:rPr sz="950" b="1">
                 <a:solidFill>
-                  <a:srgbClr val="FFFFFF"/>
+                  <a:srgbClr val="000000"/>
                 </a:solidFill>
                 <a:latin typeface="Arial"/>
               </a:rPr>
@@ -9083,7 +9083,7 @@
             <a:r>
               <a:rPr sz="1400" b="1">
                 <a:solidFill>
-                  <a:srgbClr val="FFFFFF"/>
+                  <a:srgbClr val="000000"/>
                 </a:solidFill>
                 <a:latin typeface="Arial"/>
               </a:rPr>
@@ -9137,7 +9137,7 @@
             <a:r>
               <a:rPr sz="1100" b="1">
                 <a:solidFill>
-                  <a:srgbClr val="FFFFFF"/>
+                  <a:srgbClr val="000000"/>
                 </a:solidFill>
                 <a:latin typeface="Arial"/>
               </a:rPr>
@@ -9191,7 +9191,7 @@
             <a:r>
               <a:rPr sz="1100" b="1">
                 <a:solidFill>
-                  <a:srgbClr val="FFFFFF"/>
+                  <a:srgbClr val="000000"/>
                 </a:solidFill>
                 <a:latin typeface="Arial"/>
               </a:rPr>
@@ -9245,7 +9245,7 @@
             <a:r>
               <a:rPr sz="1100" b="1">
                 <a:solidFill>
-                  <a:srgbClr val="FFFFFF"/>
+                  <a:srgbClr val="000000"/>
                 </a:solidFill>
                 <a:latin typeface="Arial"/>
               </a:rPr>
@@ -9369,7 +9369,7 @@
             <a:r>
               <a:rPr sz="1150" b="1">
                 <a:solidFill>
-                  <a:srgbClr val="FFFFFF"/>
+                  <a:srgbClr val="000000"/>
                 </a:solidFill>
                 <a:latin typeface="Arial"/>
               </a:rPr>
@@ -9423,7 +9423,7 @@
             <a:r>
               <a:rPr sz="1150" b="1">
                 <a:solidFill>
-                  <a:srgbClr val="FFFFFF"/>
+                  <a:srgbClr val="000000"/>
                 </a:solidFill>
                 <a:latin typeface="Arial"/>
               </a:rPr>
@@ -9547,7 +9547,7 @@
             <a:r>
               <a:rPr sz="1100" b="1">
                 <a:solidFill>
-                  <a:srgbClr val="FFFFFF"/>
+                  <a:srgbClr val="000000"/>
                 </a:solidFill>
                 <a:latin typeface="Arial"/>
               </a:rPr>
@@ -9601,7 +9601,7 @@
             <a:r>
               <a:rPr sz="1100" b="1">
                 <a:solidFill>
-                  <a:srgbClr val="FFFFFF"/>
+                  <a:srgbClr val="000000"/>
                 </a:solidFill>
                 <a:latin typeface="Arial"/>
               </a:rPr>
@@ -9741,7 +9741,7 @@
             <a:r>
               <a:rPr sz="1300" b="1">
                 <a:solidFill>
-                  <a:srgbClr val="FFFFFF"/>
+                  <a:srgbClr val="000000"/>
                 </a:solidFill>
                 <a:latin typeface="Arial"/>
               </a:rPr>
@@ -9795,7 +9795,7 @@
             <a:r>
               <a:rPr sz="950" b="1">
                 <a:solidFill>
-                  <a:srgbClr val="FFFFFF"/>
+                  <a:srgbClr val="000000"/>
                 </a:solidFill>
                 <a:latin typeface="Arial"/>
               </a:rPr>
@@ -9885,7 +9885,7 @@
             <a:r>
               <a:rPr sz="950" b="1">
                 <a:solidFill>
-                  <a:srgbClr val="FFFFFF"/>
+                  <a:srgbClr val="000000"/>
                 </a:solidFill>
                 <a:latin typeface="Arial"/>
               </a:rPr>
@@ -9975,7 +9975,7 @@
             <a:r>
               <a:rPr sz="950" b="1">
                 <a:solidFill>
-                  <a:srgbClr val="FFFFFF"/>
+                  <a:srgbClr val="000000"/>
                 </a:solidFill>
                 <a:latin typeface="Arial"/>
               </a:rPr>
@@ -10065,7 +10065,7 @@
             <a:r>
               <a:rPr sz="950" b="1">
                 <a:solidFill>
-                  <a:srgbClr val="FFFFFF"/>
+                  <a:srgbClr val="000000"/>
                 </a:solidFill>
                 <a:latin typeface="Arial"/>
               </a:rPr>
@@ -10155,7 +10155,7 @@
             <a:r>
               <a:rPr sz="950" b="1">
                 <a:solidFill>
-                  <a:srgbClr val="FFFFFF"/>
+                  <a:srgbClr val="000000"/>
                 </a:solidFill>
                 <a:latin typeface="Arial"/>
               </a:rPr>
@@ -10245,7 +10245,7 @@
             <a:r>
               <a:rPr sz="950" b="1">
                 <a:solidFill>
-                  <a:srgbClr val="FFFFFF"/>
+                  <a:srgbClr val="000000"/>
                 </a:solidFill>
                 <a:latin typeface="Arial"/>
               </a:rPr>
@@ -10281,7 +10281,7 @@
             <a:r>
               <a:rPr sz="1069" b="1">
                 <a:solidFill>
-                  <a:srgbClr val="FFFFFF"/>
+                  <a:srgbClr val="000000"/>
                 </a:solidFill>
                 <a:latin typeface="Arial"/>
               </a:rPr>
@@ -10441,7 +10441,7 @@
                   <a:noFill/>
                 </a:ln>
                 <a:solidFill>
-                  <a:prstClr val="white"/>
+                  <a:srgbClr val="000000"/>
                 </a:solidFill>
                 <a:effectLst/>
                 <a:uLnTx/>
@@ -10525,7 +10525,7 @@
             <a:r>
               <a:rPr sz="2300" b="1">
                 <a:solidFill>
-                  <a:srgbClr val="FFFFFF"/>
+                  <a:srgbClr val="000000"/>
                 </a:solidFill>
                 <a:latin typeface="Arial"/>
               </a:rPr>
@@ -10560,7 +10560,7 @@
             <a:r>
               <a:rPr sz="1400" b="1">
                 <a:solidFill>
-                  <a:srgbClr val="FFFFFF"/>
+                  <a:srgbClr val="000000"/>
                 </a:solidFill>
                 <a:latin typeface="Arial"/>
               </a:rPr>
@@ -10614,7 +10614,7 @@
             <a:r>
               <a:rPr sz="950" b="1">
                 <a:solidFill>
-                  <a:srgbClr val="FFFFFF"/>
+                  <a:srgbClr val="000000"/>
                 </a:solidFill>
                 <a:latin typeface="Arial"/>
               </a:rPr>
@@ -10649,7 +10649,7 @@
             <a:r>
               <a:rPr sz="1100" b="1">
                 <a:solidFill>
-                  <a:srgbClr val="FFFFFF"/>
+                  <a:srgbClr val="000000"/>
                 </a:solidFill>
                 <a:latin typeface="Arial"/>
               </a:rPr>
@@ -10684,7 +10684,7 @@
             <a:r>
               <a:rPr sz="950" b="1">
                 <a:solidFill>
-                  <a:srgbClr val="FFFFFF"/>
+                  <a:srgbClr val="000000"/>
                 </a:solidFill>
                 <a:latin typeface="Arial"/>
               </a:rPr>
@@ -10738,7 +10738,7 @@
             <a:r>
               <a:rPr sz="950" b="1">
                 <a:solidFill>
-                  <a:srgbClr val="FFFFFF"/>
+                  <a:srgbClr val="000000"/>
                 </a:solidFill>
                 <a:latin typeface="Arial"/>
               </a:rPr>
@@ -10773,7 +10773,7 @@
             <a:r>
               <a:rPr sz="1100" b="1">
                 <a:solidFill>
-                  <a:srgbClr val="FFFFFF"/>
+                  <a:srgbClr val="000000"/>
                 </a:solidFill>
                 <a:latin typeface="Arial"/>
               </a:rPr>
@@ -10808,7 +10808,7 @@
             <a:r>
               <a:rPr sz="950" b="1">
                 <a:solidFill>
-                  <a:srgbClr val="FFFFFF"/>
+                  <a:srgbClr val="000000"/>
                 </a:solidFill>
                 <a:latin typeface="Arial"/>
               </a:rPr>
@@ -10862,7 +10862,7 @@
             <a:r>
               <a:rPr sz="950" b="1">
                 <a:solidFill>
-                  <a:srgbClr val="FFFFFF"/>
+                  <a:srgbClr val="000000"/>
                 </a:solidFill>
                 <a:latin typeface="Arial"/>
               </a:rPr>
@@ -10897,7 +10897,7 @@
             <a:r>
               <a:rPr sz="1100" b="1">
                 <a:solidFill>
-                  <a:srgbClr val="FFFFFF"/>
+                  <a:srgbClr val="000000"/>
                 </a:solidFill>
                 <a:latin typeface="Arial"/>
               </a:rPr>
@@ -10932,7 +10932,7 @@
             <a:r>
               <a:rPr sz="950" b="1">
                 <a:solidFill>
-                  <a:srgbClr val="FFFFFF"/>
+                  <a:srgbClr val="000000"/>
                 </a:solidFill>
                 <a:latin typeface="Arial"/>
               </a:rPr>
@@ -10986,7 +10986,7 @@
             <a:r>
               <a:rPr sz="950" b="1">
                 <a:solidFill>
-                  <a:srgbClr val="FFFFFF"/>
+                  <a:srgbClr val="000000"/>
                 </a:solidFill>
                 <a:latin typeface="Arial"/>
               </a:rPr>
@@ -11021,7 +11021,7 @@
             <a:r>
               <a:rPr sz="1100" b="1">
                 <a:solidFill>
-                  <a:srgbClr val="FFFFFF"/>
+                  <a:srgbClr val="000000"/>
                 </a:solidFill>
                 <a:latin typeface="Arial"/>
               </a:rPr>
@@ -11056,7 +11056,7 @@
             <a:r>
               <a:rPr sz="950" b="1">
                 <a:solidFill>
-                  <a:srgbClr val="FFFFFF"/>
+                  <a:srgbClr val="000000"/>
                 </a:solidFill>
                 <a:latin typeface="Arial"/>
               </a:rPr>
@@ -11091,7 +11091,7 @@
             <a:r>
               <a:rPr sz="1400" b="1">
                 <a:solidFill>
-                  <a:srgbClr val="FFFFFF"/>
+                  <a:srgbClr val="000000"/>
                 </a:solidFill>
                 <a:latin typeface="Arial"/>
               </a:rPr>
@@ -11145,7 +11145,7 @@
             <a:r>
               <a:rPr sz="1050" b="1">
                 <a:solidFill>
-                  <a:srgbClr val="FFFFFF"/>
+                  <a:srgbClr val="000000"/>
                 </a:solidFill>
                 <a:latin typeface="Arial"/>
               </a:rPr>
@@ -11180,7 +11180,7 @@
             <a:r>
               <a:rPr sz="950" b="1">
                 <a:solidFill>
-                  <a:srgbClr val="FFFFFF"/>
+                  <a:srgbClr val="000000"/>
                 </a:solidFill>
                 <a:latin typeface="Arial"/>
               </a:rPr>
@@ -11234,7 +11234,7 @@
             <a:r>
               <a:rPr sz="1050" b="1">
                 <a:solidFill>
-                  <a:srgbClr val="FFFFFF"/>
+                  <a:srgbClr val="000000"/>
                 </a:solidFill>
                 <a:latin typeface="Arial"/>
               </a:rPr>
@@ -11269,7 +11269,7 @@
             <a:r>
               <a:rPr sz="950" b="1">
                 <a:solidFill>
-                  <a:srgbClr val="FFFFFF"/>
+                  <a:srgbClr val="000000"/>
                 </a:solidFill>
                 <a:latin typeface="Arial"/>
               </a:rPr>
@@ -11323,7 +11323,7 @@
             <a:r>
               <a:rPr sz="1050" b="1">
                 <a:solidFill>
-                  <a:srgbClr val="FFFFFF"/>
+                  <a:srgbClr val="000000"/>
                 </a:solidFill>
                 <a:latin typeface="Arial"/>
               </a:rPr>
@@ -11358,7 +11358,7 @@
             <a:r>
               <a:rPr sz="950" b="1">
                 <a:solidFill>
-                  <a:srgbClr val="FFFFFF"/>
+                  <a:srgbClr val="000000"/>
                 </a:solidFill>
                 <a:latin typeface="Arial"/>
               </a:rPr>
@@ -11412,7 +11412,7 @@
             <a:r>
               <a:rPr sz="1050" b="1">
                 <a:solidFill>
-                  <a:srgbClr val="FFFFFF"/>
+                  <a:srgbClr val="000000"/>
                 </a:solidFill>
                 <a:latin typeface="Arial"/>
               </a:rPr>
@@ -11447,7 +11447,7 @@
             <a:r>
               <a:rPr sz="950" b="1">
                 <a:solidFill>
-                  <a:srgbClr val="FFFFFF"/>
+                  <a:srgbClr val="000000"/>
                 </a:solidFill>
                 <a:latin typeface="Arial"/>
               </a:rPr>
@@ -11482,7 +11482,7 @@
             <a:r>
               <a:rPr sz="1400" b="1">
                 <a:solidFill>
-                  <a:srgbClr val="FFFFFF"/>
+                  <a:srgbClr val="000000"/>
                 </a:solidFill>
                 <a:latin typeface="Arial"/>
               </a:rPr>
@@ -11536,7 +11536,7 @@
             <a:r>
               <a:rPr sz="950" b="1">
                 <a:solidFill>
-                  <a:srgbClr val="FFFFFF"/>
+                  <a:srgbClr val="000000"/>
                 </a:solidFill>
                 <a:latin typeface="Arial"/>
               </a:rPr>
@@ -11571,7 +11571,7 @@
             <a:r>
               <a:rPr sz="950" b="1">
                 <a:solidFill>
-                  <a:srgbClr val="FFFFFF"/>
+                  <a:srgbClr val="000000"/>
                 </a:solidFill>
                 <a:latin typeface="Arial"/>
               </a:rPr>
@@ -11625,7 +11625,7 @@
             <a:r>
               <a:rPr sz="950" b="1">
                 <a:solidFill>
-                  <a:srgbClr val="FFFFFF"/>
+                  <a:srgbClr val="000000"/>
                 </a:solidFill>
                 <a:latin typeface="Arial"/>
               </a:rPr>
@@ -11660,7 +11660,7 @@
             <a:r>
               <a:rPr sz="950" b="1">
                 <a:solidFill>
-                  <a:srgbClr val="FFFFFF"/>
+                  <a:srgbClr val="000000"/>
                 </a:solidFill>
                 <a:latin typeface="Arial"/>
               </a:rPr>
@@ -11714,7 +11714,7 @@
             <a:r>
               <a:rPr sz="950" b="1">
                 <a:solidFill>
-                  <a:srgbClr val="FFFFFF"/>
+                  <a:srgbClr val="000000"/>
                 </a:solidFill>
                 <a:latin typeface="Arial"/>
               </a:rPr>
@@ -11749,7 +11749,7 @@
             <a:r>
               <a:rPr sz="950" b="1">
                 <a:solidFill>
-                  <a:srgbClr val="FFFFFF"/>
+                  <a:srgbClr val="000000"/>
                 </a:solidFill>
                 <a:latin typeface="Arial"/>
               </a:rPr>
@@ -11803,7 +11803,7 @@
             <a:r>
               <a:rPr sz="950" b="1">
                 <a:solidFill>
-                  <a:srgbClr val="FFFFFF"/>
+                  <a:srgbClr val="000000"/>
                 </a:solidFill>
                 <a:latin typeface="Arial"/>
               </a:rPr>
@@ -11838,7 +11838,7 @@
             <a:r>
               <a:rPr sz="950" b="1">
                 <a:solidFill>
-                  <a:srgbClr val="FFFFFF"/>
+                  <a:srgbClr val="000000"/>
                 </a:solidFill>
                 <a:latin typeface="Arial"/>
               </a:rPr>
@@ -11873,7 +11873,7 @@
             <a:r>
               <a:rPr sz="1350" b="1">
                 <a:solidFill>
-                  <a:srgbClr val="FFFFFF"/>
+                  <a:srgbClr val="000000"/>
                 </a:solidFill>
                 <a:latin typeface="Arial"/>
               </a:rPr>
@@ -11927,7 +11927,7 @@
             <a:r>
               <a:rPr sz="950" b="1">
                 <a:solidFill>
-                  <a:srgbClr val="FFFFFF"/>
+                  <a:srgbClr val="000000"/>
                 </a:solidFill>
                 <a:latin typeface="Arial"/>
               </a:rPr>
@@ -12016,7 +12016,7 @@
             <a:r>
               <a:rPr sz="950" b="1">
                 <a:solidFill>
-                  <a:srgbClr val="FFFFFF"/>
+                  <a:srgbClr val="000000"/>
                 </a:solidFill>
                 <a:latin typeface="Arial"/>
               </a:rPr>
@@ -12070,7 +12070,7 @@
             <a:r>
               <a:rPr sz="950" b="1">
                 <a:solidFill>
-                  <a:srgbClr val="FFFFFF"/>
+                  <a:srgbClr val="000000"/>
                 </a:solidFill>
                 <a:latin typeface="Arial"/>
               </a:rPr>
@@ -12159,7 +12159,7 @@
             <a:r>
               <a:rPr sz="950" b="1">
                 <a:solidFill>
-                  <a:srgbClr val="FFFFFF"/>
+                  <a:srgbClr val="000000"/>
                 </a:solidFill>
                 <a:latin typeface="Arial"/>
               </a:rPr>
@@ -12213,7 +12213,7 @@
             <a:r>
               <a:rPr sz="950" b="1">
                 <a:solidFill>
-                  <a:srgbClr val="FFFFFF"/>
+                  <a:srgbClr val="000000"/>
                 </a:solidFill>
                 <a:latin typeface="Arial"/>
               </a:rPr>
@@ -12302,7 +12302,7 @@
             <a:r>
               <a:rPr sz="950" b="1">
                 <a:solidFill>
-                  <a:srgbClr val="FFFFFF"/>
+                  <a:srgbClr val="000000"/>
                 </a:solidFill>
                 <a:latin typeface="Arial"/>
               </a:rPr>
@@ -12356,7 +12356,7 @@
             <a:r>
               <a:rPr sz="950" b="1">
                 <a:solidFill>
-                  <a:srgbClr val="FFFFFF"/>
+                  <a:srgbClr val="000000"/>
                 </a:solidFill>
                 <a:latin typeface="Arial"/>
               </a:rPr>
@@ -12445,7 +12445,7 @@
             <a:r>
               <a:rPr sz="950" b="1">
                 <a:solidFill>
-                  <a:srgbClr val="FFFFFF"/>
+                  <a:srgbClr val="000000"/>
                 </a:solidFill>
                 <a:latin typeface="Arial"/>
               </a:rPr>
@@ -12480,7 +12480,7 @@
             <a:r>
               <a:rPr sz="1100" b="1">
                 <a:solidFill>
-                  <a:srgbClr val="FFFFFF"/>
+                  <a:srgbClr val="000000"/>
                 </a:solidFill>
                 <a:latin typeface="Arial"/>
               </a:rPr>
@@ -12645,7 +12645,7 @@
                   <a:noFill/>
                 </a:ln>
                 <a:solidFill>
-                  <a:prstClr val="white"/>
+                  <a:srgbClr val="000000"/>
                 </a:solidFill>
                 <a:effectLst/>
                 <a:uLnTx/>
@@ -12729,7 +12729,7 @@
             <a:r>
               <a:rPr sz="2300" b="1">
                 <a:solidFill>
-                  <a:srgbClr val="FFFFFF"/>
+                  <a:srgbClr val="000000"/>
                 </a:solidFill>
                 <a:latin typeface="Arial"/>
               </a:rPr>
@@ -12764,7 +12764,7 @@
             <a:r>
               <a:rPr sz="1350" b="1">
                 <a:solidFill>
-                  <a:srgbClr val="FFFFFF"/>
+                  <a:srgbClr val="000000"/>
                 </a:solidFill>
                 <a:latin typeface="Arial"/>
               </a:rPr>
@@ -12799,7 +12799,7 @@
             <a:r>
               <a:rPr sz="950" b="1">
                 <a:solidFill>
-                  <a:srgbClr val="FFFFFF"/>
+                  <a:srgbClr val="000000"/>
                 </a:solidFill>
                 <a:latin typeface="Arial"/>
               </a:rPr>
@@ -12920,7 +12920,7 @@
             <a:r>
               <a:rPr sz="950" b="1">
                 <a:solidFill>
-                  <a:srgbClr val="FFFFFF"/>
+                  <a:srgbClr val="000000"/>
                 </a:solidFill>
                 <a:latin typeface="Arial"/>
               </a:rPr>
@@ -13041,7 +13041,7 @@
             <a:r>
               <a:rPr sz="950" b="1">
                 <a:solidFill>
-                  <a:srgbClr val="FFFFFF"/>
+                  <a:srgbClr val="000000"/>
                 </a:solidFill>
                 <a:latin typeface="Arial"/>
               </a:rPr>
@@ -13162,7 +13162,7 @@
             <a:r>
               <a:rPr sz="950" b="1">
                 <a:solidFill>
-                  <a:srgbClr val="FFFFFF"/>
+                  <a:srgbClr val="000000"/>
                 </a:solidFill>
                 <a:latin typeface="Arial"/>
               </a:rPr>
@@ -13283,7 +13283,7 @@
             <a:r>
               <a:rPr sz="1350" b="1">
                 <a:solidFill>
-                  <a:srgbClr val="FFFFFF"/>
+                  <a:srgbClr val="000000"/>
                 </a:solidFill>
                 <a:latin typeface="Arial"/>
               </a:rPr>
@@ -13337,7 +13337,7 @@
             <a:r>
               <a:rPr sz="950" b="1">
                 <a:solidFill>
-                  <a:srgbClr val="FFFFFF"/>
+                  <a:srgbClr val="000000"/>
                 </a:solidFill>
                 <a:latin typeface="Arial"/>
               </a:rPr>
@@ -13391,7 +13391,7 @@
             <a:r>
               <a:rPr sz="950" b="1">
                 <a:solidFill>
-                  <a:srgbClr val="FFFFFF"/>
+                  <a:srgbClr val="000000"/>
                 </a:solidFill>
                 <a:latin typeface="Arial"/>
               </a:rPr>
@@ -13445,7 +13445,7 @@
             <a:r>
               <a:rPr sz="950" b="1">
                 <a:solidFill>
-                  <a:srgbClr val="FFFFFF"/>
+                  <a:srgbClr val="000000"/>
                 </a:solidFill>
                 <a:latin typeface="Arial"/>
               </a:rPr>
@@ -13499,7 +13499,7 @@
             <a:r>
               <a:rPr sz="950" b="1">
                 <a:solidFill>
-                  <a:srgbClr val="FFFFFF"/>
+                  <a:srgbClr val="000000"/>
                 </a:solidFill>
                 <a:latin typeface="Arial"/>
               </a:rPr>
@@ -13553,7 +13553,7 @@
             <a:r>
               <a:rPr sz="950" b="1">
                 <a:solidFill>
-                  <a:srgbClr val="FFFFFF"/>
+                  <a:srgbClr val="000000"/>
                 </a:solidFill>
                 <a:latin typeface="Arial"/>
               </a:rPr>
@@ -13588,7 +13588,7 @@
             <a:r>
               <a:rPr sz="1350" b="1">
                 <a:solidFill>
-                  <a:srgbClr val="FFFFFF"/>
+                  <a:srgbClr val="000000"/>
                 </a:solidFill>
                 <a:latin typeface="Arial"/>
               </a:rPr>
@@ -13642,7 +13642,7 @@
             <a:r>
               <a:rPr sz="950" b="1">
                 <a:solidFill>
-                  <a:srgbClr val="FFFFFF"/>
+                  <a:srgbClr val="000000"/>
                 </a:solidFill>
                 <a:latin typeface="Arial"/>
               </a:rPr>
@@ -13677,7 +13677,7 @@
             <a:r>
               <a:rPr sz="950" b="1">
                 <a:solidFill>
-                  <a:srgbClr val="FFFFFF"/>
+                  <a:srgbClr val="000000"/>
                 </a:solidFill>
                 <a:latin typeface="Arial"/>
               </a:rPr>
@@ -13731,7 +13731,7 @@
             <a:r>
               <a:rPr sz="950" b="1">
                 <a:solidFill>
-                  <a:srgbClr val="FFFFFF"/>
+                  <a:srgbClr val="000000"/>
                 </a:solidFill>
                 <a:latin typeface="Arial"/>
               </a:rPr>
@@ -13766,7 +13766,7 @@
             <a:r>
               <a:rPr sz="950" b="1">
                 <a:solidFill>
-                  <a:srgbClr val="FFFFFF"/>
+                  <a:srgbClr val="000000"/>
                 </a:solidFill>
                 <a:latin typeface="Arial"/>
               </a:rPr>
@@ -13820,7 +13820,7 @@
             <a:r>
               <a:rPr sz="950" b="1">
                 <a:solidFill>
-                  <a:srgbClr val="FFFFFF"/>
+                  <a:srgbClr val="000000"/>
                 </a:solidFill>
                 <a:latin typeface="Arial"/>
               </a:rPr>
@@ -13855,7 +13855,7 @@
             <a:r>
               <a:rPr sz="950" b="1">
                 <a:solidFill>
-                  <a:srgbClr val="FFFFFF"/>
+                  <a:srgbClr val="000000"/>
                 </a:solidFill>
                 <a:latin typeface="Arial"/>
               </a:rPr>
@@ -13909,7 +13909,7 @@
             <a:r>
               <a:rPr sz="950" b="1">
                 <a:solidFill>
-                  <a:srgbClr val="FFFFFF"/>
+                  <a:srgbClr val="000000"/>
                 </a:solidFill>
                 <a:latin typeface="Arial"/>
               </a:rPr>
@@ -13942,7 +13942,9 @@
           <a:p>
             <a:r>
               <a:rPr sz="950" b="1">
-                <a:solidFill/>
+                <a:solidFill>
+                  <a:srgbClr val="000000"/>
+                </a:solidFill>
                 <a:latin typeface="Arial"/>
               </a:rPr>
               <a:t>AI-assisted personalization (Gemini) and continuous feedback (SkillEngine)</a:t>
@@ -13995,7 +13997,7 @@
             <a:r>
               <a:rPr sz="950" b="1">
                 <a:solidFill>
-                  <a:srgbClr val="FFFFFF"/>
+                  <a:srgbClr val="000000"/>
                 </a:solidFill>
                 <a:latin typeface="Arial"/>
               </a:rPr>
@@ -14030,7 +14032,7 @@
             <a:r>
               <a:rPr sz="950" b="1">
                 <a:solidFill>
-                  <a:srgbClr val="FFFFFF"/>
+                  <a:srgbClr val="000000"/>
                 </a:solidFill>
                 <a:latin typeface="Arial"/>
               </a:rPr>
@@ -14065,7 +14067,7 @@
             <a:r>
               <a:rPr sz="1250" b="1">
                 <a:solidFill>
-                  <a:srgbClr val="FFFFFF"/>
+                  <a:srgbClr val="000000"/>
                 </a:solidFill>
                 <a:latin typeface="Arial"/>
               </a:rPr>
@@ -14119,7 +14121,7 @@
             <a:r>
               <a:rPr sz="950" b="1">
                 <a:solidFill>
-                  <a:srgbClr val="FFFFFF"/>
+                  <a:srgbClr val="000000"/>
                 </a:solidFill>
                 <a:latin typeface="Arial"/>
               </a:rPr>
@@ -14209,7 +14211,7 @@
             <a:r>
               <a:rPr sz="950" b="1">
                 <a:solidFill>
-                  <a:srgbClr val="FFFFFF"/>
+                  <a:srgbClr val="000000"/>
                 </a:solidFill>
                 <a:latin typeface="Arial"/>
               </a:rPr>
@@ -14375,7 +14377,7 @@
                   <a:noFill/>
                 </a:ln>
                 <a:solidFill>
-                  <a:prstClr val="white"/>
+                  <a:srgbClr val="000000"/>
                 </a:solidFill>
                 <a:effectLst/>
                 <a:uLnTx/>
@@ -14459,7 +14461,7 @@
             <a:r>
               <a:rPr sz="2300" b="1">
                 <a:solidFill>
-                  <a:srgbClr val="FFFFFF"/>
+                  <a:srgbClr val="000000"/>
                 </a:solidFill>
                 <a:latin typeface="Arial"/>
               </a:rPr>
@@ -14494,7 +14496,7 @@
             <a:r>
               <a:rPr sz="1350" b="1">
                 <a:solidFill>
-                  <a:srgbClr val="FFFFFF"/>
+                  <a:srgbClr val="000000"/>
                 </a:solidFill>
                 <a:latin typeface="Arial"/>
               </a:rPr>
@@ -14548,7 +14550,7 @@
             <a:r>
               <a:rPr sz="950" b="1">
                 <a:solidFill>
-                  <a:srgbClr val="FFFFFF"/>
+                  <a:srgbClr val="000000"/>
                 </a:solidFill>
                 <a:latin typeface="Arial"/>
               </a:rPr>
@@ -14583,7 +14585,7 @@
             <a:r>
               <a:rPr sz="950" b="1">
                 <a:solidFill>
-                  <a:srgbClr val="FFFFFF"/>
+                  <a:srgbClr val="000000"/>
                 </a:solidFill>
                 <a:latin typeface="Arial"/>
               </a:rPr>
@@ -14618,7 +14620,7 @@
             <a:r>
               <a:rPr sz="950" b="1">
                 <a:solidFill>
-                  <a:srgbClr val="FFFFFF"/>
+                  <a:srgbClr val="000000"/>
                 </a:solidFill>
                 <a:latin typeface="Arial"/>
               </a:rPr>
@@ -14672,7 +14674,7 @@
             <a:r>
               <a:rPr sz="950" b="1">
                 <a:solidFill>
-                  <a:srgbClr val="FFFFFF"/>
+                  <a:srgbClr val="000000"/>
                 </a:solidFill>
                 <a:latin typeface="Arial"/>
               </a:rPr>
@@ -14707,7 +14709,7 @@
             <a:r>
               <a:rPr sz="950" b="1">
                 <a:solidFill>
-                  <a:srgbClr val="FFFFFF"/>
+                  <a:srgbClr val="000000"/>
                 </a:solidFill>
                 <a:latin typeface="Arial"/>
               </a:rPr>
@@ -14742,7 +14744,7 @@
             <a:r>
               <a:rPr sz="950" b="1">
                 <a:solidFill>
-                  <a:srgbClr val="FFFFFF"/>
+                  <a:srgbClr val="000000"/>
                 </a:solidFill>
                 <a:latin typeface="Arial"/>
               </a:rPr>
@@ -14796,7 +14798,7 @@
             <a:r>
               <a:rPr sz="950" b="1">
                 <a:solidFill>
-                  <a:srgbClr val="FFFFFF"/>
+                  <a:srgbClr val="000000"/>
                 </a:solidFill>
                 <a:latin typeface="Arial"/>
               </a:rPr>
@@ -14831,7 +14833,7 @@
             <a:r>
               <a:rPr sz="950" b="1">
                 <a:solidFill>
-                  <a:srgbClr val="FFFFFF"/>
+                  <a:srgbClr val="000000"/>
                 </a:solidFill>
                 <a:latin typeface="Arial"/>
               </a:rPr>
@@ -14866,7 +14868,7 @@
             <a:r>
               <a:rPr sz="950" b="1">
                 <a:solidFill>
-                  <a:srgbClr val="FFFFFF"/>
+                  <a:srgbClr val="000000"/>
                 </a:solidFill>
                 <a:latin typeface="Arial"/>
               </a:rPr>
@@ -14920,7 +14922,7 @@
             <a:r>
               <a:rPr sz="950" b="1">
                 <a:solidFill>
-                  <a:srgbClr val="FFFFFF"/>
+                  <a:srgbClr val="000000"/>
                 </a:solidFill>
                 <a:latin typeface="Arial"/>
               </a:rPr>
@@ -14955,7 +14957,7 @@
             <a:r>
               <a:rPr sz="950" b="1">
                 <a:solidFill>
-                  <a:srgbClr val="FFFFFF"/>
+                  <a:srgbClr val="000000"/>
                 </a:solidFill>
                 <a:latin typeface="Arial"/>
               </a:rPr>
@@ -14990,7 +14992,7 @@
             <a:r>
               <a:rPr sz="950" b="1">
                 <a:solidFill>
-                  <a:srgbClr val="FFFFFF"/>
+                  <a:srgbClr val="000000"/>
                 </a:solidFill>
                 <a:latin typeface="Arial"/>
               </a:rPr>
@@ -15025,7 +15027,7 @@
             <a:r>
               <a:rPr sz="1350" b="1">
                 <a:solidFill>
-                  <a:srgbClr val="FFFFFF"/>
+                  <a:srgbClr val="000000"/>
                 </a:solidFill>
                 <a:latin typeface="Arial"/>
               </a:rPr>
@@ -15079,7 +15081,7 @@
             <a:r>
               <a:rPr sz="950" b="1">
                 <a:solidFill>
-                  <a:srgbClr val="FFFFFF"/>
+                  <a:srgbClr val="000000"/>
                 </a:solidFill>
                 <a:latin typeface="Arial"/>
               </a:rPr>
@@ -15133,7 +15135,7 @@
             <a:r>
               <a:rPr sz="950" b="1">
                 <a:solidFill>
-                  <a:srgbClr val="FFFFFF"/>
+                  <a:srgbClr val="000000"/>
                 </a:solidFill>
                 <a:latin typeface="Arial"/>
               </a:rPr>
@@ -15187,7 +15189,7 @@
             <a:r>
               <a:rPr sz="950" b="1">
                 <a:solidFill>
-                  <a:srgbClr val="FFFFFF"/>
+                  <a:srgbClr val="000000"/>
                 </a:solidFill>
                 <a:latin typeface="Arial"/>
               </a:rPr>
@@ -15242,7 +15244,7 @@
             <a:r>
               <a:rPr sz="950" b="1">
                 <a:solidFill>
-                  <a:srgbClr val="FFFFFF"/>
+                  <a:srgbClr val="000000"/>
                 </a:solidFill>
                 <a:latin typeface="Arial"/>
               </a:rPr>
@@ -15296,7 +15298,7 @@
             <a:r>
               <a:rPr sz="950" b="1">
                 <a:solidFill>
-                  <a:srgbClr val="FFFFFF"/>
+                  <a:srgbClr val="000000"/>
                 </a:solidFill>
                 <a:latin typeface="Arial"/>
               </a:rPr>
@@ -15350,7 +15352,7 @@
             <a:r>
               <a:rPr sz="950" b="1">
                 <a:solidFill>
-                  <a:srgbClr val="FFFFFF"/>
+                  <a:srgbClr val="000000"/>
                 </a:solidFill>
                 <a:latin typeface="Arial"/>
               </a:rPr>
@@ -15404,7 +15406,7 @@
             <a:r>
               <a:rPr sz="950" b="1">
                 <a:solidFill>
-                  <a:srgbClr val="FFFFFF"/>
+                  <a:srgbClr val="000000"/>
                 </a:solidFill>
                 <a:latin typeface="Arial"/>
               </a:rPr>
@@ -15458,7 +15460,7 @@
             <a:r>
               <a:rPr sz="950" b="1">
                 <a:solidFill>
-                  <a:srgbClr val="FFFFFF"/>
+                  <a:srgbClr val="000000"/>
                 </a:solidFill>
                 <a:latin typeface="Arial"/>
               </a:rPr>
@@ -15512,7 +15514,7 @@
             <a:r>
               <a:rPr sz="950" b="1">
                 <a:solidFill>
-                  <a:srgbClr val="FFFFFF"/>
+                  <a:srgbClr val="000000"/>
                 </a:solidFill>
                 <a:latin typeface="Arial"/>
               </a:rPr>
@@ -15566,7 +15568,7 @@
             <a:r>
               <a:rPr sz="950" b="1">
                 <a:solidFill>
-                  <a:srgbClr val="FFFFFF"/>
+                  <a:srgbClr val="000000"/>
                 </a:solidFill>
                 <a:latin typeface="Arial"/>
               </a:rPr>
@@ -15620,7 +15622,7 @@
             <a:r>
               <a:rPr sz="950" b="1">
                 <a:solidFill>
-                  <a:srgbClr val="FFFFFF"/>
+                  <a:srgbClr val="000000"/>
                 </a:solidFill>
                 <a:latin typeface="Arial"/>
               </a:rPr>
@@ -15674,7 +15676,7 @@
             <a:r>
               <a:rPr sz="950" b="1">
                 <a:solidFill>
-                  <a:srgbClr val="FFFFFF"/>
+                  <a:srgbClr val="000000"/>
                 </a:solidFill>
                 <a:latin typeface="Arial"/>
               </a:rPr>
@@ -15728,7 +15730,7 @@
             <a:r>
               <a:rPr sz="950" b="1">
                 <a:solidFill>
-                  <a:srgbClr val="FFFFFF"/>
+                  <a:srgbClr val="000000"/>
                 </a:solidFill>
                 <a:latin typeface="Arial"/>
               </a:rPr>
@@ -15782,7 +15784,7 @@
             <a:r>
               <a:rPr sz="950" b="1">
                 <a:solidFill>
-                  <a:srgbClr val="FFFFFF"/>
+                  <a:srgbClr val="000000"/>
                 </a:solidFill>
                 <a:latin typeface="Arial"/>
               </a:rPr>
@@ -15836,7 +15838,7 @@
             <a:r>
               <a:rPr sz="950" b="1">
                 <a:solidFill>
-                  <a:srgbClr val="FFFFFF"/>
+                  <a:srgbClr val="000000"/>
                 </a:solidFill>
                 <a:latin typeface="Arial"/>
               </a:rPr>
@@ -15890,7 +15892,7 @@
             <a:r>
               <a:rPr sz="950" b="1">
                 <a:solidFill>
-                  <a:srgbClr val="FFFFFF"/>
+                  <a:srgbClr val="000000"/>
                 </a:solidFill>
                 <a:latin typeface="Arial"/>
               </a:rPr>
@@ -15944,7 +15946,7 @@
             <a:r>
               <a:rPr sz="950" b="1">
                 <a:solidFill>
-                  <a:srgbClr val="FFFFFF"/>
+                  <a:srgbClr val="000000"/>
                 </a:solidFill>
                 <a:latin typeface="Arial"/>
               </a:rPr>
@@ -15998,7 +16000,7 @@
             <a:r>
               <a:rPr sz="950" b="1">
                 <a:solidFill>
-                  <a:srgbClr val="FFFFFF"/>
+                  <a:srgbClr val="000000"/>
                 </a:solidFill>
                 <a:latin typeface="Arial"/>
               </a:rPr>
@@ -16052,7 +16054,7 @@
             <a:r>
               <a:rPr sz="950" b="1">
                 <a:solidFill>
-                  <a:srgbClr val="FFFFFF"/>
+                  <a:srgbClr val="000000"/>
                 </a:solidFill>
                 <a:latin typeface="Arial"/>
               </a:rPr>
@@ -16106,7 +16108,7 @@
             <a:r>
               <a:rPr sz="950" b="1">
                 <a:solidFill>
-                  <a:srgbClr val="FFFFFF"/>
+                  <a:srgbClr val="000000"/>
                 </a:solidFill>
                 <a:latin typeface="Arial"/>
               </a:rPr>
@@ -16160,7 +16162,7 @@
             <a:r>
               <a:rPr sz="950" b="1">
                 <a:solidFill>
-                  <a:srgbClr val="FFFFFF"/>
+                  <a:srgbClr val="000000"/>
                 </a:solidFill>
                 <a:latin typeface="Arial"/>
               </a:rPr>
@@ -16214,7 +16216,7 @@
             <a:r>
               <a:rPr sz="950" b="1">
                 <a:solidFill>
-                  <a:srgbClr val="FFFFFF"/>
+                  <a:srgbClr val="000000"/>
                 </a:solidFill>
                 <a:latin typeface="Arial"/>
               </a:rPr>
@@ -16268,7 +16270,7 @@
             <a:r>
               <a:rPr sz="950" b="1">
                 <a:solidFill>
-                  <a:srgbClr val="FFFFFF"/>
+                  <a:srgbClr val="000000"/>
                 </a:solidFill>
                 <a:latin typeface="Arial"/>
               </a:rPr>
@@ -16322,7 +16324,7 @@
             <a:r>
               <a:rPr sz="950" b="1">
                 <a:solidFill>
-                  <a:srgbClr val="FFFFFF"/>
+                  <a:srgbClr val="000000"/>
                 </a:solidFill>
                 <a:latin typeface="Arial"/>
               </a:rPr>
@@ -16376,7 +16378,7 @@
             <a:r>
               <a:rPr sz="950" b="1">
                 <a:solidFill>
-                  <a:srgbClr val="FFFFFF"/>
+                  <a:srgbClr val="000000"/>
                 </a:solidFill>
                 <a:latin typeface="Arial"/>
               </a:rPr>
@@ -16430,7 +16432,7 @@
             <a:r>
               <a:rPr sz="950" b="1">
                 <a:solidFill>
-                  <a:srgbClr val="FFFFFF"/>
+                  <a:srgbClr val="000000"/>
                 </a:solidFill>
                 <a:latin typeface="Arial"/>
               </a:rPr>
@@ -16484,7 +16486,7 @@
             <a:r>
               <a:rPr sz="950" b="1">
                 <a:solidFill>
-                  <a:srgbClr val="FFFFFF"/>
+                  <a:srgbClr val="000000"/>
                 </a:solidFill>
                 <a:latin typeface="Arial"/>
               </a:rPr>
@@ -16538,7 +16540,7 @@
             <a:r>
               <a:rPr sz="950" b="1">
                 <a:solidFill>
-                  <a:srgbClr val="FFFFFF"/>
+                  <a:srgbClr val="000000"/>
                 </a:solidFill>
                 <a:latin typeface="Arial"/>
               </a:rPr>
@@ -16592,7 +16594,7 @@
             <a:r>
               <a:rPr sz="950" b="1">
                 <a:solidFill>
-                  <a:srgbClr val="FFFFFF"/>
+                  <a:srgbClr val="000000"/>
                 </a:solidFill>
                 <a:latin typeface="Arial"/>
               </a:rPr>
@@ -16646,7 +16648,7 @@
             <a:r>
               <a:rPr sz="950" b="1">
                 <a:solidFill>
-                  <a:srgbClr val="FFFFFF"/>
+                  <a:srgbClr val="000000"/>
                 </a:solidFill>
                 <a:latin typeface="Arial"/>
               </a:rPr>
@@ -16700,7 +16702,7 @@
             <a:r>
               <a:rPr sz="950" b="1">
                 <a:solidFill>
-                  <a:srgbClr val="FFFFFF"/>
+                  <a:srgbClr val="000000"/>
                 </a:solidFill>
                 <a:latin typeface="Arial"/>
               </a:rPr>
@@ -16754,7 +16756,7 @@
             <a:r>
               <a:rPr sz="950" b="1">
                 <a:solidFill>
-                  <a:srgbClr val="FFFFFF"/>
+                  <a:srgbClr val="000000"/>
                 </a:solidFill>
                 <a:latin typeface="Arial"/>
               </a:rPr>
@@ -16808,7 +16810,7 @@
             <a:r>
               <a:rPr sz="950" b="1">
                 <a:solidFill>
-                  <a:srgbClr val="FFFFFF"/>
+                  <a:srgbClr val="000000"/>
                 </a:solidFill>
                 <a:latin typeface="Arial"/>
               </a:rPr>
@@ -16862,7 +16864,7 @@
             <a:r>
               <a:rPr sz="950" b="1">
                 <a:solidFill>
-                  <a:srgbClr val="FFFFFF"/>
+                  <a:srgbClr val="000000"/>
                 </a:solidFill>
                 <a:latin typeface="Arial"/>
               </a:rPr>
@@ -16916,7 +16918,7 @@
             <a:r>
               <a:rPr sz="950" b="1">
                 <a:solidFill>
-                  <a:srgbClr val="FFFFFF"/>
+                  <a:srgbClr val="000000"/>
                 </a:solidFill>
                 <a:latin typeface="Arial"/>
               </a:rPr>
@@ -16970,7 +16972,7 @@
             <a:r>
               <a:rPr sz="950" b="1">
                 <a:solidFill>
-                  <a:srgbClr val="FFFFFF"/>
+                  <a:srgbClr val="000000"/>
                 </a:solidFill>
                 <a:latin typeface="Arial"/>
               </a:rPr>
@@ -17024,7 +17026,7 @@
             <a:r>
               <a:rPr sz="950" b="1">
                 <a:solidFill>
-                  <a:srgbClr val="FFFFFF"/>
+                  <a:srgbClr val="000000"/>
                 </a:solidFill>
                 <a:latin typeface="Arial"/>
               </a:rPr>
@@ -17078,7 +17080,7 @@
             <a:r>
               <a:rPr sz="950" b="1">
                 <a:solidFill>
-                  <a:srgbClr val="FFFFFF"/>
+                  <a:srgbClr val="000000"/>
                 </a:solidFill>
                 <a:latin typeface="Arial"/>
               </a:rPr>
@@ -17132,7 +17134,7 @@
             <a:r>
               <a:rPr sz="950" b="1">
                 <a:solidFill>
-                  <a:srgbClr val="FFFFFF"/>
+                  <a:srgbClr val="000000"/>
                 </a:solidFill>
                 <a:latin typeface="Arial"/>
               </a:rPr>
@@ -17186,7 +17188,7 @@
             <a:r>
               <a:rPr sz="950" b="1">
                 <a:solidFill>
-                  <a:srgbClr val="FFFFFF"/>
+                  <a:srgbClr val="000000"/>
                 </a:solidFill>
                 <a:latin typeface="Arial"/>
               </a:rPr>
@@ -17240,7 +17242,7 @@
             <a:r>
               <a:rPr sz="950" b="1">
                 <a:solidFill>
-                  <a:srgbClr val="FFFFFF"/>
+                  <a:srgbClr val="000000"/>
                 </a:solidFill>
                 <a:latin typeface="Arial"/>
               </a:rPr>
@@ -17294,7 +17296,7 @@
             <a:r>
               <a:rPr sz="950" b="1">
                 <a:solidFill>
-                  <a:srgbClr val="FFFFFF"/>
+                  <a:srgbClr val="000000"/>
                 </a:solidFill>
                 <a:latin typeface="Arial"/>
               </a:rPr>
@@ -17348,7 +17350,7 @@
             <a:r>
               <a:rPr sz="950" b="1">
                 <a:solidFill>
-                  <a:srgbClr val="FFFFFF"/>
+                  <a:srgbClr val="000000"/>
                 </a:solidFill>
                 <a:latin typeface="Arial"/>
               </a:rPr>
@@ -17402,7 +17404,7 @@
             <a:r>
               <a:rPr sz="950" b="1">
                 <a:solidFill>
-                  <a:srgbClr val="FFFFFF"/>
+                  <a:srgbClr val="000000"/>
                 </a:solidFill>
                 <a:latin typeface="Arial"/>
               </a:rPr>
@@ -17456,7 +17458,7 @@
             <a:r>
               <a:rPr sz="950" b="1">
                 <a:solidFill>
-                  <a:srgbClr val="FFFFFF"/>
+                  <a:srgbClr val="000000"/>
                 </a:solidFill>
                 <a:latin typeface="Arial"/>
               </a:rPr>
@@ -17491,7 +17493,7 @@
             <a:r>
               <a:rPr sz="950" b="1">
                 <a:solidFill>
-                  <a:srgbClr val="FFFFFF"/>
+                  <a:srgbClr val="000000"/>
                 </a:solidFill>
                 <a:latin typeface="Arial"/>
               </a:rPr>
@@ -17526,7 +17528,7 @@
             <a:r>
               <a:rPr sz="950" b="1">
                 <a:solidFill>
-                  <a:srgbClr val="FFFFFF"/>
+                  <a:srgbClr val="000000"/>
                 </a:solidFill>
                 <a:latin typeface="Arial"/>
               </a:rPr>

--- a/SIH_Final_PPT.pptx
+++ b/SIH_Final_PPT.pptx
@@ -14,6 +14,7 @@
     <p:sldId id="293" r:id="rId5"/>
     <p:sldId id="294" r:id="rId6"/>
     <p:sldId id="296" r:id="rId7"/>
+    <p:sldId id="297" r:id="rId14"/>
   </p:sldIdLst>
   <p:sldSz cx="12192000" cy="6858000"/>
   <p:notesSz cx="6858000" cy="9144000"/>
@@ -6044,7 +6045,7 @@
               <a:defRPr/>
             </a:pPr>
             <a:r>
-              <a:rPr lang="en-US">
+              <a:rPr lang="en-US" b="1">
                 <a:solidFill>
                   <a:srgbClr val="000000"/>
                 </a:solidFill>
@@ -8402,7 +8403,7 @@
               <a:defRPr/>
             </a:pPr>
             <a:r>
-              <a:rPr lang="en-US">
+              <a:rPr lang="en-US" b="1">
                 <a:solidFill>
                   <a:srgbClr val="000000"/>
                 </a:solidFill>
@@ -13941,11 +13942,10 @@
           <a:lstStyle/>
           <a:p>
             <a:r>
-              <a:rPr sz="950" b="1">
-                <a:solidFill>
-                  <a:srgbClr val="000000"/>
-                </a:solidFill>
-                <a:latin typeface="Arial"/>
+              <a:rPr b="1">
+                <a:solidFill>
+                  <a:srgbClr val="000000"/>
+                </a:solidFill>
               </a:rPr>
               <a:t>AI-assisted personalization (Gemini) and continuous feedback (SkillEngine)</a:t>
             </a:r>
@@ -17560,6648 +17560,6 @@
         <p:nvPr/>
       </p:nvGrpSpPr>
       <p:grpSpPr/>
-      <p:sp>
-        <p:nvSpPr>
-          <p:cNvPr id="6" name="Slide Number Placeholder 5"/>
-          <p:cNvSpPr>
-            <a:spLocks noGrp="1"/>
-          </p:cNvSpPr>
-          <p:nvPr>
-            <p:ph type="sldNum" sz="quarter" idx="12"/>
-          </p:nvPr>
-        </p:nvSpPr>
-        <p:spPr/>
-        <p:txBody>
-          <a:bodyPr/>
-          <a:lstStyle/>
-          <a:p>
-            <a:pPr marL="0" marR="0" lvl="0" indent="0" algn="r" defTabSz="457200" rtl="0" eaLnBrk="1" fontAlgn="base" latinLnBrk="0" hangingPunct="1">
-              <a:lnSpc>
-                <a:spcPct val="100000"/>
-              </a:lnSpc>
-              <a:spcBef>
-                <a:spcPct val="0"/>
-              </a:spcBef>
-              <a:spcAft>
-                <a:spcPct val="0"/>
-              </a:spcAft>
-              <a:buClrTx/>
-              <a:buSzTx/>
-              <a:buFontTx/>
-              <a:buNone/>
-              <a:tabLst/>
-              <a:defRPr/>
-            </a:pPr>
-            <a:fld id="{677C3CE7-23F7-4828-823C-E0205DF2CF97}" type="slidenum">
-              <a:rPr kumimoji="0" lang="en-US" sz="1200" b="1" i="0" u="none" strike="noStrike" kern="1200" cap="none" spc="0" normalizeH="0" baseline="0" noProof="0">
-                <a:ln>
-                  <a:noFill/>
-                </a:ln>
-                <a:solidFill>
-                  <a:prstClr val="white"/>
-                </a:solidFill>
-                <a:effectLst/>
-                <a:uLnTx/>
-                <a:uFillTx/>
-                <a:latin typeface="TradeGothic" pitchFamily="1" charset="0"/>
-                <a:ea typeface="ＭＳ Ｐゴシック" pitchFamily="1" charset="-128"/>
-                <a:cs typeface="+mn-cs"/>
-              </a:rPr>
-              <a:pPr marL="0" marR="0" lvl="0" indent="0" algn="r" defTabSz="457200" rtl="0" eaLnBrk="1" fontAlgn="base" latinLnBrk="0" hangingPunct="1">
-                <a:lnSpc>
-                  <a:spcPct val="100000"/>
-                </a:lnSpc>
-                <a:spcBef>
-                  <a:spcPct val="0"/>
-                </a:spcBef>
-                <a:spcAft>
-                  <a:spcPct val="0"/>
-                </a:spcAft>
-                <a:buClrTx/>
-                <a:buSzTx/>
-                <a:buFontTx/>
-                <a:buNone/>
-                <a:tabLst/>
-                <a:defRPr/>
-              </a:pPr>
-              <a:t>6</a:t>
-            </a:fld>
-            <a:endParaRPr kumimoji="0" lang="en-US" sz="1200" b="1" i="0" u="none" strike="noStrike" kern="1200" cap="none" spc="0" normalizeH="0" baseline="0" noProof="0" dirty="0">
-              <a:ln>
-                <a:noFill/>
-              </a:ln>
-              <a:solidFill>
-                <a:prstClr val="white"/>
-              </a:solidFill>
-              <a:effectLst/>
-              <a:uLnTx/>
-              <a:uFillTx/>
-              <a:latin typeface="TradeGothic" pitchFamily="1" charset="0"/>
-              <a:ea typeface="ＭＳ Ｐゴシック" pitchFamily="1" charset="-128"/>
-              <a:cs typeface="+mn-cs"/>
-            </a:endParaRPr>
-          </a:p>
-        </p:txBody>
-      </p:sp>
-      <p:sp>
-        <p:nvSpPr>
-          <p:cNvPr id="7" name="Footer Placeholder 6"/>
-          <p:cNvSpPr>
-            <a:spLocks noGrp="1"/>
-          </p:cNvSpPr>
-          <p:nvPr>
-            <p:ph type="ftr" sz="quarter" idx="11"/>
-          </p:nvPr>
-        </p:nvSpPr>
-        <p:spPr>
-          <a:xfrm>
-            <a:off x="4648200" y="6356353"/>
-            <a:ext cx="3204000" cy="365125"/>
-          </a:xfrm>
-        </p:spPr>
-        <p:txBody>
-          <a:bodyPr/>
-          <a:lstStyle/>
-          <a:p>
-            <a:pPr marL="0" marR="0" lvl="0" indent="0" algn="ctr" defTabSz="457200" rtl="0" eaLnBrk="1" fontAlgn="auto" latinLnBrk="0" hangingPunct="1">
-              <a:lnSpc>
-                <a:spcPct val="100000"/>
-              </a:lnSpc>
-              <a:spcBef>
-                <a:spcPts val="0"/>
-              </a:spcBef>
-              <a:spcAft>
-                <a:spcPts val="0"/>
-              </a:spcAft>
-              <a:buClrTx/>
-              <a:buSzTx/>
-              <a:buFontTx/>
-              <a:buNone/>
-              <a:tabLst/>
-              <a:defRPr/>
-            </a:pPr>
-            <a:r>
-              <a:rPr kumimoji="0" lang="en-US" sz="1200" b="1" i="0" u="none" strike="noStrike" kern="1200" cap="none" spc="0" normalizeH="0" baseline="0" noProof="0">
-                <a:ln>
-                  <a:noFill/>
-                </a:ln>
-                <a:solidFill>
-                  <a:prstClr val="white"/>
-                </a:solidFill>
-                <a:effectLst/>
-                <a:uLnTx/>
-                <a:uFillTx/>
-                <a:latin typeface="TradeGothic"/>
-                <a:ea typeface="+mn-ea"/>
-                <a:cs typeface="+mn-cs"/>
-              </a:rPr>
-              <a:t>@SIH Idea submission- Template</a:t>
-            </a:r>
-            <a:endParaRPr kumimoji="0" lang="en-US" sz="1200" b="0" i="0" u="none" strike="noStrike" kern="1200" cap="none" spc="0" normalizeH="0" baseline="0" noProof="0" dirty="0">
-              <a:ln>
-                <a:noFill/>
-              </a:ln>
-              <a:solidFill>
-                <a:prstClr val="white"/>
-              </a:solidFill>
-              <a:effectLst/>
-              <a:uLnTx/>
-              <a:uFillTx/>
-              <a:latin typeface="TradeGothic"/>
-              <a:ea typeface="+mn-ea"/>
-              <a:cs typeface="+mn-cs"/>
-            </a:endParaRPr>
-          </a:p>
-        </p:txBody>
-      </p:sp>
-      <p:pic>
-        <p:nvPicPr>
-          <p:cNvPr id="12" name="Picture 11"/>
-          <p:cNvPicPr>
-            <a:picLocks noChangeAspect="1"/>
-          </p:cNvPicPr>
-          <p:nvPr/>
-        </p:nvPicPr>
-        <p:blipFill>
-          <a:blip r:embed="rId3">
-            <a:extLst>
-              <a:ext uri="{28A0092B-C50C-407E-A947-70E740481C1C}">
-                <a14:useLocalDpi xmlns:a14="http://schemas.microsoft.com/office/drawing/2010/main" val="0"/>
-              </a:ext>
-            </a:extLst>
-          </a:blip>
-          <a:stretch>
-            <a:fillRect/>
-          </a:stretch>
-        </p:blipFill>
-        <p:spPr>
-          <a:xfrm>
-            <a:off x="9780086" y="1500"/>
-            <a:ext cx="2249850" cy="1062337"/>
-          </a:xfrm>
-          <a:prstGeom prst="rect">
-            <a:avLst/>
-          </a:prstGeom>
-        </p:spPr>
-      </p:pic>
-      <p:sp>
-        <p:nvSpPr>
-          <p:cNvPr id="15" name="Oval 14"/>
-          <p:cNvSpPr/>
-          <p:nvPr/>
-        </p:nvSpPr>
-        <p:spPr>
-          <a:xfrm>
-            <a:off x="594360" y="1417320"/>
-            <a:ext cx="320040" cy="320040"/>
-          </a:xfrm>
-          <a:prstGeom prst="ellipse">
-            <a:avLst/>
-          </a:prstGeom>
-          <a:solidFill>
-            <a:srgbClr val="2365A9"/>
-          </a:solidFill>
-          <a:ln>
-            <a:solidFill>
-              <a:srgbClr val="2365A9"/>
-            </a:solidFill>
-          </a:ln>
-        </p:spPr>
-        <p:style>
-          <a:lnRef idx="1">
-            <a:schemeClr val="accent1"/>
-          </a:lnRef>
-          <a:fillRef idx="3">
-            <a:schemeClr val="accent1"/>
-          </a:fillRef>
-          <a:effectRef idx="2">
-            <a:schemeClr val="accent1"/>
-          </a:effectRef>
-          <a:fontRef idx="minor">
-            <a:schemeClr val="lt1"/>
-          </a:fontRef>
-        </p:style>
-        <p:txBody>
-          <a:bodyPr rtlCol="0" anchor="ctr"/>
-          <a:lstStyle/>
-          <a:p>
-            <a:pPr algn="ctr"/>
-            <a:r>
-              <a:rPr sz="950" b="1">
-                <a:solidFill>
-                  <a:srgbClr val="FFFFFF"/>
-                </a:solidFill>
-                <a:latin typeface="Arial"/>
-              </a:rPr>
-              <a:t>01</a:t>
-            </a:r>
-          </a:p>
-        </p:txBody>
-      </p:sp>
-      <p:sp>
-        <p:nvSpPr>
-          <p:cNvPr id="18" name="Oval 17"/>
-          <p:cNvSpPr/>
-          <p:nvPr/>
-        </p:nvSpPr>
-        <p:spPr>
-          <a:xfrm>
-            <a:off x="594360" y="2258568"/>
-            <a:ext cx="320040" cy="320040"/>
-          </a:xfrm>
-          <a:prstGeom prst="ellipse">
-            <a:avLst/>
-          </a:prstGeom>
-          <a:solidFill>
-            <a:srgbClr val="2365A9"/>
-          </a:solidFill>
-          <a:ln>
-            <a:solidFill>
-              <a:srgbClr val="2365A9"/>
-            </a:solidFill>
-          </a:ln>
-        </p:spPr>
-        <p:style>
-          <a:lnRef idx="1">
-            <a:schemeClr val="accent1"/>
-          </a:lnRef>
-          <a:fillRef idx="3">
-            <a:schemeClr val="accent1"/>
-          </a:fillRef>
-          <a:effectRef idx="2">
-            <a:schemeClr val="accent1"/>
-          </a:effectRef>
-          <a:fontRef idx="minor">
-            <a:schemeClr val="lt1"/>
-          </a:fontRef>
-        </p:style>
-        <p:txBody>
-          <a:bodyPr rtlCol="0" anchor="ctr"/>
-          <a:lstStyle/>
-          <a:p>
-            <a:pPr algn="ctr"/>
-            <a:r>
-              <a:rPr sz="950" b="1">
-                <a:solidFill>
-                  <a:srgbClr val="FFFFFF"/>
-                </a:solidFill>
-                <a:latin typeface="Arial"/>
-              </a:rPr>
-              <a:t>02</a:t>
-            </a:r>
-          </a:p>
-        </p:txBody>
-      </p:sp>
-      <p:sp>
-        <p:nvSpPr>
-          <p:cNvPr id="21" name="Oval 20"/>
-          <p:cNvSpPr/>
-          <p:nvPr/>
-        </p:nvSpPr>
-        <p:spPr>
-          <a:xfrm>
-            <a:off x="594360" y="3099816"/>
-            <a:ext cx="320040" cy="320040"/>
-          </a:xfrm>
-          <a:prstGeom prst="ellipse">
-            <a:avLst/>
-          </a:prstGeom>
-          <a:solidFill>
-            <a:srgbClr val="2365A9"/>
-          </a:solidFill>
-          <a:ln>
-            <a:solidFill>
-              <a:srgbClr val="2365A9"/>
-            </a:solidFill>
-          </a:ln>
-        </p:spPr>
-        <p:style>
-          <a:lnRef idx="1">
-            <a:schemeClr val="accent1"/>
-          </a:lnRef>
-          <a:fillRef idx="3">
-            <a:schemeClr val="accent1"/>
-          </a:fillRef>
-          <a:effectRef idx="2">
-            <a:schemeClr val="accent1"/>
-          </a:effectRef>
-          <a:fontRef idx="minor">
-            <a:schemeClr val="lt1"/>
-          </a:fontRef>
-        </p:style>
-        <p:txBody>
-          <a:bodyPr rtlCol="0" anchor="ctr"/>
-          <a:lstStyle/>
-          <a:p>
-            <a:pPr algn="ctr"/>
-            <a:r>
-              <a:rPr sz="950" b="1">
-                <a:solidFill>
-                  <a:srgbClr val="FFFFFF"/>
-                </a:solidFill>
-                <a:latin typeface="Arial"/>
-              </a:rPr>
-              <a:t>03</a:t>
-            </a:r>
-          </a:p>
-        </p:txBody>
-      </p:sp>
-      <p:sp>
-        <p:nvSpPr>
-          <p:cNvPr id="24" name="Oval 23"/>
-          <p:cNvSpPr/>
-          <p:nvPr/>
-        </p:nvSpPr>
-        <p:spPr>
-          <a:xfrm>
-            <a:off x="594360" y="3941064"/>
-            <a:ext cx="320040" cy="320040"/>
-          </a:xfrm>
-          <a:prstGeom prst="ellipse">
-            <a:avLst/>
-          </a:prstGeom>
-          <a:solidFill>
-            <a:srgbClr val="2365A9"/>
-          </a:solidFill>
-          <a:ln>
-            <a:solidFill>
-              <a:srgbClr val="2365A9"/>
-            </a:solidFill>
-          </a:ln>
-        </p:spPr>
-        <p:style>
-          <a:lnRef idx="1">
-            <a:schemeClr val="accent1"/>
-          </a:lnRef>
-          <a:fillRef idx="3">
-            <a:schemeClr val="accent1"/>
-          </a:fillRef>
-          <a:effectRef idx="2">
-            <a:schemeClr val="accent1"/>
-          </a:effectRef>
-          <a:fontRef idx="minor">
-            <a:schemeClr val="lt1"/>
-          </a:fontRef>
-        </p:style>
-        <p:txBody>
-          <a:bodyPr rtlCol="0" anchor="ctr"/>
-          <a:lstStyle/>
-          <a:p>
-            <a:pPr algn="ctr"/>
-            <a:r>
-              <a:rPr sz="950" b="1">
-                <a:solidFill>
-                  <a:srgbClr val="FFFFFF"/>
-                </a:solidFill>
-                <a:latin typeface="Arial"/>
-              </a:rPr>
-              <a:t>04</a:t>
-            </a:r>
-          </a:p>
-        </p:txBody>
-      </p:sp>
-      <p:sp>
-        <p:nvSpPr>
-          <p:cNvPr id="25" name="TextBox 24"/>
-          <p:cNvSpPr txBox="1"/>
-          <p:nvPr/>
-        </p:nvSpPr>
-        <p:spPr>
-          <a:xfrm>
-            <a:off x="411480" y="320040"/>
-            <a:ext cx="11338560" cy="365760"/>
-          </a:xfrm>
-          <a:prstGeom prst="rect">
-            <a:avLst/>
-          </a:prstGeom>
-          <a:noFill/>
-        </p:spPr>
-        <p:txBody>
-          <a:bodyPr wrap="none" anchor="ctr">
-            <a:spAutoFit/>
-          </a:bodyPr>
-          <a:lstStyle/>
-          <a:p>
-            <a:pPr algn="ctr"/>
-            <a:r>
-              <a:rPr sz="1800" b="1">
-                <a:solidFill>
-                  <a:srgbClr val="FFFFFF"/>
-                </a:solidFill>
-                <a:latin typeface="Arial"/>
-              </a:rPr>
-              <a:t>COMPETITOR COMPARISON — WHY OUR PLATFORM IS THE BEST</a:t>
-            </a:r>
-          </a:p>
-        </p:txBody>
-      </p:sp>
-      <p:sp>
-        <p:nvSpPr>
-          <p:cNvPr id="26" name="TextBox 25"/>
-          <p:cNvSpPr txBox="1"/>
-          <p:nvPr/>
-        </p:nvSpPr>
-        <p:spPr>
-          <a:xfrm>
-            <a:off x="502920" y="713232"/>
-            <a:ext cx="11064240" cy="228600"/>
-          </a:xfrm>
-          <a:prstGeom prst="rect">
-            <a:avLst/>
-          </a:prstGeom>
-          <a:noFill/>
-        </p:spPr>
-        <p:txBody>
-          <a:bodyPr wrap="none" anchor="ctr">
-            <a:spAutoFit/>
-          </a:bodyPr>
-          <a:lstStyle/>
-          <a:p>
-            <a:pPr algn="ctr"/>
-            <a:r>
-              <a:rPr sz="950" b="1">
-                <a:solidFill>
-                  <a:srgbClr val="FFFFFF"/>
-                </a:solidFill>
-                <a:latin typeface="Arial"/>
-              </a:rPr>
-              <a:t>The differentiator is a continuous, evidence-driven skill intelligence loop — not just a collection of career features.</a:t>
-            </a:r>
-          </a:p>
-        </p:txBody>
-      </p:sp>
-      <p:sp>
-        <p:nvSpPr>
-          <p:cNvPr id="27" name="Rounded Rectangle 26"/>
-          <p:cNvSpPr/>
-          <p:nvPr/>
-        </p:nvSpPr>
-        <p:spPr>
-          <a:xfrm>
-            <a:off x="411480" y="1024128"/>
-            <a:ext cx="2907792" cy="365760"/>
-          </a:xfrm>
-          <a:prstGeom prst="roundRect">
-            <a:avLst/>
-          </a:prstGeom>
-          <a:solidFill>
-            <a:srgbClr val="2365A9"/>
-          </a:solidFill>
-          <a:ln w="7620">
-            <a:solidFill>
-              <a:srgbClr val="2365A9"/>
-            </a:solidFill>
-          </a:ln>
-        </p:spPr>
-        <p:style>
-          <a:lnRef idx="1">
-            <a:schemeClr val="accent1"/>
-          </a:lnRef>
-          <a:fillRef idx="3">
-            <a:schemeClr val="accent1"/>
-          </a:fillRef>
-          <a:effectRef idx="2">
-            <a:schemeClr val="accent1"/>
-          </a:effectRef>
-          <a:fontRef idx="minor">
-            <a:schemeClr val="lt1"/>
-          </a:fontRef>
-        </p:style>
-        <p:txBody>
-          <a:bodyPr rtlCol="0" anchor="ctr"/>
-          <a:lstStyle/>
-          <a:p>
-            <a:pPr algn="ctr"/>
-            <a:r>
-              <a:rPr sz="950" b="1">
-                <a:solidFill>
-                  <a:srgbClr val="FFFFFF"/>
-                </a:solidFill>
-                <a:latin typeface="Arial"/>
-              </a:rPr>
-              <a:t>Feature / Capability</a:t>
-            </a:r>
-          </a:p>
-        </p:txBody>
-      </p:sp>
-      <p:sp>
-        <p:nvSpPr>
-          <p:cNvPr id="28" name="Rounded Rectangle 27"/>
-          <p:cNvSpPr/>
-          <p:nvPr/>
-        </p:nvSpPr>
-        <p:spPr>
-          <a:xfrm>
-            <a:off x="3456432" y="1024128"/>
-            <a:ext cx="1481328" cy="365760"/>
-          </a:xfrm>
-          <a:prstGeom prst="roundRect">
-            <a:avLst/>
-          </a:prstGeom>
-          <a:solidFill>
-            <a:srgbClr val="43945C"/>
-          </a:solidFill>
-          <a:ln w="7620">
-            <a:solidFill>
-              <a:srgbClr val="43945C"/>
-            </a:solidFill>
-          </a:ln>
-        </p:spPr>
-        <p:style>
-          <a:lnRef idx="1">
-            <a:schemeClr val="accent1"/>
-          </a:lnRef>
-          <a:fillRef idx="3">
-            <a:schemeClr val="accent1"/>
-          </a:fillRef>
-          <a:effectRef idx="2">
-            <a:schemeClr val="accent1"/>
-          </a:effectRef>
-          <a:fontRef idx="minor">
-            <a:schemeClr val="lt1"/>
-          </a:fontRef>
-        </p:style>
-        <p:txBody>
-          <a:bodyPr rtlCol="0" anchor="ctr"/>
-          <a:lstStyle/>
-          <a:p>
-            <a:pPr algn="ctr"/>
-            <a:r>
-              <a:rPr sz="950" b="1">
-                <a:solidFill>
-                  <a:srgbClr val="FFFFFF"/>
-                </a:solidFill>
-                <a:latin typeface="Arial"/>
-              </a:rPr>
-              <a:t>✓ OUR PLATFORM</a:t>
-            </a:r>
-          </a:p>
-        </p:txBody>
-      </p:sp>
-      <p:sp>
-        <p:nvSpPr>
-          <p:cNvPr id="29" name="Rounded Rectangle 28"/>
-          <p:cNvSpPr/>
-          <p:nvPr/>
-        </p:nvSpPr>
-        <p:spPr>
-          <a:xfrm>
-            <a:off x="5074920" y="1024128"/>
-            <a:ext cx="1143000" cy="365760"/>
-          </a:xfrm>
-          <a:prstGeom prst="roundRect">
-            <a:avLst/>
-          </a:prstGeom>
-          <a:solidFill>
-            <a:srgbClr val="2365A9"/>
-          </a:solidFill>
-          <a:ln w="7620">
-            <a:solidFill>
-              <a:srgbClr val="2365A9"/>
-            </a:solidFill>
-          </a:ln>
-        </p:spPr>
-        <p:style>
-          <a:lnRef idx="1">
-            <a:schemeClr val="accent1"/>
-          </a:lnRef>
-          <a:fillRef idx="3">
-            <a:schemeClr val="accent1"/>
-          </a:fillRef>
-          <a:effectRef idx="2">
-            <a:schemeClr val="accent1"/>
-          </a:effectRef>
-          <a:fontRef idx="minor">
-            <a:schemeClr val="lt1"/>
-          </a:fontRef>
-        </p:style>
-        <p:txBody>
-          <a:bodyPr rtlCol="0" anchor="ctr"/>
-          <a:lstStyle/>
-          <a:p>
-            <a:pPr algn="ctr"/>
-            <a:r>
-              <a:rPr sz="950" b="1">
-                <a:solidFill>
-                  <a:srgbClr val="FFFFFF"/>
-                </a:solidFill>
-                <a:latin typeface="Arial"/>
-              </a:rPr>
-              <a:t>iKlavya</a:t>
-            </a:r>
-          </a:p>
-        </p:txBody>
-      </p:sp>
-      <p:sp>
-        <p:nvSpPr>
-          <p:cNvPr id="30" name="Rounded Rectangle 29"/>
-          <p:cNvSpPr/>
-          <p:nvPr/>
-        </p:nvSpPr>
-        <p:spPr>
-          <a:xfrm>
-            <a:off x="6327648" y="1024128"/>
-            <a:ext cx="1143000" cy="365760"/>
-          </a:xfrm>
-          <a:prstGeom prst="roundRect">
-            <a:avLst/>
-          </a:prstGeom>
-          <a:solidFill>
-            <a:srgbClr val="2365A9"/>
-          </a:solidFill>
-          <a:ln w="7620">
-            <a:solidFill>
-              <a:srgbClr val="2365A9"/>
-            </a:solidFill>
-          </a:ln>
-        </p:spPr>
-        <p:style>
-          <a:lnRef idx="1">
-            <a:schemeClr val="accent1"/>
-          </a:lnRef>
-          <a:fillRef idx="3">
-            <a:schemeClr val="accent1"/>
-          </a:fillRef>
-          <a:effectRef idx="2">
-            <a:schemeClr val="accent1"/>
-          </a:effectRef>
-          <a:fontRef idx="minor">
-            <a:schemeClr val="lt1"/>
-          </a:fontRef>
-        </p:style>
-        <p:txBody>
-          <a:bodyPr rtlCol="0" anchor="ctr"/>
-          <a:lstStyle/>
-          <a:p>
-            <a:pPr algn="ctr"/>
-            <a:r>
-              <a:rPr sz="950" b="1">
-                <a:solidFill>
-                  <a:srgbClr val="FFFFFF"/>
-                </a:solidFill>
-                <a:latin typeface="Arial"/>
-              </a:rPr>
-              <a:t>Superset</a:t>
-            </a:r>
-          </a:p>
-        </p:txBody>
-      </p:sp>
-      <p:sp>
-        <p:nvSpPr>
-          <p:cNvPr id="31" name="Rounded Rectangle 30"/>
-          <p:cNvSpPr/>
-          <p:nvPr/>
-        </p:nvSpPr>
-        <p:spPr>
-          <a:xfrm>
-            <a:off x="7580375" y="1024128"/>
-            <a:ext cx="1143000" cy="365760"/>
-          </a:xfrm>
-          <a:prstGeom prst="roundRect">
-            <a:avLst/>
-          </a:prstGeom>
-          <a:solidFill>
-            <a:srgbClr val="2365A9"/>
-          </a:solidFill>
-          <a:ln w="7620">
-            <a:solidFill>
-              <a:srgbClr val="2365A9"/>
-            </a:solidFill>
-          </a:ln>
-        </p:spPr>
-        <p:style>
-          <a:lnRef idx="1">
-            <a:schemeClr val="accent1"/>
-          </a:lnRef>
-          <a:fillRef idx="3">
-            <a:schemeClr val="accent1"/>
-          </a:fillRef>
-          <a:effectRef idx="2">
-            <a:schemeClr val="accent1"/>
-          </a:effectRef>
-          <a:fontRef idx="minor">
-            <a:schemeClr val="lt1"/>
-          </a:fontRef>
-        </p:style>
-        <p:txBody>
-          <a:bodyPr rtlCol="0" anchor="ctr"/>
-          <a:lstStyle/>
-          <a:p>
-            <a:pPr algn="ctr"/>
-            <a:r>
-              <a:rPr sz="950" b="1">
-                <a:solidFill>
-                  <a:srgbClr val="FFFFFF"/>
-                </a:solidFill>
-                <a:latin typeface="Arial"/>
-              </a:rPr>
-              <a:t>Unstop</a:t>
-            </a:r>
-          </a:p>
-        </p:txBody>
-      </p:sp>
-      <p:sp>
-        <p:nvSpPr>
-          <p:cNvPr id="32" name="Rounded Rectangle 31"/>
-          <p:cNvSpPr/>
-          <p:nvPr/>
-        </p:nvSpPr>
-        <p:spPr>
-          <a:xfrm>
-            <a:off x="8833104" y="1024128"/>
-            <a:ext cx="1783080" cy="365760"/>
-          </a:xfrm>
-          <a:prstGeom prst="roundRect">
-            <a:avLst/>
-          </a:prstGeom>
-          <a:solidFill>
-            <a:srgbClr val="2365A9"/>
-          </a:solidFill>
-          <a:ln w="7620">
-            <a:solidFill>
-              <a:srgbClr val="2365A9"/>
-            </a:solidFill>
-          </a:ln>
-        </p:spPr>
-        <p:style>
-          <a:lnRef idx="1">
-            <a:schemeClr val="accent1"/>
-          </a:lnRef>
-          <a:fillRef idx="3">
-            <a:schemeClr val="accent1"/>
-          </a:fillRef>
-          <a:effectRef idx="2">
-            <a:schemeClr val="accent1"/>
-          </a:effectRef>
-          <a:fontRef idx="minor">
-            <a:schemeClr val="lt1"/>
-          </a:fontRef>
-        </p:style>
-        <p:txBody>
-          <a:bodyPr rtlCol="0" anchor="ctr"/>
-          <a:lstStyle/>
-          <a:p>
-            <a:pPr algn="ctr"/>
-            <a:r>
-              <a:rPr sz="950" b="1">
-                <a:solidFill>
-                  <a:srgbClr val="FFFFFF"/>
-                </a:solidFill>
-                <a:latin typeface="Arial"/>
-              </a:rPr>
-              <a:t>LinkedIn</a:t>
-            </a:r>
-          </a:p>
-        </p:txBody>
-      </p:sp>
-      <p:sp>
-        <p:nvSpPr>
-          <p:cNvPr id="33" name="Rounded Rectangle 32"/>
-          <p:cNvSpPr/>
-          <p:nvPr/>
-        </p:nvSpPr>
-        <p:spPr>
-          <a:xfrm>
-            <a:off x="411480" y="1435608"/>
-            <a:ext cx="2907792" cy="233172"/>
-          </a:xfrm>
-          <a:prstGeom prst="roundRect">
-            <a:avLst/>
-          </a:prstGeom>
-          <a:solidFill>
-            <a:srgbClr val="FFFFFF"/>
-          </a:solidFill>
-          <a:ln w="7620">
-            <a:solidFill>
-              <a:srgbClr val="D5E0EA"/>
-            </a:solidFill>
-          </a:ln>
-        </p:spPr>
-        <p:style>
-          <a:lnRef idx="1">
-            <a:schemeClr val="accent1"/>
-          </a:lnRef>
-          <a:fillRef idx="3">
-            <a:schemeClr val="accent1"/>
-          </a:fillRef>
-          <a:effectRef idx="2">
-            <a:schemeClr val="accent1"/>
-          </a:effectRef>
-          <a:fontRef idx="minor">
-            <a:schemeClr val="lt1"/>
-          </a:fontRef>
-        </p:style>
-        <p:txBody>
-          <a:bodyPr rtlCol="0" anchor="ctr"/>
-          <a:lstStyle/>
-          <a:p>
-            <a:pPr algn="l"/>
-            <a:r>
-              <a:rPr sz="950" b="1">
-                <a:solidFill>
-                  <a:srgbClr val="FFFFFF"/>
-                </a:solidFill>
-                <a:latin typeface="Arial"/>
-              </a:rPr>
-              <a:t>AI Career Guidance</a:t>
-            </a:r>
-          </a:p>
-        </p:txBody>
-      </p:sp>
-      <p:sp>
-        <p:nvSpPr>
-          <p:cNvPr id="34" name="Rounded Rectangle 33"/>
-          <p:cNvSpPr/>
-          <p:nvPr/>
-        </p:nvSpPr>
-        <p:spPr>
-          <a:xfrm>
-            <a:off x="3456432" y="1435608"/>
-            <a:ext cx="1481328" cy="233172"/>
-          </a:xfrm>
-          <a:prstGeom prst="roundRect">
-            <a:avLst/>
-          </a:prstGeom>
-          <a:solidFill>
-            <a:srgbClr val="FFFFFF"/>
-          </a:solidFill>
-          <a:ln w="7620">
-            <a:solidFill>
-              <a:srgbClr val="D5E0EA"/>
-            </a:solidFill>
-          </a:ln>
-        </p:spPr>
-        <p:style>
-          <a:lnRef idx="1">
-            <a:schemeClr val="accent1"/>
-          </a:lnRef>
-          <a:fillRef idx="3">
-            <a:schemeClr val="accent1"/>
-          </a:fillRef>
-          <a:effectRef idx="2">
-            <a:schemeClr val="accent1"/>
-          </a:effectRef>
-          <a:fontRef idx="minor">
-            <a:schemeClr val="lt1"/>
-          </a:fontRef>
-        </p:style>
-        <p:txBody>
-          <a:bodyPr rtlCol="0" anchor="ctr"/>
-          <a:lstStyle/>
-          <a:p>
-            <a:pPr algn="ctr"/>
-            <a:r>
-              <a:rPr sz="950" b="1">
-                <a:solidFill>
-                  <a:srgbClr val="FFFFFF"/>
-                </a:solidFill>
-                <a:latin typeface="Arial"/>
-              </a:rPr>
-              <a:t>✓ Advanced &amp; Personalized</a:t>
-            </a:r>
-          </a:p>
-        </p:txBody>
-      </p:sp>
-      <p:sp>
-        <p:nvSpPr>
-          <p:cNvPr id="35" name="Rounded Rectangle 34"/>
-          <p:cNvSpPr/>
-          <p:nvPr/>
-        </p:nvSpPr>
-        <p:spPr>
-          <a:xfrm>
-            <a:off x="5074920" y="1435608"/>
-            <a:ext cx="1143000" cy="233172"/>
-          </a:xfrm>
-          <a:prstGeom prst="roundRect">
-            <a:avLst/>
-          </a:prstGeom>
-          <a:solidFill>
-            <a:srgbClr val="FFFFFF"/>
-          </a:solidFill>
-          <a:ln w="7620">
-            <a:solidFill>
-              <a:srgbClr val="D5E0EA"/>
-            </a:solidFill>
-          </a:ln>
-        </p:spPr>
-        <p:style>
-          <a:lnRef idx="1">
-            <a:schemeClr val="accent1"/>
-          </a:lnRef>
-          <a:fillRef idx="3">
-            <a:schemeClr val="accent1"/>
-          </a:fillRef>
-          <a:effectRef idx="2">
-            <a:schemeClr val="accent1"/>
-          </a:effectRef>
-          <a:fontRef idx="minor">
-            <a:schemeClr val="lt1"/>
-          </a:fontRef>
-        </p:style>
-        <p:txBody>
-          <a:bodyPr rtlCol="0" anchor="ctr"/>
-          <a:lstStyle/>
-          <a:p>
-            <a:pPr algn="ctr"/>
-            <a:r>
-              <a:rPr sz="950" b="1">
-                <a:solidFill>
-                  <a:srgbClr val="FFFFFF"/>
-                </a:solidFill>
-                <a:latin typeface="Arial"/>
-              </a:rPr>
-              <a:t>✓ Basic Guidance</a:t>
-            </a:r>
-          </a:p>
-        </p:txBody>
-      </p:sp>
-      <p:sp>
-        <p:nvSpPr>
-          <p:cNvPr id="36" name="Rounded Rectangle 35"/>
-          <p:cNvSpPr/>
-          <p:nvPr/>
-        </p:nvSpPr>
-        <p:spPr>
-          <a:xfrm>
-            <a:off x="6327648" y="1435608"/>
-            <a:ext cx="1143000" cy="233172"/>
-          </a:xfrm>
-          <a:prstGeom prst="roundRect">
-            <a:avLst/>
-          </a:prstGeom>
-          <a:solidFill>
-            <a:srgbClr val="FFFFFF"/>
-          </a:solidFill>
-          <a:ln w="7620">
-            <a:solidFill>
-              <a:srgbClr val="D5E0EA"/>
-            </a:solidFill>
-          </a:ln>
-        </p:spPr>
-        <p:style>
-          <a:lnRef idx="1">
-            <a:schemeClr val="accent1"/>
-          </a:lnRef>
-          <a:fillRef idx="3">
-            <a:schemeClr val="accent1"/>
-          </a:fillRef>
-          <a:effectRef idx="2">
-            <a:schemeClr val="accent1"/>
-          </a:effectRef>
-          <a:fontRef idx="minor">
-            <a:schemeClr val="lt1"/>
-          </a:fontRef>
-        </p:style>
-        <p:txBody>
-          <a:bodyPr rtlCol="0" anchor="ctr"/>
-          <a:lstStyle/>
-          <a:p>
-            <a:pPr algn="ctr"/>
-            <a:r>
-              <a:rPr sz="950" b="1">
-                <a:solidFill>
-                  <a:srgbClr val="FFFFFF"/>
-                </a:solidFill>
-                <a:latin typeface="Arial"/>
-              </a:rPr>
-              <a:t>✓ Career Resources</a:t>
-            </a:r>
-          </a:p>
-        </p:txBody>
-      </p:sp>
-      <p:sp>
-        <p:nvSpPr>
-          <p:cNvPr id="37" name="Rounded Rectangle 36"/>
-          <p:cNvSpPr/>
-          <p:nvPr/>
-        </p:nvSpPr>
-        <p:spPr>
-          <a:xfrm>
-            <a:off x="7580375" y="1435608"/>
-            <a:ext cx="1143000" cy="233172"/>
-          </a:xfrm>
-          <a:prstGeom prst="roundRect">
-            <a:avLst/>
-          </a:prstGeom>
-          <a:solidFill>
-            <a:srgbClr val="FFFFFF"/>
-          </a:solidFill>
-          <a:ln w="7620">
-            <a:solidFill>
-              <a:srgbClr val="D5E0EA"/>
-            </a:solidFill>
-          </a:ln>
-        </p:spPr>
-        <p:style>
-          <a:lnRef idx="1">
-            <a:schemeClr val="accent1"/>
-          </a:lnRef>
-          <a:fillRef idx="3">
-            <a:schemeClr val="accent1"/>
-          </a:fillRef>
-          <a:effectRef idx="2">
-            <a:schemeClr val="accent1"/>
-          </a:effectRef>
-          <a:fontRef idx="minor">
-            <a:schemeClr val="lt1"/>
-          </a:fontRef>
-        </p:style>
-        <p:txBody>
-          <a:bodyPr rtlCol="0" anchor="ctr"/>
-          <a:lstStyle/>
-          <a:p>
-            <a:pPr algn="ctr"/>
-            <a:r>
-              <a:rPr sz="950" b="1">
-                <a:solidFill>
-                  <a:srgbClr val="FFFFFF"/>
-                </a:solidFill>
-                <a:latin typeface="Arial"/>
-              </a:rPr>
-              <a:t>× Not Available</a:t>
-            </a:r>
-          </a:p>
-        </p:txBody>
-      </p:sp>
-      <p:sp>
-        <p:nvSpPr>
-          <p:cNvPr id="38" name="Rounded Rectangle 37"/>
-          <p:cNvSpPr/>
-          <p:nvPr/>
-        </p:nvSpPr>
-        <p:spPr>
-          <a:xfrm>
-            <a:off x="8833104" y="1435608"/>
-            <a:ext cx="1783080" cy="233172"/>
-          </a:xfrm>
-          <a:prstGeom prst="roundRect">
-            <a:avLst/>
-          </a:prstGeom>
-          <a:solidFill>
-            <a:srgbClr val="FFFFFF"/>
-          </a:solidFill>
-          <a:ln w="7620">
-            <a:solidFill>
-              <a:srgbClr val="D5E0EA"/>
-            </a:solidFill>
-          </a:ln>
-        </p:spPr>
-        <p:style>
-          <a:lnRef idx="1">
-            <a:schemeClr val="accent1"/>
-          </a:lnRef>
-          <a:fillRef idx="3">
-            <a:schemeClr val="accent1"/>
-          </a:fillRef>
-          <a:effectRef idx="2">
-            <a:schemeClr val="accent1"/>
-          </a:effectRef>
-          <a:fontRef idx="minor">
-            <a:schemeClr val="lt1"/>
-          </a:fontRef>
-        </p:style>
-        <p:txBody>
-          <a:bodyPr rtlCol="0" anchor="ctr"/>
-          <a:lstStyle/>
-          <a:p>
-            <a:pPr algn="ctr"/>
-            <a:r>
-              <a:rPr sz="950" b="1">
-                <a:solidFill>
-                  <a:srgbClr val="FFFFFF"/>
-                </a:solidFill>
-                <a:latin typeface="Arial"/>
-              </a:rPr>
-              <a:t>✓ Limited Insights</a:t>
-            </a:r>
-          </a:p>
-        </p:txBody>
-      </p:sp>
-      <p:sp>
-        <p:nvSpPr>
-          <p:cNvPr id="39" name="Rounded Rectangle 38"/>
-          <p:cNvSpPr/>
-          <p:nvPr/>
-        </p:nvSpPr>
-        <p:spPr>
-          <a:xfrm>
-            <a:off x="411480" y="1668780"/>
-            <a:ext cx="2907792" cy="233172"/>
-          </a:xfrm>
-          <a:prstGeom prst="roundRect">
-            <a:avLst/>
-          </a:prstGeom>
-          <a:solidFill>
-            <a:srgbClr val="FFFFFF"/>
-          </a:solidFill>
-          <a:ln w="7620">
-            <a:solidFill>
-              <a:srgbClr val="D5E0EA"/>
-            </a:solidFill>
-          </a:ln>
-        </p:spPr>
-        <p:style>
-          <a:lnRef idx="1">
-            <a:schemeClr val="accent1"/>
-          </a:lnRef>
-          <a:fillRef idx="3">
-            <a:schemeClr val="accent1"/>
-          </a:fillRef>
-          <a:effectRef idx="2">
-            <a:schemeClr val="accent1"/>
-          </a:effectRef>
-          <a:fontRef idx="minor">
-            <a:schemeClr val="lt1"/>
-          </a:fontRef>
-        </p:style>
-        <p:txBody>
-          <a:bodyPr rtlCol="0" anchor="ctr"/>
-          <a:lstStyle/>
-          <a:p>
-            <a:pPr algn="l"/>
-            <a:r>
-              <a:rPr sz="950" b="1">
-                <a:solidFill>
-                  <a:srgbClr val="FFFFFF"/>
-                </a:solidFill>
-                <a:latin typeface="Arial"/>
-              </a:rPr>
-              <a:t>AI Resume Builder</a:t>
-            </a:r>
-          </a:p>
-        </p:txBody>
-      </p:sp>
-      <p:sp>
-        <p:nvSpPr>
-          <p:cNvPr id="40" name="Rounded Rectangle 39"/>
-          <p:cNvSpPr/>
-          <p:nvPr/>
-        </p:nvSpPr>
-        <p:spPr>
-          <a:xfrm>
-            <a:off x="3456432" y="1668780"/>
-            <a:ext cx="1481328" cy="233172"/>
-          </a:xfrm>
-          <a:prstGeom prst="roundRect">
-            <a:avLst/>
-          </a:prstGeom>
-          <a:solidFill>
-            <a:srgbClr val="FFFFFF"/>
-          </a:solidFill>
-          <a:ln w="7620">
-            <a:solidFill>
-              <a:srgbClr val="D5E0EA"/>
-            </a:solidFill>
-          </a:ln>
-        </p:spPr>
-        <p:style>
-          <a:lnRef idx="1">
-            <a:schemeClr val="accent1"/>
-          </a:lnRef>
-          <a:fillRef idx="3">
-            <a:schemeClr val="accent1"/>
-          </a:fillRef>
-          <a:effectRef idx="2">
-            <a:schemeClr val="accent1"/>
-          </a:effectRef>
-          <a:fontRef idx="minor">
-            <a:schemeClr val="lt1"/>
-          </a:fontRef>
-        </p:style>
-        <p:txBody>
-          <a:bodyPr rtlCol="0" anchor="ctr"/>
-          <a:lstStyle/>
-          <a:p>
-            <a:pPr algn="ctr"/>
-            <a:r>
-              <a:rPr sz="950" b="1">
-                <a:solidFill>
-                  <a:srgbClr val="FFFFFF"/>
-                </a:solidFill>
-                <a:latin typeface="Arial"/>
-              </a:rPr>
-              <a:t>✓ AI Optimized</a:t>
-            </a:r>
-          </a:p>
-        </p:txBody>
-      </p:sp>
-      <p:sp>
-        <p:nvSpPr>
-          <p:cNvPr id="41" name="Rounded Rectangle 40"/>
-          <p:cNvSpPr/>
-          <p:nvPr/>
-        </p:nvSpPr>
-        <p:spPr>
-          <a:xfrm>
-            <a:off x="5074920" y="1668780"/>
-            <a:ext cx="1143000" cy="233172"/>
-          </a:xfrm>
-          <a:prstGeom prst="roundRect">
-            <a:avLst/>
-          </a:prstGeom>
-          <a:solidFill>
-            <a:srgbClr val="FFFFFF"/>
-          </a:solidFill>
-          <a:ln w="7620">
-            <a:solidFill>
-              <a:srgbClr val="D5E0EA"/>
-            </a:solidFill>
-          </a:ln>
-        </p:spPr>
-        <p:style>
-          <a:lnRef idx="1">
-            <a:schemeClr val="accent1"/>
-          </a:lnRef>
-          <a:fillRef idx="3">
-            <a:schemeClr val="accent1"/>
-          </a:fillRef>
-          <a:effectRef idx="2">
-            <a:schemeClr val="accent1"/>
-          </a:effectRef>
-          <a:fontRef idx="minor">
-            <a:schemeClr val="lt1"/>
-          </a:fontRef>
-        </p:style>
-        <p:txBody>
-          <a:bodyPr rtlCol="0" anchor="ctr"/>
-          <a:lstStyle/>
-          <a:p>
-            <a:pPr algn="ctr"/>
-            <a:r>
-              <a:rPr sz="950" b="1">
-                <a:solidFill>
-                  <a:srgbClr val="FFFFFF"/>
-                </a:solidFill>
-                <a:latin typeface="Arial"/>
-              </a:rPr>
-              <a:t>✓ Available</a:t>
-            </a:r>
-          </a:p>
-        </p:txBody>
-      </p:sp>
-      <p:sp>
-        <p:nvSpPr>
-          <p:cNvPr id="42" name="Rounded Rectangle 41"/>
-          <p:cNvSpPr/>
-          <p:nvPr/>
-        </p:nvSpPr>
-        <p:spPr>
-          <a:xfrm>
-            <a:off x="6327648" y="1668780"/>
-            <a:ext cx="1143000" cy="233172"/>
-          </a:xfrm>
-          <a:prstGeom prst="roundRect">
-            <a:avLst/>
-          </a:prstGeom>
-          <a:solidFill>
-            <a:srgbClr val="FFFFFF"/>
-          </a:solidFill>
-          <a:ln w="7620">
-            <a:solidFill>
-              <a:srgbClr val="D5E0EA"/>
-            </a:solidFill>
-          </a:ln>
-        </p:spPr>
-        <p:style>
-          <a:lnRef idx="1">
-            <a:schemeClr val="accent1"/>
-          </a:lnRef>
-          <a:fillRef idx="3">
-            <a:schemeClr val="accent1"/>
-          </a:fillRef>
-          <a:effectRef idx="2">
-            <a:schemeClr val="accent1"/>
-          </a:effectRef>
-          <a:fontRef idx="minor">
-            <a:schemeClr val="lt1"/>
-          </a:fontRef>
-        </p:style>
-        <p:txBody>
-          <a:bodyPr rtlCol="0" anchor="ctr"/>
-          <a:lstStyle/>
-          <a:p>
-            <a:pPr algn="ctr"/>
-            <a:r>
-              <a:rPr sz="950" b="1">
-                <a:solidFill>
-                  <a:srgbClr val="FFFFFF"/>
-                </a:solidFill>
-                <a:latin typeface="Arial"/>
-              </a:rPr>
-              <a:t>✓ Available</a:t>
-            </a:r>
-          </a:p>
-        </p:txBody>
-      </p:sp>
-      <p:sp>
-        <p:nvSpPr>
-          <p:cNvPr id="43" name="Rounded Rectangle 42"/>
-          <p:cNvSpPr/>
-          <p:nvPr/>
-        </p:nvSpPr>
-        <p:spPr>
-          <a:xfrm>
-            <a:off x="7580375" y="1668780"/>
-            <a:ext cx="1143000" cy="233172"/>
-          </a:xfrm>
-          <a:prstGeom prst="roundRect">
-            <a:avLst/>
-          </a:prstGeom>
-          <a:solidFill>
-            <a:srgbClr val="FFFFFF"/>
-          </a:solidFill>
-          <a:ln w="7620">
-            <a:solidFill>
-              <a:srgbClr val="D5E0EA"/>
-            </a:solidFill>
-          </a:ln>
-        </p:spPr>
-        <p:style>
-          <a:lnRef idx="1">
-            <a:schemeClr val="accent1"/>
-          </a:lnRef>
-          <a:fillRef idx="3">
-            <a:schemeClr val="accent1"/>
-          </a:fillRef>
-          <a:effectRef idx="2">
-            <a:schemeClr val="accent1"/>
-          </a:effectRef>
-          <a:fontRef idx="minor">
-            <a:schemeClr val="lt1"/>
-          </a:fontRef>
-        </p:style>
-        <p:txBody>
-          <a:bodyPr rtlCol="0" anchor="ctr"/>
-          <a:lstStyle/>
-          <a:p>
-            <a:pPr algn="ctr"/>
-            <a:r>
-              <a:rPr sz="950" b="1">
-                <a:solidFill>
-                  <a:srgbClr val="FFFFFF"/>
-                </a:solidFill>
-                <a:latin typeface="Arial"/>
-              </a:rPr>
-              <a:t>× Not Available</a:t>
-            </a:r>
-          </a:p>
-        </p:txBody>
-      </p:sp>
-      <p:sp>
-        <p:nvSpPr>
-          <p:cNvPr id="44" name="Rounded Rectangle 43"/>
-          <p:cNvSpPr/>
-          <p:nvPr/>
-        </p:nvSpPr>
-        <p:spPr>
-          <a:xfrm>
-            <a:off x="8833104" y="1668780"/>
-            <a:ext cx="1783080" cy="233172"/>
-          </a:xfrm>
-          <a:prstGeom prst="roundRect">
-            <a:avLst/>
-          </a:prstGeom>
-          <a:solidFill>
-            <a:srgbClr val="FFFFFF"/>
-          </a:solidFill>
-          <a:ln w="7620">
-            <a:solidFill>
-              <a:srgbClr val="D5E0EA"/>
-            </a:solidFill>
-          </a:ln>
-        </p:spPr>
-        <p:style>
-          <a:lnRef idx="1">
-            <a:schemeClr val="accent1"/>
-          </a:lnRef>
-          <a:fillRef idx="3">
-            <a:schemeClr val="accent1"/>
-          </a:fillRef>
-          <a:effectRef idx="2">
-            <a:schemeClr val="accent1"/>
-          </a:effectRef>
-          <a:fontRef idx="minor">
-            <a:schemeClr val="lt1"/>
-          </a:fontRef>
-        </p:style>
-        <p:txBody>
-          <a:bodyPr rtlCol="0" anchor="ctr"/>
-          <a:lstStyle/>
-          <a:p>
-            <a:pPr algn="ctr"/>
-            <a:r>
-              <a:rPr sz="950" b="1">
-                <a:solidFill>
-                  <a:srgbClr val="FFFFFF"/>
-                </a:solidFill>
-                <a:latin typeface="Arial"/>
-              </a:rPr>
-              <a:t>× Not Available</a:t>
-            </a:r>
-          </a:p>
-        </p:txBody>
-      </p:sp>
-      <p:sp>
-        <p:nvSpPr>
-          <p:cNvPr id="45" name="Rounded Rectangle 44"/>
-          <p:cNvSpPr/>
-          <p:nvPr/>
-        </p:nvSpPr>
-        <p:spPr>
-          <a:xfrm>
-            <a:off x="411480" y="1901952"/>
-            <a:ext cx="2907792" cy="233172"/>
-          </a:xfrm>
-          <a:prstGeom prst="roundRect">
-            <a:avLst/>
-          </a:prstGeom>
-          <a:solidFill>
-            <a:srgbClr val="FFFFFF"/>
-          </a:solidFill>
-          <a:ln w="7620">
-            <a:solidFill>
-              <a:srgbClr val="D5E0EA"/>
-            </a:solidFill>
-          </a:ln>
-        </p:spPr>
-        <p:style>
-          <a:lnRef idx="1">
-            <a:schemeClr val="accent1"/>
-          </a:lnRef>
-          <a:fillRef idx="3">
-            <a:schemeClr val="accent1"/>
-          </a:fillRef>
-          <a:effectRef idx="2">
-            <a:schemeClr val="accent1"/>
-          </a:effectRef>
-          <a:fontRef idx="minor">
-            <a:schemeClr val="lt1"/>
-          </a:fontRef>
-        </p:style>
-        <p:txBody>
-          <a:bodyPr rtlCol="0" anchor="ctr"/>
-          <a:lstStyle/>
-          <a:p>
-            <a:pPr algn="l"/>
-            <a:r>
-              <a:rPr sz="950" b="1">
-                <a:solidFill>
-                  <a:srgbClr val="FFFFFF"/>
-                </a:solidFill>
-                <a:latin typeface="Arial"/>
-              </a:rPr>
-              <a:t>AI Mock Interview</a:t>
-            </a:r>
-          </a:p>
-        </p:txBody>
-      </p:sp>
-      <p:sp>
-        <p:nvSpPr>
-          <p:cNvPr id="46" name="Rounded Rectangle 45"/>
-          <p:cNvSpPr/>
-          <p:nvPr/>
-        </p:nvSpPr>
-        <p:spPr>
-          <a:xfrm>
-            <a:off x="3456432" y="1901952"/>
-            <a:ext cx="1481328" cy="233172"/>
-          </a:xfrm>
-          <a:prstGeom prst="roundRect">
-            <a:avLst/>
-          </a:prstGeom>
-          <a:solidFill>
-            <a:srgbClr val="FFFFFF"/>
-          </a:solidFill>
-          <a:ln w="7620">
-            <a:solidFill>
-              <a:srgbClr val="D5E0EA"/>
-            </a:solidFill>
-          </a:ln>
-        </p:spPr>
-        <p:style>
-          <a:lnRef idx="1">
-            <a:schemeClr val="accent1"/>
-          </a:lnRef>
-          <a:fillRef idx="3">
-            <a:schemeClr val="accent1"/>
-          </a:fillRef>
-          <a:effectRef idx="2">
-            <a:schemeClr val="accent1"/>
-          </a:effectRef>
-          <a:fontRef idx="minor">
-            <a:schemeClr val="lt1"/>
-          </a:fontRef>
-        </p:style>
-        <p:txBody>
-          <a:bodyPr rtlCol="0" anchor="ctr"/>
-          <a:lstStyle/>
-          <a:p>
-            <a:pPr algn="ctr"/>
-            <a:r>
-              <a:rPr sz="950" b="1">
-                <a:solidFill>
-                  <a:srgbClr val="FFFFFF"/>
-                </a:solidFill>
-                <a:latin typeface="Arial"/>
-              </a:rPr>
-              <a:t>✓ Adaptive &amp; AI Driven</a:t>
-            </a:r>
-          </a:p>
-        </p:txBody>
-      </p:sp>
-      <p:sp>
-        <p:nvSpPr>
-          <p:cNvPr id="47" name="Rounded Rectangle 46"/>
-          <p:cNvSpPr/>
-          <p:nvPr/>
-        </p:nvSpPr>
-        <p:spPr>
-          <a:xfrm>
-            <a:off x="5074920" y="1901952"/>
-            <a:ext cx="1143000" cy="233172"/>
-          </a:xfrm>
-          <a:prstGeom prst="roundRect">
-            <a:avLst/>
-          </a:prstGeom>
-          <a:solidFill>
-            <a:srgbClr val="FFFFFF"/>
-          </a:solidFill>
-          <a:ln w="7620">
-            <a:solidFill>
-              <a:srgbClr val="D5E0EA"/>
-            </a:solidFill>
-          </a:ln>
-        </p:spPr>
-        <p:style>
-          <a:lnRef idx="1">
-            <a:schemeClr val="accent1"/>
-          </a:lnRef>
-          <a:fillRef idx="3">
-            <a:schemeClr val="accent1"/>
-          </a:fillRef>
-          <a:effectRef idx="2">
-            <a:schemeClr val="accent1"/>
-          </a:effectRef>
-          <a:fontRef idx="minor">
-            <a:schemeClr val="lt1"/>
-          </a:fontRef>
-        </p:style>
-        <p:txBody>
-          <a:bodyPr rtlCol="0" anchor="ctr"/>
-          <a:lstStyle/>
-          <a:p>
-            <a:pPr algn="ctr"/>
-            <a:r>
-              <a:rPr sz="950" b="1">
-                <a:solidFill>
-                  <a:srgbClr val="FFFFFF"/>
-                </a:solidFill>
-                <a:latin typeface="Arial"/>
-              </a:rPr>
-              <a:t>✓ Available</a:t>
-            </a:r>
-          </a:p>
-        </p:txBody>
-      </p:sp>
-      <p:sp>
-        <p:nvSpPr>
-          <p:cNvPr id="48" name="Rounded Rectangle 47"/>
-          <p:cNvSpPr/>
-          <p:nvPr/>
-        </p:nvSpPr>
-        <p:spPr>
-          <a:xfrm>
-            <a:off x="6327648" y="1901952"/>
-            <a:ext cx="1143000" cy="233172"/>
-          </a:xfrm>
-          <a:prstGeom prst="roundRect">
-            <a:avLst/>
-          </a:prstGeom>
-          <a:solidFill>
-            <a:srgbClr val="FFFFFF"/>
-          </a:solidFill>
-          <a:ln w="7620">
-            <a:solidFill>
-              <a:srgbClr val="D5E0EA"/>
-            </a:solidFill>
-          </a:ln>
-        </p:spPr>
-        <p:style>
-          <a:lnRef idx="1">
-            <a:schemeClr val="accent1"/>
-          </a:lnRef>
-          <a:fillRef idx="3">
-            <a:schemeClr val="accent1"/>
-          </a:fillRef>
-          <a:effectRef idx="2">
-            <a:schemeClr val="accent1"/>
-          </a:effectRef>
-          <a:fontRef idx="minor">
-            <a:schemeClr val="lt1"/>
-          </a:fontRef>
-        </p:style>
-        <p:txBody>
-          <a:bodyPr rtlCol="0" anchor="ctr"/>
-          <a:lstStyle/>
-          <a:p>
-            <a:pPr algn="ctr"/>
-            <a:r>
-              <a:rPr sz="950" b="1">
-                <a:solidFill>
-                  <a:srgbClr val="FFFFFF"/>
-                </a:solidFill>
-                <a:latin typeface="Arial"/>
-              </a:rPr>
-              <a:t>✓ Available</a:t>
-            </a:r>
-          </a:p>
-        </p:txBody>
-      </p:sp>
-      <p:sp>
-        <p:nvSpPr>
-          <p:cNvPr id="49" name="Rounded Rectangle 48"/>
-          <p:cNvSpPr/>
-          <p:nvPr/>
-        </p:nvSpPr>
-        <p:spPr>
-          <a:xfrm>
-            <a:off x="7580375" y="1901952"/>
-            <a:ext cx="1143000" cy="233172"/>
-          </a:xfrm>
-          <a:prstGeom prst="roundRect">
-            <a:avLst/>
-          </a:prstGeom>
-          <a:solidFill>
-            <a:srgbClr val="FFFFFF"/>
-          </a:solidFill>
-          <a:ln w="7620">
-            <a:solidFill>
-              <a:srgbClr val="D5E0EA"/>
-            </a:solidFill>
-          </a:ln>
-        </p:spPr>
-        <p:style>
-          <a:lnRef idx="1">
-            <a:schemeClr val="accent1"/>
-          </a:lnRef>
-          <a:fillRef idx="3">
-            <a:schemeClr val="accent1"/>
-          </a:fillRef>
-          <a:effectRef idx="2">
-            <a:schemeClr val="accent1"/>
-          </a:effectRef>
-          <a:fontRef idx="minor">
-            <a:schemeClr val="lt1"/>
-          </a:fontRef>
-        </p:style>
-        <p:txBody>
-          <a:bodyPr rtlCol="0" anchor="ctr"/>
-          <a:lstStyle/>
-          <a:p>
-            <a:pPr algn="ctr"/>
-            <a:r>
-              <a:rPr sz="950" b="1">
-                <a:solidFill>
-                  <a:srgbClr val="FFFFFF"/>
-                </a:solidFill>
-                <a:latin typeface="Arial"/>
-              </a:rPr>
-              <a:t>✓ Available</a:t>
-            </a:r>
-          </a:p>
-        </p:txBody>
-      </p:sp>
-      <p:sp>
-        <p:nvSpPr>
-          <p:cNvPr id="50" name="Rounded Rectangle 49"/>
-          <p:cNvSpPr/>
-          <p:nvPr/>
-        </p:nvSpPr>
-        <p:spPr>
-          <a:xfrm>
-            <a:off x="8833104" y="1901952"/>
-            <a:ext cx="1783080" cy="233172"/>
-          </a:xfrm>
-          <a:prstGeom prst="roundRect">
-            <a:avLst/>
-          </a:prstGeom>
-          <a:solidFill>
-            <a:srgbClr val="FFFFFF"/>
-          </a:solidFill>
-          <a:ln w="7620">
-            <a:solidFill>
-              <a:srgbClr val="D5E0EA"/>
-            </a:solidFill>
-          </a:ln>
-        </p:spPr>
-        <p:style>
-          <a:lnRef idx="1">
-            <a:schemeClr val="accent1"/>
-          </a:lnRef>
-          <a:fillRef idx="3">
-            <a:schemeClr val="accent1"/>
-          </a:fillRef>
-          <a:effectRef idx="2">
-            <a:schemeClr val="accent1"/>
-          </a:effectRef>
-          <a:fontRef idx="minor">
-            <a:schemeClr val="lt1"/>
-          </a:fontRef>
-        </p:style>
-        <p:txBody>
-          <a:bodyPr rtlCol="0" anchor="ctr"/>
-          <a:lstStyle/>
-          <a:p>
-            <a:pPr algn="ctr"/>
-            <a:r>
-              <a:rPr sz="950" b="1">
-                <a:solidFill>
-                  <a:srgbClr val="FFFFFF"/>
-                </a:solidFill>
-                <a:latin typeface="Arial"/>
-              </a:rPr>
-              <a:t>× Not Available</a:t>
-            </a:r>
-          </a:p>
-        </p:txBody>
-      </p:sp>
-      <p:sp>
-        <p:nvSpPr>
-          <p:cNvPr id="51" name="Rounded Rectangle 50"/>
-          <p:cNvSpPr/>
-          <p:nvPr/>
-        </p:nvSpPr>
-        <p:spPr>
-          <a:xfrm>
-            <a:off x="411480" y="2135124"/>
-            <a:ext cx="2907792" cy="233172"/>
-          </a:xfrm>
-          <a:prstGeom prst="roundRect">
-            <a:avLst/>
-          </a:prstGeom>
-          <a:solidFill>
-            <a:srgbClr val="FFFFFF"/>
-          </a:solidFill>
-          <a:ln w="7620">
-            <a:solidFill>
-              <a:srgbClr val="D5E0EA"/>
-            </a:solidFill>
-          </a:ln>
-        </p:spPr>
-        <p:style>
-          <a:lnRef idx="1">
-            <a:schemeClr val="accent1"/>
-          </a:lnRef>
-          <a:fillRef idx="3">
-            <a:schemeClr val="accent1"/>
-          </a:fillRef>
-          <a:effectRef idx="2">
-            <a:schemeClr val="accent1"/>
-          </a:effectRef>
-          <a:fontRef idx="minor">
-            <a:schemeClr val="lt1"/>
-          </a:fontRef>
-        </p:style>
-        <p:txBody>
-          <a:bodyPr rtlCol="0" anchor="ctr"/>
-          <a:lstStyle/>
-          <a:p>
-            <a:pPr algn="l"/>
-            <a:r>
-              <a:rPr sz="950" b="1">
-                <a:solidFill>
-                  <a:srgbClr val="FFFFFF"/>
-                </a:solidFill>
-                <a:latin typeface="Arial"/>
-              </a:rPr>
-              <a:t>Jobs &amp; Internships</a:t>
-            </a:r>
-          </a:p>
-        </p:txBody>
-      </p:sp>
-      <p:sp>
-        <p:nvSpPr>
-          <p:cNvPr id="52" name="Rounded Rectangle 51"/>
-          <p:cNvSpPr/>
-          <p:nvPr/>
-        </p:nvSpPr>
-        <p:spPr>
-          <a:xfrm>
-            <a:off x="3456432" y="2135124"/>
-            <a:ext cx="1481328" cy="233172"/>
-          </a:xfrm>
-          <a:prstGeom prst="roundRect">
-            <a:avLst/>
-          </a:prstGeom>
-          <a:solidFill>
-            <a:srgbClr val="FFFFFF"/>
-          </a:solidFill>
-          <a:ln w="7620">
-            <a:solidFill>
-              <a:srgbClr val="D5E0EA"/>
-            </a:solidFill>
-          </a:ln>
-        </p:spPr>
-        <p:style>
-          <a:lnRef idx="1">
-            <a:schemeClr val="accent1"/>
-          </a:lnRef>
-          <a:fillRef idx="3">
-            <a:schemeClr val="accent1"/>
-          </a:fillRef>
-          <a:effectRef idx="2">
-            <a:schemeClr val="accent1"/>
-          </a:effectRef>
-          <a:fontRef idx="minor">
-            <a:schemeClr val="lt1"/>
-          </a:fontRef>
-        </p:style>
-        <p:txBody>
-          <a:bodyPr rtlCol="0" anchor="ctr"/>
-          <a:lstStyle/>
-          <a:p>
-            <a:pPr algn="ctr"/>
-            <a:r>
-              <a:rPr sz="950" b="1">
-                <a:solidFill>
-                  <a:srgbClr val="FFFFFF"/>
-                </a:solidFill>
-                <a:latin typeface="Arial"/>
-              </a:rPr>
-              <a:t>✓ Curated + AI Matched</a:t>
-            </a:r>
-          </a:p>
-        </p:txBody>
-      </p:sp>
-      <p:sp>
-        <p:nvSpPr>
-          <p:cNvPr id="53" name="Rounded Rectangle 52"/>
-          <p:cNvSpPr/>
-          <p:nvPr/>
-        </p:nvSpPr>
-        <p:spPr>
-          <a:xfrm>
-            <a:off x="5074920" y="2135124"/>
-            <a:ext cx="1143000" cy="233172"/>
-          </a:xfrm>
-          <a:prstGeom prst="roundRect">
-            <a:avLst/>
-          </a:prstGeom>
-          <a:solidFill>
-            <a:srgbClr val="FFFFFF"/>
-          </a:solidFill>
-          <a:ln w="7620">
-            <a:solidFill>
-              <a:srgbClr val="D5E0EA"/>
-            </a:solidFill>
-          </a:ln>
-        </p:spPr>
-        <p:style>
-          <a:lnRef idx="1">
-            <a:schemeClr val="accent1"/>
-          </a:lnRef>
-          <a:fillRef idx="3">
-            <a:schemeClr val="accent1"/>
-          </a:fillRef>
-          <a:effectRef idx="2">
-            <a:schemeClr val="accent1"/>
-          </a:effectRef>
-          <a:fontRef idx="minor">
-            <a:schemeClr val="lt1"/>
-          </a:fontRef>
-        </p:style>
-        <p:txBody>
-          <a:bodyPr rtlCol="0" anchor="ctr"/>
-          <a:lstStyle/>
-          <a:p>
-            <a:pPr algn="ctr"/>
-            <a:r>
-              <a:rPr sz="950" b="1">
-                <a:solidFill>
-                  <a:srgbClr val="FFFFFF"/>
-                </a:solidFill>
-                <a:latin typeface="Arial"/>
-              </a:rPr>
-              <a:t>✓ Available</a:t>
-            </a:r>
-          </a:p>
-        </p:txBody>
-      </p:sp>
-      <p:sp>
-        <p:nvSpPr>
-          <p:cNvPr id="54" name="Rounded Rectangle 53"/>
-          <p:cNvSpPr/>
-          <p:nvPr/>
-        </p:nvSpPr>
-        <p:spPr>
-          <a:xfrm>
-            <a:off x="6327648" y="2135124"/>
-            <a:ext cx="1143000" cy="233172"/>
-          </a:xfrm>
-          <a:prstGeom prst="roundRect">
-            <a:avLst/>
-          </a:prstGeom>
-          <a:solidFill>
-            <a:srgbClr val="FFFFFF"/>
-          </a:solidFill>
-          <a:ln w="7620">
-            <a:solidFill>
-              <a:srgbClr val="D5E0EA"/>
-            </a:solidFill>
-          </a:ln>
-        </p:spPr>
-        <p:style>
-          <a:lnRef idx="1">
-            <a:schemeClr val="accent1"/>
-          </a:lnRef>
-          <a:fillRef idx="3">
-            <a:schemeClr val="accent1"/>
-          </a:fillRef>
-          <a:effectRef idx="2">
-            <a:schemeClr val="accent1"/>
-          </a:effectRef>
-          <a:fontRef idx="minor">
-            <a:schemeClr val="lt1"/>
-          </a:fontRef>
-        </p:style>
-        <p:txBody>
-          <a:bodyPr rtlCol="0" anchor="ctr"/>
-          <a:lstStyle/>
-          <a:p>
-            <a:pPr algn="ctr"/>
-            <a:r>
-              <a:rPr sz="950" b="1">
-                <a:solidFill>
-                  <a:srgbClr val="FFFFFF"/>
-                </a:solidFill>
-                <a:latin typeface="Arial"/>
-              </a:rPr>
-              <a:t>✓ Available</a:t>
-            </a:r>
-          </a:p>
-        </p:txBody>
-      </p:sp>
-      <p:sp>
-        <p:nvSpPr>
-          <p:cNvPr id="55" name="Rounded Rectangle 54"/>
-          <p:cNvSpPr/>
-          <p:nvPr/>
-        </p:nvSpPr>
-        <p:spPr>
-          <a:xfrm>
-            <a:off x="7580375" y="2135124"/>
-            <a:ext cx="1143000" cy="233172"/>
-          </a:xfrm>
-          <a:prstGeom prst="roundRect">
-            <a:avLst/>
-          </a:prstGeom>
-          <a:solidFill>
-            <a:srgbClr val="FFFFFF"/>
-          </a:solidFill>
-          <a:ln w="7620">
-            <a:solidFill>
-              <a:srgbClr val="D5E0EA"/>
-            </a:solidFill>
-          </a:ln>
-        </p:spPr>
-        <p:style>
-          <a:lnRef idx="1">
-            <a:schemeClr val="accent1"/>
-          </a:lnRef>
-          <a:fillRef idx="3">
-            <a:schemeClr val="accent1"/>
-          </a:fillRef>
-          <a:effectRef idx="2">
-            <a:schemeClr val="accent1"/>
-          </a:effectRef>
-          <a:fontRef idx="minor">
-            <a:schemeClr val="lt1"/>
-          </a:fontRef>
-        </p:style>
-        <p:txBody>
-          <a:bodyPr rtlCol="0" anchor="ctr"/>
-          <a:lstStyle/>
-          <a:p>
-            <a:pPr algn="ctr"/>
-            <a:r>
-              <a:rPr sz="950" b="1">
-                <a:solidFill>
-                  <a:srgbClr val="FFFFFF"/>
-                </a:solidFill>
-                <a:latin typeface="Arial"/>
-              </a:rPr>
-              <a:t>✓ Available</a:t>
-            </a:r>
-          </a:p>
-        </p:txBody>
-      </p:sp>
-      <p:sp>
-        <p:nvSpPr>
-          <p:cNvPr id="56" name="Rounded Rectangle 55"/>
-          <p:cNvSpPr/>
-          <p:nvPr/>
-        </p:nvSpPr>
-        <p:spPr>
-          <a:xfrm>
-            <a:off x="8833104" y="2135124"/>
-            <a:ext cx="1783080" cy="233172"/>
-          </a:xfrm>
-          <a:prstGeom prst="roundRect">
-            <a:avLst/>
-          </a:prstGeom>
-          <a:solidFill>
-            <a:srgbClr val="FFFFFF"/>
-          </a:solidFill>
-          <a:ln w="7620">
-            <a:solidFill>
-              <a:srgbClr val="D5E0EA"/>
-            </a:solidFill>
-          </a:ln>
-        </p:spPr>
-        <p:style>
-          <a:lnRef idx="1">
-            <a:schemeClr val="accent1"/>
-          </a:lnRef>
-          <a:fillRef idx="3">
-            <a:schemeClr val="accent1"/>
-          </a:fillRef>
-          <a:effectRef idx="2">
-            <a:schemeClr val="accent1"/>
-          </a:effectRef>
-          <a:fontRef idx="minor">
-            <a:schemeClr val="lt1"/>
-          </a:fontRef>
-        </p:style>
-        <p:txBody>
-          <a:bodyPr rtlCol="0" anchor="ctr"/>
-          <a:lstStyle/>
-          <a:p>
-            <a:pPr algn="ctr"/>
-            <a:r>
-              <a:rPr sz="950" b="1">
-                <a:solidFill>
-                  <a:srgbClr val="FFFFFF"/>
-                </a:solidFill>
-                <a:latin typeface="Arial"/>
-              </a:rPr>
-              <a:t>✓ Yes</a:t>
-            </a:r>
-          </a:p>
-        </p:txBody>
-      </p:sp>
-      <p:sp>
-        <p:nvSpPr>
-          <p:cNvPr id="57" name="Rounded Rectangle 56"/>
-          <p:cNvSpPr/>
-          <p:nvPr/>
-        </p:nvSpPr>
-        <p:spPr>
-          <a:xfrm>
-            <a:off x="411480" y="2368296"/>
-            <a:ext cx="2907792" cy="233172"/>
-          </a:xfrm>
-          <a:prstGeom prst="roundRect">
-            <a:avLst/>
-          </a:prstGeom>
-          <a:solidFill>
-            <a:srgbClr val="FFFFFF"/>
-          </a:solidFill>
-          <a:ln w="7620">
-            <a:solidFill>
-              <a:srgbClr val="D5E0EA"/>
-            </a:solidFill>
-          </a:ln>
-        </p:spPr>
-        <p:style>
-          <a:lnRef idx="1">
-            <a:schemeClr val="accent1"/>
-          </a:lnRef>
-          <a:fillRef idx="3">
-            <a:schemeClr val="accent1"/>
-          </a:fillRef>
-          <a:effectRef idx="2">
-            <a:schemeClr val="accent1"/>
-          </a:effectRef>
-          <a:fontRef idx="minor">
-            <a:schemeClr val="lt1"/>
-          </a:fontRef>
-        </p:style>
-        <p:txBody>
-          <a:bodyPr rtlCol="0" anchor="ctr"/>
-          <a:lstStyle/>
-          <a:p>
-            <a:pPr algn="l"/>
-            <a:r>
-              <a:rPr sz="950" b="1">
-                <a:solidFill>
-                  <a:srgbClr val="FFFFFF"/>
-                </a:solidFill>
-                <a:latin typeface="Arial"/>
-              </a:rPr>
-              <a:t>Skill Assessment</a:t>
-            </a:r>
-          </a:p>
-        </p:txBody>
-      </p:sp>
-      <p:sp>
-        <p:nvSpPr>
-          <p:cNvPr id="58" name="Rounded Rectangle 57"/>
-          <p:cNvSpPr/>
-          <p:nvPr/>
-        </p:nvSpPr>
-        <p:spPr>
-          <a:xfrm>
-            <a:off x="3456432" y="2368296"/>
-            <a:ext cx="1481328" cy="233172"/>
-          </a:xfrm>
-          <a:prstGeom prst="roundRect">
-            <a:avLst/>
-          </a:prstGeom>
-          <a:solidFill>
-            <a:srgbClr val="FFFFFF"/>
-          </a:solidFill>
-          <a:ln w="7620">
-            <a:solidFill>
-              <a:srgbClr val="D5E0EA"/>
-            </a:solidFill>
-          </a:ln>
-        </p:spPr>
-        <p:style>
-          <a:lnRef idx="1">
-            <a:schemeClr val="accent1"/>
-          </a:lnRef>
-          <a:fillRef idx="3">
-            <a:schemeClr val="accent1"/>
-          </a:fillRef>
-          <a:effectRef idx="2">
-            <a:schemeClr val="accent1"/>
-          </a:effectRef>
-          <a:fontRef idx="minor">
-            <a:schemeClr val="lt1"/>
-          </a:fontRef>
-        </p:style>
-        <p:txBody>
-          <a:bodyPr rtlCol="0" anchor="ctr"/>
-          <a:lstStyle/>
-          <a:p>
-            <a:pPr algn="ctr"/>
-            <a:r>
-              <a:rPr sz="950" b="1">
-                <a:solidFill>
-                  <a:srgbClr val="FFFFFF"/>
-                </a:solidFill>
-                <a:latin typeface="Arial"/>
-              </a:rPr>
-              <a:t>✓ 20–30 Q AI Diagnostic</a:t>
-            </a:r>
-          </a:p>
-        </p:txBody>
-      </p:sp>
-      <p:sp>
-        <p:nvSpPr>
-          <p:cNvPr id="59" name="Rounded Rectangle 58"/>
-          <p:cNvSpPr/>
-          <p:nvPr/>
-        </p:nvSpPr>
-        <p:spPr>
-          <a:xfrm>
-            <a:off x="5074920" y="2368296"/>
-            <a:ext cx="1143000" cy="233172"/>
-          </a:xfrm>
-          <a:prstGeom prst="roundRect">
-            <a:avLst/>
-          </a:prstGeom>
-          <a:solidFill>
-            <a:srgbClr val="FFFFFF"/>
-          </a:solidFill>
-          <a:ln w="7620">
-            <a:solidFill>
-              <a:srgbClr val="D5E0EA"/>
-            </a:solidFill>
-          </a:ln>
-        </p:spPr>
-        <p:style>
-          <a:lnRef idx="1">
-            <a:schemeClr val="accent1"/>
-          </a:lnRef>
-          <a:fillRef idx="3">
-            <a:schemeClr val="accent1"/>
-          </a:fillRef>
-          <a:effectRef idx="2">
-            <a:schemeClr val="accent1"/>
-          </a:effectRef>
-          <a:fontRef idx="minor">
-            <a:schemeClr val="lt1"/>
-          </a:fontRef>
-        </p:style>
-        <p:txBody>
-          <a:bodyPr rtlCol="0" anchor="ctr"/>
-          <a:lstStyle/>
-          <a:p>
-            <a:pPr algn="ctr"/>
-            <a:r>
-              <a:rPr sz="950" b="1">
-                <a:solidFill>
-                  <a:srgbClr val="FFFFFF"/>
-                </a:solidFill>
-                <a:latin typeface="Arial"/>
-              </a:rPr>
-              <a:t>✓ Available</a:t>
-            </a:r>
-          </a:p>
-        </p:txBody>
-      </p:sp>
-      <p:sp>
-        <p:nvSpPr>
-          <p:cNvPr id="60" name="Rounded Rectangle 59"/>
-          <p:cNvSpPr/>
-          <p:nvPr/>
-        </p:nvSpPr>
-        <p:spPr>
-          <a:xfrm>
-            <a:off x="6327648" y="2368296"/>
-            <a:ext cx="1143000" cy="233172"/>
-          </a:xfrm>
-          <a:prstGeom prst="roundRect">
-            <a:avLst/>
-          </a:prstGeom>
-          <a:solidFill>
-            <a:srgbClr val="FFFFFF"/>
-          </a:solidFill>
-          <a:ln w="7620">
-            <a:solidFill>
-              <a:srgbClr val="D5E0EA"/>
-            </a:solidFill>
-          </a:ln>
-        </p:spPr>
-        <p:style>
-          <a:lnRef idx="1">
-            <a:schemeClr val="accent1"/>
-          </a:lnRef>
-          <a:fillRef idx="3">
-            <a:schemeClr val="accent1"/>
-          </a:fillRef>
-          <a:effectRef idx="2">
-            <a:schemeClr val="accent1"/>
-          </a:effectRef>
-          <a:fontRef idx="minor">
-            <a:schemeClr val="lt1"/>
-          </a:fontRef>
-        </p:style>
-        <p:txBody>
-          <a:bodyPr rtlCol="0" anchor="ctr"/>
-          <a:lstStyle/>
-          <a:p>
-            <a:pPr algn="ctr"/>
-            <a:r>
-              <a:rPr sz="950" b="1">
-                <a:solidFill>
-                  <a:srgbClr val="FFFFFF"/>
-                </a:solidFill>
-                <a:latin typeface="Arial"/>
-              </a:rPr>
-              <a:t>✓ Available</a:t>
-            </a:r>
-          </a:p>
-        </p:txBody>
-      </p:sp>
-      <p:sp>
-        <p:nvSpPr>
-          <p:cNvPr id="61" name="Rounded Rectangle 60"/>
-          <p:cNvSpPr/>
-          <p:nvPr/>
-        </p:nvSpPr>
-        <p:spPr>
-          <a:xfrm>
-            <a:off x="7580375" y="2368296"/>
-            <a:ext cx="1143000" cy="233172"/>
-          </a:xfrm>
-          <a:prstGeom prst="roundRect">
-            <a:avLst/>
-          </a:prstGeom>
-          <a:solidFill>
-            <a:srgbClr val="FFFFFF"/>
-          </a:solidFill>
-          <a:ln w="7620">
-            <a:solidFill>
-              <a:srgbClr val="D5E0EA"/>
-            </a:solidFill>
-          </a:ln>
-        </p:spPr>
-        <p:style>
-          <a:lnRef idx="1">
-            <a:schemeClr val="accent1"/>
-          </a:lnRef>
-          <a:fillRef idx="3">
-            <a:schemeClr val="accent1"/>
-          </a:fillRef>
-          <a:effectRef idx="2">
-            <a:schemeClr val="accent1"/>
-          </a:effectRef>
-          <a:fontRef idx="minor">
-            <a:schemeClr val="lt1"/>
-          </a:fontRef>
-        </p:style>
-        <p:txBody>
-          <a:bodyPr rtlCol="0" anchor="ctr"/>
-          <a:lstStyle/>
-          <a:p>
-            <a:pPr algn="ctr"/>
-            <a:r>
-              <a:rPr sz="950" b="1">
-                <a:solidFill>
-                  <a:srgbClr val="FFFFFF"/>
-                </a:solidFill>
-                <a:latin typeface="Arial"/>
-              </a:rPr>
-              <a:t>✓ Available</a:t>
-            </a:r>
-          </a:p>
-        </p:txBody>
-      </p:sp>
-      <p:sp>
-        <p:nvSpPr>
-          <p:cNvPr id="62" name="Rounded Rectangle 61"/>
-          <p:cNvSpPr/>
-          <p:nvPr/>
-        </p:nvSpPr>
-        <p:spPr>
-          <a:xfrm>
-            <a:off x="8833104" y="2368296"/>
-            <a:ext cx="1783080" cy="233172"/>
-          </a:xfrm>
-          <a:prstGeom prst="roundRect">
-            <a:avLst/>
-          </a:prstGeom>
-          <a:solidFill>
-            <a:srgbClr val="FFFFFF"/>
-          </a:solidFill>
-          <a:ln w="7620">
-            <a:solidFill>
-              <a:srgbClr val="D5E0EA"/>
-            </a:solidFill>
-          </a:ln>
-        </p:spPr>
-        <p:style>
-          <a:lnRef idx="1">
-            <a:schemeClr val="accent1"/>
-          </a:lnRef>
-          <a:fillRef idx="3">
-            <a:schemeClr val="accent1"/>
-          </a:fillRef>
-          <a:effectRef idx="2">
-            <a:schemeClr val="accent1"/>
-          </a:effectRef>
-          <a:fontRef idx="minor">
-            <a:schemeClr val="lt1"/>
-          </a:fontRef>
-        </p:style>
-        <p:txBody>
-          <a:bodyPr rtlCol="0" anchor="ctr"/>
-          <a:lstStyle/>
-          <a:p>
-            <a:pPr algn="ctr"/>
-            <a:r>
-              <a:rPr sz="950" b="1">
-                <a:solidFill>
-                  <a:srgbClr val="FFFFFF"/>
-                </a:solidFill>
-                <a:latin typeface="Arial"/>
-              </a:rPr>
-              <a:t>× Not Available</a:t>
-            </a:r>
-          </a:p>
-        </p:txBody>
-      </p:sp>
-      <p:sp>
-        <p:nvSpPr>
-          <p:cNvPr id="63" name="Rounded Rectangle 62"/>
-          <p:cNvSpPr/>
-          <p:nvPr/>
-        </p:nvSpPr>
-        <p:spPr>
-          <a:xfrm>
-            <a:off x="411480" y="2601468"/>
-            <a:ext cx="2907792" cy="233172"/>
-          </a:xfrm>
-          <a:prstGeom prst="roundRect">
-            <a:avLst/>
-          </a:prstGeom>
-          <a:solidFill>
-            <a:srgbClr val="FFFFFF"/>
-          </a:solidFill>
-          <a:ln w="7620">
-            <a:solidFill>
-              <a:srgbClr val="D5E0EA"/>
-            </a:solidFill>
-          </a:ln>
-        </p:spPr>
-        <p:style>
-          <a:lnRef idx="1">
-            <a:schemeClr val="accent1"/>
-          </a:lnRef>
-          <a:fillRef idx="3">
-            <a:schemeClr val="accent1"/>
-          </a:fillRef>
-          <a:effectRef idx="2">
-            <a:schemeClr val="accent1"/>
-          </a:effectRef>
-          <a:fontRef idx="minor">
-            <a:schemeClr val="lt1"/>
-          </a:fontRef>
-        </p:style>
-        <p:txBody>
-          <a:bodyPr rtlCol="0" anchor="ctr"/>
-          <a:lstStyle/>
-          <a:p>
-            <a:pPr algn="l"/>
-            <a:r>
-              <a:rPr sz="950" b="1">
-                <a:solidFill>
-                  <a:srgbClr val="FFFFFF"/>
-                </a:solidFill>
-                <a:latin typeface="Arial"/>
-              </a:rPr>
-              <a:t>Skill Gap Detection</a:t>
-            </a:r>
-          </a:p>
-        </p:txBody>
-      </p:sp>
-      <p:sp>
-        <p:nvSpPr>
-          <p:cNvPr id="64" name="Rounded Rectangle 63"/>
-          <p:cNvSpPr/>
-          <p:nvPr/>
-        </p:nvSpPr>
-        <p:spPr>
-          <a:xfrm>
-            <a:off x="3456432" y="2601468"/>
-            <a:ext cx="1481328" cy="233172"/>
-          </a:xfrm>
-          <a:prstGeom prst="roundRect">
-            <a:avLst/>
-          </a:prstGeom>
-          <a:solidFill>
-            <a:srgbClr val="FFFFFF"/>
-          </a:solidFill>
-          <a:ln w="7620">
-            <a:solidFill>
-              <a:srgbClr val="D5E0EA"/>
-            </a:solidFill>
-          </a:ln>
-        </p:spPr>
-        <p:style>
-          <a:lnRef idx="1">
-            <a:schemeClr val="accent1"/>
-          </a:lnRef>
-          <a:fillRef idx="3">
-            <a:schemeClr val="accent1"/>
-          </a:fillRef>
-          <a:effectRef idx="2">
-            <a:schemeClr val="accent1"/>
-          </a:effectRef>
-          <a:fontRef idx="minor">
-            <a:schemeClr val="lt1"/>
-          </a:fontRef>
-        </p:style>
-        <p:txBody>
-          <a:bodyPr rtlCol="0" anchor="ctr"/>
-          <a:lstStyle/>
-          <a:p>
-            <a:pPr algn="ctr"/>
-            <a:r>
-              <a:rPr sz="950" b="1">
-                <a:solidFill>
-                  <a:srgbClr val="FFFFFF"/>
-                </a:solidFill>
-                <a:latin typeface="Arial"/>
-              </a:rPr>
-              <a:t>✓ Evidence Based</a:t>
-            </a:r>
-          </a:p>
-        </p:txBody>
-      </p:sp>
-      <p:sp>
-        <p:nvSpPr>
-          <p:cNvPr id="65" name="Rounded Rectangle 64"/>
-          <p:cNvSpPr/>
-          <p:nvPr/>
-        </p:nvSpPr>
-        <p:spPr>
-          <a:xfrm>
-            <a:off x="5074920" y="2601468"/>
-            <a:ext cx="1143000" cy="233172"/>
-          </a:xfrm>
-          <a:prstGeom prst="roundRect">
-            <a:avLst/>
-          </a:prstGeom>
-          <a:solidFill>
-            <a:srgbClr val="FFFFFF"/>
-          </a:solidFill>
-          <a:ln w="7620">
-            <a:solidFill>
-              <a:srgbClr val="D5E0EA"/>
-            </a:solidFill>
-          </a:ln>
-        </p:spPr>
-        <p:style>
-          <a:lnRef idx="1">
-            <a:schemeClr val="accent1"/>
-          </a:lnRef>
-          <a:fillRef idx="3">
-            <a:schemeClr val="accent1"/>
-          </a:fillRef>
-          <a:effectRef idx="2">
-            <a:schemeClr val="accent1"/>
-          </a:effectRef>
-          <a:fontRef idx="minor">
-            <a:schemeClr val="lt1"/>
-          </a:fontRef>
-        </p:style>
-        <p:txBody>
-          <a:bodyPr rtlCol="0" anchor="ctr"/>
-          <a:lstStyle/>
-          <a:p>
-            <a:pPr algn="ctr"/>
-            <a:r>
-              <a:rPr sz="950" b="1">
-                <a:solidFill>
-                  <a:srgbClr val="FFFFFF"/>
-                </a:solidFill>
-                <a:latin typeface="Arial"/>
-              </a:rPr>
-              <a:t>● Basic</a:t>
-            </a:r>
-          </a:p>
-        </p:txBody>
-      </p:sp>
-      <p:sp>
-        <p:nvSpPr>
-          <p:cNvPr id="66" name="Rounded Rectangle 65"/>
-          <p:cNvSpPr/>
-          <p:nvPr/>
-        </p:nvSpPr>
-        <p:spPr>
-          <a:xfrm>
-            <a:off x="6327648" y="2601468"/>
-            <a:ext cx="1143000" cy="233172"/>
-          </a:xfrm>
-          <a:prstGeom prst="roundRect">
-            <a:avLst/>
-          </a:prstGeom>
-          <a:solidFill>
-            <a:srgbClr val="FFFFFF"/>
-          </a:solidFill>
-          <a:ln w="7620">
-            <a:solidFill>
-              <a:srgbClr val="D5E0EA"/>
-            </a:solidFill>
-          </a:ln>
-        </p:spPr>
-        <p:style>
-          <a:lnRef idx="1">
-            <a:schemeClr val="accent1"/>
-          </a:lnRef>
-          <a:fillRef idx="3">
-            <a:schemeClr val="accent1"/>
-          </a:fillRef>
-          <a:effectRef idx="2">
-            <a:schemeClr val="accent1"/>
-          </a:effectRef>
-          <a:fontRef idx="minor">
-            <a:schemeClr val="lt1"/>
-          </a:fontRef>
-        </p:style>
-        <p:txBody>
-          <a:bodyPr rtlCol="0" anchor="ctr"/>
-          <a:lstStyle/>
-          <a:p>
-            <a:pPr algn="ctr"/>
-            <a:r>
-              <a:rPr sz="950" b="1">
-                <a:solidFill>
-                  <a:srgbClr val="FFFFFF"/>
-                </a:solidFill>
-                <a:latin typeface="Arial"/>
-              </a:rPr>
-              <a:t>● Limited</a:t>
-            </a:r>
-          </a:p>
-        </p:txBody>
-      </p:sp>
-      <p:sp>
-        <p:nvSpPr>
-          <p:cNvPr id="67" name="Rounded Rectangle 66"/>
-          <p:cNvSpPr/>
-          <p:nvPr/>
-        </p:nvSpPr>
-        <p:spPr>
-          <a:xfrm>
-            <a:off x="7580375" y="2601468"/>
-            <a:ext cx="1143000" cy="233172"/>
-          </a:xfrm>
-          <a:prstGeom prst="roundRect">
-            <a:avLst/>
-          </a:prstGeom>
-          <a:solidFill>
-            <a:srgbClr val="FFFFFF"/>
-          </a:solidFill>
-          <a:ln w="7620">
-            <a:solidFill>
-              <a:srgbClr val="D5E0EA"/>
-            </a:solidFill>
-          </a:ln>
-        </p:spPr>
-        <p:style>
-          <a:lnRef idx="1">
-            <a:schemeClr val="accent1"/>
-          </a:lnRef>
-          <a:fillRef idx="3">
-            <a:schemeClr val="accent1"/>
-          </a:fillRef>
-          <a:effectRef idx="2">
-            <a:schemeClr val="accent1"/>
-          </a:effectRef>
-          <a:fontRef idx="minor">
-            <a:schemeClr val="lt1"/>
-          </a:fontRef>
-        </p:style>
-        <p:txBody>
-          <a:bodyPr rtlCol="0" anchor="ctr"/>
-          <a:lstStyle/>
-          <a:p>
-            <a:pPr algn="ctr"/>
-            <a:r>
-              <a:rPr sz="950" b="1">
-                <a:solidFill>
-                  <a:srgbClr val="FFFFFF"/>
-                </a:solidFill>
-                <a:latin typeface="Arial"/>
-              </a:rPr>
-              <a:t>● Limited</a:t>
-            </a:r>
-          </a:p>
-        </p:txBody>
-      </p:sp>
-      <p:sp>
-        <p:nvSpPr>
-          <p:cNvPr id="68" name="Rounded Rectangle 67"/>
-          <p:cNvSpPr/>
-          <p:nvPr/>
-        </p:nvSpPr>
-        <p:spPr>
-          <a:xfrm>
-            <a:off x="8833104" y="2601468"/>
-            <a:ext cx="1783080" cy="233172"/>
-          </a:xfrm>
-          <a:prstGeom prst="roundRect">
-            <a:avLst/>
-          </a:prstGeom>
-          <a:solidFill>
-            <a:srgbClr val="FFFFFF"/>
-          </a:solidFill>
-          <a:ln w="7620">
-            <a:solidFill>
-              <a:srgbClr val="D5E0EA"/>
-            </a:solidFill>
-          </a:ln>
-        </p:spPr>
-        <p:style>
-          <a:lnRef idx="1">
-            <a:schemeClr val="accent1"/>
-          </a:lnRef>
-          <a:fillRef idx="3">
-            <a:schemeClr val="accent1"/>
-          </a:fillRef>
-          <a:effectRef idx="2">
-            <a:schemeClr val="accent1"/>
-          </a:effectRef>
-          <a:fontRef idx="minor">
-            <a:schemeClr val="lt1"/>
-          </a:fontRef>
-        </p:style>
-        <p:txBody>
-          <a:bodyPr rtlCol="0" anchor="ctr"/>
-          <a:lstStyle/>
-          <a:p>
-            <a:pPr algn="ctr"/>
-            <a:r>
-              <a:rPr sz="950" b="1">
-                <a:solidFill>
-                  <a:srgbClr val="FFFFFF"/>
-                </a:solidFill>
-                <a:latin typeface="Arial"/>
-              </a:rPr>
-              <a:t>● Limited</a:t>
-            </a:r>
-          </a:p>
-        </p:txBody>
-      </p:sp>
-      <p:sp>
-        <p:nvSpPr>
-          <p:cNvPr id="69" name="Rounded Rectangle 68"/>
-          <p:cNvSpPr/>
-          <p:nvPr/>
-        </p:nvSpPr>
-        <p:spPr>
-          <a:xfrm>
-            <a:off x="411480" y="2834640"/>
-            <a:ext cx="2907792" cy="233172"/>
-          </a:xfrm>
-          <a:prstGeom prst="roundRect">
-            <a:avLst/>
-          </a:prstGeom>
-          <a:solidFill>
-            <a:srgbClr val="FFFFFF"/>
-          </a:solidFill>
-          <a:ln w="7620">
-            <a:solidFill>
-              <a:srgbClr val="D5E0EA"/>
-            </a:solidFill>
-          </a:ln>
-        </p:spPr>
-        <p:style>
-          <a:lnRef idx="1">
-            <a:schemeClr val="accent1"/>
-          </a:lnRef>
-          <a:fillRef idx="3">
-            <a:schemeClr val="accent1"/>
-          </a:fillRef>
-          <a:effectRef idx="2">
-            <a:schemeClr val="accent1"/>
-          </a:effectRef>
-          <a:fontRef idx="minor">
-            <a:schemeClr val="lt1"/>
-          </a:fontRef>
-        </p:style>
-        <p:txBody>
-          <a:bodyPr rtlCol="0" anchor="ctr"/>
-          <a:lstStyle/>
-          <a:p>
-            <a:pPr algn="l"/>
-            <a:r>
-              <a:rPr sz="950" b="1">
-                <a:solidFill>
-                  <a:srgbClr val="FFFFFF"/>
-                </a:solidFill>
-                <a:latin typeface="Arial"/>
-              </a:rPr>
-              <a:t>Personalized Learning</a:t>
-            </a:r>
-          </a:p>
-        </p:txBody>
-      </p:sp>
-      <p:sp>
-        <p:nvSpPr>
-          <p:cNvPr id="70" name="Rounded Rectangle 69"/>
-          <p:cNvSpPr/>
-          <p:nvPr/>
-        </p:nvSpPr>
-        <p:spPr>
-          <a:xfrm>
-            <a:off x="3456432" y="2834640"/>
-            <a:ext cx="1481328" cy="233172"/>
-          </a:xfrm>
-          <a:prstGeom prst="roundRect">
-            <a:avLst/>
-          </a:prstGeom>
-          <a:solidFill>
-            <a:srgbClr val="FFFFFF"/>
-          </a:solidFill>
-          <a:ln w="7620">
-            <a:solidFill>
-              <a:srgbClr val="D5E0EA"/>
-            </a:solidFill>
-          </a:ln>
-        </p:spPr>
-        <p:style>
-          <a:lnRef idx="1">
-            <a:schemeClr val="accent1"/>
-          </a:lnRef>
-          <a:fillRef idx="3">
-            <a:schemeClr val="accent1"/>
-          </a:fillRef>
-          <a:effectRef idx="2">
-            <a:schemeClr val="accent1"/>
-          </a:effectRef>
-          <a:fontRef idx="minor">
-            <a:schemeClr val="lt1"/>
-          </a:fontRef>
-        </p:style>
-        <p:txBody>
-          <a:bodyPr rtlCol="0" anchor="ctr"/>
-          <a:lstStyle/>
-          <a:p>
-            <a:pPr algn="ctr"/>
-            <a:r>
-              <a:rPr sz="950" b="1">
-                <a:solidFill>
-                  <a:srgbClr val="FFFFFF"/>
-                </a:solidFill>
-                <a:latin typeface="Arial"/>
-              </a:rPr>
-              <a:t>✓ AI Driven &amp; Adaptive</a:t>
-            </a:r>
-          </a:p>
-        </p:txBody>
-      </p:sp>
-      <p:sp>
-        <p:nvSpPr>
-          <p:cNvPr id="71" name="Rounded Rectangle 70"/>
-          <p:cNvSpPr/>
-          <p:nvPr/>
-        </p:nvSpPr>
-        <p:spPr>
-          <a:xfrm>
-            <a:off x="5074920" y="2834640"/>
-            <a:ext cx="1143000" cy="233172"/>
-          </a:xfrm>
-          <a:prstGeom prst="roundRect">
-            <a:avLst/>
-          </a:prstGeom>
-          <a:solidFill>
-            <a:srgbClr val="FFFFFF"/>
-          </a:solidFill>
-          <a:ln w="7620">
-            <a:solidFill>
-              <a:srgbClr val="D5E0EA"/>
-            </a:solidFill>
-          </a:ln>
-        </p:spPr>
-        <p:style>
-          <a:lnRef idx="1">
-            <a:schemeClr val="accent1"/>
-          </a:lnRef>
-          <a:fillRef idx="3">
-            <a:schemeClr val="accent1"/>
-          </a:fillRef>
-          <a:effectRef idx="2">
-            <a:schemeClr val="accent1"/>
-          </a:effectRef>
-          <a:fontRef idx="minor">
-            <a:schemeClr val="lt1"/>
-          </a:fontRef>
-        </p:style>
-        <p:txBody>
-          <a:bodyPr rtlCol="0" anchor="ctr"/>
-          <a:lstStyle/>
-          <a:p>
-            <a:pPr algn="ctr"/>
-            <a:r>
-              <a:rPr sz="950" b="1">
-                <a:solidFill>
-                  <a:srgbClr val="FFFFFF"/>
-                </a:solidFill>
-                <a:latin typeface="Arial"/>
-              </a:rPr>
-              <a:t>✓ Available</a:t>
-            </a:r>
-          </a:p>
-        </p:txBody>
-      </p:sp>
-      <p:sp>
-        <p:nvSpPr>
-          <p:cNvPr id="72" name="Rounded Rectangle 71"/>
-          <p:cNvSpPr/>
-          <p:nvPr/>
-        </p:nvSpPr>
-        <p:spPr>
-          <a:xfrm>
-            <a:off x="6327648" y="2834640"/>
-            <a:ext cx="1143000" cy="233172"/>
-          </a:xfrm>
-          <a:prstGeom prst="roundRect">
-            <a:avLst/>
-          </a:prstGeom>
-          <a:solidFill>
-            <a:srgbClr val="FFFFFF"/>
-          </a:solidFill>
-          <a:ln w="7620">
-            <a:solidFill>
-              <a:srgbClr val="D5E0EA"/>
-            </a:solidFill>
-          </a:ln>
-        </p:spPr>
-        <p:style>
-          <a:lnRef idx="1">
-            <a:schemeClr val="accent1"/>
-          </a:lnRef>
-          <a:fillRef idx="3">
-            <a:schemeClr val="accent1"/>
-          </a:fillRef>
-          <a:effectRef idx="2">
-            <a:schemeClr val="accent1"/>
-          </a:effectRef>
-          <a:fontRef idx="minor">
-            <a:schemeClr val="lt1"/>
-          </a:fontRef>
-        </p:style>
-        <p:txBody>
-          <a:bodyPr rtlCol="0" anchor="ctr"/>
-          <a:lstStyle/>
-          <a:p>
-            <a:pPr algn="ctr"/>
-            <a:r>
-              <a:rPr sz="950" b="1">
-                <a:solidFill>
-                  <a:srgbClr val="FFFFFF"/>
-                </a:solidFill>
-                <a:latin typeface="Arial"/>
-              </a:rPr>
-              <a:t>● Available</a:t>
-            </a:r>
-          </a:p>
-        </p:txBody>
-      </p:sp>
-      <p:sp>
-        <p:nvSpPr>
-          <p:cNvPr id="73" name="Rounded Rectangle 72"/>
-          <p:cNvSpPr/>
-          <p:nvPr/>
-        </p:nvSpPr>
-        <p:spPr>
-          <a:xfrm>
-            <a:off x="7580375" y="2834640"/>
-            <a:ext cx="1143000" cy="233172"/>
-          </a:xfrm>
-          <a:prstGeom prst="roundRect">
-            <a:avLst/>
-          </a:prstGeom>
-          <a:solidFill>
-            <a:srgbClr val="FFFFFF"/>
-          </a:solidFill>
-          <a:ln w="7620">
-            <a:solidFill>
-              <a:srgbClr val="D5E0EA"/>
-            </a:solidFill>
-          </a:ln>
-        </p:spPr>
-        <p:style>
-          <a:lnRef idx="1">
-            <a:schemeClr val="accent1"/>
-          </a:lnRef>
-          <a:fillRef idx="3">
-            <a:schemeClr val="accent1"/>
-          </a:fillRef>
-          <a:effectRef idx="2">
-            <a:schemeClr val="accent1"/>
-          </a:effectRef>
-          <a:fontRef idx="minor">
-            <a:schemeClr val="lt1"/>
-          </a:fontRef>
-        </p:style>
-        <p:txBody>
-          <a:bodyPr rtlCol="0" anchor="ctr"/>
-          <a:lstStyle/>
-          <a:p>
-            <a:pPr algn="ctr"/>
-            <a:r>
-              <a:rPr sz="950" b="1">
-                <a:solidFill>
-                  <a:srgbClr val="FFFFFF"/>
-                </a:solidFill>
-                <a:latin typeface="Arial"/>
-              </a:rPr>
-              <a:t>✓ Available</a:t>
-            </a:r>
-          </a:p>
-        </p:txBody>
-      </p:sp>
-      <p:sp>
-        <p:nvSpPr>
-          <p:cNvPr id="74" name="Rounded Rectangle 73"/>
-          <p:cNvSpPr/>
-          <p:nvPr/>
-        </p:nvSpPr>
-        <p:spPr>
-          <a:xfrm>
-            <a:off x="8833104" y="2834640"/>
-            <a:ext cx="1783080" cy="233172"/>
-          </a:xfrm>
-          <a:prstGeom prst="roundRect">
-            <a:avLst/>
-          </a:prstGeom>
-          <a:solidFill>
-            <a:srgbClr val="FFFFFF"/>
-          </a:solidFill>
-          <a:ln w="7620">
-            <a:solidFill>
-              <a:srgbClr val="D5E0EA"/>
-            </a:solidFill>
-          </a:ln>
-        </p:spPr>
-        <p:style>
-          <a:lnRef idx="1">
-            <a:schemeClr val="accent1"/>
-          </a:lnRef>
-          <a:fillRef idx="3">
-            <a:schemeClr val="accent1"/>
-          </a:fillRef>
-          <a:effectRef idx="2">
-            <a:schemeClr val="accent1"/>
-          </a:effectRef>
-          <a:fontRef idx="minor">
-            <a:schemeClr val="lt1"/>
-          </a:fontRef>
-        </p:style>
-        <p:txBody>
-          <a:bodyPr rtlCol="0" anchor="ctr"/>
-          <a:lstStyle/>
-          <a:p>
-            <a:pPr algn="ctr"/>
-            <a:r>
-              <a:rPr sz="950" b="1">
-                <a:solidFill>
-                  <a:srgbClr val="FFFFFF"/>
-                </a:solidFill>
-                <a:latin typeface="Arial"/>
-              </a:rPr>
-              <a:t>✓ Limited</a:t>
-            </a:r>
-          </a:p>
-        </p:txBody>
-      </p:sp>
-      <p:sp>
-        <p:nvSpPr>
-          <p:cNvPr id="75" name="Rounded Rectangle 74"/>
-          <p:cNvSpPr/>
-          <p:nvPr/>
-        </p:nvSpPr>
-        <p:spPr>
-          <a:xfrm>
-            <a:off x="411480" y="3067812"/>
-            <a:ext cx="2907792" cy="233172"/>
-          </a:xfrm>
-          <a:prstGeom prst="roundRect">
-            <a:avLst/>
-          </a:prstGeom>
-          <a:solidFill>
-            <a:srgbClr val="FFFFFF"/>
-          </a:solidFill>
-          <a:ln w="7620">
-            <a:solidFill>
-              <a:srgbClr val="D5E0EA"/>
-            </a:solidFill>
-          </a:ln>
-        </p:spPr>
-        <p:style>
-          <a:lnRef idx="1">
-            <a:schemeClr val="accent1"/>
-          </a:lnRef>
-          <a:fillRef idx="3">
-            <a:schemeClr val="accent1"/>
-          </a:fillRef>
-          <a:effectRef idx="2">
-            <a:schemeClr val="accent1"/>
-          </a:effectRef>
-          <a:fontRef idx="minor">
-            <a:schemeClr val="lt1"/>
-          </a:fontRef>
-        </p:style>
-        <p:txBody>
-          <a:bodyPr rtlCol="0" anchor="ctr"/>
-          <a:lstStyle/>
-          <a:p>
-            <a:pPr algn="l"/>
-            <a:r>
-              <a:rPr sz="950" b="1">
-                <a:solidFill>
-                  <a:srgbClr val="FFFFFF"/>
-                </a:solidFill>
-                <a:latin typeface="Arial"/>
-              </a:rPr>
-              <a:t>Continuous Skill Updating</a:t>
-            </a:r>
-          </a:p>
-        </p:txBody>
-      </p:sp>
-      <p:sp>
-        <p:nvSpPr>
-          <p:cNvPr id="76" name="Rounded Rectangle 75"/>
-          <p:cNvSpPr/>
-          <p:nvPr/>
-        </p:nvSpPr>
-        <p:spPr>
-          <a:xfrm>
-            <a:off x="3456432" y="3067812"/>
-            <a:ext cx="1481328" cy="233172"/>
-          </a:xfrm>
-          <a:prstGeom prst="roundRect">
-            <a:avLst/>
-          </a:prstGeom>
-          <a:solidFill>
-            <a:srgbClr val="FFFFFF"/>
-          </a:solidFill>
-          <a:ln w="7620">
-            <a:solidFill>
-              <a:srgbClr val="D5E0EA"/>
-            </a:solidFill>
-          </a:ln>
-        </p:spPr>
-        <p:style>
-          <a:lnRef idx="1">
-            <a:schemeClr val="accent1"/>
-          </a:lnRef>
-          <a:fillRef idx="3">
-            <a:schemeClr val="accent1"/>
-          </a:fillRef>
-          <a:effectRef idx="2">
-            <a:schemeClr val="accent1"/>
-          </a:effectRef>
-          <a:fontRef idx="minor">
-            <a:schemeClr val="lt1"/>
-          </a:fontRef>
-        </p:style>
-        <p:txBody>
-          <a:bodyPr rtlCol="0" anchor="ctr"/>
-          <a:lstStyle/>
-          <a:p>
-            <a:pPr algn="ctr"/>
-            <a:r>
-              <a:rPr sz="950" b="1">
-                <a:solidFill>
-                  <a:srgbClr val="FFFFFF"/>
-                </a:solidFill>
-                <a:latin typeface="Arial"/>
-              </a:rPr>
-              <a:t>✓ Auto Update</a:t>
-            </a:r>
-          </a:p>
-        </p:txBody>
-      </p:sp>
-      <p:sp>
-        <p:nvSpPr>
-          <p:cNvPr id="77" name="Rounded Rectangle 76"/>
-          <p:cNvSpPr/>
-          <p:nvPr/>
-        </p:nvSpPr>
-        <p:spPr>
-          <a:xfrm>
-            <a:off x="5074920" y="3067812"/>
-            <a:ext cx="1143000" cy="233172"/>
-          </a:xfrm>
-          <a:prstGeom prst="roundRect">
-            <a:avLst/>
-          </a:prstGeom>
-          <a:solidFill>
-            <a:srgbClr val="FFFFFF"/>
-          </a:solidFill>
-          <a:ln w="7620">
-            <a:solidFill>
-              <a:srgbClr val="D5E0EA"/>
-            </a:solidFill>
-          </a:ln>
-        </p:spPr>
-        <p:style>
-          <a:lnRef idx="1">
-            <a:schemeClr val="accent1"/>
-          </a:lnRef>
-          <a:fillRef idx="3">
-            <a:schemeClr val="accent1"/>
-          </a:fillRef>
-          <a:effectRef idx="2">
-            <a:schemeClr val="accent1"/>
-          </a:effectRef>
-          <a:fontRef idx="minor">
-            <a:schemeClr val="lt1"/>
-          </a:fontRef>
-        </p:style>
-        <p:txBody>
-          <a:bodyPr rtlCol="0" anchor="ctr"/>
-          <a:lstStyle/>
-          <a:p>
-            <a:pPr algn="ctr"/>
-            <a:r>
-              <a:rPr sz="950" b="1">
-                <a:solidFill>
-                  <a:srgbClr val="FFFFFF"/>
-                </a:solidFill>
-                <a:latin typeface="Arial"/>
-              </a:rPr>
-              <a:t>● Manual</a:t>
-            </a:r>
-          </a:p>
-        </p:txBody>
-      </p:sp>
-      <p:sp>
-        <p:nvSpPr>
-          <p:cNvPr id="78" name="Rounded Rectangle 77"/>
-          <p:cNvSpPr/>
-          <p:nvPr/>
-        </p:nvSpPr>
-        <p:spPr>
-          <a:xfrm>
-            <a:off x="6327648" y="3067812"/>
-            <a:ext cx="1143000" cy="233172"/>
-          </a:xfrm>
-          <a:prstGeom prst="roundRect">
-            <a:avLst/>
-          </a:prstGeom>
-          <a:solidFill>
-            <a:srgbClr val="FFFFFF"/>
-          </a:solidFill>
-          <a:ln w="7620">
-            <a:solidFill>
-              <a:srgbClr val="D5E0EA"/>
-            </a:solidFill>
-          </a:ln>
-        </p:spPr>
-        <p:style>
-          <a:lnRef idx="1">
-            <a:schemeClr val="accent1"/>
-          </a:lnRef>
-          <a:fillRef idx="3">
-            <a:schemeClr val="accent1"/>
-          </a:fillRef>
-          <a:effectRef idx="2">
-            <a:schemeClr val="accent1"/>
-          </a:effectRef>
-          <a:fontRef idx="minor">
-            <a:schemeClr val="lt1"/>
-          </a:fontRef>
-        </p:style>
-        <p:txBody>
-          <a:bodyPr rtlCol="0" anchor="ctr"/>
-          <a:lstStyle/>
-          <a:p>
-            <a:pPr algn="ctr"/>
-            <a:r>
-              <a:rPr sz="950" b="1">
-                <a:solidFill>
-                  <a:srgbClr val="FFFFFF"/>
-                </a:solidFill>
-                <a:latin typeface="Arial"/>
-              </a:rPr>
-              <a:t>× Not Available</a:t>
-            </a:r>
-          </a:p>
-        </p:txBody>
-      </p:sp>
-      <p:sp>
-        <p:nvSpPr>
-          <p:cNvPr id="79" name="Rounded Rectangle 78"/>
-          <p:cNvSpPr/>
-          <p:nvPr/>
-        </p:nvSpPr>
-        <p:spPr>
-          <a:xfrm>
-            <a:off x="7580375" y="3067812"/>
-            <a:ext cx="1143000" cy="233172"/>
-          </a:xfrm>
-          <a:prstGeom prst="roundRect">
-            <a:avLst/>
-          </a:prstGeom>
-          <a:solidFill>
-            <a:srgbClr val="FFFFFF"/>
-          </a:solidFill>
-          <a:ln w="7620">
-            <a:solidFill>
-              <a:srgbClr val="D5E0EA"/>
-            </a:solidFill>
-          </a:ln>
-        </p:spPr>
-        <p:style>
-          <a:lnRef idx="1">
-            <a:schemeClr val="accent1"/>
-          </a:lnRef>
-          <a:fillRef idx="3">
-            <a:schemeClr val="accent1"/>
-          </a:fillRef>
-          <a:effectRef idx="2">
-            <a:schemeClr val="accent1"/>
-          </a:effectRef>
-          <a:fontRef idx="minor">
-            <a:schemeClr val="lt1"/>
-          </a:fontRef>
-        </p:style>
-        <p:txBody>
-          <a:bodyPr rtlCol="0" anchor="ctr"/>
-          <a:lstStyle/>
-          <a:p>
-            <a:pPr algn="ctr"/>
-            <a:r>
-              <a:rPr sz="950" b="1">
-                <a:solidFill>
-                  <a:srgbClr val="FFFFFF"/>
-                </a:solidFill>
-                <a:latin typeface="Arial"/>
-              </a:rPr>
-              <a:t>× Not Available</a:t>
-            </a:r>
-          </a:p>
-        </p:txBody>
-      </p:sp>
-      <p:sp>
-        <p:nvSpPr>
-          <p:cNvPr id="80" name="Rounded Rectangle 79"/>
-          <p:cNvSpPr/>
-          <p:nvPr/>
-        </p:nvSpPr>
-        <p:spPr>
-          <a:xfrm>
-            <a:off x="8833104" y="3067812"/>
-            <a:ext cx="1783080" cy="233172"/>
-          </a:xfrm>
-          <a:prstGeom prst="roundRect">
-            <a:avLst/>
-          </a:prstGeom>
-          <a:solidFill>
-            <a:srgbClr val="FFFFFF"/>
-          </a:solidFill>
-          <a:ln w="7620">
-            <a:solidFill>
-              <a:srgbClr val="D5E0EA"/>
-            </a:solidFill>
-          </a:ln>
-        </p:spPr>
-        <p:style>
-          <a:lnRef idx="1">
-            <a:schemeClr val="accent1"/>
-          </a:lnRef>
-          <a:fillRef idx="3">
-            <a:schemeClr val="accent1"/>
-          </a:fillRef>
-          <a:effectRef idx="2">
-            <a:schemeClr val="accent1"/>
-          </a:effectRef>
-          <a:fontRef idx="minor">
-            <a:schemeClr val="lt1"/>
-          </a:fontRef>
-        </p:style>
-        <p:txBody>
-          <a:bodyPr rtlCol="0" anchor="ctr"/>
-          <a:lstStyle/>
-          <a:p>
-            <a:pPr algn="ctr"/>
-            <a:r>
-              <a:rPr sz="950" b="1">
-                <a:solidFill>
-                  <a:srgbClr val="FFFFFF"/>
-                </a:solidFill>
-                <a:latin typeface="Arial"/>
-              </a:rPr>
-              <a:t>× Not Available</a:t>
-            </a:r>
-          </a:p>
-        </p:txBody>
-      </p:sp>
-      <p:sp>
-        <p:nvSpPr>
-          <p:cNvPr id="81" name="Rounded Rectangle 80"/>
-          <p:cNvSpPr/>
-          <p:nvPr/>
-        </p:nvSpPr>
-        <p:spPr>
-          <a:xfrm>
-            <a:off x="411480" y="3300984"/>
-            <a:ext cx="2907792" cy="233172"/>
-          </a:xfrm>
-          <a:prstGeom prst="roundRect">
-            <a:avLst/>
-          </a:prstGeom>
-          <a:solidFill>
-            <a:srgbClr val="FFFFFF"/>
-          </a:solidFill>
-          <a:ln w="7620">
-            <a:solidFill>
-              <a:srgbClr val="D5E0EA"/>
-            </a:solidFill>
-          </a:ln>
-        </p:spPr>
-        <p:style>
-          <a:lnRef idx="1">
-            <a:schemeClr val="accent1"/>
-          </a:lnRef>
-          <a:fillRef idx="3">
-            <a:schemeClr val="accent1"/>
-          </a:fillRef>
-          <a:effectRef idx="2">
-            <a:schemeClr val="accent1"/>
-          </a:effectRef>
-          <a:fontRef idx="minor">
-            <a:schemeClr val="lt1"/>
-          </a:fontRef>
-        </p:style>
-        <p:txBody>
-          <a:bodyPr rtlCol="0" anchor="ctr"/>
-          <a:lstStyle/>
-          <a:p>
-            <a:pPr algn="l"/>
-            <a:r>
-              <a:rPr sz="950" b="1">
-                <a:solidFill>
-                  <a:srgbClr val="FFFFFF"/>
-                </a:solidFill>
-                <a:latin typeface="Arial"/>
-              </a:rPr>
-              <a:t>Evidence-Based Skill Profile</a:t>
-            </a:r>
-          </a:p>
-        </p:txBody>
-      </p:sp>
-      <p:sp>
-        <p:nvSpPr>
-          <p:cNvPr id="82" name="Rounded Rectangle 81"/>
-          <p:cNvSpPr/>
-          <p:nvPr/>
-        </p:nvSpPr>
-        <p:spPr>
-          <a:xfrm>
-            <a:off x="3456432" y="3300984"/>
-            <a:ext cx="1481328" cy="233172"/>
-          </a:xfrm>
-          <a:prstGeom prst="roundRect">
-            <a:avLst/>
-          </a:prstGeom>
-          <a:solidFill>
-            <a:srgbClr val="FFFFFF"/>
-          </a:solidFill>
-          <a:ln w="7620">
-            <a:solidFill>
-              <a:srgbClr val="D5E0EA"/>
-            </a:solidFill>
-          </a:ln>
-        </p:spPr>
-        <p:style>
-          <a:lnRef idx="1">
-            <a:schemeClr val="accent1"/>
-          </a:lnRef>
-          <a:fillRef idx="3">
-            <a:schemeClr val="accent1"/>
-          </a:fillRef>
-          <a:effectRef idx="2">
-            <a:schemeClr val="accent1"/>
-          </a:effectRef>
-          <a:fontRef idx="minor">
-            <a:schemeClr val="lt1"/>
-          </a:fontRef>
-        </p:style>
-        <p:txBody>
-          <a:bodyPr rtlCol="0" anchor="ctr"/>
-          <a:lstStyle/>
-          <a:p>
-            <a:pPr algn="ctr"/>
-            <a:r>
-              <a:rPr sz="950" b="1">
-                <a:solidFill>
-                  <a:srgbClr val="FFFFFF"/>
-                </a:solidFill>
-                <a:latin typeface="Arial"/>
-              </a:rPr>
-              <a:t>✓ Projects, Tests, GitHub, Courses</a:t>
-            </a:r>
-          </a:p>
-        </p:txBody>
-      </p:sp>
-      <p:sp>
-        <p:nvSpPr>
-          <p:cNvPr id="83" name="Rounded Rectangle 82"/>
-          <p:cNvSpPr/>
-          <p:nvPr/>
-        </p:nvSpPr>
-        <p:spPr>
-          <a:xfrm>
-            <a:off x="5074920" y="3300984"/>
-            <a:ext cx="1143000" cy="233172"/>
-          </a:xfrm>
-          <a:prstGeom prst="roundRect">
-            <a:avLst/>
-          </a:prstGeom>
-          <a:solidFill>
-            <a:srgbClr val="FFFFFF"/>
-          </a:solidFill>
-          <a:ln w="7620">
-            <a:solidFill>
-              <a:srgbClr val="D5E0EA"/>
-            </a:solidFill>
-          </a:ln>
-        </p:spPr>
-        <p:style>
-          <a:lnRef idx="1">
-            <a:schemeClr val="accent1"/>
-          </a:lnRef>
-          <a:fillRef idx="3">
-            <a:schemeClr val="accent1"/>
-          </a:fillRef>
-          <a:effectRef idx="2">
-            <a:schemeClr val="accent1"/>
-          </a:effectRef>
-          <a:fontRef idx="minor">
-            <a:schemeClr val="lt1"/>
-          </a:fontRef>
-        </p:style>
-        <p:txBody>
-          <a:bodyPr rtlCol="0" anchor="ctr"/>
-          <a:lstStyle/>
-          <a:p>
-            <a:pPr algn="ctr"/>
-            <a:r>
-              <a:rPr sz="950" b="1">
-                <a:solidFill>
-                  <a:srgbClr val="FFFFFF"/>
-                </a:solidFill>
-                <a:latin typeface="Arial"/>
-              </a:rPr>
-              <a:t>● Partial</a:t>
-            </a:r>
-          </a:p>
-        </p:txBody>
-      </p:sp>
-      <p:sp>
-        <p:nvSpPr>
-          <p:cNvPr id="84" name="Rounded Rectangle 83"/>
-          <p:cNvSpPr/>
-          <p:nvPr/>
-        </p:nvSpPr>
-        <p:spPr>
-          <a:xfrm>
-            <a:off x="6327648" y="3300984"/>
-            <a:ext cx="1143000" cy="233172"/>
-          </a:xfrm>
-          <a:prstGeom prst="roundRect">
-            <a:avLst/>
-          </a:prstGeom>
-          <a:solidFill>
-            <a:srgbClr val="FFFFFF"/>
-          </a:solidFill>
-          <a:ln w="7620">
-            <a:solidFill>
-              <a:srgbClr val="D5E0EA"/>
-            </a:solidFill>
-          </a:ln>
-        </p:spPr>
-        <p:style>
-          <a:lnRef idx="1">
-            <a:schemeClr val="accent1"/>
-          </a:lnRef>
-          <a:fillRef idx="3">
-            <a:schemeClr val="accent1"/>
-          </a:fillRef>
-          <a:effectRef idx="2">
-            <a:schemeClr val="accent1"/>
-          </a:effectRef>
-          <a:fontRef idx="minor">
-            <a:schemeClr val="lt1"/>
-          </a:fontRef>
-        </p:style>
-        <p:txBody>
-          <a:bodyPr rtlCol="0" anchor="ctr"/>
-          <a:lstStyle/>
-          <a:p>
-            <a:pPr algn="ctr"/>
-            <a:r>
-              <a:rPr sz="950" b="1">
-                <a:solidFill>
-                  <a:srgbClr val="FFFFFF"/>
-                </a:solidFill>
-                <a:latin typeface="Arial"/>
-              </a:rPr>
-              <a:t>● Partial</a:t>
-            </a:r>
-          </a:p>
-        </p:txBody>
-      </p:sp>
-      <p:sp>
-        <p:nvSpPr>
-          <p:cNvPr id="85" name="Rounded Rectangle 84"/>
-          <p:cNvSpPr/>
-          <p:nvPr/>
-        </p:nvSpPr>
-        <p:spPr>
-          <a:xfrm>
-            <a:off x="7580375" y="3300984"/>
-            <a:ext cx="1143000" cy="233172"/>
-          </a:xfrm>
-          <a:prstGeom prst="roundRect">
-            <a:avLst/>
-          </a:prstGeom>
-          <a:solidFill>
-            <a:srgbClr val="FFFFFF"/>
-          </a:solidFill>
-          <a:ln w="7620">
-            <a:solidFill>
-              <a:srgbClr val="D5E0EA"/>
-            </a:solidFill>
-          </a:ln>
-        </p:spPr>
-        <p:style>
-          <a:lnRef idx="1">
-            <a:schemeClr val="accent1"/>
-          </a:lnRef>
-          <a:fillRef idx="3">
-            <a:schemeClr val="accent1"/>
-          </a:fillRef>
-          <a:effectRef idx="2">
-            <a:schemeClr val="accent1"/>
-          </a:effectRef>
-          <a:fontRef idx="minor">
-            <a:schemeClr val="lt1"/>
-          </a:fontRef>
-        </p:style>
-        <p:txBody>
-          <a:bodyPr rtlCol="0" anchor="ctr"/>
-          <a:lstStyle/>
-          <a:p>
-            <a:pPr algn="ctr"/>
-            <a:r>
-              <a:rPr sz="950" b="1">
-                <a:solidFill>
-                  <a:srgbClr val="FFFFFF"/>
-                </a:solidFill>
-                <a:latin typeface="Arial"/>
-              </a:rPr>
-              <a:t>● Partial</a:t>
-            </a:r>
-          </a:p>
-        </p:txBody>
-      </p:sp>
-      <p:sp>
-        <p:nvSpPr>
-          <p:cNvPr id="86" name="Rounded Rectangle 85"/>
-          <p:cNvSpPr/>
-          <p:nvPr/>
-        </p:nvSpPr>
-        <p:spPr>
-          <a:xfrm>
-            <a:off x="8833104" y="3300984"/>
-            <a:ext cx="1783080" cy="233172"/>
-          </a:xfrm>
-          <a:prstGeom prst="roundRect">
-            <a:avLst/>
-          </a:prstGeom>
-          <a:solidFill>
-            <a:srgbClr val="FFFFFF"/>
-          </a:solidFill>
-          <a:ln w="7620">
-            <a:solidFill>
-              <a:srgbClr val="D5E0EA"/>
-            </a:solidFill>
-          </a:ln>
-        </p:spPr>
-        <p:style>
-          <a:lnRef idx="1">
-            <a:schemeClr val="accent1"/>
-          </a:lnRef>
-          <a:fillRef idx="3">
-            <a:schemeClr val="accent1"/>
-          </a:fillRef>
-          <a:effectRef idx="2">
-            <a:schemeClr val="accent1"/>
-          </a:effectRef>
-          <a:fontRef idx="minor">
-            <a:schemeClr val="lt1"/>
-          </a:fontRef>
-        </p:style>
-        <p:txBody>
-          <a:bodyPr rtlCol="0" anchor="ctr"/>
-          <a:lstStyle/>
-          <a:p>
-            <a:pPr algn="ctr"/>
-            <a:r>
-              <a:rPr sz="950" b="1">
-                <a:solidFill>
-                  <a:srgbClr val="FFFFFF"/>
-                </a:solidFill>
-                <a:latin typeface="Arial"/>
-              </a:rPr>
-              <a:t>× Not Available</a:t>
-            </a:r>
-          </a:p>
-        </p:txBody>
-      </p:sp>
-      <p:sp>
-        <p:nvSpPr>
-          <p:cNvPr id="87" name="Rounded Rectangle 86"/>
-          <p:cNvSpPr/>
-          <p:nvPr/>
-        </p:nvSpPr>
-        <p:spPr>
-          <a:xfrm>
-            <a:off x="411480" y="3534156"/>
-            <a:ext cx="2907792" cy="233172"/>
-          </a:xfrm>
-          <a:prstGeom prst="roundRect">
-            <a:avLst/>
-          </a:prstGeom>
-          <a:solidFill>
-            <a:srgbClr val="FFFFFF"/>
-          </a:solidFill>
-          <a:ln w="7620">
-            <a:solidFill>
-              <a:srgbClr val="D5E0EA"/>
-            </a:solidFill>
-          </a:ln>
-        </p:spPr>
-        <p:style>
-          <a:lnRef idx="1">
-            <a:schemeClr val="accent1"/>
-          </a:lnRef>
-          <a:fillRef idx="3">
-            <a:schemeClr val="accent1"/>
-          </a:fillRef>
-          <a:effectRef idx="2">
-            <a:schemeClr val="accent1"/>
-          </a:effectRef>
-          <a:fontRef idx="minor">
-            <a:schemeClr val="lt1"/>
-          </a:fontRef>
-        </p:style>
-        <p:txBody>
-          <a:bodyPr rtlCol="0" anchor="ctr"/>
-          <a:lstStyle/>
-          <a:p>
-            <a:pPr algn="l"/>
-            <a:r>
-              <a:rPr sz="950" b="1">
-                <a:solidFill>
-                  <a:srgbClr val="FFFFFF"/>
-                </a:solidFill>
-                <a:latin typeface="Arial"/>
-              </a:rPr>
-              <a:t>Resource → Test → Skill Update</a:t>
-            </a:r>
-          </a:p>
-        </p:txBody>
-      </p:sp>
-      <p:sp>
-        <p:nvSpPr>
-          <p:cNvPr id="88" name="Rounded Rectangle 87"/>
-          <p:cNvSpPr/>
-          <p:nvPr/>
-        </p:nvSpPr>
-        <p:spPr>
-          <a:xfrm>
-            <a:off x="3456432" y="3534156"/>
-            <a:ext cx="1481328" cy="233172"/>
-          </a:xfrm>
-          <a:prstGeom prst="roundRect">
-            <a:avLst/>
-          </a:prstGeom>
-          <a:solidFill>
-            <a:srgbClr val="FFFFFF"/>
-          </a:solidFill>
-          <a:ln w="7620">
-            <a:solidFill>
-              <a:srgbClr val="D5E0EA"/>
-            </a:solidFill>
-          </a:ln>
-        </p:spPr>
-        <p:style>
-          <a:lnRef idx="1">
-            <a:schemeClr val="accent1"/>
-          </a:lnRef>
-          <a:fillRef idx="3">
-            <a:schemeClr val="accent1"/>
-          </a:fillRef>
-          <a:effectRef idx="2">
-            <a:schemeClr val="accent1"/>
-          </a:effectRef>
-          <a:fontRef idx="minor">
-            <a:schemeClr val="lt1"/>
-          </a:fontRef>
-        </p:style>
-        <p:txBody>
-          <a:bodyPr rtlCol="0" anchor="ctr"/>
-          <a:lstStyle/>
-          <a:p>
-            <a:pPr algn="ctr"/>
-            <a:r>
-              <a:rPr sz="950" b="1">
-                <a:solidFill>
-                  <a:srgbClr val="FFFFFF"/>
-                </a:solidFill>
-                <a:latin typeface="Arial"/>
-              </a:rPr>
-              <a:t>✓ Closed Loop</a:t>
-            </a:r>
-          </a:p>
-        </p:txBody>
-      </p:sp>
-      <p:sp>
-        <p:nvSpPr>
-          <p:cNvPr id="89" name="Rounded Rectangle 88"/>
-          <p:cNvSpPr/>
-          <p:nvPr/>
-        </p:nvSpPr>
-        <p:spPr>
-          <a:xfrm>
-            <a:off x="5074920" y="3534156"/>
-            <a:ext cx="1143000" cy="233172"/>
-          </a:xfrm>
-          <a:prstGeom prst="roundRect">
-            <a:avLst/>
-          </a:prstGeom>
-          <a:solidFill>
-            <a:srgbClr val="FFFFFF"/>
-          </a:solidFill>
-          <a:ln w="7620">
-            <a:solidFill>
-              <a:srgbClr val="D5E0EA"/>
-            </a:solidFill>
-          </a:ln>
-        </p:spPr>
-        <p:style>
-          <a:lnRef idx="1">
-            <a:schemeClr val="accent1"/>
-          </a:lnRef>
-          <a:fillRef idx="3">
-            <a:schemeClr val="accent1"/>
-          </a:fillRef>
-          <a:effectRef idx="2">
-            <a:schemeClr val="accent1"/>
-          </a:effectRef>
-          <a:fontRef idx="minor">
-            <a:schemeClr val="lt1"/>
-          </a:fontRef>
-        </p:style>
-        <p:txBody>
-          <a:bodyPr rtlCol="0" anchor="ctr"/>
-          <a:lstStyle/>
-          <a:p>
-            <a:pPr algn="ctr"/>
-            <a:r>
-              <a:rPr sz="950" b="1">
-                <a:solidFill>
-                  <a:srgbClr val="FFFFFF"/>
-                </a:solidFill>
-                <a:latin typeface="Arial"/>
-              </a:rPr>
-              <a:t>● Partial</a:t>
-            </a:r>
-          </a:p>
-        </p:txBody>
-      </p:sp>
-      <p:sp>
-        <p:nvSpPr>
-          <p:cNvPr id="90" name="Rounded Rectangle 89"/>
-          <p:cNvSpPr/>
-          <p:nvPr/>
-        </p:nvSpPr>
-        <p:spPr>
-          <a:xfrm>
-            <a:off x="6327648" y="3534156"/>
-            <a:ext cx="1143000" cy="233172"/>
-          </a:xfrm>
-          <a:prstGeom prst="roundRect">
-            <a:avLst/>
-          </a:prstGeom>
-          <a:solidFill>
-            <a:srgbClr val="FFFFFF"/>
-          </a:solidFill>
-          <a:ln w="7620">
-            <a:solidFill>
-              <a:srgbClr val="D5E0EA"/>
-            </a:solidFill>
-          </a:ln>
-        </p:spPr>
-        <p:style>
-          <a:lnRef idx="1">
-            <a:schemeClr val="accent1"/>
-          </a:lnRef>
-          <a:fillRef idx="3">
-            <a:schemeClr val="accent1"/>
-          </a:fillRef>
-          <a:effectRef idx="2">
-            <a:schemeClr val="accent1"/>
-          </a:effectRef>
-          <a:fontRef idx="minor">
-            <a:schemeClr val="lt1"/>
-          </a:fontRef>
-        </p:style>
-        <p:txBody>
-          <a:bodyPr rtlCol="0" anchor="ctr"/>
-          <a:lstStyle/>
-          <a:p>
-            <a:pPr algn="ctr"/>
-            <a:r>
-              <a:rPr sz="950" b="1">
-                <a:solidFill>
-                  <a:srgbClr val="FFFFFF"/>
-                </a:solidFill>
-                <a:latin typeface="Arial"/>
-              </a:rPr>
-              <a:t>× Not Available</a:t>
-            </a:r>
-          </a:p>
-        </p:txBody>
-      </p:sp>
-      <p:sp>
-        <p:nvSpPr>
-          <p:cNvPr id="91" name="Rounded Rectangle 90"/>
-          <p:cNvSpPr/>
-          <p:nvPr/>
-        </p:nvSpPr>
-        <p:spPr>
-          <a:xfrm>
-            <a:off x="7580375" y="3534156"/>
-            <a:ext cx="1143000" cy="233172"/>
-          </a:xfrm>
-          <a:prstGeom prst="roundRect">
-            <a:avLst/>
-          </a:prstGeom>
-          <a:solidFill>
-            <a:srgbClr val="FFFFFF"/>
-          </a:solidFill>
-          <a:ln w="7620">
-            <a:solidFill>
-              <a:srgbClr val="D5E0EA"/>
-            </a:solidFill>
-          </a:ln>
-        </p:spPr>
-        <p:style>
-          <a:lnRef idx="1">
-            <a:schemeClr val="accent1"/>
-          </a:lnRef>
-          <a:fillRef idx="3">
-            <a:schemeClr val="accent1"/>
-          </a:fillRef>
-          <a:effectRef idx="2">
-            <a:schemeClr val="accent1"/>
-          </a:effectRef>
-          <a:fontRef idx="minor">
-            <a:schemeClr val="lt1"/>
-          </a:fontRef>
-        </p:style>
-        <p:txBody>
-          <a:bodyPr rtlCol="0" anchor="ctr"/>
-          <a:lstStyle/>
-          <a:p>
-            <a:pPr algn="ctr"/>
-            <a:r>
-              <a:rPr sz="950" b="1">
-                <a:solidFill>
-                  <a:srgbClr val="FFFFFF"/>
-                </a:solidFill>
-                <a:latin typeface="Arial"/>
-              </a:rPr>
-              <a:t>● Partial</a:t>
-            </a:r>
-          </a:p>
-        </p:txBody>
-      </p:sp>
-      <p:sp>
-        <p:nvSpPr>
-          <p:cNvPr id="92" name="Rounded Rectangle 91"/>
-          <p:cNvSpPr/>
-          <p:nvPr/>
-        </p:nvSpPr>
-        <p:spPr>
-          <a:xfrm>
-            <a:off x="8833104" y="3534156"/>
-            <a:ext cx="1783080" cy="233172"/>
-          </a:xfrm>
-          <a:prstGeom prst="roundRect">
-            <a:avLst/>
-          </a:prstGeom>
-          <a:solidFill>
-            <a:srgbClr val="FFFFFF"/>
-          </a:solidFill>
-          <a:ln w="7620">
-            <a:solidFill>
-              <a:srgbClr val="D5E0EA"/>
-            </a:solidFill>
-          </a:ln>
-        </p:spPr>
-        <p:style>
-          <a:lnRef idx="1">
-            <a:schemeClr val="accent1"/>
-          </a:lnRef>
-          <a:fillRef idx="3">
-            <a:schemeClr val="accent1"/>
-          </a:fillRef>
-          <a:effectRef idx="2">
-            <a:schemeClr val="accent1"/>
-          </a:effectRef>
-          <a:fontRef idx="minor">
-            <a:schemeClr val="lt1"/>
-          </a:fontRef>
-        </p:style>
-        <p:txBody>
-          <a:bodyPr rtlCol="0" anchor="ctr"/>
-          <a:lstStyle/>
-          <a:p>
-            <a:pPr algn="ctr"/>
-            <a:r>
-              <a:rPr sz="950" b="1">
-                <a:solidFill>
-                  <a:srgbClr val="FFFFFF"/>
-                </a:solidFill>
-                <a:latin typeface="Arial"/>
-              </a:rPr>
-              <a:t>× Not Available</a:t>
-            </a:r>
-          </a:p>
-        </p:txBody>
-      </p:sp>
-      <p:sp>
-        <p:nvSpPr>
-          <p:cNvPr id="93" name="Rounded Rectangle 92"/>
-          <p:cNvSpPr/>
-          <p:nvPr/>
-        </p:nvSpPr>
-        <p:spPr>
-          <a:xfrm>
-            <a:off x="411480" y="3767328"/>
-            <a:ext cx="2907792" cy="233172"/>
-          </a:xfrm>
-          <a:prstGeom prst="roundRect">
-            <a:avLst/>
-          </a:prstGeom>
-          <a:solidFill>
-            <a:srgbClr val="FFFFFF"/>
-          </a:solidFill>
-          <a:ln w="7620">
-            <a:solidFill>
-              <a:srgbClr val="D5E0EA"/>
-            </a:solidFill>
-          </a:ln>
-        </p:spPr>
-        <p:style>
-          <a:lnRef idx="1">
-            <a:schemeClr val="accent1"/>
-          </a:lnRef>
-          <a:fillRef idx="3">
-            <a:schemeClr val="accent1"/>
-          </a:fillRef>
-          <a:effectRef idx="2">
-            <a:schemeClr val="accent1"/>
-          </a:effectRef>
-          <a:fontRef idx="minor">
-            <a:schemeClr val="lt1"/>
-          </a:fontRef>
-        </p:style>
-        <p:txBody>
-          <a:bodyPr rtlCol="0" anchor="ctr"/>
-          <a:lstStyle/>
-          <a:p>
-            <a:pPr algn="l"/>
-            <a:r>
-              <a:rPr sz="950" b="1">
-                <a:solidFill>
-                  <a:srgbClr val="FFFFFF"/>
-                </a:solidFill>
-                <a:latin typeface="Arial"/>
-              </a:rPr>
-              <a:t>80% Skill Verification Rule</a:t>
-            </a:r>
-          </a:p>
-        </p:txBody>
-      </p:sp>
-      <p:sp>
-        <p:nvSpPr>
-          <p:cNvPr id="94" name="Rounded Rectangle 93"/>
-          <p:cNvSpPr/>
-          <p:nvPr/>
-        </p:nvSpPr>
-        <p:spPr>
-          <a:xfrm>
-            <a:off x="3456432" y="3767328"/>
-            <a:ext cx="1481328" cy="233172"/>
-          </a:xfrm>
-          <a:prstGeom prst="roundRect">
-            <a:avLst/>
-          </a:prstGeom>
-          <a:solidFill>
-            <a:srgbClr val="FFFFFF"/>
-          </a:solidFill>
-          <a:ln w="7620">
-            <a:solidFill>
-              <a:srgbClr val="D5E0EA"/>
-            </a:solidFill>
-          </a:ln>
-        </p:spPr>
-        <p:style>
-          <a:lnRef idx="1">
-            <a:schemeClr val="accent1"/>
-          </a:lnRef>
-          <a:fillRef idx="3">
-            <a:schemeClr val="accent1"/>
-          </a:fillRef>
-          <a:effectRef idx="2">
-            <a:schemeClr val="accent1"/>
-          </a:effectRef>
-          <a:fontRef idx="minor">
-            <a:schemeClr val="lt1"/>
-          </a:fontRef>
-        </p:style>
-        <p:txBody>
-          <a:bodyPr rtlCol="0" anchor="ctr"/>
-          <a:lstStyle/>
-          <a:p>
-            <a:pPr algn="ctr"/>
-            <a:r>
-              <a:rPr sz="950" b="1">
-                <a:solidFill>
-                  <a:srgbClr val="FFFFFF"/>
-                </a:solidFill>
-                <a:latin typeface="Arial"/>
-              </a:rPr>
-              <a:t>✓ Quality Assurance</a:t>
-            </a:r>
-          </a:p>
-        </p:txBody>
-      </p:sp>
-      <p:sp>
-        <p:nvSpPr>
-          <p:cNvPr id="95" name="Rounded Rectangle 94"/>
-          <p:cNvSpPr/>
-          <p:nvPr/>
-        </p:nvSpPr>
-        <p:spPr>
-          <a:xfrm>
-            <a:off x="5074920" y="3767328"/>
-            <a:ext cx="1143000" cy="233172"/>
-          </a:xfrm>
-          <a:prstGeom prst="roundRect">
-            <a:avLst/>
-          </a:prstGeom>
-          <a:solidFill>
-            <a:srgbClr val="FFFFFF"/>
-          </a:solidFill>
-          <a:ln w="7620">
-            <a:solidFill>
-              <a:srgbClr val="D5E0EA"/>
-            </a:solidFill>
-          </a:ln>
-        </p:spPr>
-        <p:style>
-          <a:lnRef idx="1">
-            <a:schemeClr val="accent1"/>
-          </a:lnRef>
-          <a:fillRef idx="3">
-            <a:schemeClr val="accent1"/>
-          </a:fillRef>
-          <a:effectRef idx="2">
-            <a:schemeClr val="accent1"/>
-          </a:effectRef>
-          <a:fontRef idx="minor">
-            <a:schemeClr val="lt1"/>
-          </a:fontRef>
-        </p:style>
-        <p:txBody>
-          <a:bodyPr rtlCol="0" anchor="ctr"/>
-          <a:lstStyle/>
-          <a:p>
-            <a:pPr algn="ctr"/>
-            <a:r>
-              <a:rPr sz="950" b="1">
-                <a:solidFill>
-                  <a:srgbClr val="FFFFFF"/>
-                </a:solidFill>
-                <a:latin typeface="Arial"/>
-              </a:rPr>
-              <a:t>×</a:t>
-            </a:r>
-          </a:p>
-        </p:txBody>
-      </p:sp>
-      <p:sp>
-        <p:nvSpPr>
-          <p:cNvPr id="96" name="Rounded Rectangle 95"/>
-          <p:cNvSpPr/>
-          <p:nvPr/>
-        </p:nvSpPr>
-        <p:spPr>
-          <a:xfrm>
-            <a:off x="6327648" y="3767328"/>
-            <a:ext cx="1143000" cy="233172"/>
-          </a:xfrm>
-          <a:prstGeom prst="roundRect">
-            <a:avLst/>
-          </a:prstGeom>
-          <a:solidFill>
-            <a:srgbClr val="FFFFFF"/>
-          </a:solidFill>
-          <a:ln w="7620">
-            <a:solidFill>
-              <a:srgbClr val="D5E0EA"/>
-            </a:solidFill>
-          </a:ln>
-        </p:spPr>
-        <p:style>
-          <a:lnRef idx="1">
-            <a:schemeClr val="accent1"/>
-          </a:lnRef>
-          <a:fillRef idx="3">
-            <a:schemeClr val="accent1"/>
-          </a:fillRef>
-          <a:effectRef idx="2">
-            <a:schemeClr val="accent1"/>
-          </a:effectRef>
-          <a:fontRef idx="minor">
-            <a:schemeClr val="lt1"/>
-          </a:fontRef>
-        </p:style>
-        <p:txBody>
-          <a:bodyPr rtlCol="0" anchor="ctr"/>
-          <a:lstStyle/>
-          <a:p>
-            <a:pPr algn="ctr"/>
-            <a:r>
-              <a:rPr sz="950" b="1">
-                <a:solidFill>
-                  <a:srgbClr val="FFFFFF"/>
-                </a:solidFill>
-                <a:latin typeface="Arial"/>
-              </a:rPr>
-              <a:t>×</a:t>
-            </a:r>
-          </a:p>
-        </p:txBody>
-      </p:sp>
-      <p:sp>
-        <p:nvSpPr>
-          <p:cNvPr id="97" name="Rounded Rectangle 96"/>
-          <p:cNvSpPr/>
-          <p:nvPr/>
-        </p:nvSpPr>
-        <p:spPr>
-          <a:xfrm>
-            <a:off x="7580375" y="3767328"/>
-            <a:ext cx="1143000" cy="233172"/>
-          </a:xfrm>
-          <a:prstGeom prst="roundRect">
-            <a:avLst/>
-          </a:prstGeom>
-          <a:solidFill>
-            <a:srgbClr val="FFFFFF"/>
-          </a:solidFill>
-          <a:ln w="7620">
-            <a:solidFill>
-              <a:srgbClr val="D5E0EA"/>
-            </a:solidFill>
-          </a:ln>
-        </p:spPr>
-        <p:style>
-          <a:lnRef idx="1">
-            <a:schemeClr val="accent1"/>
-          </a:lnRef>
-          <a:fillRef idx="3">
-            <a:schemeClr val="accent1"/>
-          </a:fillRef>
-          <a:effectRef idx="2">
-            <a:schemeClr val="accent1"/>
-          </a:effectRef>
-          <a:fontRef idx="minor">
-            <a:schemeClr val="lt1"/>
-          </a:fontRef>
-        </p:style>
-        <p:txBody>
-          <a:bodyPr rtlCol="0" anchor="ctr"/>
-          <a:lstStyle/>
-          <a:p>
-            <a:pPr algn="ctr"/>
-            <a:r>
-              <a:rPr sz="950" b="1">
-                <a:solidFill>
-                  <a:srgbClr val="FFFFFF"/>
-                </a:solidFill>
-                <a:latin typeface="Arial"/>
-              </a:rPr>
-              <a:t>×</a:t>
-            </a:r>
-          </a:p>
-        </p:txBody>
-      </p:sp>
-      <p:sp>
-        <p:nvSpPr>
-          <p:cNvPr id="98" name="Rounded Rectangle 97"/>
-          <p:cNvSpPr/>
-          <p:nvPr/>
-        </p:nvSpPr>
-        <p:spPr>
-          <a:xfrm>
-            <a:off x="8833104" y="3767328"/>
-            <a:ext cx="1783080" cy="233172"/>
-          </a:xfrm>
-          <a:prstGeom prst="roundRect">
-            <a:avLst/>
-          </a:prstGeom>
-          <a:solidFill>
-            <a:srgbClr val="FFFFFF"/>
-          </a:solidFill>
-          <a:ln w="7620">
-            <a:solidFill>
-              <a:srgbClr val="D5E0EA"/>
-            </a:solidFill>
-          </a:ln>
-        </p:spPr>
-        <p:style>
-          <a:lnRef idx="1">
-            <a:schemeClr val="accent1"/>
-          </a:lnRef>
-          <a:fillRef idx="3">
-            <a:schemeClr val="accent1"/>
-          </a:fillRef>
-          <a:effectRef idx="2">
-            <a:schemeClr val="accent1"/>
-          </a:effectRef>
-          <a:fontRef idx="minor">
-            <a:schemeClr val="lt1"/>
-          </a:fontRef>
-        </p:style>
-        <p:txBody>
-          <a:bodyPr rtlCol="0" anchor="ctr"/>
-          <a:lstStyle/>
-          <a:p>
-            <a:pPr algn="ctr"/>
-            <a:r>
-              <a:rPr sz="950" b="1">
-                <a:solidFill>
-                  <a:srgbClr val="FFFFFF"/>
-                </a:solidFill>
-                <a:latin typeface="Arial"/>
-              </a:rPr>
-              <a:t>×</a:t>
-            </a:r>
-          </a:p>
-        </p:txBody>
-      </p:sp>
-      <p:sp>
-        <p:nvSpPr>
-          <p:cNvPr id="99" name="Rounded Rectangle 98"/>
-          <p:cNvSpPr/>
-          <p:nvPr/>
-        </p:nvSpPr>
-        <p:spPr>
-          <a:xfrm>
-            <a:off x="411480" y="4000500"/>
-            <a:ext cx="2907792" cy="233172"/>
-          </a:xfrm>
-          <a:prstGeom prst="roundRect">
-            <a:avLst/>
-          </a:prstGeom>
-          <a:solidFill>
-            <a:srgbClr val="FFFFFF"/>
-          </a:solidFill>
-          <a:ln w="7620">
-            <a:solidFill>
-              <a:srgbClr val="D5E0EA"/>
-            </a:solidFill>
-          </a:ln>
-        </p:spPr>
-        <p:style>
-          <a:lnRef idx="1">
-            <a:schemeClr val="accent1"/>
-          </a:lnRef>
-          <a:fillRef idx="3">
-            <a:schemeClr val="accent1"/>
-          </a:fillRef>
-          <a:effectRef idx="2">
-            <a:schemeClr val="accent1"/>
-          </a:effectRef>
-          <a:fontRef idx="minor">
-            <a:schemeClr val="lt1"/>
-          </a:fontRef>
-        </p:style>
-        <p:txBody>
-          <a:bodyPr rtlCol="0" anchor="ctr"/>
-          <a:lstStyle/>
-          <a:p>
-            <a:pPr algn="l"/>
-            <a:r>
-              <a:rPr sz="950" b="1">
-                <a:solidFill>
-                  <a:srgbClr val="FFFFFF"/>
-                </a:solidFill>
-                <a:latin typeface="Arial"/>
-              </a:rPr>
-              <a:t>Easy → Medium → Hard Adaptive Tests</a:t>
-            </a:r>
-          </a:p>
-        </p:txBody>
-      </p:sp>
-      <p:sp>
-        <p:nvSpPr>
-          <p:cNvPr id="100" name="Rounded Rectangle 99"/>
-          <p:cNvSpPr/>
-          <p:nvPr/>
-        </p:nvSpPr>
-        <p:spPr>
-          <a:xfrm>
-            <a:off x="3456432" y="4000500"/>
-            <a:ext cx="1481328" cy="233172"/>
-          </a:xfrm>
-          <a:prstGeom prst="roundRect">
-            <a:avLst/>
-          </a:prstGeom>
-          <a:solidFill>
-            <a:srgbClr val="FFFFFF"/>
-          </a:solidFill>
-          <a:ln w="7620">
-            <a:solidFill>
-              <a:srgbClr val="D5E0EA"/>
-            </a:solidFill>
-          </a:ln>
-        </p:spPr>
-        <p:style>
-          <a:lnRef idx="1">
-            <a:schemeClr val="accent1"/>
-          </a:lnRef>
-          <a:fillRef idx="3">
-            <a:schemeClr val="accent1"/>
-          </a:fillRef>
-          <a:effectRef idx="2">
-            <a:schemeClr val="accent1"/>
-          </a:effectRef>
-          <a:fontRef idx="minor">
-            <a:schemeClr val="lt1"/>
-          </a:fontRef>
-        </p:style>
-        <p:txBody>
-          <a:bodyPr rtlCol="0" anchor="ctr"/>
-          <a:lstStyle/>
-          <a:p>
-            <a:pPr algn="ctr"/>
-            <a:r>
-              <a:rPr sz="950" b="1">
-                <a:solidFill>
-                  <a:srgbClr val="FFFFFF"/>
-                </a:solidFill>
-                <a:latin typeface="Arial"/>
-              </a:rPr>
-              <a:t>✓ Adaptive</a:t>
-            </a:r>
-          </a:p>
-        </p:txBody>
-      </p:sp>
-      <p:sp>
-        <p:nvSpPr>
-          <p:cNvPr id="101" name="Rounded Rectangle 100"/>
-          <p:cNvSpPr/>
-          <p:nvPr/>
-        </p:nvSpPr>
-        <p:spPr>
-          <a:xfrm>
-            <a:off x="5074920" y="4000500"/>
-            <a:ext cx="1143000" cy="233172"/>
-          </a:xfrm>
-          <a:prstGeom prst="roundRect">
-            <a:avLst/>
-          </a:prstGeom>
-          <a:solidFill>
-            <a:srgbClr val="FFFFFF"/>
-          </a:solidFill>
-          <a:ln w="7620">
-            <a:solidFill>
-              <a:srgbClr val="D5E0EA"/>
-            </a:solidFill>
-          </a:ln>
-        </p:spPr>
-        <p:style>
-          <a:lnRef idx="1">
-            <a:schemeClr val="accent1"/>
-          </a:lnRef>
-          <a:fillRef idx="3">
-            <a:schemeClr val="accent1"/>
-          </a:fillRef>
-          <a:effectRef idx="2">
-            <a:schemeClr val="accent1"/>
-          </a:effectRef>
-          <a:fontRef idx="minor">
-            <a:schemeClr val="lt1"/>
-          </a:fontRef>
-        </p:style>
-        <p:txBody>
-          <a:bodyPr rtlCol="0" anchor="ctr"/>
-          <a:lstStyle/>
-          <a:p>
-            <a:pPr algn="ctr"/>
-            <a:r>
-              <a:rPr sz="950" b="1">
-                <a:solidFill>
-                  <a:srgbClr val="FFFFFF"/>
-                </a:solidFill>
-                <a:latin typeface="Arial"/>
-              </a:rPr>
-              <a:t>● Limited</a:t>
-            </a:r>
-          </a:p>
-        </p:txBody>
-      </p:sp>
-      <p:sp>
-        <p:nvSpPr>
-          <p:cNvPr id="102" name="Rounded Rectangle 101"/>
-          <p:cNvSpPr/>
-          <p:nvPr/>
-        </p:nvSpPr>
-        <p:spPr>
-          <a:xfrm>
-            <a:off x="6327648" y="4000500"/>
-            <a:ext cx="1143000" cy="233172"/>
-          </a:xfrm>
-          <a:prstGeom prst="roundRect">
-            <a:avLst/>
-          </a:prstGeom>
-          <a:solidFill>
-            <a:srgbClr val="FFFFFF"/>
-          </a:solidFill>
-          <a:ln w="7620">
-            <a:solidFill>
-              <a:srgbClr val="D5E0EA"/>
-            </a:solidFill>
-          </a:ln>
-        </p:spPr>
-        <p:style>
-          <a:lnRef idx="1">
-            <a:schemeClr val="accent1"/>
-          </a:lnRef>
-          <a:fillRef idx="3">
-            <a:schemeClr val="accent1"/>
-          </a:fillRef>
-          <a:effectRef idx="2">
-            <a:schemeClr val="accent1"/>
-          </a:effectRef>
-          <a:fontRef idx="minor">
-            <a:schemeClr val="lt1"/>
-          </a:fontRef>
-        </p:style>
-        <p:txBody>
-          <a:bodyPr rtlCol="0" anchor="ctr"/>
-          <a:lstStyle/>
-          <a:p>
-            <a:pPr algn="ctr"/>
-            <a:r>
-              <a:rPr sz="950" b="1">
-                <a:solidFill>
-                  <a:srgbClr val="FFFFFF"/>
-                </a:solidFill>
-                <a:latin typeface="Arial"/>
-              </a:rPr>
-              <a:t>● Limited</a:t>
-            </a:r>
-          </a:p>
-        </p:txBody>
-      </p:sp>
-      <p:sp>
-        <p:nvSpPr>
-          <p:cNvPr id="103" name="Rounded Rectangle 102"/>
-          <p:cNvSpPr/>
-          <p:nvPr/>
-        </p:nvSpPr>
-        <p:spPr>
-          <a:xfrm>
-            <a:off x="7580375" y="4000500"/>
-            <a:ext cx="1143000" cy="233172"/>
-          </a:xfrm>
-          <a:prstGeom prst="roundRect">
-            <a:avLst/>
-          </a:prstGeom>
-          <a:solidFill>
-            <a:srgbClr val="FFFFFF"/>
-          </a:solidFill>
-          <a:ln w="7620">
-            <a:solidFill>
-              <a:srgbClr val="D5E0EA"/>
-            </a:solidFill>
-          </a:ln>
-        </p:spPr>
-        <p:style>
-          <a:lnRef idx="1">
-            <a:schemeClr val="accent1"/>
-          </a:lnRef>
-          <a:fillRef idx="3">
-            <a:schemeClr val="accent1"/>
-          </a:fillRef>
-          <a:effectRef idx="2">
-            <a:schemeClr val="accent1"/>
-          </a:effectRef>
-          <a:fontRef idx="minor">
-            <a:schemeClr val="lt1"/>
-          </a:fontRef>
-        </p:style>
-        <p:txBody>
-          <a:bodyPr rtlCol="0" anchor="ctr"/>
-          <a:lstStyle/>
-          <a:p>
-            <a:pPr algn="ctr"/>
-            <a:r>
-              <a:rPr sz="950" b="1">
-                <a:solidFill>
-                  <a:srgbClr val="FFFFFF"/>
-                </a:solidFill>
-                <a:latin typeface="Arial"/>
-              </a:rPr>
-              <a:t>✓ Adaptive</a:t>
-            </a:r>
-          </a:p>
-        </p:txBody>
-      </p:sp>
-      <p:sp>
-        <p:nvSpPr>
-          <p:cNvPr id="104" name="Rounded Rectangle 103"/>
-          <p:cNvSpPr/>
-          <p:nvPr/>
-        </p:nvSpPr>
-        <p:spPr>
-          <a:xfrm>
-            <a:off x="8833104" y="4000500"/>
-            <a:ext cx="1783080" cy="233172"/>
-          </a:xfrm>
-          <a:prstGeom prst="roundRect">
-            <a:avLst/>
-          </a:prstGeom>
-          <a:solidFill>
-            <a:srgbClr val="FFFFFF"/>
-          </a:solidFill>
-          <a:ln w="7620">
-            <a:solidFill>
-              <a:srgbClr val="D5E0EA"/>
-            </a:solidFill>
-          </a:ln>
-        </p:spPr>
-        <p:style>
-          <a:lnRef idx="1">
-            <a:schemeClr val="accent1"/>
-          </a:lnRef>
-          <a:fillRef idx="3">
-            <a:schemeClr val="accent1"/>
-          </a:fillRef>
-          <a:effectRef idx="2">
-            <a:schemeClr val="accent1"/>
-          </a:effectRef>
-          <a:fontRef idx="minor">
-            <a:schemeClr val="lt1"/>
-          </a:fontRef>
-        </p:style>
-        <p:txBody>
-          <a:bodyPr rtlCol="0" anchor="ctr"/>
-          <a:lstStyle/>
-          <a:p>
-            <a:pPr algn="ctr"/>
-            <a:r>
-              <a:rPr sz="950" b="1">
-                <a:solidFill>
-                  <a:srgbClr val="FFFFFF"/>
-                </a:solidFill>
-                <a:latin typeface="Arial"/>
-              </a:rPr>
-              <a:t>× Not Available</a:t>
-            </a:r>
-          </a:p>
-        </p:txBody>
-      </p:sp>
-      <p:sp>
-        <p:nvSpPr>
-          <p:cNvPr id="105" name="Rounded Rectangle 104"/>
-          <p:cNvSpPr/>
-          <p:nvPr/>
-        </p:nvSpPr>
-        <p:spPr>
-          <a:xfrm>
-            <a:off x="411480" y="4233672"/>
-            <a:ext cx="2907792" cy="233172"/>
-          </a:xfrm>
-          <a:prstGeom prst="roundRect">
-            <a:avLst/>
-          </a:prstGeom>
-          <a:solidFill>
-            <a:srgbClr val="FFFFFF"/>
-          </a:solidFill>
-          <a:ln w="7620">
-            <a:solidFill>
-              <a:srgbClr val="D5E0EA"/>
-            </a:solidFill>
-          </a:ln>
-        </p:spPr>
-        <p:style>
-          <a:lnRef idx="1">
-            <a:schemeClr val="accent1"/>
-          </a:lnRef>
-          <a:fillRef idx="3">
-            <a:schemeClr val="accent1"/>
-          </a:fillRef>
-          <a:effectRef idx="2">
-            <a:schemeClr val="accent1"/>
-          </a:effectRef>
-          <a:fontRef idx="minor">
-            <a:schemeClr val="lt1"/>
-          </a:fontRef>
-        </p:style>
-        <p:txBody>
-          <a:bodyPr rtlCol="0" anchor="ctr"/>
-          <a:lstStyle/>
-          <a:p>
-            <a:pPr algn="l"/>
-            <a:r>
-              <a:rPr sz="950" b="1">
-                <a:solidFill>
-                  <a:srgbClr val="FFFFFF"/>
-                </a:solidFill>
-                <a:latin typeface="Arial"/>
-              </a:rPr>
-              <a:t>AI Daily Timetable</a:t>
-            </a:r>
-          </a:p>
-        </p:txBody>
-      </p:sp>
-      <p:sp>
-        <p:nvSpPr>
-          <p:cNvPr id="106" name="Rounded Rectangle 105"/>
-          <p:cNvSpPr/>
-          <p:nvPr/>
-        </p:nvSpPr>
-        <p:spPr>
-          <a:xfrm>
-            <a:off x="3456432" y="4233672"/>
-            <a:ext cx="1481328" cy="233172"/>
-          </a:xfrm>
-          <a:prstGeom prst="roundRect">
-            <a:avLst/>
-          </a:prstGeom>
-          <a:solidFill>
-            <a:srgbClr val="FFFFFF"/>
-          </a:solidFill>
-          <a:ln w="7620">
-            <a:solidFill>
-              <a:srgbClr val="D5E0EA"/>
-            </a:solidFill>
-          </a:ln>
-        </p:spPr>
-        <p:style>
-          <a:lnRef idx="1">
-            <a:schemeClr val="accent1"/>
-          </a:lnRef>
-          <a:fillRef idx="3">
-            <a:schemeClr val="accent1"/>
-          </a:fillRef>
-          <a:effectRef idx="2">
-            <a:schemeClr val="accent1"/>
-          </a:effectRef>
-          <a:fontRef idx="minor">
-            <a:schemeClr val="lt1"/>
-          </a:fontRef>
-        </p:style>
-        <p:txBody>
-          <a:bodyPr rtlCol="0" anchor="ctr"/>
-          <a:lstStyle/>
-          <a:p>
-            <a:pPr algn="ctr"/>
-            <a:r>
-              <a:rPr sz="950" b="1">
-                <a:solidFill>
-                  <a:srgbClr val="FFFFFF"/>
-                </a:solidFill>
-                <a:latin typeface="Arial"/>
-              </a:rPr>
-              <a:t>✓ Personalized Planner</a:t>
-            </a:r>
-          </a:p>
-        </p:txBody>
-      </p:sp>
-      <p:sp>
-        <p:nvSpPr>
-          <p:cNvPr id="107" name="Rounded Rectangle 106"/>
-          <p:cNvSpPr/>
-          <p:nvPr/>
-        </p:nvSpPr>
-        <p:spPr>
-          <a:xfrm>
-            <a:off x="5074920" y="4233672"/>
-            <a:ext cx="1143000" cy="233172"/>
-          </a:xfrm>
-          <a:prstGeom prst="roundRect">
-            <a:avLst/>
-          </a:prstGeom>
-          <a:solidFill>
-            <a:srgbClr val="FFFFFF"/>
-          </a:solidFill>
-          <a:ln w="7620">
-            <a:solidFill>
-              <a:srgbClr val="D5E0EA"/>
-            </a:solidFill>
-          </a:ln>
-        </p:spPr>
-        <p:style>
-          <a:lnRef idx="1">
-            <a:schemeClr val="accent1"/>
-          </a:lnRef>
-          <a:fillRef idx="3">
-            <a:schemeClr val="accent1"/>
-          </a:fillRef>
-          <a:effectRef idx="2">
-            <a:schemeClr val="accent1"/>
-          </a:effectRef>
-          <a:fontRef idx="minor">
-            <a:schemeClr val="lt1"/>
-          </a:fontRef>
-        </p:style>
-        <p:txBody>
-          <a:bodyPr rtlCol="0" anchor="ctr"/>
-          <a:lstStyle/>
-          <a:p>
-            <a:pPr algn="ctr"/>
-            <a:r>
-              <a:rPr sz="950" b="1">
-                <a:solidFill>
-                  <a:srgbClr val="FFFFFF"/>
-                </a:solidFill>
-                <a:latin typeface="Arial"/>
-              </a:rPr>
-              <a:t>×</a:t>
-            </a:r>
-          </a:p>
-        </p:txBody>
-      </p:sp>
-      <p:sp>
-        <p:nvSpPr>
-          <p:cNvPr id="108" name="Rounded Rectangle 107"/>
-          <p:cNvSpPr/>
-          <p:nvPr/>
-        </p:nvSpPr>
-        <p:spPr>
-          <a:xfrm>
-            <a:off x="6327648" y="4233672"/>
-            <a:ext cx="1143000" cy="233172"/>
-          </a:xfrm>
-          <a:prstGeom prst="roundRect">
-            <a:avLst/>
-          </a:prstGeom>
-          <a:solidFill>
-            <a:srgbClr val="FFFFFF"/>
-          </a:solidFill>
-          <a:ln w="7620">
-            <a:solidFill>
-              <a:srgbClr val="D5E0EA"/>
-            </a:solidFill>
-          </a:ln>
-        </p:spPr>
-        <p:style>
-          <a:lnRef idx="1">
-            <a:schemeClr val="accent1"/>
-          </a:lnRef>
-          <a:fillRef idx="3">
-            <a:schemeClr val="accent1"/>
-          </a:fillRef>
-          <a:effectRef idx="2">
-            <a:schemeClr val="accent1"/>
-          </a:effectRef>
-          <a:fontRef idx="minor">
-            <a:schemeClr val="lt1"/>
-          </a:fontRef>
-        </p:style>
-        <p:txBody>
-          <a:bodyPr rtlCol="0" anchor="ctr"/>
-          <a:lstStyle/>
-          <a:p>
-            <a:pPr algn="ctr"/>
-            <a:r>
-              <a:rPr sz="950" b="1">
-                <a:solidFill>
-                  <a:srgbClr val="FFFFFF"/>
-                </a:solidFill>
-                <a:latin typeface="Arial"/>
-              </a:rPr>
-              <a:t>×</a:t>
-            </a:r>
-          </a:p>
-        </p:txBody>
-      </p:sp>
-      <p:sp>
-        <p:nvSpPr>
-          <p:cNvPr id="109" name="Rounded Rectangle 108"/>
-          <p:cNvSpPr/>
-          <p:nvPr/>
-        </p:nvSpPr>
-        <p:spPr>
-          <a:xfrm>
-            <a:off x="7580375" y="4233672"/>
-            <a:ext cx="1143000" cy="233172"/>
-          </a:xfrm>
-          <a:prstGeom prst="roundRect">
-            <a:avLst/>
-          </a:prstGeom>
-          <a:solidFill>
-            <a:srgbClr val="FFFFFF"/>
-          </a:solidFill>
-          <a:ln w="7620">
-            <a:solidFill>
-              <a:srgbClr val="D5E0EA"/>
-            </a:solidFill>
-          </a:ln>
-        </p:spPr>
-        <p:style>
-          <a:lnRef idx="1">
-            <a:schemeClr val="accent1"/>
-          </a:lnRef>
-          <a:fillRef idx="3">
-            <a:schemeClr val="accent1"/>
-          </a:fillRef>
-          <a:effectRef idx="2">
-            <a:schemeClr val="accent1"/>
-          </a:effectRef>
-          <a:fontRef idx="minor">
-            <a:schemeClr val="lt1"/>
-          </a:fontRef>
-        </p:style>
-        <p:txBody>
-          <a:bodyPr rtlCol="0" anchor="ctr"/>
-          <a:lstStyle/>
-          <a:p>
-            <a:pPr algn="ctr"/>
-            <a:r>
-              <a:rPr sz="950" b="1">
-                <a:solidFill>
-                  <a:srgbClr val="FFFFFF"/>
-                </a:solidFill>
-                <a:latin typeface="Arial"/>
-              </a:rPr>
-              <a:t>● Partial</a:t>
-            </a:r>
-          </a:p>
-        </p:txBody>
-      </p:sp>
-      <p:sp>
-        <p:nvSpPr>
-          <p:cNvPr id="110" name="Rounded Rectangle 109"/>
-          <p:cNvSpPr/>
-          <p:nvPr/>
-        </p:nvSpPr>
-        <p:spPr>
-          <a:xfrm>
-            <a:off x="8833104" y="4233672"/>
-            <a:ext cx="1783080" cy="233172"/>
-          </a:xfrm>
-          <a:prstGeom prst="roundRect">
-            <a:avLst/>
-          </a:prstGeom>
-          <a:solidFill>
-            <a:srgbClr val="FFFFFF"/>
-          </a:solidFill>
-          <a:ln w="7620">
-            <a:solidFill>
-              <a:srgbClr val="D5E0EA"/>
-            </a:solidFill>
-          </a:ln>
-        </p:spPr>
-        <p:style>
-          <a:lnRef idx="1">
-            <a:schemeClr val="accent1"/>
-          </a:lnRef>
-          <a:fillRef idx="3">
-            <a:schemeClr val="accent1"/>
-          </a:fillRef>
-          <a:effectRef idx="2">
-            <a:schemeClr val="accent1"/>
-          </a:effectRef>
-          <a:fontRef idx="minor">
-            <a:schemeClr val="lt1"/>
-          </a:fontRef>
-        </p:style>
-        <p:txBody>
-          <a:bodyPr rtlCol="0" anchor="ctr"/>
-          <a:lstStyle/>
-          <a:p>
-            <a:pPr algn="ctr"/>
-            <a:r>
-              <a:rPr sz="950" b="1">
-                <a:solidFill>
-                  <a:srgbClr val="FFFFFF"/>
-                </a:solidFill>
-                <a:latin typeface="Arial"/>
-              </a:rPr>
-              <a:t>×</a:t>
-            </a:r>
-          </a:p>
-        </p:txBody>
-      </p:sp>
-      <p:sp>
-        <p:nvSpPr>
-          <p:cNvPr id="111" name="Rounded Rectangle 110"/>
-          <p:cNvSpPr/>
-          <p:nvPr/>
-        </p:nvSpPr>
-        <p:spPr>
-          <a:xfrm>
-            <a:off x="411480" y="4466844"/>
-            <a:ext cx="2907792" cy="233172"/>
-          </a:xfrm>
-          <a:prstGeom prst="roundRect">
-            <a:avLst/>
-          </a:prstGeom>
-          <a:solidFill>
-            <a:srgbClr val="FFFFFF"/>
-          </a:solidFill>
-          <a:ln w="7620">
-            <a:solidFill>
-              <a:srgbClr val="D5E0EA"/>
-            </a:solidFill>
-          </a:ln>
-        </p:spPr>
-        <p:style>
-          <a:lnRef idx="1">
-            <a:schemeClr val="accent1"/>
-          </a:lnRef>
-          <a:fillRef idx="3">
-            <a:schemeClr val="accent1"/>
-          </a:fillRef>
-          <a:effectRef idx="2">
-            <a:schemeClr val="accent1"/>
-          </a:effectRef>
-          <a:fontRef idx="minor">
-            <a:schemeClr val="lt1"/>
-          </a:fontRef>
-        </p:style>
-        <p:txBody>
-          <a:bodyPr rtlCol="0" anchor="ctr"/>
-          <a:lstStyle/>
-          <a:p>
-            <a:pPr algn="l"/>
-            <a:r>
-              <a:rPr sz="950" b="1">
-                <a:solidFill>
-                  <a:srgbClr val="FFFFFF"/>
-                </a:solidFill>
-                <a:latin typeface="Arial"/>
-              </a:rPr>
-              <a:t>Streak System for Learning</a:t>
-            </a:r>
-          </a:p>
-        </p:txBody>
-      </p:sp>
-      <p:sp>
-        <p:nvSpPr>
-          <p:cNvPr id="112" name="Rounded Rectangle 111"/>
-          <p:cNvSpPr/>
-          <p:nvPr/>
-        </p:nvSpPr>
-        <p:spPr>
-          <a:xfrm>
-            <a:off x="3456432" y="4466844"/>
-            <a:ext cx="1481328" cy="233172"/>
-          </a:xfrm>
-          <a:prstGeom prst="roundRect">
-            <a:avLst/>
-          </a:prstGeom>
-          <a:solidFill>
-            <a:srgbClr val="FFFFFF"/>
-          </a:solidFill>
-          <a:ln w="7620">
-            <a:solidFill>
-              <a:srgbClr val="D5E0EA"/>
-            </a:solidFill>
-          </a:ln>
-        </p:spPr>
-        <p:style>
-          <a:lnRef idx="1">
-            <a:schemeClr val="accent1"/>
-          </a:lnRef>
-          <a:fillRef idx="3">
-            <a:schemeClr val="accent1"/>
-          </a:fillRef>
-          <a:effectRef idx="2">
-            <a:schemeClr val="accent1"/>
-          </a:effectRef>
-          <a:fontRef idx="minor">
-            <a:schemeClr val="lt1"/>
-          </a:fontRef>
-        </p:style>
-        <p:txBody>
-          <a:bodyPr rtlCol="0" anchor="ctr"/>
-          <a:lstStyle/>
-          <a:p>
-            <a:pPr algn="ctr"/>
-            <a:r>
-              <a:rPr sz="950" b="1">
-                <a:solidFill>
-                  <a:srgbClr val="FFFFFF"/>
-                </a:solidFill>
-                <a:latin typeface="Arial"/>
-              </a:rPr>
-              <a:t>✓ Gamified</a:t>
-            </a:r>
-          </a:p>
-        </p:txBody>
-      </p:sp>
-      <p:sp>
-        <p:nvSpPr>
-          <p:cNvPr id="113" name="Rounded Rectangle 112"/>
-          <p:cNvSpPr/>
-          <p:nvPr/>
-        </p:nvSpPr>
-        <p:spPr>
-          <a:xfrm>
-            <a:off x="5074920" y="4466844"/>
-            <a:ext cx="1143000" cy="233172"/>
-          </a:xfrm>
-          <a:prstGeom prst="roundRect">
-            <a:avLst/>
-          </a:prstGeom>
-          <a:solidFill>
-            <a:srgbClr val="FFFFFF"/>
-          </a:solidFill>
-          <a:ln w="7620">
-            <a:solidFill>
-              <a:srgbClr val="D5E0EA"/>
-            </a:solidFill>
-          </a:ln>
-        </p:spPr>
-        <p:style>
-          <a:lnRef idx="1">
-            <a:schemeClr val="accent1"/>
-          </a:lnRef>
-          <a:fillRef idx="3">
-            <a:schemeClr val="accent1"/>
-          </a:fillRef>
-          <a:effectRef idx="2">
-            <a:schemeClr val="accent1"/>
-          </a:effectRef>
-          <a:fontRef idx="minor">
-            <a:schemeClr val="lt1"/>
-          </a:fontRef>
-        </p:style>
-        <p:txBody>
-          <a:bodyPr rtlCol="0" anchor="ctr"/>
-          <a:lstStyle/>
-          <a:p>
-            <a:pPr algn="ctr"/>
-            <a:r>
-              <a:rPr sz="950" b="1">
-                <a:solidFill>
-                  <a:srgbClr val="FFFFFF"/>
-                </a:solidFill>
-                <a:latin typeface="Arial"/>
-              </a:rPr>
-              <a:t>● Available</a:t>
-            </a:r>
-          </a:p>
-        </p:txBody>
-      </p:sp>
-      <p:sp>
-        <p:nvSpPr>
-          <p:cNvPr id="114" name="Rounded Rectangle 113"/>
-          <p:cNvSpPr/>
-          <p:nvPr/>
-        </p:nvSpPr>
-        <p:spPr>
-          <a:xfrm>
-            <a:off x="6327648" y="4466844"/>
-            <a:ext cx="1143000" cy="233172"/>
-          </a:xfrm>
-          <a:prstGeom prst="roundRect">
-            <a:avLst/>
-          </a:prstGeom>
-          <a:solidFill>
-            <a:srgbClr val="FFFFFF"/>
-          </a:solidFill>
-          <a:ln w="7620">
-            <a:solidFill>
-              <a:srgbClr val="D5E0EA"/>
-            </a:solidFill>
-          </a:ln>
-        </p:spPr>
-        <p:style>
-          <a:lnRef idx="1">
-            <a:schemeClr val="accent1"/>
-          </a:lnRef>
-          <a:fillRef idx="3">
-            <a:schemeClr val="accent1"/>
-          </a:fillRef>
-          <a:effectRef idx="2">
-            <a:schemeClr val="accent1"/>
-          </a:effectRef>
-          <a:fontRef idx="minor">
-            <a:schemeClr val="lt1"/>
-          </a:fontRef>
-        </p:style>
-        <p:txBody>
-          <a:bodyPr rtlCol="0" anchor="ctr"/>
-          <a:lstStyle/>
-          <a:p>
-            <a:pPr algn="ctr"/>
-            <a:r>
-              <a:rPr sz="950" b="1">
-                <a:solidFill>
-                  <a:srgbClr val="FFFFFF"/>
-                </a:solidFill>
-                <a:latin typeface="Arial"/>
-              </a:rPr>
-              <a:t>×</a:t>
-            </a:r>
-          </a:p>
-        </p:txBody>
-      </p:sp>
-      <p:sp>
-        <p:nvSpPr>
-          <p:cNvPr id="115" name="Rounded Rectangle 114"/>
-          <p:cNvSpPr/>
-          <p:nvPr/>
-        </p:nvSpPr>
-        <p:spPr>
-          <a:xfrm>
-            <a:off x="7580375" y="4466844"/>
-            <a:ext cx="1143000" cy="233172"/>
-          </a:xfrm>
-          <a:prstGeom prst="roundRect">
-            <a:avLst/>
-          </a:prstGeom>
-          <a:solidFill>
-            <a:srgbClr val="FFFFFF"/>
-          </a:solidFill>
-          <a:ln w="7620">
-            <a:solidFill>
-              <a:srgbClr val="D5E0EA"/>
-            </a:solidFill>
-          </a:ln>
-        </p:spPr>
-        <p:style>
-          <a:lnRef idx="1">
-            <a:schemeClr val="accent1"/>
-          </a:lnRef>
-          <a:fillRef idx="3">
-            <a:schemeClr val="accent1"/>
-          </a:fillRef>
-          <a:effectRef idx="2">
-            <a:schemeClr val="accent1"/>
-          </a:effectRef>
-          <a:fontRef idx="minor">
-            <a:schemeClr val="lt1"/>
-          </a:fontRef>
-        </p:style>
-        <p:txBody>
-          <a:bodyPr rtlCol="0" anchor="ctr"/>
-          <a:lstStyle/>
-          <a:p>
-            <a:pPr algn="ctr"/>
-            <a:r>
-              <a:rPr sz="950" b="1">
-                <a:solidFill>
-                  <a:srgbClr val="FFFFFF"/>
-                </a:solidFill>
-                <a:latin typeface="Arial"/>
-              </a:rPr>
-              <a:t>● Available</a:t>
-            </a:r>
-          </a:p>
-        </p:txBody>
-      </p:sp>
-      <p:sp>
-        <p:nvSpPr>
-          <p:cNvPr id="116" name="Rounded Rectangle 115"/>
-          <p:cNvSpPr/>
-          <p:nvPr/>
-        </p:nvSpPr>
-        <p:spPr>
-          <a:xfrm>
-            <a:off x="8833104" y="4466844"/>
-            <a:ext cx="1783080" cy="233172"/>
-          </a:xfrm>
-          <a:prstGeom prst="roundRect">
-            <a:avLst/>
-          </a:prstGeom>
-          <a:solidFill>
-            <a:srgbClr val="FFFFFF"/>
-          </a:solidFill>
-          <a:ln w="7620">
-            <a:solidFill>
-              <a:srgbClr val="D5E0EA"/>
-            </a:solidFill>
-          </a:ln>
-        </p:spPr>
-        <p:style>
-          <a:lnRef idx="1">
-            <a:schemeClr val="accent1"/>
-          </a:lnRef>
-          <a:fillRef idx="3">
-            <a:schemeClr val="accent1"/>
-          </a:fillRef>
-          <a:effectRef idx="2">
-            <a:schemeClr val="accent1"/>
-          </a:effectRef>
-          <a:fontRef idx="minor">
-            <a:schemeClr val="lt1"/>
-          </a:fontRef>
-        </p:style>
-        <p:txBody>
-          <a:bodyPr rtlCol="0" anchor="ctr"/>
-          <a:lstStyle/>
-          <a:p>
-            <a:pPr algn="ctr"/>
-            <a:r>
-              <a:rPr sz="950" b="1">
-                <a:solidFill>
-                  <a:srgbClr val="FFFFFF"/>
-                </a:solidFill>
-                <a:latin typeface="Arial"/>
-              </a:rPr>
-              <a:t>● Available</a:t>
-            </a:r>
-          </a:p>
-        </p:txBody>
-      </p:sp>
-      <p:sp>
-        <p:nvSpPr>
-          <p:cNvPr id="117" name="Rounded Rectangle 116"/>
-          <p:cNvSpPr/>
-          <p:nvPr/>
-        </p:nvSpPr>
-        <p:spPr>
-          <a:xfrm>
-            <a:off x="411480" y="4700016"/>
-            <a:ext cx="2907792" cy="233172"/>
-          </a:xfrm>
-          <a:prstGeom prst="roundRect">
-            <a:avLst/>
-          </a:prstGeom>
-          <a:solidFill>
-            <a:srgbClr val="FFFFFF"/>
-          </a:solidFill>
-          <a:ln w="7620">
-            <a:solidFill>
-              <a:srgbClr val="D5E0EA"/>
-            </a:solidFill>
-          </a:ln>
-        </p:spPr>
-        <p:style>
-          <a:lnRef idx="1">
-            <a:schemeClr val="accent1"/>
-          </a:lnRef>
-          <a:fillRef idx="3">
-            <a:schemeClr val="accent1"/>
-          </a:fillRef>
-          <a:effectRef idx="2">
-            <a:schemeClr val="accent1"/>
-          </a:effectRef>
-          <a:fontRef idx="minor">
-            <a:schemeClr val="lt1"/>
-          </a:fontRef>
-        </p:style>
-        <p:txBody>
-          <a:bodyPr rtlCol="0" anchor="ctr"/>
-          <a:lstStyle/>
-          <a:p>
-            <a:pPr algn="l"/>
-            <a:r>
-              <a:rPr sz="950" b="1">
-                <a:solidFill>
-                  <a:srgbClr val="FFFFFF"/>
-                </a:solidFill>
-                <a:latin typeface="Arial"/>
-              </a:rPr>
-              <a:t>XP / Gamified Skill Progression</a:t>
-            </a:r>
-          </a:p>
-        </p:txBody>
-      </p:sp>
-      <p:sp>
-        <p:nvSpPr>
-          <p:cNvPr id="118" name="Rounded Rectangle 117"/>
-          <p:cNvSpPr/>
-          <p:nvPr/>
-        </p:nvSpPr>
-        <p:spPr>
-          <a:xfrm>
-            <a:off x="3456432" y="4700016"/>
-            <a:ext cx="1481328" cy="233172"/>
-          </a:xfrm>
-          <a:prstGeom prst="roundRect">
-            <a:avLst/>
-          </a:prstGeom>
-          <a:solidFill>
-            <a:srgbClr val="FFFFFF"/>
-          </a:solidFill>
-          <a:ln w="7620">
-            <a:solidFill>
-              <a:srgbClr val="D5E0EA"/>
-            </a:solidFill>
-          </a:ln>
-        </p:spPr>
-        <p:style>
-          <a:lnRef idx="1">
-            <a:schemeClr val="accent1"/>
-          </a:lnRef>
-          <a:fillRef idx="3">
-            <a:schemeClr val="accent1"/>
-          </a:fillRef>
-          <a:effectRef idx="2">
-            <a:schemeClr val="accent1"/>
-          </a:effectRef>
-          <a:fontRef idx="minor">
-            <a:schemeClr val="lt1"/>
-          </a:fontRef>
-        </p:style>
-        <p:txBody>
-          <a:bodyPr rtlCol="0" anchor="ctr"/>
-          <a:lstStyle/>
-          <a:p>
-            <a:pPr algn="ctr"/>
-            <a:r>
-              <a:rPr sz="950" b="1">
-                <a:solidFill>
-                  <a:srgbClr val="FFFFFF"/>
-                </a:solidFill>
-                <a:latin typeface="Arial"/>
-              </a:rPr>
-              <a:t>✓ XP + Levels + Rewards</a:t>
-            </a:r>
-          </a:p>
-        </p:txBody>
-      </p:sp>
-      <p:sp>
-        <p:nvSpPr>
-          <p:cNvPr id="119" name="Rounded Rectangle 118"/>
-          <p:cNvSpPr/>
-          <p:nvPr/>
-        </p:nvSpPr>
-        <p:spPr>
-          <a:xfrm>
-            <a:off x="5074920" y="4700016"/>
-            <a:ext cx="1143000" cy="233172"/>
-          </a:xfrm>
-          <a:prstGeom prst="roundRect">
-            <a:avLst/>
-          </a:prstGeom>
-          <a:solidFill>
-            <a:srgbClr val="FFFFFF"/>
-          </a:solidFill>
-          <a:ln w="7620">
-            <a:solidFill>
-              <a:srgbClr val="D5E0EA"/>
-            </a:solidFill>
-          </a:ln>
-        </p:spPr>
-        <p:style>
-          <a:lnRef idx="1">
-            <a:schemeClr val="accent1"/>
-          </a:lnRef>
-          <a:fillRef idx="3">
-            <a:schemeClr val="accent1"/>
-          </a:fillRef>
-          <a:effectRef idx="2">
-            <a:schemeClr val="accent1"/>
-          </a:effectRef>
-          <a:fontRef idx="minor">
-            <a:schemeClr val="lt1"/>
-          </a:fontRef>
-        </p:style>
-        <p:txBody>
-          <a:bodyPr rtlCol="0" anchor="ctr"/>
-          <a:lstStyle/>
-          <a:p>
-            <a:pPr algn="ctr"/>
-            <a:r>
-              <a:rPr sz="950" b="1">
-                <a:solidFill>
-                  <a:srgbClr val="FFFFFF"/>
-                </a:solidFill>
-                <a:latin typeface="Arial"/>
-              </a:rPr>
-              <a:t>● Available</a:t>
-            </a:r>
-          </a:p>
-        </p:txBody>
-      </p:sp>
-      <p:sp>
-        <p:nvSpPr>
-          <p:cNvPr id="120" name="Rounded Rectangle 119"/>
-          <p:cNvSpPr/>
-          <p:nvPr/>
-        </p:nvSpPr>
-        <p:spPr>
-          <a:xfrm>
-            <a:off x="6327648" y="4700016"/>
-            <a:ext cx="1143000" cy="233172"/>
-          </a:xfrm>
-          <a:prstGeom prst="roundRect">
-            <a:avLst/>
-          </a:prstGeom>
-          <a:solidFill>
-            <a:srgbClr val="FFFFFF"/>
-          </a:solidFill>
-          <a:ln w="7620">
-            <a:solidFill>
-              <a:srgbClr val="D5E0EA"/>
-            </a:solidFill>
-          </a:ln>
-        </p:spPr>
-        <p:style>
-          <a:lnRef idx="1">
-            <a:schemeClr val="accent1"/>
-          </a:lnRef>
-          <a:fillRef idx="3">
-            <a:schemeClr val="accent1"/>
-          </a:fillRef>
-          <a:effectRef idx="2">
-            <a:schemeClr val="accent1"/>
-          </a:effectRef>
-          <a:fontRef idx="minor">
-            <a:schemeClr val="lt1"/>
-          </a:fontRef>
-        </p:style>
-        <p:txBody>
-          <a:bodyPr rtlCol="0" anchor="ctr"/>
-          <a:lstStyle/>
-          <a:p>
-            <a:pPr algn="ctr"/>
-            <a:r>
-              <a:rPr sz="950" b="1">
-                <a:solidFill>
-                  <a:srgbClr val="FFFFFF"/>
-                </a:solidFill>
-                <a:latin typeface="Arial"/>
-              </a:rPr>
-              <a:t>×</a:t>
-            </a:r>
-          </a:p>
-        </p:txBody>
-      </p:sp>
-      <p:sp>
-        <p:nvSpPr>
-          <p:cNvPr id="121" name="Rounded Rectangle 120"/>
-          <p:cNvSpPr/>
-          <p:nvPr/>
-        </p:nvSpPr>
-        <p:spPr>
-          <a:xfrm>
-            <a:off x="7580375" y="4700016"/>
-            <a:ext cx="1143000" cy="233172"/>
-          </a:xfrm>
-          <a:prstGeom prst="roundRect">
-            <a:avLst/>
-          </a:prstGeom>
-          <a:solidFill>
-            <a:srgbClr val="FFFFFF"/>
-          </a:solidFill>
-          <a:ln w="7620">
-            <a:solidFill>
-              <a:srgbClr val="D5E0EA"/>
-            </a:solidFill>
-          </a:ln>
-        </p:spPr>
-        <p:style>
-          <a:lnRef idx="1">
-            <a:schemeClr val="accent1"/>
-          </a:lnRef>
-          <a:fillRef idx="3">
-            <a:schemeClr val="accent1"/>
-          </a:fillRef>
-          <a:effectRef idx="2">
-            <a:schemeClr val="accent1"/>
-          </a:effectRef>
-          <a:fontRef idx="minor">
-            <a:schemeClr val="lt1"/>
-          </a:fontRef>
-        </p:style>
-        <p:txBody>
-          <a:bodyPr rtlCol="0" anchor="ctr"/>
-          <a:lstStyle/>
-          <a:p>
-            <a:pPr algn="ctr"/>
-            <a:r>
-              <a:rPr sz="950" b="1">
-                <a:solidFill>
-                  <a:srgbClr val="FFFFFF"/>
-                </a:solidFill>
-                <a:latin typeface="Arial"/>
-              </a:rPr>
-              <a:t>✓ Gamified</a:t>
-            </a:r>
-          </a:p>
-        </p:txBody>
-      </p:sp>
-      <p:sp>
-        <p:nvSpPr>
-          <p:cNvPr id="122" name="Rounded Rectangle 121"/>
-          <p:cNvSpPr/>
-          <p:nvPr/>
-        </p:nvSpPr>
-        <p:spPr>
-          <a:xfrm>
-            <a:off x="8833104" y="4700016"/>
-            <a:ext cx="1783080" cy="233172"/>
-          </a:xfrm>
-          <a:prstGeom prst="roundRect">
-            <a:avLst/>
-          </a:prstGeom>
-          <a:solidFill>
-            <a:srgbClr val="FFFFFF"/>
-          </a:solidFill>
-          <a:ln w="7620">
-            <a:solidFill>
-              <a:srgbClr val="D5E0EA"/>
-            </a:solidFill>
-          </a:ln>
-        </p:spPr>
-        <p:style>
-          <a:lnRef idx="1">
-            <a:schemeClr val="accent1"/>
-          </a:lnRef>
-          <a:fillRef idx="3">
-            <a:schemeClr val="accent1"/>
-          </a:fillRef>
-          <a:effectRef idx="2">
-            <a:schemeClr val="accent1"/>
-          </a:effectRef>
-          <a:fontRef idx="minor">
-            <a:schemeClr val="lt1"/>
-          </a:fontRef>
-        </p:style>
-        <p:txBody>
-          <a:bodyPr rtlCol="0" anchor="ctr"/>
-          <a:lstStyle/>
-          <a:p>
-            <a:pPr algn="ctr"/>
-            <a:r>
-              <a:rPr sz="950" b="1">
-                <a:solidFill>
-                  <a:srgbClr val="FFFFFF"/>
-                </a:solidFill>
-                <a:latin typeface="Arial"/>
-              </a:rPr>
-              <a:t>● Limited</a:t>
-            </a:r>
-          </a:p>
-        </p:txBody>
-      </p:sp>
-      <p:sp>
-        <p:nvSpPr>
-          <p:cNvPr id="123" name="Rounded Rectangle 122"/>
-          <p:cNvSpPr/>
-          <p:nvPr/>
-        </p:nvSpPr>
-        <p:spPr>
-          <a:xfrm>
-            <a:off x="411480" y="4933188"/>
-            <a:ext cx="2907792" cy="233172"/>
-          </a:xfrm>
-          <a:prstGeom prst="roundRect">
-            <a:avLst/>
-          </a:prstGeom>
-          <a:solidFill>
-            <a:srgbClr val="FFFFFF"/>
-          </a:solidFill>
-          <a:ln w="7620">
-            <a:solidFill>
-              <a:srgbClr val="D5E0EA"/>
-            </a:solidFill>
-          </a:ln>
-        </p:spPr>
-        <p:style>
-          <a:lnRef idx="1">
-            <a:schemeClr val="accent1"/>
-          </a:lnRef>
-          <a:fillRef idx="3">
-            <a:schemeClr val="accent1"/>
-          </a:fillRef>
-          <a:effectRef idx="2">
-            <a:schemeClr val="accent1"/>
-          </a:effectRef>
-          <a:fontRef idx="minor">
-            <a:schemeClr val="lt1"/>
-          </a:fontRef>
-        </p:style>
-        <p:txBody>
-          <a:bodyPr rtlCol="0" anchor="ctr"/>
-          <a:lstStyle/>
-          <a:p>
-            <a:pPr algn="l"/>
-            <a:r>
-              <a:rPr sz="950" b="1">
-                <a:solidFill>
-                  <a:srgbClr val="FFFFFF"/>
-                </a:solidFill>
-                <a:latin typeface="Arial"/>
-              </a:rPr>
-              <a:t>Dynamic Career Readiness Score</a:t>
-            </a:r>
-          </a:p>
-        </p:txBody>
-      </p:sp>
-      <p:sp>
-        <p:nvSpPr>
-          <p:cNvPr id="124" name="Rounded Rectangle 123"/>
-          <p:cNvSpPr/>
-          <p:nvPr/>
-        </p:nvSpPr>
-        <p:spPr>
-          <a:xfrm>
-            <a:off x="3456432" y="4933188"/>
-            <a:ext cx="1481328" cy="233172"/>
-          </a:xfrm>
-          <a:prstGeom prst="roundRect">
-            <a:avLst/>
-          </a:prstGeom>
-          <a:solidFill>
-            <a:srgbClr val="FFFFFF"/>
-          </a:solidFill>
-          <a:ln w="7620">
-            <a:solidFill>
-              <a:srgbClr val="D5E0EA"/>
-            </a:solidFill>
-          </a:ln>
-        </p:spPr>
-        <p:style>
-          <a:lnRef idx="1">
-            <a:schemeClr val="accent1"/>
-          </a:lnRef>
-          <a:fillRef idx="3">
-            <a:schemeClr val="accent1"/>
-          </a:fillRef>
-          <a:effectRef idx="2">
-            <a:schemeClr val="accent1"/>
-          </a:effectRef>
-          <a:fontRef idx="minor">
-            <a:schemeClr val="lt1"/>
-          </a:fontRef>
-        </p:style>
-        <p:txBody>
-          <a:bodyPr rtlCol="0" anchor="ctr"/>
-          <a:lstStyle/>
-          <a:p>
-            <a:pPr algn="ctr"/>
-            <a:r>
-              <a:rPr sz="950" b="1">
-                <a:solidFill>
-                  <a:srgbClr val="FFFFFF"/>
-                </a:solidFill>
-                <a:latin typeface="Arial"/>
-              </a:rPr>
-              <a:t>✓ Real-time Score</a:t>
-            </a:r>
-          </a:p>
-        </p:txBody>
-      </p:sp>
-      <p:sp>
-        <p:nvSpPr>
-          <p:cNvPr id="125" name="Rounded Rectangle 124"/>
-          <p:cNvSpPr/>
-          <p:nvPr/>
-        </p:nvSpPr>
-        <p:spPr>
-          <a:xfrm>
-            <a:off x="5074920" y="4933188"/>
-            <a:ext cx="1143000" cy="233172"/>
-          </a:xfrm>
-          <a:prstGeom prst="roundRect">
-            <a:avLst/>
-          </a:prstGeom>
-          <a:solidFill>
-            <a:srgbClr val="FFFFFF"/>
-          </a:solidFill>
-          <a:ln w="7620">
-            <a:solidFill>
-              <a:srgbClr val="D5E0EA"/>
-            </a:solidFill>
-          </a:ln>
-        </p:spPr>
-        <p:style>
-          <a:lnRef idx="1">
-            <a:schemeClr val="accent1"/>
-          </a:lnRef>
-          <a:fillRef idx="3">
-            <a:schemeClr val="accent1"/>
-          </a:fillRef>
-          <a:effectRef idx="2">
-            <a:schemeClr val="accent1"/>
-          </a:effectRef>
-          <a:fontRef idx="minor">
-            <a:schemeClr val="lt1"/>
-          </a:fontRef>
-        </p:style>
-        <p:txBody>
-          <a:bodyPr rtlCol="0" anchor="ctr"/>
-          <a:lstStyle/>
-          <a:p>
-            <a:pPr algn="ctr"/>
-            <a:r>
-              <a:rPr sz="950" b="1">
-                <a:solidFill>
-                  <a:srgbClr val="FFFFFF"/>
-                </a:solidFill>
-                <a:latin typeface="Arial"/>
-              </a:rPr>
-              <a:t>✓ Partial</a:t>
-            </a:r>
-          </a:p>
-        </p:txBody>
-      </p:sp>
-      <p:sp>
-        <p:nvSpPr>
-          <p:cNvPr id="126" name="Rounded Rectangle 125"/>
-          <p:cNvSpPr/>
-          <p:nvPr/>
-        </p:nvSpPr>
-        <p:spPr>
-          <a:xfrm>
-            <a:off x="6327648" y="4933188"/>
-            <a:ext cx="1143000" cy="233172"/>
-          </a:xfrm>
-          <a:prstGeom prst="roundRect">
-            <a:avLst/>
-          </a:prstGeom>
-          <a:solidFill>
-            <a:srgbClr val="FFFFFF"/>
-          </a:solidFill>
-          <a:ln w="7620">
-            <a:solidFill>
-              <a:srgbClr val="D5E0EA"/>
-            </a:solidFill>
-          </a:ln>
-        </p:spPr>
-        <p:style>
-          <a:lnRef idx="1">
-            <a:schemeClr val="accent1"/>
-          </a:lnRef>
-          <a:fillRef idx="3">
-            <a:schemeClr val="accent1"/>
-          </a:fillRef>
-          <a:effectRef idx="2">
-            <a:schemeClr val="accent1"/>
-          </a:effectRef>
-          <a:fontRef idx="minor">
-            <a:schemeClr val="lt1"/>
-          </a:fontRef>
-        </p:style>
-        <p:txBody>
-          <a:bodyPr rtlCol="0" anchor="ctr"/>
-          <a:lstStyle/>
-          <a:p>
-            <a:pPr algn="ctr"/>
-            <a:r>
-              <a:rPr sz="950" b="1">
-                <a:solidFill>
-                  <a:srgbClr val="FFFFFF"/>
-                </a:solidFill>
-                <a:latin typeface="Arial"/>
-              </a:rPr>
-              <a:t>● Partial</a:t>
-            </a:r>
-          </a:p>
-        </p:txBody>
-      </p:sp>
-      <p:sp>
-        <p:nvSpPr>
-          <p:cNvPr id="127" name="Rounded Rectangle 126"/>
-          <p:cNvSpPr/>
-          <p:nvPr/>
-        </p:nvSpPr>
-        <p:spPr>
-          <a:xfrm>
-            <a:off x="7580375" y="4933188"/>
-            <a:ext cx="1143000" cy="233172"/>
-          </a:xfrm>
-          <a:prstGeom prst="roundRect">
-            <a:avLst/>
-          </a:prstGeom>
-          <a:solidFill>
-            <a:srgbClr val="FFFFFF"/>
-          </a:solidFill>
-          <a:ln w="7620">
-            <a:solidFill>
-              <a:srgbClr val="D5E0EA"/>
-            </a:solidFill>
-          </a:ln>
-        </p:spPr>
-        <p:style>
-          <a:lnRef idx="1">
-            <a:schemeClr val="accent1"/>
-          </a:lnRef>
-          <a:fillRef idx="3">
-            <a:schemeClr val="accent1"/>
-          </a:fillRef>
-          <a:effectRef idx="2">
-            <a:schemeClr val="accent1"/>
-          </a:effectRef>
-          <a:fontRef idx="minor">
-            <a:schemeClr val="lt1"/>
-          </a:fontRef>
-        </p:style>
-        <p:txBody>
-          <a:bodyPr rtlCol="0" anchor="ctr"/>
-          <a:lstStyle/>
-          <a:p>
-            <a:pPr algn="ctr"/>
-            <a:r>
-              <a:rPr sz="950" b="1">
-                <a:solidFill>
-                  <a:srgbClr val="FFFFFF"/>
-                </a:solidFill>
-                <a:latin typeface="Arial"/>
-              </a:rPr>
-              <a:t>● Partial</a:t>
-            </a:r>
-          </a:p>
-        </p:txBody>
-      </p:sp>
-      <p:sp>
-        <p:nvSpPr>
-          <p:cNvPr id="128" name="Rounded Rectangle 127"/>
-          <p:cNvSpPr/>
-          <p:nvPr/>
-        </p:nvSpPr>
-        <p:spPr>
-          <a:xfrm>
-            <a:off x="8833104" y="4933188"/>
-            <a:ext cx="1783080" cy="233172"/>
-          </a:xfrm>
-          <a:prstGeom prst="roundRect">
-            <a:avLst/>
-          </a:prstGeom>
-          <a:solidFill>
-            <a:srgbClr val="FFFFFF"/>
-          </a:solidFill>
-          <a:ln w="7620">
-            <a:solidFill>
-              <a:srgbClr val="D5E0EA"/>
-            </a:solidFill>
-          </a:ln>
-        </p:spPr>
-        <p:style>
-          <a:lnRef idx="1">
-            <a:schemeClr val="accent1"/>
-          </a:lnRef>
-          <a:fillRef idx="3">
-            <a:schemeClr val="accent1"/>
-          </a:fillRef>
-          <a:effectRef idx="2">
-            <a:schemeClr val="accent1"/>
-          </a:effectRef>
-          <a:fontRef idx="minor">
-            <a:schemeClr val="lt1"/>
-          </a:fontRef>
-        </p:style>
-        <p:txBody>
-          <a:bodyPr rtlCol="0" anchor="ctr"/>
-          <a:lstStyle/>
-          <a:p>
-            <a:pPr algn="ctr"/>
-            <a:r>
-              <a:rPr sz="950" b="1">
-                <a:solidFill>
-                  <a:srgbClr val="FFFFFF"/>
-                </a:solidFill>
-                <a:latin typeface="Arial"/>
-              </a:rPr>
-              <a:t>× Not Available</a:t>
-            </a:r>
-          </a:p>
-        </p:txBody>
-      </p:sp>
-      <p:sp>
-        <p:nvSpPr>
-          <p:cNvPr id="129" name="Rounded Rectangle 128"/>
-          <p:cNvSpPr/>
-          <p:nvPr/>
-        </p:nvSpPr>
-        <p:spPr>
-          <a:xfrm>
-            <a:off x="411480" y="5166360"/>
-            <a:ext cx="2907792" cy="233172"/>
-          </a:xfrm>
-          <a:prstGeom prst="roundRect">
-            <a:avLst/>
-          </a:prstGeom>
-          <a:solidFill>
-            <a:srgbClr val="FFFFFF"/>
-          </a:solidFill>
-          <a:ln w="7620">
-            <a:solidFill>
-              <a:srgbClr val="D5E0EA"/>
-            </a:solidFill>
-          </a:ln>
-        </p:spPr>
-        <p:style>
-          <a:lnRef idx="1">
-            <a:schemeClr val="accent1"/>
-          </a:lnRef>
-          <a:fillRef idx="3">
-            <a:schemeClr val="accent1"/>
-          </a:fillRef>
-          <a:effectRef idx="2">
-            <a:schemeClr val="accent1"/>
-          </a:effectRef>
-          <a:fontRef idx="minor">
-            <a:schemeClr val="lt1"/>
-          </a:fontRef>
-        </p:style>
-        <p:txBody>
-          <a:bodyPr rtlCol="0" anchor="ctr"/>
-          <a:lstStyle/>
-          <a:p>
-            <a:pPr algn="l"/>
-            <a:r>
-              <a:rPr sz="950" b="1">
-                <a:solidFill>
-                  <a:srgbClr val="FFFFFF"/>
-                </a:solidFill>
-                <a:latin typeface="Arial"/>
-              </a:rPr>
-              <a:t>Skill Evidence Graph</a:t>
-            </a:r>
-          </a:p>
-        </p:txBody>
-      </p:sp>
-      <p:sp>
-        <p:nvSpPr>
-          <p:cNvPr id="130" name="Rounded Rectangle 129"/>
-          <p:cNvSpPr/>
-          <p:nvPr/>
-        </p:nvSpPr>
-        <p:spPr>
-          <a:xfrm>
-            <a:off x="3456432" y="5166360"/>
-            <a:ext cx="1481328" cy="233172"/>
-          </a:xfrm>
-          <a:prstGeom prst="roundRect">
-            <a:avLst/>
-          </a:prstGeom>
-          <a:solidFill>
-            <a:srgbClr val="FFFFFF"/>
-          </a:solidFill>
-          <a:ln w="7620">
-            <a:solidFill>
-              <a:srgbClr val="D5E0EA"/>
-            </a:solidFill>
-          </a:ln>
-        </p:spPr>
-        <p:style>
-          <a:lnRef idx="1">
-            <a:schemeClr val="accent1"/>
-          </a:lnRef>
-          <a:fillRef idx="3">
-            <a:schemeClr val="accent1"/>
-          </a:fillRef>
-          <a:effectRef idx="2">
-            <a:schemeClr val="accent1"/>
-          </a:effectRef>
-          <a:fontRef idx="minor">
-            <a:schemeClr val="lt1"/>
-          </a:fontRef>
-        </p:style>
-        <p:txBody>
-          <a:bodyPr rtlCol="0" anchor="ctr"/>
-          <a:lstStyle/>
-          <a:p>
-            <a:pPr algn="ctr"/>
-            <a:r>
-              <a:rPr sz="950" b="1">
-                <a:solidFill>
-                  <a:srgbClr val="FFFFFF"/>
-                </a:solidFill>
-                <a:latin typeface="Arial"/>
-              </a:rPr>
-              <a:t>✓ Visual Skill Map</a:t>
-            </a:r>
-          </a:p>
-        </p:txBody>
-      </p:sp>
-      <p:sp>
-        <p:nvSpPr>
-          <p:cNvPr id="131" name="Rounded Rectangle 130"/>
-          <p:cNvSpPr/>
-          <p:nvPr/>
-        </p:nvSpPr>
-        <p:spPr>
-          <a:xfrm>
-            <a:off x="5074920" y="5166360"/>
-            <a:ext cx="1143000" cy="233172"/>
-          </a:xfrm>
-          <a:prstGeom prst="roundRect">
-            <a:avLst/>
-          </a:prstGeom>
-          <a:solidFill>
-            <a:srgbClr val="FFFFFF"/>
-          </a:solidFill>
-          <a:ln w="7620">
-            <a:solidFill>
-              <a:srgbClr val="D5E0EA"/>
-            </a:solidFill>
-          </a:ln>
-        </p:spPr>
-        <p:style>
-          <a:lnRef idx="1">
-            <a:schemeClr val="accent1"/>
-          </a:lnRef>
-          <a:fillRef idx="3">
-            <a:schemeClr val="accent1"/>
-          </a:fillRef>
-          <a:effectRef idx="2">
-            <a:schemeClr val="accent1"/>
-          </a:effectRef>
-          <a:fontRef idx="minor">
-            <a:schemeClr val="lt1"/>
-          </a:fontRef>
-        </p:style>
-        <p:txBody>
-          <a:bodyPr rtlCol="0" anchor="ctr"/>
-          <a:lstStyle/>
-          <a:p>
-            <a:pPr algn="ctr"/>
-            <a:r>
-              <a:rPr sz="950" b="1">
-                <a:solidFill>
-                  <a:srgbClr val="FFFFFF"/>
-                </a:solidFill>
-                <a:latin typeface="Arial"/>
-              </a:rPr>
-              <a:t>×</a:t>
-            </a:r>
-          </a:p>
-        </p:txBody>
-      </p:sp>
-      <p:sp>
-        <p:nvSpPr>
-          <p:cNvPr id="132" name="Rounded Rectangle 131"/>
-          <p:cNvSpPr/>
-          <p:nvPr/>
-        </p:nvSpPr>
-        <p:spPr>
-          <a:xfrm>
-            <a:off x="6327648" y="5166360"/>
-            <a:ext cx="1143000" cy="233172"/>
-          </a:xfrm>
-          <a:prstGeom prst="roundRect">
-            <a:avLst/>
-          </a:prstGeom>
-          <a:solidFill>
-            <a:srgbClr val="FFFFFF"/>
-          </a:solidFill>
-          <a:ln w="7620">
-            <a:solidFill>
-              <a:srgbClr val="D5E0EA"/>
-            </a:solidFill>
-          </a:ln>
-        </p:spPr>
-        <p:style>
-          <a:lnRef idx="1">
-            <a:schemeClr val="accent1"/>
-          </a:lnRef>
-          <a:fillRef idx="3">
-            <a:schemeClr val="accent1"/>
-          </a:fillRef>
-          <a:effectRef idx="2">
-            <a:schemeClr val="accent1"/>
-          </a:effectRef>
-          <a:fontRef idx="minor">
-            <a:schemeClr val="lt1"/>
-          </a:fontRef>
-        </p:style>
-        <p:txBody>
-          <a:bodyPr rtlCol="0" anchor="ctr"/>
-          <a:lstStyle/>
-          <a:p>
-            <a:pPr algn="ctr"/>
-            <a:r>
-              <a:rPr sz="950" b="1">
-                <a:solidFill>
-                  <a:srgbClr val="FFFFFF"/>
-                </a:solidFill>
-                <a:latin typeface="Arial"/>
-              </a:rPr>
-              <a:t>×</a:t>
-            </a:r>
-          </a:p>
-        </p:txBody>
-      </p:sp>
-      <p:sp>
-        <p:nvSpPr>
-          <p:cNvPr id="133" name="Rounded Rectangle 132"/>
-          <p:cNvSpPr/>
-          <p:nvPr/>
-        </p:nvSpPr>
-        <p:spPr>
-          <a:xfrm>
-            <a:off x="7580375" y="5166360"/>
-            <a:ext cx="1143000" cy="233172"/>
-          </a:xfrm>
-          <a:prstGeom prst="roundRect">
-            <a:avLst/>
-          </a:prstGeom>
-          <a:solidFill>
-            <a:srgbClr val="FFFFFF"/>
-          </a:solidFill>
-          <a:ln w="7620">
-            <a:solidFill>
-              <a:srgbClr val="D5E0EA"/>
-            </a:solidFill>
-          </a:ln>
-        </p:spPr>
-        <p:style>
-          <a:lnRef idx="1">
-            <a:schemeClr val="accent1"/>
-          </a:lnRef>
-          <a:fillRef idx="3">
-            <a:schemeClr val="accent1"/>
-          </a:fillRef>
-          <a:effectRef idx="2">
-            <a:schemeClr val="accent1"/>
-          </a:effectRef>
-          <a:fontRef idx="minor">
-            <a:schemeClr val="lt1"/>
-          </a:fontRef>
-        </p:style>
-        <p:txBody>
-          <a:bodyPr rtlCol="0" anchor="ctr"/>
-          <a:lstStyle/>
-          <a:p>
-            <a:pPr algn="ctr"/>
-            <a:r>
-              <a:rPr sz="950" b="1">
-                <a:solidFill>
-                  <a:srgbClr val="FFFFFF"/>
-                </a:solidFill>
-                <a:latin typeface="Arial"/>
-              </a:rPr>
-              <a:t>×</a:t>
-            </a:r>
-          </a:p>
-        </p:txBody>
-      </p:sp>
-      <p:sp>
-        <p:nvSpPr>
-          <p:cNvPr id="134" name="Rounded Rectangle 133"/>
-          <p:cNvSpPr/>
-          <p:nvPr/>
-        </p:nvSpPr>
-        <p:spPr>
-          <a:xfrm>
-            <a:off x="8833104" y="5166360"/>
-            <a:ext cx="1783080" cy="233172"/>
-          </a:xfrm>
-          <a:prstGeom prst="roundRect">
-            <a:avLst/>
-          </a:prstGeom>
-          <a:solidFill>
-            <a:srgbClr val="FFFFFF"/>
-          </a:solidFill>
-          <a:ln w="7620">
-            <a:solidFill>
-              <a:srgbClr val="D5E0EA"/>
-            </a:solidFill>
-          </a:ln>
-        </p:spPr>
-        <p:style>
-          <a:lnRef idx="1">
-            <a:schemeClr val="accent1"/>
-          </a:lnRef>
-          <a:fillRef idx="3">
-            <a:schemeClr val="accent1"/>
-          </a:fillRef>
-          <a:effectRef idx="2">
-            <a:schemeClr val="accent1"/>
-          </a:effectRef>
-          <a:fontRef idx="minor">
-            <a:schemeClr val="lt1"/>
-          </a:fontRef>
-        </p:style>
-        <p:txBody>
-          <a:bodyPr rtlCol="0" anchor="ctr"/>
-          <a:lstStyle/>
-          <a:p>
-            <a:pPr algn="ctr"/>
-            <a:r>
-              <a:rPr sz="950" b="1">
-                <a:solidFill>
-                  <a:srgbClr val="FFFFFF"/>
-                </a:solidFill>
-                <a:latin typeface="Arial"/>
-              </a:rPr>
-              <a:t>× Limited</a:t>
-            </a:r>
-          </a:p>
-        </p:txBody>
-      </p:sp>
-      <p:sp>
-        <p:nvSpPr>
-          <p:cNvPr id="135" name="TextBox 134"/>
-          <p:cNvSpPr txBox="1"/>
-          <p:nvPr/>
-        </p:nvSpPr>
-        <p:spPr>
-          <a:xfrm>
-            <a:off x="457200" y="5596128"/>
-            <a:ext cx="10972800" cy="210312"/>
-          </a:xfrm>
-          <a:prstGeom prst="rect">
-            <a:avLst/>
-          </a:prstGeom>
-          <a:noFill/>
-        </p:spPr>
-        <p:txBody>
-          <a:bodyPr wrap="none" anchor="ctr">
-            <a:spAutoFit/>
-          </a:bodyPr>
-          <a:lstStyle/>
-          <a:p>
-            <a:pPr algn="ctr"/>
-            <a:r>
-              <a:rPr sz="1100" b="1">
-                <a:solidFill>
-                  <a:srgbClr val="FFFFFF"/>
-                </a:solidFill>
-                <a:latin typeface="Arial"/>
-              </a:rPr>
-              <a:t>WHY OUR PLATFORM STANDS OUT</a:t>
-            </a:r>
-          </a:p>
-        </p:txBody>
-      </p:sp>
-      <p:sp>
-        <p:nvSpPr>
-          <p:cNvPr id="136" name="Rounded Rectangle 135"/>
-          <p:cNvSpPr/>
-          <p:nvPr/>
-        </p:nvSpPr>
-        <p:spPr>
-          <a:xfrm>
-            <a:off x="502920" y="5870448"/>
-            <a:ext cx="3566160" cy="310896"/>
-          </a:xfrm>
-          <a:prstGeom prst="roundRect">
-            <a:avLst/>
-          </a:prstGeom>
-          <a:solidFill>
-            <a:srgbClr val="F3F7FA"/>
-          </a:solidFill>
-          <a:ln w="7620">
-            <a:solidFill>
-              <a:srgbClr val="2365A9"/>
-            </a:solidFill>
-          </a:ln>
-        </p:spPr>
-        <p:style>
-          <a:lnRef idx="1">
-            <a:schemeClr val="accent1"/>
-          </a:lnRef>
-          <a:fillRef idx="3">
-            <a:schemeClr val="accent1"/>
-          </a:fillRef>
-          <a:effectRef idx="2">
-            <a:schemeClr val="accent1"/>
-          </a:effectRef>
-          <a:fontRef idx="minor">
-            <a:schemeClr val="lt1"/>
-          </a:fontRef>
-        </p:style>
-        <p:txBody>
-          <a:bodyPr rtlCol="0" anchor="ctr"/>
-          <a:lstStyle/>
-          <a:p>
-            <a:pPr algn="l"/>
-            <a:r>
-              <a:rPr sz="950" b="1">
-                <a:solidFill>
-                  <a:srgbClr val="FFFFFF"/>
-                </a:solidFill>
-                <a:latin typeface="Arial"/>
-              </a:rPr>
-              <a:t>1. End-to-end: Assess → Learn → Grow → Get Hired</a:t>
-            </a:r>
-          </a:p>
-        </p:txBody>
-      </p:sp>
-      <p:sp>
-        <p:nvSpPr>
-          <p:cNvPr id="137" name="Rounded Rectangle 136"/>
-          <p:cNvSpPr/>
-          <p:nvPr/>
-        </p:nvSpPr>
-        <p:spPr>
-          <a:xfrm>
-            <a:off x="4325112" y="5870448"/>
-            <a:ext cx="3566160" cy="310896"/>
-          </a:xfrm>
-          <a:prstGeom prst="roundRect">
-            <a:avLst/>
-          </a:prstGeom>
-          <a:solidFill>
-            <a:srgbClr val="F3F7FA"/>
-          </a:solidFill>
-          <a:ln w="7620">
-            <a:solidFill>
-              <a:srgbClr val="26847C"/>
-            </a:solidFill>
-          </a:ln>
-        </p:spPr>
-        <p:style>
-          <a:lnRef idx="1">
-            <a:schemeClr val="accent1"/>
-          </a:lnRef>
-          <a:fillRef idx="3">
-            <a:schemeClr val="accent1"/>
-          </a:fillRef>
-          <a:effectRef idx="2">
-            <a:schemeClr val="accent1"/>
-          </a:effectRef>
-          <a:fontRef idx="minor">
-            <a:schemeClr val="lt1"/>
-          </a:fontRef>
-        </p:style>
-        <p:txBody>
-          <a:bodyPr rtlCol="0" anchor="ctr"/>
-          <a:lstStyle/>
-          <a:p>
-            <a:pPr algn="l"/>
-            <a:r>
-              <a:rPr sz="950" b="1">
-                <a:solidFill>
-                  <a:srgbClr val="FFFFFF"/>
-                </a:solidFill>
-                <a:latin typeface="Arial"/>
-              </a:rPr>
-              <a:t>2. Closed loop: Resource → Test → Update → Verify → Improve</a:t>
-            </a:r>
-          </a:p>
-        </p:txBody>
-      </p:sp>
-      <p:sp>
-        <p:nvSpPr>
-          <p:cNvPr id="138" name="Rounded Rectangle 137"/>
-          <p:cNvSpPr/>
-          <p:nvPr/>
-        </p:nvSpPr>
-        <p:spPr>
-          <a:xfrm>
-            <a:off x="8147304" y="5870448"/>
-            <a:ext cx="3566160" cy="310896"/>
-          </a:xfrm>
-          <a:prstGeom prst="roundRect">
-            <a:avLst/>
-          </a:prstGeom>
-          <a:solidFill>
-            <a:srgbClr val="F3F7FA"/>
-          </a:solidFill>
-          <a:ln w="7620">
-            <a:solidFill>
-              <a:srgbClr val="43945C"/>
-            </a:solidFill>
-          </a:ln>
-        </p:spPr>
-        <p:style>
-          <a:lnRef idx="1">
-            <a:schemeClr val="accent1"/>
-          </a:lnRef>
-          <a:fillRef idx="3">
-            <a:schemeClr val="accent1"/>
-          </a:fillRef>
-          <a:effectRef idx="2">
-            <a:schemeClr val="accent1"/>
-          </a:effectRef>
-          <a:fontRef idx="minor">
-            <a:schemeClr val="lt1"/>
-          </a:fontRef>
-        </p:style>
-        <p:txBody>
-          <a:bodyPr rtlCol="0" anchor="ctr"/>
-          <a:lstStyle/>
-          <a:p>
-            <a:pPr algn="l"/>
-            <a:r>
-              <a:rPr sz="950" b="1">
-                <a:solidFill>
-                  <a:srgbClr val="FFFFFF"/>
-                </a:solidFill>
-                <a:latin typeface="Arial"/>
-              </a:rPr>
-              <a:t>3. Evidence-based profile + Skill Evidence Graph</a:t>
-            </a:r>
-          </a:p>
-        </p:txBody>
-      </p:sp>
-      <p:sp>
-        <p:nvSpPr>
-          <p:cNvPr id="139" name="Rounded Rectangle 138"/>
-          <p:cNvSpPr/>
-          <p:nvPr/>
-        </p:nvSpPr>
-        <p:spPr>
-          <a:xfrm>
-            <a:off x="502920" y="6254496"/>
-            <a:ext cx="3566160" cy="310896"/>
-          </a:xfrm>
-          <a:prstGeom prst="roundRect">
-            <a:avLst/>
-          </a:prstGeom>
-          <a:solidFill>
-            <a:srgbClr val="F3F7FA"/>
-          </a:solidFill>
-          <a:ln w="7620">
-            <a:solidFill>
-              <a:srgbClr val="E77E22"/>
-            </a:solidFill>
-          </a:ln>
-        </p:spPr>
-        <p:style>
-          <a:lnRef idx="1">
-            <a:schemeClr val="accent1"/>
-          </a:lnRef>
-          <a:fillRef idx="3">
-            <a:schemeClr val="accent1"/>
-          </a:fillRef>
-          <a:effectRef idx="2">
-            <a:schemeClr val="accent1"/>
-          </a:effectRef>
-          <a:fontRef idx="minor">
-            <a:schemeClr val="lt1"/>
-          </a:fontRef>
-        </p:style>
-        <p:txBody>
-          <a:bodyPr rtlCol="0" anchor="ctr"/>
-          <a:lstStyle/>
-          <a:p>
-            <a:pPr algn="l"/>
-            <a:r>
-              <a:rPr sz="950" b="1">
-                <a:solidFill>
-                  <a:srgbClr val="FFFFFF"/>
-                </a:solidFill>
-                <a:latin typeface="Arial"/>
-              </a:rPr>
-              <a:t>4. Adaptive learning + Daily Planner + Streaks + XP</a:t>
-            </a:r>
-          </a:p>
-        </p:txBody>
-      </p:sp>
-      <p:sp>
-        <p:nvSpPr>
-          <p:cNvPr id="140" name="Rounded Rectangle 139"/>
-          <p:cNvSpPr/>
-          <p:nvPr/>
-        </p:nvSpPr>
-        <p:spPr>
-          <a:xfrm>
-            <a:off x="4325112" y="6254496"/>
-            <a:ext cx="3566160" cy="310896"/>
-          </a:xfrm>
-          <a:prstGeom prst="roundRect">
-            <a:avLst/>
-          </a:prstGeom>
-          <a:solidFill>
-            <a:srgbClr val="F3F7FA"/>
-          </a:solidFill>
-          <a:ln w="7620">
-            <a:solidFill>
-              <a:srgbClr val="C24343"/>
-            </a:solidFill>
-          </a:ln>
-        </p:spPr>
-        <p:style>
-          <a:lnRef idx="1">
-            <a:schemeClr val="accent1"/>
-          </a:lnRef>
-          <a:fillRef idx="3">
-            <a:schemeClr val="accent1"/>
-          </a:fillRef>
-          <a:effectRef idx="2">
-            <a:schemeClr val="accent1"/>
-          </a:effectRef>
-          <a:fontRef idx="minor">
-            <a:schemeClr val="lt1"/>
-          </a:fontRef>
-        </p:style>
-        <p:txBody>
-          <a:bodyPr rtlCol="0" anchor="ctr"/>
-          <a:lstStyle/>
-          <a:p>
-            <a:pPr algn="l"/>
-            <a:r>
-              <a:rPr sz="950" b="1">
-                <a:solidFill>
-                  <a:srgbClr val="FFFFFF"/>
-                </a:solidFill>
-                <a:latin typeface="Arial"/>
-              </a:rPr>
-              <a:t>5. Academia + Industry + Students in one intelligence layer</a:t>
-            </a:r>
-          </a:p>
-        </p:txBody>
-      </p:sp>
-      <p:sp>
-        <p:nvSpPr>
-          <p:cNvPr id="141" name="TextBox 140"/>
-          <p:cNvSpPr txBox="1"/>
-          <p:nvPr/>
-        </p:nvSpPr>
-        <p:spPr>
-          <a:xfrm>
-            <a:off x="548640" y="6629400"/>
-            <a:ext cx="10789920" cy="146304"/>
-          </a:xfrm>
-          <a:prstGeom prst="rect">
-            <a:avLst/>
-          </a:prstGeom>
-          <a:noFill/>
-        </p:spPr>
-        <p:txBody>
-          <a:bodyPr wrap="none" anchor="ctr">
-            <a:spAutoFit/>
-          </a:bodyPr>
-          <a:lstStyle/>
-          <a:p>
-            <a:pPr algn="ctr"/>
-            <a:r>
-              <a:rPr sz="950" b="1">
-                <a:solidFill>
-                  <a:srgbClr val="FFFFFF"/>
-                </a:solidFill>
-                <a:latin typeface="Arial"/>
-              </a:rPr>
-              <a:t>✓ Core/strong   ● Partial/basic/limited   × Not a primary offering</a:t>
-            </a:r>
-          </a:p>
-        </p:txBody>
-      </p:sp>
     </p:spTree>
   </p:cSld>
   <p:clrMapOvr>
